--- a/файлы/prezentaciya-chernovik.pptx
+++ b/файлы/prezentaciya-chernovik.pptx
@@ -11269,8 +11269,8 @@
         </p:blipFill>
         <p:spPr>
           <a:xfrm>
-            <a:off x="265176" y="1272997"/>
-            <a:ext cx="11667744" cy="5153254"/>
+            <a:off x="847147" y="960120"/>
+            <a:ext cx="10503802" cy="5779008"/>
           </a:xfrm>
           <a:prstGeom prst="rect">
             <a:avLst/>

--- a/файлы/prezentaciya-chernovik.pptx
+++ b/файлы/prezentaciya-chernovik.pptx
@@ -11269,8 +11269,8 @@
         </p:blipFill>
         <p:spPr>
           <a:xfrm>
-            <a:off x="847147" y="960120"/>
-            <a:ext cx="10503802" cy="5779008"/>
+            <a:off x="1302376" y="960120"/>
+            <a:ext cx="9593345" cy="5779008"/>
           </a:xfrm>
           <a:prstGeom prst="rect">
             <a:avLst/>

--- a/файлы/prezentaciya-chernovik.pptx
+++ b/файлы/prezentaciya-chernovik.pptx
@@ -12891,119 +12891,30 @@
           </p:txBody>
         </p:sp>
       </p:grpSp>
-      <p:sp>
-        <p:nvSpPr>
-          <p:cNvPr id="910" name="Поле 910"/>
-          <p:cNvSpPr txBox="1"/>
+      <p:pic>
+        <p:nvPicPr>
+          <p:cNvPr id="910" name="Рисунок 910"/>
+          <p:cNvPicPr>
+            <a:picLocks noChangeAspect="1"/>
+          </p:cNvPicPr>
           <p:nvPr/>
-        </p:nvSpPr>
+        </p:nvPicPr>
+        <p:blipFill>
+          <a:blip r:embed="rId5"/>
+          <a:stretch>
+            <a:fillRect/>
+          </a:stretch>
+        </p:blipFill>
         <p:spPr>
           <a:xfrm>
-            <a:off x="822960" y="2148840"/>
-            <a:ext cx="10515600" cy="2286000"/>
+            <a:off x="1322926" y="960120"/>
+            <a:ext cx="9552243" cy="5779008"/>
           </a:xfrm>
-          <a:prstGeom prst="roundRect">
-            <a:avLst>
-              <a:gd name="adj" fmla="val 4000"/>
-            </a:avLst>
+          <a:prstGeom prst="rect">
+            <a:avLst/>
           </a:prstGeom>
-          <a:solidFill>
-            <a:srgbClr val="F7F6FE"/>
-          </a:solidFill>
-          <a:ln w="12700">
-            <a:solidFill>
-              <a:srgbClr val="6C5CE0"/>
-            </a:solidFill>
-            <a:prstDash val="dash"/>
-          </a:ln>
         </p:spPr>
-        <p:txBody>
-          <a:bodyPr anchor="ctr" lIns="91440" rIns="91440" tIns="68580" bIns="68580" wrap="square">
-            <a:noAutofit/>
-          </a:bodyPr>
-          <a:lstStyle/>
-          <a:p>
-            <a:pPr algn="l" marL="0" indent="0">
-              <a:lnSpc>
-                <a:spcPct val="100000"/>
-              </a:lnSpc>
-              <a:spcAft>
-                <a:spcPts val="400"/>
-              </a:spcAft>
-              <a:buNone/>
-            </a:pPr>
-            <a:r>
-              <a:rPr lang="ru-RU" sz="1400" b="1" dirty="0">
-                <a:solidFill>
-                  <a:srgbClr val="6C5CE0"/>
-                </a:solidFill>
-                <a:latin typeface="Onest Black" pitchFamily="2" charset="-52"/>
-              </a:rPr>
-              <a:t xml:space="preserve">Карта целевого состояния процесса</a:t>
-            </a:r>
-          </a:p>
-          <a:p>
-            <a:pPr algn="l" marL="0" indent="0">
-              <a:lnSpc>
-                <a:spcPct val="110000"/>
-              </a:lnSpc>
-              <a:spcAft>
-                <a:spcPts val="200"/>
-              </a:spcAft>
-              <a:buNone/>
-            </a:pPr>
-            <a:r>
-              <a:rPr lang="ru-RU" sz="1100" b="0" dirty="0">
-                <a:solidFill>
-                  <a:srgbClr val="595959"/>
-                </a:solidFill>
-                <a:latin typeface="Onest Medium" pitchFamily="2" charset="-52"/>
-              </a:rPr>
-              <a:t xml:space="preserve">Та же сетка, что у карты текущего состояния: сравнение читается глазом.</a:t>
-            </a:r>
-          </a:p>
-          <a:p>
-            <a:pPr algn="l" marL="0" indent="0">
-              <a:lnSpc>
-                <a:spcPct val="110000"/>
-              </a:lnSpc>
-              <a:spcAft>
-                <a:spcPts val="200"/>
-              </a:spcAft>
-              <a:buNone/>
-            </a:pPr>
-            <a:r>
-              <a:rPr lang="ru-RU" sz="1100" b="0" dirty="0">
-                <a:solidFill>
-                  <a:srgbClr val="595959"/>
-                </a:solidFill>
-                <a:latin typeface="Onest Medium" pitchFamily="2" charset="-52"/>
-              </a:rPr>
-              <a:t xml:space="preserve">Проблемы («ежи») заменяются мероприятиями («облачками»), выноска внизу — «Предлагаемые решения», ВПП пересчитан.</a:t>
-            </a:r>
-          </a:p>
-          <a:p>
-            <a:pPr algn="l" marL="0" indent="0">
-              <a:lnSpc>
-                <a:spcPct val="100000"/>
-              </a:lnSpc>
-              <a:spcAft>
-                <a:spcPts val="0"/>
-              </a:spcAft>
-              <a:buNone/>
-            </a:pPr>
-            <a:r>
-              <a:rPr lang="ru-RU" sz="1000" b="0" dirty="0">
-                <a:solidFill>
-                  <a:srgbClr val="6C5CE0"/>
-                </a:solidFill>
-                <a:latin typeface="Onest Medium" pitchFamily="2" charset="-52"/>
-              </a:rPr>
-              <a:t xml:space="preserve">Готовится 01–03.09.2026 на основе карты текущего состояния</a:t>
-            </a:r>
-          </a:p>
-        </p:txBody>
-      </p:sp>
+      </p:pic>
     </p:spTree>
   </p:cSld>
   <p:clrMapOvr>

--- a/файлы/prezentaciya-chernovik.pptx
+++ b/файлы/prezentaciya-chernovik.pptx
@@ -4059,97 +4059,1450 @@
           </p:txBody>
         </p:sp>
       </p:grpSp>
+      <p:graphicFrame>
+        <p:nvGraphicFramePr>
+          <p:cNvPr id="917" name="Таблица 917"/>
+          <p:cNvGraphicFramePr>
+            <a:graphicFrameLocks noGrp="1"/>
+          </p:cNvGraphicFramePr>
+          <p:nvPr/>
+        </p:nvGraphicFramePr>
+        <p:xfrm>
+          <a:off x="411480" y="1444752"/>
+          <a:ext cx="11338560" cy="4526280"/>
+        </p:xfrm>
+        <a:graphic>
+          <a:graphicData uri="http://schemas.openxmlformats.org/drawingml/2006/table">
+            <a:tbl>
+              <a:tblPr/>
+              <a:tblGrid>
+                <a:gridCol w="2240280"/>
+                <a:gridCol w="2377440"/>
+                <a:gridCol w="6720840"/>
+              </a:tblGrid>
+              <a:tr h="502920">
+                <a:tc>
+                  <a:txBody>
+                    <a:bodyPr/>
+                    <a:lstStyle/>
+                    <a:p>
+                      <a:pPr algn="l" marL="0" indent="0">
+                        <a:lnSpc>
+                          <a:spcPct val="100000"/>
+                        </a:lnSpc>
+                        <a:spcAft>
+                          <a:spcPts val="0"/>
+                        </a:spcAft>
+                        <a:buNone/>
+                      </a:pPr>
+                      <a:r>
+                        <a:rPr lang="ru-RU" sz="950" b="1" dirty="0">
+                          <a:solidFill>
+                            <a:srgbClr val="000000"/>
+                          </a:solidFill>
+                          <a:latin typeface="Onest Black" pitchFamily="2" charset="-52"/>
+                        </a:rPr>
+                        <a:t xml:space="preserve">Что</a:t>
+                      </a:r>
+                    </a:p>
+                  </a:txBody>
+                  <a:tcPr marL="45720" marR="45720" marT="27432" marB="27432" anchor="ctr">
+                    <a:lnL w="6350" cap="flat">
+                      <a:solidFill>
+                        <a:srgbClr val="C9C2EE"/>
+                      </a:solidFill>
+                    </a:lnL>
+                    <a:lnR w="6350" cap="flat">
+                      <a:solidFill>
+                        <a:srgbClr val="C9C2EE"/>
+                      </a:solidFill>
+                    </a:lnR>
+                    <a:lnT w="6350" cap="flat">
+                      <a:solidFill>
+                        <a:srgbClr val="C9C2EE"/>
+                      </a:solidFill>
+                    </a:lnT>
+                    <a:lnB w="6350" cap="flat">
+                      <a:solidFill>
+                        <a:srgbClr val="C9C2EE"/>
+                      </a:solidFill>
+                    </a:lnB>
+                    <a:solidFill>
+                      <a:srgbClr val="EFEDFB"/>
+                    </a:solidFill>
+                  </a:tcPr>
+                </a:tc>
+                <a:tc>
+                  <a:txBody>
+                    <a:bodyPr/>
+                    <a:lstStyle/>
+                    <a:p>
+                      <a:pPr algn="l" marL="0" indent="0">
+                        <a:lnSpc>
+                          <a:spcPct val="100000"/>
+                        </a:lnSpc>
+                        <a:spcAft>
+                          <a:spcPts val="0"/>
+                        </a:spcAft>
+                        <a:buNone/>
+                      </a:pPr>
+                      <a:r>
+                        <a:rPr lang="ru-RU" sz="950" b="1" dirty="0">
+                          <a:solidFill>
+                            <a:srgbClr val="000000"/>
+                          </a:solidFill>
+                          <a:latin typeface="Onest Black" pitchFamily="2" charset="-52"/>
+                        </a:rPr>
+                        <a:t xml:space="preserve">Как было</a:t>
+                      </a:r>
+                    </a:p>
+                  </a:txBody>
+                  <a:tcPr marL="45720" marR="45720" marT="27432" marB="27432" anchor="ctr">
+                    <a:lnL w="6350" cap="flat">
+                      <a:solidFill>
+                        <a:srgbClr val="C9C2EE"/>
+                      </a:solidFill>
+                    </a:lnL>
+                    <a:lnR w="6350" cap="flat">
+                      <a:solidFill>
+                        <a:srgbClr val="C9C2EE"/>
+                      </a:solidFill>
+                    </a:lnR>
+                    <a:lnT w="6350" cap="flat">
+                      <a:solidFill>
+                        <a:srgbClr val="C9C2EE"/>
+                      </a:solidFill>
+                    </a:lnT>
+                    <a:lnB w="6350" cap="flat">
+                      <a:solidFill>
+                        <a:srgbClr val="C9C2EE"/>
+                      </a:solidFill>
+                    </a:lnB>
+                    <a:solidFill>
+                      <a:srgbClr val="EFEDFB"/>
+                    </a:solidFill>
+                  </a:tcPr>
+                </a:tc>
+                <a:tc>
+                  <a:txBody>
+                    <a:bodyPr/>
+                    <a:lstStyle/>
+                    <a:p>
+                      <a:pPr algn="l" marL="0" indent="0">
+                        <a:lnSpc>
+                          <a:spcPct val="100000"/>
+                        </a:lnSpc>
+                        <a:spcAft>
+                          <a:spcPts val="0"/>
+                        </a:spcAft>
+                        <a:buNone/>
+                      </a:pPr>
+                      <a:r>
+                        <a:rPr lang="ru-RU" sz="950" b="1" dirty="0">
+                          <a:solidFill>
+                            <a:srgbClr val="000000"/>
+                          </a:solidFill>
+                          <a:latin typeface="Onest Black" pitchFamily="2" charset="-52"/>
+                        </a:rPr>
+                        <a:t xml:space="preserve">Подробнее</a:t>
+                      </a:r>
+                    </a:p>
+                  </a:txBody>
+                  <a:tcPr marL="45720" marR="45720" marT="27432" marB="27432" anchor="ctr">
+                    <a:lnL w="6350" cap="flat">
+                      <a:solidFill>
+                        <a:srgbClr val="C9C2EE"/>
+                      </a:solidFill>
+                    </a:lnL>
+                    <a:lnR w="6350" cap="flat">
+                      <a:solidFill>
+                        <a:srgbClr val="C9C2EE"/>
+                      </a:solidFill>
+                    </a:lnR>
+                    <a:lnT w="6350" cap="flat">
+                      <a:solidFill>
+                        <a:srgbClr val="C9C2EE"/>
+                      </a:solidFill>
+                    </a:lnT>
+                    <a:lnB w="6350" cap="flat">
+                      <a:solidFill>
+                        <a:srgbClr val="C9C2EE"/>
+                      </a:solidFill>
+                    </a:lnB>
+                    <a:solidFill>
+                      <a:srgbClr val="EFEDFB"/>
+                    </a:solidFill>
+                  </a:tcPr>
+                </a:tc>
+              </a:tr>
+              <a:tr h="502920">
+                <a:tc>
+                  <a:txBody>
+                    <a:bodyPr/>
+                    <a:lstStyle/>
+                    <a:p>
+                      <a:pPr algn="l" marL="0" indent="0">
+                        <a:lnSpc>
+                          <a:spcPct val="105000"/>
+                        </a:lnSpc>
+                        <a:spcAft>
+                          <a:spcPts val="0"/>
+                        </a:spcAft>
+                        <a:buNone/>
+                      </a:pPr>
+                      <a:r>
+                        <a:rPr lang="ru-RU" sz="900" b="0" dirty="0">
+                          <a:solidFill>
+                            <a:srgbClr val="000000"/>
+                          </a:solidFill>
+                          <a:latin typeface="Onest Medium" pitchFamily="2" charset="-52"/>
+                        </a:rPr>
+                        <a:t xml:space="preserve">Каналов приёма</a:t>
+                      </a:r>
+                    </a:p>
+                  </a:txBody>
+                  <a:tcPr marL="45720" marR="45720" marT="27432" marB="27432" anchor="ctr">
+                    <a:lnL w="6350" cap="flat">
+                      <a:solidFill>
+                        <a:srgbClr val="C9C2EE"/>
+                      </a:solidFill>
+                    </a:lnL>
+                    <a:lnR w="6350" cap="flat">
+                      <a:solidFill>
+                        <a:srgbClr val="C9C2EE"/>
+                      </a:solidFill>
+                    </a:lnR>
+                    <a:lnT w="6350" cap="flat">
+                      <a:solidFill>
+                        <a:srgbClr val="C9C2EE"/>
+                      </a:solidFill>
+                    </a:lnT>
+                    <a:lnB w="6350" cap="flat">
+                      <a:solidFill>
+                        <a:srgbClr val="C9C2EE"/>
+                      </a:solidFill>
+                    </a:lnB>
+                    <a:solidFill>
+                      <a:srgbClr val="FFFFFF"/>
+                    </a:solidFill>
+                  </a:tcPr>
+                </a:tc>
+                <a:tc>
+                  <a:txBody>
+                    <a:bodyPr/>
+                    <a:lstStyle/>
+                    <a:p>
+                      <a:pPr algn="l" marL="0" indent="0">
+                        <a:lnSpc>
+                          <a:spcPct val="105000"/>
+                        </a:lnSpc>
+                        <a:spcAft>
+                          <a:spcPts val="0"/>
+                        </a:spcAft>
+                        <a:buNone/>
+                      </a:pPr>
+                      <a:r>
+                        <a:rPr lang="ru-RU" sz="900" b="1" dirty="0">
+                          <a:solidFill>
+                            <a:srgbClr val="6C5CE0"/>
+                          </a:solidFill>
+                          <a:latin typeface="Onest Black" pitchFamily="2" charset="-52"/>
+                        </a:rPr>
+                        <a:t xml:space="preserve">четыре разрозненных</a:t>
+                      </a:r>
+                    </a:p>
+                  </a:txBody>
+                  <a:tcPr marL="45720" marR="45720" marT="27432" marB="27432" anchor="ctr">
+                    <a:lnL w="6350" cap="flat">
+                      <a:solidFill>
+                        <a:srgbClr val="C9C2EE"/>
+                      </a:solidFill>
+                    </a:lnL>
+                    <a:lnR w="6350" cap="flat">
+                      <a:solidFill>
+                        <a:srgbClr val="C9C2EE"/>
+                      </a:solidFill>
+                    </a:lnR>
+                    <a:lnT w="6350" cap="flat">
+                      <a:solidFill>
+                        <a:srgbClr val="C9C2EE"/>
+                      </a:solidFill>
+                    </a:lnT>
+                    <a:lnB w="6350" cap="flat">
+                      <a:solidFill>
+                        <a:srgbClr val="C9C2EE"/>
+                      </a:solidFill>
+                    </a:lnB>
+                    <a:solidFill>
+                      <a:srgbClr val="FFFFFF"/>
+                    </a:solidFill>
+                  </a:tcPr>
+                </a:tc>
+                <a:tc>
+                  <a:txBody>
+                    <a:bodyPr/>
+                    <a:lstStyle/>
+                    <a:p>
+                      <a:pPr algn="l" marL="0" indent="0">
+                        <a:lnSpc>
+                          <a:spcPct val="105000"/>
+                        </a:lnSpc>
+                        <a:spcAft>
+                          <a:spcPts val="0"/>
+                        </a:spcAft>
+                        <a:buNone/>
+                      </a:pPr>
+                      <a:r>
+                        <a:rPr lang="ru-RU" sz="880" b="0" dirty="0">
+                          <a:solidFill>
+                            <a:srgbClr val="595959"/>
+                          </a:solidFill>
+                          <a:latin typeface="Onest Regular" pitchFamily="2" charset="-52"/>
+                        </a:rPr>
+                        <a:t xml:space="preserve">личный приём, письменное заявление, социальные сети, платформа обратной связи</a:t>
+                      </a:r>
+                    </a:p>
+                  </a:txBody>
+                  <a:tcPr marL="45720" marR="45720" marT="27432" marB="27432" anchor="ctr">
+                    <a:lnL w="6350" cap="flat">
+                      <a:solidFill>
+                        <a:srgbClr val="C9C2EE"/>
+                      </a:solidFill>
+                    </a:lnL>
+                    <a:lnR w="6350" cap="flat">
+                      <a:solidFill>
+                        <a:srgbClr val="C9C2EE"/>
+                      </a:solidFill>
+                    </a:lnR>
+                    <a:lnT w="6350" cap="flat">
+                      <a:solidFill>
+                        <a:srgbClr val="C9C2EE"/>
+                      </a:solidFill>
+                    </a:lnT>
+                    <a:lnB w="6350" cap="flat">
+                      <a:solidFill>
+                        <a:srgbClr val="C9C2EE"/>
+                      </a:solidFill>
+                    </a:lnB>
+                    <a:solidFill>
+                      <a:srgbClr val="FFFFFF"/>
+                    </a:solidFill>
+                  </a:tcPr>
+                </a:tc>
+              </a:tr>
+              <a:tr h="502920">
+                <a:tc>
+                  <a:txBody>
+                    <a:bodyPr/>
+                    <a:lstStyle/>
+                    <a:p>
+                      <a:pPr algn="l" marL="0" indent="0">
+                        <a:lnSpc>
+                          <a:spcPct val="105000"/>
+                        </a:lnSpc>
+                        <a:spcAft>
+                          <a:spcPts val="0"/>
+                        </a:spcAft>
+                        <a:buNone/>
+                      </a:pPr>
+                      <a:r>
+                        <a:rPr lang="ru-RU" sz="900" b="0" dirty="0">
+                          <a:solidFill>
+                            <a:srgbClr val="000000"/>
+                          </a:solidFill>
+                          <a:latin typeface="Onest Medium" pitchFamily="2" charset="-52"/>
+                        </a:rPr>
+                        <a:t xml:space="preserve">Регистрация</a:t>
+                      </a:r>
+                    </a:p>
+                  </a:txBody>
+                  <a:tcPr marL="45720" marR="45720" marT="27432" marB="27432" anchor="ctr">
+                    <a:lnL w="6350" cap="flat">
+                      <a:solidFill>
+                        <a:srgbClr val="C9C2EE"/>
+                      </a:solidFill>
+                    </a:lnL>
+                    <a:lnR w="6350" cap="flat">
+                      <a:solidFill>
+                        <a:srgbClr val="C9C2EE"/>
+                      </a:solidFill>
+                    </a:lnR>
+                    <a:lnT w="6350" cap="flat">
+                      <a:solidFill>
+                        <a:srgbClr val="C9C2EE"/>
+                      </a:solidFill>
+                    </a:lnT>
+                    <a:lnB w="6350" cap="flat">
+                      <a:solidFill>
+                        <a:srgbClr val="C9C2EE"/>
+                      </a:solidFill>
+                    </a:lnB>
+                    <a:solidFill>
+                      <a:srgbClr val="FFFFFF"/>
+                    </a:solidFill>
+                  </a:tcPr>
+                </a:tc>
+                <a:tc>
+                  <a:txBody>
+                    <a:bodyPr/>
+                    <a:lstStyle/>
+                    <a:p>
+                      <a:pPr algn="l" marL="0" indent="0">
+                        <a:lnSpc>
+                          <a:spcPct val="105000"/>
+                        </a:lnSpc>
+                        <a:spcAft>
+                          <a:spcPts val="0"/>
+                        </a:spcAft>
+                        <a:buNone/>
+                      </a:pPr>
+                      <a:r>
+                        <a:rPr lang="ru-RU" sz="900" b="1" dirty="0">
+                          <a:solidFill>
+                            <a:srgbClr val="6C5CE0"/>
+                          </a:solidFill>
+                          <a:latin typeface="Onest Black" pitchFamily="2" charset="-52"/>
+                        </a:rPr>
+                        <a:t xml:space="preserve">вручную</a:t>
+                      </a:r>
+                    </a:p>
+                  </a:txBody>
+                  <a:tcPr marL="45720" marR="45720" marT="27432" marB="27432" anchor="ctr">
+                    <a:lnL w="6350" cap="flat">
+                      <a:solidFill>
+                        <a:srgbClr val="C9C2EE"/>
+                      </a:solidFill>
+                    </a:lnL>
+                    <a:lnR w="6350" cap="flat">
+                      <a:solidFill>
+                        <a:srgbClr val="C9C2EE"/>
+                      </a:solidFill>
+                    </a:lnR>
+                    <a:lnT w="6350" cap="flat">
+                      <a:solidFill>
+                        <a:srgbClr val="C9C2EE"/>
+                      </a:solidFill>
+                    </a:lnT>
+                    <a:lnB w="6350" cap="flat">
+                      <a:solidFill>
+                        <a:srgbClr val="C9C2EE"/>
+                      </a:solidFill>
+                    </a:lnB>
+                    <a:solidFill>
+                      <a:srgbClr val="FFFFFF"/>
+                    </a:solidFill>
+                  </a:tcPr>
+                </a:tc>
+                <a:tc>
+                  <a:txBody>
+                    <a:bodyPr/>
+                    <a:lstStyle/>
+                    <a:p>
+                      <a:pPr algn="l" marL="0" indent="0">
+                        <a:lnSpc>
+                          <a:spcPct val="105000"/>
+                        </a:lnSpc>
+                        <a:spcAft>
+                          <a:spcPts val="0"/>
+                        </a:spcAft>
+                        <a:buNone/>
+                      </a:pPr>
+                      <a:r>
+                        <a:rPr lang="ru-RU" sz="880" b="0" dirty="0">
+                          <a:solidFill>
+                            <a:srgbClr val="595959"/>
+                          </a:solidFill>
+                          <a:latin typeface="Onest Regular" pitchFamily="2" charset="-52"/>
+                        </a:rPr>
+                        <a:t xml:space="preserve">журнал входящих и карточка в системе документооборота, суть и адрес записываются в свободной форме</a:t>
+                      </a:r>
+                    </a:p>
+                  </a:txBody>
+                  <a:tcPr marL="45720" marR="45720" marT="27432" marB="27432" anchor="ctr">
+                    <a:lnL w="6350" cap="flat">
+                      <a:solidFill>
+                        <a:srgbClr val="C9C2EE"/>
+                      </a:solidFill>
+                    </a:lnL>
+                    <a:lnR w="6350" cap="flat">
+                      <a:solidFill>
+                        <a:srgbClr val="C9C2EE"/>
+                      </a:solidFill>
+                    </a:lnR>
+                    <a:lnT w="6350" cap="flat">
+                      <a:solidFill>
+                        <a:srgbClr val="C9C2EE"/>
+                      </a:solidFill>
+                    </a:lnT>
+                    <a:lnB w="6350" cap="flat">
+                      <a:solidFill>
+                        <a:srgbClr val="C9C2EE"/>
+                      </a:solidFill>
+                    </a:lnB>
+                    <a:solidFill>
+                      <a:srgbClr val="FFFFFF"/>
+                    </a:solidFill>
+                  </a:tcPr>
+                </a:tc>
+              </a:tr>
+              <a:tr h="502920">
+                <a:tc>
+                  <a:txBody>
+                    <a:bodyPr/>
+                    <a:lstStyle/>
+                    <a:p>
+                      <a:pPr algn="l" marL="0" indent="0">
+                        <a:lnSpc>
+                          <a:spcPct val="105000"/>
+                        </a:lnSpc>
+                        <a:spcAft>
+                          <a:spcPts val="0"/>
+                        </a:spcAft>
+                        <a:buNone/>
+                      </a:pPr>
+                      <a:r>
+                        <a:rPr lang="ru-RU" sz="900" b="0" dirty="0">
+                          <a:solidFill>
+                            <a:srgbClr val="000000"/>
+                          </a:solidFill>
+                          <a:latin typeface="Onest Medium" pitchFamily="2" charset="-52"/>
+                        </a:rPr>
+                        <a:t xml:space="preserve">Маршрут</a:t>
+                      </a:r>
+                    </a:p>
+                  </a:txBody>
+                  <a:tcPr marL="45720" marR="45720" marT="27432" marB="27432" anchor="ctr">
+                    <a:lnL w="6350" cap="flat">
+                      <a:solidFill>
+                        <a:srgbClr val="C9C2EE"/>
+                      </a:solidFill>
+                    </a:lnL>
+                    <a:lnR w="6350" cap="flat">
+                      <a:solidFill>
+                        <a:srgbClr val="C9C2EE"/>
+                      </a:solidFill>
+                    </a:lnR>
+                    <a:lnT w="6350" cap="flat">
+                      <a:solidFill>
+                        <a:srgbClr val="C9C2EE"/>
+                      </a:solidFill>
+                    </a:lnT>
+                    <a:lnB w="6350" cap="flat">
+                      <a:solidFill>
+                        <a:srgbClr val="C9C2EE"/>
+                      </a:solidFill>
+                    </a:lnB>
+                    <a:solidFill>
+                      <a:srgbClr val="FFFFFF"/>
+                    </a:solidFill>
+                  </a:tcPr>
+                </a:tc>
+                <a:tc>
+                  <a:txBody>
+                    <a:bodyPr/>
+                    <a:lstStyle/>
+                    <a:p>
+                      <a:pPr algn="l" marL="0" indent="0">
+                        <a:lnSpc>
+                          <a:spcPct val="105000"/>
+                        </a:lnSpc>
+                        <a:spcAft>
+                          <a:spcPts val="0"/>
+                        </a:spcAft>
+                        <a:buNone/>
+                      </a:pPr>
+                      <a:r>
+                        <a:rPr lang="ru-RU" sz="900" b="1" dirty="0">
+                          <a:solidFill>
+                            <a:srgbClr val="6C5CE0"/>
+                          </a:solidFill>
+                          <a:latin typeface="Onest Black" pitchFamily="2" charset="-52"/>
+                        </a:rPr>
+                        <a:t xml:space="preserve">через первое лицо</a:t>
+                      </a:r>
+                    </a:p>
+                  </a:txBody>
+                  <a:tcPr marL="45720" marR="45720" marT="27432" marB="27432" anchor="ctr">
+                    <a:lnL w="6350" cap="flat">
+                      <a:solidFill>
+                        <a:srgbClr val="C9C2EE"/>
+                      </a:solidFill>
+                    </a:lnL>
+                    <a:lnR w="6350" cap="flat">
+                      <a:solidFill>
+                        <a:srgbClr val="C9C2EE"/>
+                      </a:solidFill>
+                    </a:lnR>
+                    <a:lnT w="6350" cap="flat">
+                      <a:solidFill>
+                        <a:srgbClr val="C9C2EE"/>
+                      </a:solidFill>
+                    </a:lnT>
+                    <a:lnB w="6350" cap="flat">
+                      <a:solidFill>
+                        <a:srgbClr val="C9C2EE"/>
+                      </a:solidFill>
+                    </a:lnB>
+                    <a:solidFill>
+                      <a:srgbClr val="FFFFFF"/>
+                    </a:solidFill>
+                  </a:tcPr>
+                </a:tc>
+                <a:tc>
+                  <a:txBody>
+                    <a:bodyPr/>
+                    <a:lstStyle/>
+                    <a:p>
+                      <a:pPr algn="l" marL="0" indent="0">
+                        <a:lnSpc>
+                          <a:spcPct val="105000"/>
+                        </a:lnSpc>
+                        <a:spcAft>
+                          <a:spcPts val="0"/>
+                        </a:spcAft>
+                        <a:buNone/>
+                      </a:pPr>
+                      <a:r>
+                        <a:rPr lang="ru-RU" sz="880" b="0" dirty="0">
+                          <a:solidFill>
+                            <a:srgbClr val="595959"/>
+                          </a:solidFill>
+                          <a:latin typeface="Onest Regular" pitchFamily="2" charset="-52"/>
+                        </a:rPr>
+                        <a:t xml:space="preserve">ответственного заместителя определяет лично Глава округа — и для сложного вопроса, и для заявки о яме</a:t>
+                      </a:r>
+                    </a:p>
+                  </a:txBody>
+                  <a:tcPr marL="45720" marR="45720" marT="27432" marB="27432" anchor="ctr">
+                    <a:lnL w="6350" cap="flat">
+                      <a:solidFill>
+                        <a:srgbClr val="C9C2EE"/>
+                      </a:solidFill>
+                    </a:lnL>
+                    <a:lnR w="6350" cap="flat">
+                      <a:solidFill>
+                        <a:srgbClr val="C9C2EE"/>
+                      </a:solidFill>
+                    </a:lnR>
+                    <a:lnT w="6350" cap="flat">
+                      <a:solidFill>
+                        <a:srgbClr val="C9C2EE"/>
+                      </a:solidFill>
+                    </a:lnT>
+                    <a:lnB w="6350" cap="flat">
+                      <a:solidFill>
+                        <a:srgbClr val="C9C2EE"/>
+                      </a:solidFill>
+                    </a:lnB>
+                    <a:solidFill>
+                      <a:srgbClr val="FFFFFF"/>
+                    </a:solidFill>
+                  </a:tcPr>
+                </a:tc>
+              </a:tr>
+              <a:tr h="502920">
+                <a:tc>
+                  <a:txBody>
+                    <a:bodyPr/>
+                    <a:lstStyle/>
+                    <a:p>
+                      <a:pPr algn="l" marL="0" indent="0">
+                        <a:lnSpc>
+                          <a:spcPct val="105000"/>
+                        </a:lnSpc>
+                        <a:spcAft>
+                          <a:spcPts val="0"/>
+                        </a:spcAft>
+                        <a:buNone/>
+                      </a:pPr>
+                      <a:r>
+                        <a:rPr lang="ru-RU" sz="900" b="0" dirty="0">
+                          <a:solidFill>
+                            <a:srgbClr val="000000"/>
+                          </a:solidFill>
+                          <a:latin typeface="Onest Medium" pitchFamily="2" charset="-52"/>
+                        </a:rPr>
+                        <a:t xml:space="preserve">Срок</a:t>
+                      </a:r>
+                    </a:p>
+                  </a:txBody>
+                  <a:tcPr marL="45720" marR="45720" marT="27432" marB="27432" anchor="ctr">
+                    <a:lnL w="6350" cap="flat">
+                      <a:solidFill>
+                        <a:srgbClr val="C9C2EE"/>
+                      </a:solidFill>
+                    </a:lnL>
+                    <a:lnR w="6350" cap="flat">
+                      <a:solidFill>
+                        <a:srgbClr val="C9C2EE"/>
+                      </a:solidFill>
+                    </a:lnR>
+                    <a:lnT w="6350" cap="flat">
+                      <a:solidFill>
+                        <a:srgbClr val="C9C2EE"/>
+                      </a:solidFill>
+                    </a:lnT>
+                    <a:lnB w="6350" cap="flat">
+                      <a:solidFill>
+                        <a:srgbClr val="C9C2EE"/>
+                      </a:solidFill>
+                    </a:lnB>
+                    <a:solidFill>
+                      <a:srgbClr val="FFFFFF"/>
+                    </a:solidFill>
+                  </a:tcPr>
+                </a:tc>
+                <a:tc>
+                  <a:txBody>
+                    <a:bodyPr/>
+                    <a:lstStyle/>
+                    <a:p>
+                      <a:pPr algn="l" marL="0" indent="0">
+                        <a:lnSpc>
+                          <a:spcPct val="105000"/>
+                        </a:lnSpc>
+                        <a:spcAft>
+                          <a:spcPts val="0"/>
+                        </a:spcAft>
+                        <a:buNone/>
+                      </a:pPr>
+                      <a:r>
+                        <a:rPr lang="ru-RU" sz="900" b="1" dirty="0">
+                          <a:solidFill>
+                            <a:srgbClr val="6C5CE0"/>
+                          </a:solidFill>
+                          <a:latin typeface="Onest Black" pitchFamily="2" charset="-52"/>
+                        </a:rPr>
+                        <a:t xml:space="preserve">30 календарных дней</a:t>
+                      </a:r>
+                    </a:p>
+                  </a:txBody>
+                  <a:tcPr marL="45720" marR="45720" marT="27432" marB="27432" anchor="ctr">
+                    <a:lnL w="6350" cap="flat">
+                      <a:solidFill>
+                        <a:srgbClr val="C9C2EE"/>
+                      </a:solidFill>
+                    </a:lnL>
+                    <a:lnR w="6350" cap="flat">
+                      <a:solidFill>
+                        <a:srgbClr val="C9C2EE"/>
+                      </a:solidFill>
+                    </a:lnR>
+                    <a:lnT w="6350" cap="flat">
+                      <a:solidFill>
+                        <a:srgbClr val="C9C2EE"/>
+                      </a:solidFill>
+                    </a:lnT>
+                    <a:lnB w="6350" cap="flat">
+                      <a:solidFill>
+                        <a:srgbClr val="C9C2EE"/>
+                      </a:solidFill>
+                    </a:lnB>
+                    <a:solidFill>
+                      <a:srgbClr val="FFFFFF"/>
+                    </a:solidFill>
+                  </a:tcPr>
+                </a:tc>
+                <a:tc>
+                  <a:txBody>
+                    <a:bodyPr/>
+                    <a:lstStyle/>
+                    <a:p>
+                      <a:pPr algn="l" marL="0" indent="0">
+                        <a:lnSpc>
+                          <a:spcPct val="105000"/>
+                        </a:lnSpc>
+                        <a:spcAft>
+                          <a:spcPts val="0"/>
+                        </a:spcAft>
+                        <a:buNone/>
+                      </a:pPr>
+                      <a:r>
+                        <a:rPr lang="ru-RU" sz="880" b="0" dirty="0">
+                          <a:solidFill>
+                            <a:srgbClr val="595959"/>
+                          </a:solidFill>
+                          <a:latin typeface="Onest Regular" pitchFamily="2" charset="-52"/>
+                        </a:rPr>
+                        <a:t xml:space="preserve">один на любое обращение; о ходе работы гражданин не информируется</a:t>
+                      </a:r>
+                    </a:p>
+                  </a:txBody>
+                  <a:tcPr marL="45720" marR="45720" marT="27432" marB="27432" anchor="ctr">
+                    <a:lnL w="6350" cap="flat">
+                      <a:solidFill>
+                        <a:srgbClr val="C9C2EE"/>
+                      </a:solidFill>
+                    </a:lnL>
+                    <a:lnR w="6350" cap="flat">
+                      <a:solidFill>
+                        <a:srgbClr val="C9C2EE"/>
+                      </a:solidFill>
+                    </a:lnR>
+                    <a:lnT w="6350" cap="flat">
+                      <a:solidFill>
+                        <a:srgbClr val="C9C2EE"/>
+                      </a:solidFill>
+                    </a:lnT>
+                    <a:lnB w="6350" cap="flat">
+                      <a:solidFill>
+                        <a:srgbClr val="C9C2EE"/>
+                      </a:solidFill>
+                    </a:lnB>
+                    <a:solidFill>
+                      <a:srgbClr val="FFFFFF"/>
+                    </a:solidFill>
+                  </a:tcPr>
+                </a:tc>
+              </a:tr>
+              <a:tr h="502920">
+                <a:tc>
+                  <a:txBody>
+                    <a:bodyPr/>
+                    <a:lstStyle/>
+                    <a:p>
+                      <a:pPr algn="l" marL="0" indent="0">
+                        <a:lnSpc>
+                          <a:spcPct val="105000"/>
+                        </a:lnSpc>
+                        <a:spcAft>
+                          <a:spcPts val="0"/>
+                        </a:spcAft>
+                        <a:buNone/>
+                      </a:pPr>
+                      <a:r>
+                        <a:rPr lang="ru-RU" sz="900" b="0" dirty="0">
+                          <a:solidFill>
+                            <a:srgbClr val="000000"/>
+                          </a:solidFill>
+                          <a:latin typeface="Onest Medium" pitchFamily="2" charset="-52"/>
+                        </a:rPr>
+                        <a:t xml:space="preserve">Ответ</a:t>
+                      </a:r>
+                    </a:p>
+                  </a:txBody>
+                  <a:tcPr marL="45720" marR="45720" marT="27432" marB="27432" anchor="ctr">
+                    <a:lnL w="6350" cap="flat">
+                      <a:solidFill>
+                        <a:srgbClr val="C9C2EE"/>
+                      </a:solidFill>
+                    </a:lnL>
+                    <a:lnR w="6350" cap="flat">
+                      <a:solidFill>
+                        <a:srgbClr val="C9C2EE"/>
+                      </a:solidFill>
+                    </a:lnR>
+                    <a:lnT w="6350" cap="flat">
+                      <a:solidFill>
+                        <a:srgbClr val="C9C2EE"/>
+                      </a:solidFill>
+                    </a:lnT>
+                    <a:lnB w="6350" cap="flat">
+                      <a:solidFill>
+                        <a:srgbClr val="C9C2EE"/>
+                      </a:solidFill>
+                    </a:lnB>
+                    <a:solidFill>
+                      <a:srgbClr val="FFFFFF"/>
+                    </a:solidFill>
+                  </a:tcPr>
+                </a:tc>
+                <a:tc>
+                  <a:txBody>
+                    <a:bodyPr/>
+                    <a:lstStyle/>
+                    <a:p>
+                      <a:pPr algn="l" marL="0" indent="0">
+                        <a:lnSpc>
+                          <a:spcPct val="105000"/>
+                        </a:lnSpc>
+                        <a:spcAft>
+                          <a:spcPts val="0"/>
+                        </a:spcAft>
+                        <a:buNone/>
+                      </a:pPr>
+                      <a:r>
+                        <a:rPr lang="ru-RU" sz="900" b="1" dirty="0">
+                          <a:solidFill>
+                            <a:srgbClr val="6C5CE0"/>
+                          </a:solidFill>
+                          <a:latin typeface="Onest Black" pitchFamily="2" charset="-52"/>
+                        </a:rPr>
+                        <a:t xml:space="preserve">почтой</a:t>
+                      </a:r>
+                    </a:p>
+                  </a:txBody>
+                  <a:tcPr marL="45720" marR="45720" marT="27432" marB="27432" anchor="ctr">
+                    <a:lnL w="6350" cap="flat">
+                      <a:solidFill>
+                        <a:srgbClr val="C9C2EE"/>
+                      </a:solidFill>
+                    </a:lnL>
+                    <a:lnR w="6350" cap="flat">
+                      <a:solidFill>
+                        <a:srgbClr val="C9C2EE"/>
+                      </a:solidFill>
+                    </a:lnR>
+                    <a:lnT w="6350" cap="flat">
+                      <a:solidFill>
+                        <a:srgbClr val="C9C2EE"/>
+                      </a:solidFill>
+                    </a:lnT>
+                    <a:lnB w="6350" cap="flat">
+                      <a:solidFill>
+                        <a:srgbClr val="C9C2EE"/>
+                      </a:solidFill>
+                    </a:lnB>
+                    <a:solidFill>
+                      <a:srgbClr val="FFFFFF"/>
+                    </a:solidFill>
+                  </a:tcPr>
+                </a:tc>
+                <a:tc>
+                  <a:txBody>
+                    <a:bodyPr/>
+                    <a:lstStyle/>
+                    <a:p>
+                      <a:pPr algn="l" marL="0" indent="0">
+                        <a:lnSpc>
+                          <a:spcPct val="105000"/>
+                        </a:lnSpc>
+                        <a:spcAft>
+                          <a:spcPts val="0"/>
+                        </a:spcAft>
+                        <a:buNone/>
+                      </a:pPr>
+                      <a:r>
+                        <a:rPr lang="ru-RU" sz="880" b="0" dirty="0">
+                          <a:solidFill>
+                            <a:srgbClr val="595959"/>
+                          </a:solidFill>
+                          <a:latin typeface="Onest Regular" pitchFamily="2" charset="-52"/>
+                        </a:rPr>
+                        <a:t xml:space="preserve">до недели сверх нормативного срока, в зависимости от населённого пункта</a:t>
+                      </a:r>
+                    </a:p>
+                  </a:txBody>
+                  <a:tcPr marL="45720" marR="45720" marT="27432" marB="27432" anchor="ctr">
+                    <a:lnL w="6350" cap="flat">
+                      <a:solidFill>
+                        <a:srgbClr val="C9C2EE"/>
+                      </a:solidFill>
+                    </a:lnL>
+                    <a:lnR w="6350" cap="flat">
+                      <a:solidFill>
+                        <a:srgbClr val="C9C2EE"/>
+                      </a:solidFill>
+                    </a:lnR>
+                    <a:lnT w="6350" cap="flat">
+                      <a:solidFill>
+                        <a:srgbClr val="C9C2EE"/>
+                      </a:solidFill>
+                    </a:lnT>
+                    <a:lnB w="6350" cap="flat">
+                      <a:solidFill>
+                        <a:srgbClr val="C9C2EE"/>
+                      </a:solidFill>
+                    </a:lnB>
+                    <a:solidFill>
+                      <a:srgbClr val="FFFFFF"/>
+                    </a:solidFill>
+                  </a:tcPr>
+                </a:tc>
+              </a:tr>
+              <a:tr h="502920">
+                <a:tc>
+                  <a:txBody>
+                    <a:bodyPr/>
+                    <a:lstStyle/>
+                    <a:p>
+                      <a:pPr algn="l" marL="0" indent="0">
+                        <a:lnSpc>
+                          <a:spcPct val="105000"/>
+                        </a:lnSpc>
+                        <a:spcAft>
+                          <a:spcPts val="0"/>
+                        </a:spcAft>
+                        <a:buNone/>
+                      </a:pPr>
+                      <a:r>
+                        <a:rPr lang="ru-RU" sz="900" b="0" dirty="0">
+                          <a:solidFill>
+                            <a:srgbClr val="000000"/>
+                          </a:solidFill>
+                          <a:latin typeface="Onest Medium" pitchFamily="2" charset="-52"/>
+                        </a:rPr>
+                        <a:t xml:space="preserve">Подтверждение результата</a:t>
+                      </a:r>
+                    </a:p>
+                  </a:txBody>
+                  <a:tcPr marL="45720" marR="45720" marT="27432" marB="27432" anchor="ctr">
+                    <a:lnL w="6350" cap="flat">
+                      <a:solidFill>
+                        <a:srgbClr val="C9C2EE"/>
+                      </a:solidFill>
+                    </a:lnL>
+                    <a:lnR w="6350" cap="flat">
+                      <a:solidFill>
+                        <a:srgbClr val="C9C2EE"/>
+                      </a:solidFill>
+                    </a:lnR>
+                    <a:lnT w="6350" cap="flat">
+                      <a:solidFill>
+                        <a:srgbClr val="C9C2EE"/>
+                      </a:solidFill>
+                    </a:lnT>
+                    <a:lnB w="6350" cap="flat">
+                      <a:solidFill>
+                        <a:srgbClr val="C9C2EE"/>
+                      </a:solidFill>
+                    </a:lnB>
+                    <a:solidFill>
+                      <a:srgbClr val="FFFFFF"/>
+                    </a:solidFill>
+                  </a:tcPr>
+                </a:tc>
+                <a:tc>
+                  <a:txBody>
+                    <a:bodyPr/>
+                    <a:lstStyle/>
+                    <a:p>
+                      <a:pPr algn="l" marL="0" indent="0">
+                        <a:lnSpc>
+                          <a:spcPct val="105000"/>
+                        </a:lnSpc>
+                        <a:spcAft>
+                          <a:spcPts val="0"/>
+                        </a:spcAft>
+                        <a:buNone/>
+                      </a:pPr>
+                      <a:r>
+                        <a:rPr lang="ru-RU" sz="900" b="1" dirty="0">
+                          <a:solidFill>
+                            <a:srgbClr val="6C5CE0"/>
+                          </a:solidFill>
+                          <a:latin typeface="Onest Black" pitchFamily="2" charset="-52"/>
+                        </a:rPr>
+                        <a:t xml:space="preserve">нет</a:t>
+                      </a:r>
+                    </a:p>
+                  </a:txBody>
+                  <a:tcPr marL="45720" marR="45720" marT="27432" marB="27432" anchor="ctr">
+                    <a:lnL w="6350" cap="flat">
+                      <a:solidFill>
+                        <a:srgbClr val="C9C2EE"/>
+                      </a:solidFill>
+                    </a:lnL>
+                    <a:lnR w="6350" cap="flat">
+                      <a:solidFill>
+                        <a:srgbClr val="C9C2EE"/>
+                      </a:solidFill>
+                    </a:lnR>
+                    <a:lnT w="6350" cap="flat">
+                      <a:solidFill>
+                        <a:srgbClr val="C9C2EE"/>
+                      </a:solidFill>
+                    </a:lnT>
+                    <a:lnB w="6350" cap="flat">
+                      <a:solidFill>
+                        <a:srgbClr val="C9C2EE"/>
+                      </a:solidFill>
+                    </a:lnB>
+                    <a:solidFill>
+                      <a:srgbClr val="FFFFFF"/>
+                    </a:solidFill>
+                  </a:tcPr>
+                </a:tc>
+                <a:tc>
+                  <a:txBody>
+                    <a:bodyPr/>
+                    <a:lstStyle/>
+                    <a:p>
+                      <a:pPr algn="l" marL="0" indent="0">
+                        <a:lnSpc>
+                          <a:spcPct val="105000"/>
+                        </a:lnSpc>
+                        <a:spcAft>
+                          <a:spcPts val="0"/>
+                        </a:spcAft>
+                        <a:buNone/>
+                      </a:pPr>
+                      <a:r>
+                        <a:rPr lang="ru-RU" sz="880" b="0" dirty="0">
+                          <a:solidFill>
+                            <a:srgbClr val="595959"/>
+                          </a:solidFill>
+                          <a:latin typeface="Onest Regular" pitchFamily="2" charset="-52"/>
+                        </a:rPr>
+                        <a:t xml:space="preserve">фотографии или акта об устранении нет ни у исполнителя, ни у руководителя</a:t>
+                      </a:r>
+                    </a:p>
+                  </a:txBody>
+                  <a:tcPr marL="45720" marR="45720" marT="27432" marB="27432" anchor="ctr">
+                    <a:lnL w="6350" cap="flat">
+                      <a:solidFill>
+                        <a:srgbClr val="C9C2EE"/>
+                      </a:solidFill>
+                    </a:lnL>
+                    <a:lnR w="6350" cap="flat">
+                      <a:solidFill>
+                        <a:srgbClr val="C9C2EE"/>
+                      </a:solidFill>
+                    </a:lnR>
+                    <a:lnT w="6350" cap="flat">
+                      <a:solidFill>
+                        <a:srgbClr val="C9C2EE"/>
+                      </a:solidFill>
+                    </a:lnT>
+                    <a:lnB w="6350" cap="flat">
+                      <a:solidFill>
+                        <a:srgbClr val="C9C2EE"/>
+                      </a:solidFill>
+                    </a:lnB>
+                    <a:solidFill>
+                      <a:srgbClr val="FFFFFF"/>
+                    </a:solidFill>
+                  </a:tcPr>
+                </a:tc>
+              </a:tr>
+              <a:tr h="502920">
+                <a:tc>
+                  <a:txBody>
+                    <a:bodyPr/>
+                    <a:lstStyle/>
+                    <a:p>
+                      <a:pPr algn="l" marL="0" indent="0">
+                        <a:lnSpc>
+                          <a:spcPct val="105000"/>
+                        </a:lnSpc>
+                        <a:spcAft>
+                          <a:spcPts val="0"/>
+                        </a:spcAft>
+                        <a:buNone/>
+                      </a:pPr>
+                      <a:r>
+                        <a:rPr lang="ru-RU" sz="900" b="0" dirty="0">
+                          <a:solidFill>
+                            <a:srgbClr val="000000"/>
+                          </a:solidFill>
+                          <a:latin typeface="Onest Medium" pitchFamily="2" charset="-52"/>
+                        </a:rPr>
+                        <a:t xml:space="preserve">Повторные обращения</a:t>
+                      </a:r>
+                    </a:p>
+                  </a:txBody>
+                  <a:tcPr marL="45720" marR="45720" marT="27432" marB="27432" anchor="ctr">
+                    <a:lnL w="6350" cap="flat">
+                      <a:solidFill>
+                        <a:srgbClr val="C9C2EE"/>
+                      </a:solidFill>
+                    </a:lnL>
+                    <a:lnR w="6350" cap="flat">
+                      <a:solidFill>
+                        <a:srgbClr val="C9C2EE"/>
+                      </a:solidFill>
+                    </a:lnR>
+                    <a:lnT w="6350" cap="flat">
+                      <a:solidFill>
+                        <a:srgbClr val="C9C2EE"/>
+                      </a:solidFill>
+                    </a:lnT>
+                    <a:lnB w="6350" cap="flat">
+                      <a:solidFill>
+                        <a:srgbClr val="C9C2EE"/>
+                      </a:solidFill>
+                    </a:lnB>
+                    <a:solidFill>
+                      <a:srgbClr val="FFFFFF"/>
+                    </a:solidFill>
+                  </a:tcPr>
+                </a:tc>
+                <a:tc>
+                  <a:txBody>
+                    <a:bodyPr/>
+                    <a:lstStyle/>
+                    <a:p>
+                      <a:pPr algn="l" marL="0" indent="0">
+                        <a:lnSpc>
+                          <a:spcPct val="105000"/>
+                        </a:lnSpc>
+                        <a:spcAft>
+                          <a:spcPts val="0"/>
+                        </a:spcAft>
+                        <a:buNone/>
+                      </a:pPr>
+                      <a:r>
+                        <a:rPr lang="ru-RU" sz="900" b="1" dirty="0">
+                          <a:solidFill>
+                            <a:srgbClr val="6C5CE0"/>
+                          </a:solidFill>
+                          <a:latin typeface="Onest Black" pitchFamily="2" charset="-52"/>
+                        </a:rPr>
+                        <a:t xml:space="preserve">не выявляются</a:t>
+                      </a:r>
+                    </a:p>
+                  </a:txBody>
+                  <a:tcPr marL="45720" marR="45720" marT="27432" marB="27432" anchor="ctr">
+                    <a:lnL w="6350" cap="flat">
+                      <a:solidFill>
+                        <a:srgbClr val="C9C2EE"/>
+                      </a:solidFill>
+                    </a:lnL>
+                    <a:lnR w="6350" cap="flat">
+                      <a:solidFill>
+                        <a:srgbClr val="C9C2EE"/>
+                      </a:solidFill>
+                    </a:lnR>
+                    <a:lnT w="6350" cap="flat">
+                      <a:solidFill>
+                        <a:srgbClr val="C9C2EE"/>
+                      </a:solidFill>
+                    </a:lnT>
+                    <a:lnB w="6350" cap="flat">
+                      <a:solidFill>
+                        <a:srgbClr val="C9C2EE"/>
+                      </a:solidFill>
+                    </a:lnB>
+                    <a:solidFill>
+                      <a:srgbClr val="FFFFFF"/>
+                    </a:solidFill>
+                  </a:tcPr>
+                </a:tc>
+                <a:tc>
+                  <a:txBody>
+                    <a:bodyPr/>
+                    <a:lstStyle/>
+                    <a:p>
+                      <a:pPr algn="l" marL="0" indent="0">
+                        <a:lnSpc>
+                          <a:spcPct val="105000"/>
+                        </a:lnSpc>
+                        <a:spcAft>
+                          <a:spcPts val="0"/>
+                        </a:spcAft>
+                        <a:buNone/>
+                      </a:pPr>
+                      <a:r>
+                        <a:rPr lang="ru-RU" sz="880" b="0" dirty="0">
+                          <a:solidFill>
+                            <a:srgbClr val="595959"/>
+                          </a:solidFill>
+                          <a:latin typeface="Onest Regular" pitchFamily="2" charset="-52"/>
+                        </a:rPr>
+                        <a:t xml:space="preserve">работа по одному объекту заводится и выполняется несколько раз</a:t>
+                      </a:r>
+                    </a:p>
+                  </a:txBody>
+                  <a:tcPr marL="45720" marR="45720" marT="27432" marB="27432" anchor="ctr">
+                    <a:lnL w="6350" cap="flat">
+                      <a:solidFill>
+                        <a:srgbClr val="C9C2EE"/>
+                      </a:solidFill>
+                    </a:lnL>
+                    <a:lnR w="6350" cap="flat">
+                      <a:solidFill>
+                        <a:srgbClr val="C9C2EE"/>
+                      </a:solidFill>
+                    </a:lnR>
+                    <a:lnT w="6350" cap="flat">
+                      <a:solidFill>
+                        <a:srgbClr val="C9C2EE"/>
+                      </a:solidFill>
+                    </a:lnT>
+                    <a:lnB w="6350" cap="flat">
+                      <a:solidFill>
+                        <a:srgbClr val="C9C2EE"/>
+                      </a:solidFill>
+                    </a:lnB>
+                    <a:solidFill>
+                      <a:srgbClr val="FFFFFF"/>
+                    </a:solidFill>
+                  </a:tcPr>
+                </a:tc>
+              </a:tr>
+              <a:tr h="502920">
+                <a:tc>
+                  <a:txBody>
+                    <a:bodyPr/>
+                    <a:lstStyle/>
+                    <a:p>
+                      <a:pPr algn="l" marL="0" indent="0">
+                        <a:lnSpc>
+                          <a:spcPct val="105000"/>
+                        </a:lnSpc>
+                        <a:spcAft>
+                          <a:spcPts val="0"/>
+                        </a:spcAft>
+                        <a:buNone/>
+                      </a:pPr>
+                      <a:r>
+                        <a:rPr lang="ru-RU" sz="900" b="0" dirty="0">
+                          <a:solidFill>
+                            <a:srgbClr val="000000"/>
+                          </a:solidFill>
+                          <a:latin typeface="Onest Medium" pitchFamily="2" charset="-52"/>
+                        </a:rPr>
+                        <a:t xml:space="preserve">Отчётность</a:t>
+                      </a:r>
+                    </a:p>
+                  </a:txBody>
+                  <a:tcPr marL="45720" marR="45720" marT="27432" marB="27432" anchor="ctr">
+                    <a:lnL w="6350" cap="flat">
+                      <a:solidFill>
+                        <a:srgbClr val="C9C2EE"/>
+                      </a:solidFill>
+                    </a:lnL>
+                    <a:lnR w="6350" cap="flat">
+                      <a:solidFill>
+                        <a:srgbClr val="C9C2EE"/>
+                      </a:solidFill>
+                    </a:lnR>
+                    <a:lnT w="6350" cap="flat">
+                      <a:solidFill>
+                        <a:srgbClr val="C9C2EE"/>
+                      </a:solidFill>
+                    </a:lnT>
+                    <a:lnB w="6350" cap="flat">
+                      <a:solidFill>
+                        <a:srgbClr val="C9C2EE"/>
+                      </a:solidFill>
+                    </a:lnB>
+                    <a:solidFill>
+                      <a:srgbClr val="FFFFFF"/>
+                    </a:solidFill>
+                  </a:tcPr>
+                </a:tc>
+                <a:tc>
+                  <a:txBody>
+                    <a:bodyPr/>
+                    <a:lstStyle/>
+                    <a:p>
+                      <a:pPr algn="l" marL="0" indent="0">
+                        <a:lnSpc>
+                          <a:spcPct val="105000"/>
+                        </a:lnSpc>
+                        <a:spcAft>
+                          <a:spcPts val="0"/>
+                        </a:spcAft>
+                        <a:buNone/>
+                      </a:pPr>
+                      <a:r>
+                        <a:rPr lang="ru-RU" sz="900" b="1" dirty="0">
+                          <a:solidFill>
+                            <a:srgbClr val="6C5CE0"/>
+                          </a:solidFill>
+                          <a:latin typeface="Onest Black" pitchFamily="2" charset="-52"/>
+                        </a:rPr>
+                        <a:t xml:space="preserve">вручную</a:t>
+                      </a:r>
+                    </a:p>
+                  </a:txBody>
+                  <a:tcPr marL="45720" marR="45720" marT="27432" marB="27432" anchor="ctr">
+                    <a:lnL w="6350" cap="flat">
+                      <a:solidFill>
+                        <a:srgbClr val="C9C2EE"/>
+                      </a:solidFill>
+                    </a:lnL>
+                    <a:lnR w="6350" cap="flat">
+                      <a:solidFill>
+                        <a:srgbClr val="C9C2EE"/>
+                      </a:solidFill>
+                    </a:lnR>
+                    <a:lnT w="6350" cap="flat">
+                      <a:solidFill>
+                        <a:srgbClr val="C9C2EE"/>
+                      </a:solidFill>
+                    </a:lnT>
+                    <a:lnB w="6350" cap="flat">
+                      <a:solidFill>
+                        <a:srgbClr val="C9C2EE"/>
+                      </a:solidFill>
+                    </a:lnB>
+                    <a:solidFill>
+                      <a:srgbClr val="FFFFFF"/>
+                    </a:solidFill>
+                  </a:tcPr>
+                </a:tc>
+                <a:tc>
+                  <a:txBody>
+                    <a:bodyPr/>
+                    <a:lstStyle/>
+                    <a:p>
+                      <a:pPr algn="l" marL="0" indent="0">
+                        <a:lnSpc>
+                          <a:spcPct val="105000"/>
+                        </a:lnSpc>
+                        <a:spcAft>
+                          <a:spcPts val="0"/>
+                        </a:spcAft>
+                        <a:buNone/>
+                      </a:pPr>
+                      <a:r>
+                        <a:rPr lang="ru-RU" sz="880" b="0" dirty="0">
+                          <a:solidFill>
+                            <a:srgbClr val="595959"/>
+                          </a:solidFill>
+                          <a:latin typeface="Onest Regular" pitchFamily="2" charset="-52"/>
+                        </a:rPr>
+                        <a:t xml:space="preserve">предварительный срез данных по обращениям занимает неделю</a:t>
+                      </a:r>
+                    </a:p>
+                  </a:txBody>
+                  <a:tcPr marL="45720" marR="45720" marT="27432" marB="27432" anchor="ctr">
+                    <a:lnL w="6350" cap="flat">
+                      <a:solidFill>
+                        <a:srgbClr val="C9C2EE"/>
+                      </a:solidFill>
+                    </a:lnL>
+                    <a:lnR w="6350" cap="flat">
+                      <a:solidFill>
+                        <a:srgbClr val="C9C2EE"/>
+                      </a:solidFill>
+                    </a:lnR>
+                    <a:lnT w="6350" cap="flat">
+                      <a:solidFill>
+                        <a:srgbClr val="C9C2EE"/>
+                      </a:solidFill>
+                    </a:lnT>
+                    <a:lnB w="6350" cap="flat">
+                      <a:solidFill>
+                        <a:srgbClr val="C9C2EE"/>
+                      </a:solidFill>
+                    </a:lnB>
+                    <a:solidFill>
+                      <a:srgbClr val="FFFFFF"/>
+                    </a:solidFill>
+                  </a:tcPr>
+                </a:tc>
+              </a:tr>
+            </a:tbl>
+          </a:graphicData>
+        </a:graphic>
+      </p:graphicFrame>
       <p:sp>
         <p:nvSpPr>
-          <p:cNvPr id="917" name="Поле 917"/>
+          <p:cNvPr id="918" name="Поле 918"/>
           <p:cNvSpPr txBox="1"/>
           <p:nvPr/>
         </p:nvSpPr>
         <p:spPr>
           <a:xfrm>
-            <a:off x="822960" y="2148840"/>
-            <a:ext cx="10515600" cy="2286000"/>
+            <a:off x="411480" y="987552"/>
+            <a:ext cx="11338560" cy="411480"/>
           </a:xfrm>
-          <a:prstGeom prst="roundRect">
-            <a:avLst>
-              <a:gd name="adj" fmla="val 4000"/>
-            </a:avLst>
+          <a:prstGeom prst="rect">
+            <a:avLst/>
           </a:prstGeom>
-          <a:solidFill>
-            <a:srgbClr val="F7F6FE"/>
-          </a:solidFill>
-          <a:ln w="12700">
-            <a:solidFill>
-              <a:srgbClr val="6C5CE0"/>
-            </a:solidFill>
-            <a:prstDash val="dash"/>
+          <a:noFill/>
+          <a:ln w="0">
+            <a:noFill/>
           </a:ln>
         </p:spPr>
         <p:txBody>
-          <a:bodyPr anchor="ctr" lIns="91440" rIns="91440" tIns="68580" bIns="68580" wrap="square">
+          <a:bodyPr anchor="t" lIns="91440" rIns="91440" tIns="68580" bIns="68580" wrap="square">
             <a:noAutofit/>
           </a:bodyPr>
           <a:lstStyle/>
-          <a:p>
-            <a:pPr algn="l" marL="0" indent="0">
-              <a:lnSpc>
-                <a:spcPct val="100000"/>
-              </a:lnSpc>
-              <a:spcAft>
-                <a:spcPts val="400"/>
-              </a:spcAft>
-              <a:buNone/>
-            </a:pPr>
-            <a:r>
-              <a:rPr lang="ru-RU" sz="1400" b="1" dirty="0">
-                <a:solidFill>
-                  <a:srgbClr val="6C5CE0"/>
-                </a:solidFill>
-                <a:latin typeface="Onest Black" pitchFamily="2" charset="-52"/>
-              </a:rPr>
-              <a:t xml:space="preserve">Как принимались сообщения раньше</a:t>
-            </a:r>
-          </a:p>
-          <a:p>
-            <a:pPr algn="l" marL="0" indent="0">
-              <a:lnSpc>
-                <a:spcPct val="110000"/>
-              </a:lnSpc>
-              <a:spcAft>
-                <a:spcPts val="200"/>
-              </a:spcAft>
-              <a:buNone/>
-            </a:pPr>
-            <a:r>
-              <a:rPr lang="ru-RU" sz="1100" b="0" dirty="0">
-                <a:solidFill>
-                  <a:srgbClr val="595959"/>
-                </a:solidFill>
-                <a:latin typeface="Onest Medium" pitchFamily="2" charset="-52"/>
-              </a:rPr>
-              <a:t xml:space="preserve">Схема или фотографии: телефон приёмной, личный приём, письменные заявления, комментарии в социальных сетях. Журнал регистрации, передача поручения запиской.</a:t>
-            </a:r>
-          </a:p>
-          <a:p>
-            <a:pPr algn="l" marL="0" indent="0">
-              <a:lnSpc>
-                <a:spcPct val="110000"/>
-              </a:lnSpc>
-              <a:spcAft>
-                <a:spcPts val="200"/>
-              </a:spcAft>
-              <a:buNone/>
-            </a:pPr>
-            <a:r>
-              <a:rPr lang="ru-RU" sz="1100" b="0" dirty="0">
-                <a:solidFill>
-                  <a:srgbClr val="595959"/>
-                </a:solidFill>
-                <a:latin typeface="Onest Medium" pitchFamily="2" charset="-52"/>
-              </a:rPr>
-              <a:t xml:space="preserve">Скриншоты таблиц целиком не используем — из зала не читаются.</a:t>
-            </a:r>
-          </a:p>
           <a:p>
             <a:pPr algn="l" marL="0" indent="0">
               <a:lnSpc>
@@ -4161,13 +5514,59 @@
               <a:buNone/>
             </a:pPr>
             <a:r>
-              <a:rPr lang="ru-RU" sz="1000" b="0" dirty="0">
+              <a:rPr lang="ru-RU" sz="1050" b="0" dirty="0">
+                <a:solidFill>
+                  <a:srgbClr val="000000"/>
+                </a:solidFill>
+                <a:latin typeface="Onest Medium" pitchFamily="2" charset="-52"/>
+              </a:rPr>
+              <a:t xml:space="preserve">Время протекания процесса — от 7 до 30 календарных дней. В очереди на разбор постоянно 2–8 сообщений.</a:t>
+            </a:r>
+          </a:p>
+        </p:txBody>
+      </p:sp>
+      <p:sp>
+        <p:nvSpPr>
+          <p:cNvPr id="919" name="Поле 919"/>
+          <p:cNvSpPr txBox="1"/>
+          <p:nvPr/>
+        </p:nvSpPr>
+        <p:spPr>
+          <a:xfrm>
+            <a:off x="411480" y="6144768"/>
+            <a:ext cx="11338560" cy="365760"/>
+          </a:xfrm>
+          <a:prstGeom prst="rect">
+            <a:avLst/>
+          </a:prstGeom>
+          <a:noFill/>
+          <a:ln w="0">
+            <a:noFill/>
+          </a:ln>
+        </p:spPr>
+        <p:txBody>
+          <a:bodyPr anchor="t" lIns="91440" rIns="91440" tIns="68580" bIns="68580" wrap="square">
+            <a:noAutofit/>
+          </a:bodyPr>
+          <a:lstStyle/>
+          <a:p>
+            <a:pPr algn="l" marL="0" indent="0">
+              <a:lnSpc>
+                <a:spcPct val="100000"/>
+              </a:lnSpc>
+              <a:spcAft>
+                <a:spcPts val="0"/>
+              </a:spcAft>
+              <a:buNone/>
+            </a:pPr>
+            <a:r>
+              <a:rPr lang="ru-RU" sz="950" b="0" dirty="0">
                 <a:solidFill>
                   <a:srgbClr val="6C5CE0"/>
                 </a:solidFill>
                 <a:latin typeface="Onest Medium" pitchFamily="2" charset="-52"/>
               </a:rPr>
-              <a:t xml:space="preserve">Материал собирается вместе с замерами «как было», 24–31.08.2026</a:t>
+              <a:t xml:space="preserve">Сюда же — фотографии прежнего рабочего процесса: журнал регистрации, стол приёмной, стопка письменных заявлений</a:t>
             </a:r>
           </a:p>
         </p:txBody>
@@ -4592,117 +5991,1450 @@
           </p:txBody>
         </p:sp>
       </p:grpSp>
+      <p:graphicFrame>
+        <p:nvGraphicFramePr>
+          <p:cNvPr id="920" name="Таблица 920"/>
+          <p:cNvGraphicFramePr>
+            <a:graphicFrameLocks noGrp="1"/>
+          </p:cNvGraphicFramePr>
+          <p:nvPr/>
+        </p:nvGraphicFramePr>
+        <p:xfrm>
+          <a:off x="411480" y="1444752"/>
+          <a:ext cx="11338560" cy="4526280"/>
+        </p:xfrm>
+        <a:graphic>
+          <a:graphicData uri="http://schemas.openxmlformats.org/drawingml/2006/table">
+            <a:tbl>
+              <a:tblPr/>
+              <a:tblGrid>
+                <a:gridCol w="2240280"/>
+                <a:gridCol w="2377440"/>
+                <a:gridCol w="6720840"/>
+              </a:tblGrid>
+              <a:tr h="502920">
+                <a:tc>
+                  <a:txBody>
+                    <a:bodyPr/>
+                    <a:lstStyle/>
+                    <a:p>
+                      <a:pPr algn="l" marL="0" indent="0">
+                        <a:lnSpc>
+                          <a:spcPct val="100000"/>
+                        </a:lnSpc>
+                        <a:spcAft>
+                          <a:spcPts val="0"/>
+                        </a:spcAft>
+                        <a:buNone/>
+                      </a:pPr>
+                      <a:r>
+                        <a:rPr lang="ru-RU" sz="950" b="1" dirty="0">
+                          <a:solidFill>
+                            <a:srgbClr val="000000"/>
+                          </a:solidFill>
+                          <a:latin typeface="Onest Black" pitchFamily="2" charset="-52"/>
+                        </a:rPr>
+                        <a:t xml:space="preserve">Что</a:t>
+                      </a:r>
+                    </a:p>
+                  </a:txBody>
+                  <a:tcPr marL="45720" marR="45720" marT="27432" marB="27432" anchor="ctr">
+                    <a:lnL w="6350" cap="flat">
+                      <a:solidFill>
+                        <a:srgbClr val="C9C2EE"/>
+                      </a:solidFill>
+                    </a:lnL>
+                    <a:lnR w="6350" cap="flat">
+                      <a:solidFill>
+                        <a:srgbClr val="C9C2EE"/>
+                      </a:solidFill>
+                    </a:lnR>
+                    <a:lnT w="6350" cap="flat">
+                      <a:solidFill>
+                        <a:srgbClr val="C9C2EE"/>
+                      </a:solidFill>
+                    </a:lnT>
+                    <a:lnB w="6350" cap="flat">
+                      <a:solidFill>
+                        <a:srgbClr val="C9C2EE"/>
+                      </a:solidFill>
+                    </a:lnB>
+                    <a:solidFill>
+                      <a:srgbClr val="EFEDFB"/>
+                    </a:solidFill>
+                  </a:tcPr>
+                </a:tc>
+                <a:tc>
+                  <a:txBody>
+                    <a:bodyPr/>
+                    <a:lstStyle/>
+                    <a:p>
+                      <a:pPr algn="l" marL="0" indent="0">
+                        <a:lnSpc>
+                          <a:spcPct val="100000"/>
+                        </a:lnSpc>
+                        <a:spcAft>
+                          <a:spcPts val="0"/>
+                        </a:spcAft>
+                        <a:buNone/>
+                      </a:pPr>
+                      <a:r>
+                        <a:rPr lang="ru-RU" sz="950" b="1" dirty="0">
+                          <a:solidFill>
+                            <a:srgbClr val="000000"/>
+                          </a:solidFill>
+                          <a:latin typeface="Onest Black" pitchFamily="2" charset="-52"/>
+                        </a:rPr>
+                        <a:t xml:space="preserve">Как стало</a:t>
+                      </a:r>
+                    </a:p>
+                  </a:txBody>
+                  <a:tcPr marL="45720" marR="45720" marT="27432" marB="27432" anchor="ctr">
+                    <a:lnL w="6350" cap="flat">
+                      <a:solidFill>
+                        <a:srgbClr val="C9C2EE"/>
+                      </a:solidFill>
+                    </a:lnL>
+                    <a:lnR w="6350" cap="flat">
+                      <a:solidFill>
+                        <a:srgbClr val="C9C2EE"/>
+                      </a:solidFill>
+                    </a:lnR>
+                    <a:lnT w="6350" cap="flat">
+                      <a:solidFill>
+                        <a:srgbClr val="C9C2EE"/>
+                      </a:solidFill>
+                    </a:lnT>
+                    <a:lnB w="6350" cap="flat">
+                      <a:solidFill>
+                        <a:srgbClr val="C9C2EE"/>
+                      </a:solidFill>
+                    </a:lnB>
+                    <a:solidFill>
+                      <a:srgbClr val="EFEDFB"/>
+                    </a:solidFill>
+                  </a:tcPr>
+                </a:tc>
+                <a:tc>
+                  <a:txBody>
+                    <a:bodyPr/>
+                    <a:lstStyle/>
+                    <a:p>
+                      <a:pPr algn="l" marL="0" indent="0">
+                        <a:lnSpc>
+                          <a:spcPct val="100000"/>
+                        </a:lnSpc>
+                        <a:spcAft>
+                          <a:spcPts val="0"/>
+                        </a:spcAft>
+                        <a:buNone/>
+                      </a:pPr>
+                      <a:r>
+                        <a:rPr lang="ru-RU" sz="950" b="1" dirty="0">
+                          <a:solidFill>
+                            <a:srgbClr val="000000"/>
+                          </a:solidFill>
+                          <a:latin typeface="Onest Black" pitchFamily="2" charset="-52"/>
+                        </a:rPr>
+                        <a:t xml:space="preserve">Подробнее</a:t>
+                      </a:r>
+                    </a:p>
+                  </a:txBody>
+                  <a:tcPr marL="45720" marR="45720" marT="27432" marB="27432" anchor="ctr">
+                    <a:lnL w="6350" cap="flat">
+                      <a:solidFill>
+                        <a:srgbClr val="C9C2EE"/>
+                      </a:solidFill>
+                    </a:lnL>
+                    <a:lnR w="6350" cap="flat">
+                      <a:solidFill>
+                        <a:srgbClr val="C9C2EE"/>
+                      </a:solidFill>
+                    </a:lnR>
+                    <a:lnT w="6350" cap="flat">
+                      <a:solidFill>
+                        <a:srgbClr val="C9C2EE"/>
+                      </a:solidFill>
+                    </a:lnT>
+                    <a:lnB w="6350" cap="flat">
+                      <a:solidFill>
+                        <a:srgbClr val="C9C2EE"/>
+                      </a:solidFill>
+                    </a:lnB>
+                    <a:solidFill>
+                      <a:srgbClr val="EFEDFB"/>
+                    </a:solidFill>
+                  </a:tcPr>
+                </a:tc>
+              </a:tr>
+              <a:tr h="502920">
+                <a:tc>
+                  <a:txBody>
+                    <a:bodyPr/>
+                    <a:lstStyle/>
+                    <a:p>
+                      <a:pPr algn="l" marL="0" indent="0">
+                        <a:lnSpc>
+                          <a:spcPct val="105000"/>
+                        </a:lnSpc>
+                        <a:spcAft>
+                          <a:spcPts val="0"/>
+                        </a:spcAft>
+                        <a:buNone/>
+                      </a:pPr>
+                      <a:r>
+                        <a:rPr lang="ru-RU" sz="900" b="0" dirty="0">
+                          <a:solidFill>
+                            <a:srgbClr val="000000"/>
+                          </a:solidFill>
+                          <a:latin typeface="Onest Medium" pitchFamily="2" charset="-52"/>
+                        </a:rPr>
+                        <a:t xml:space="preserve">Каналов приёма</a:t>
+                      </a:r>
+                    </a:p>
+                  </a:txBody>
+                  <a:tcPr marL="45720" marR="45720" marT="27432" marB="27432" anchor="ctr">
+                    <a:lnL w="6350" cap="flat">
+                      <a:solidFill>
+                        <a:srgbClr val="C9C2EE"/>
+                      </a:solidFill>
+                    </a:lnL>
+                    <a:lnR w="6350" cap="flat">
+                      <a:solidFill>
+                        <a:srgbClr val="C9C2EE"/>
+                      </a:solidFill>
+                    </a:lnR>
+                    <a:lnT w="6350" cap="flat">
+                      <a:solidFill>
+                        <a:srgbClr val="C9C2EE"/>
+                      </a:solidFill>
+                    </a:lnT>
+                    <a:lnB w="6350" cap="flat">
+                      <a:solidFill>
+                        <a:srgbClr val="C9C2EE"/>
+                      </a:solidFill>
+                    </a:lnB>
+                    <a:solidFill>
+                      <a:srgbClr val="FFFFFF"/>
+                    </a:solidFill>
+                  </a:tcPr>
+                </a:tc>
+                <a:tc>
+                  <a:txBody>
+                    <a:bodyPr/>
+                    <a:lstStyle/>
+                    <a:p>
+                      <a:pPr algn="l" marL="0" indent="0">
+                        <a:lnSpc>
+                          <a:spcPct val="105000"/>
+                        </a:lnSpc>
+                        <a:spcAft>
+                          <a:spcPts val="0"/>
+                        </a:spcAft>
+                        <a:buNone/>
+                      </a:pPr>
+                      <a:r>
+                        <a:rPr lang="ru-RU" sz="900" b="1" dirty="0">
+                          <a:solidFill>
+                            <a:srgbClr val="6C5CE0"/>
+                          </a:solidFill>
+                          <a:latin typeface="Onest Black" pitchFamily="2" charset="-52"/>
+                        </a:rPr>
+                        <a:t xml:space="preserve">один цифровой, два мессенджера</a:t>
+                      </a:r>
+                    </a:p>
+                  </a:txBody>
+                  <a:tcPr marL="45720" marR="45720" marT="27432" marB="27432" anchor="ctr">
+                    <a:lnL w="6350" cap="flat">
+                      <a:solidFill>
+                        <a:srgbClr val="C9C2EE"/>
+                      </a:solidFill>
+                    </a:lnL>
+                    <a:lnR w="6350" cap="flat">
+                      <a:solidFill>
+                        <a:srgbClr val="C9C2EE"/>
+                      </a:solidFill>
+                    </a:lnR>
+                    <a:lnT w="6350" cap="flat">
+                      <a:solidFill>
+                        <a:srgbClr val="C9C2EE"/>
+                      </a:solidFill>
+                    </a:lnT>
+                    <a:lnB w="6350" cap="flat">
+                      <a:solidFill>
+                        <a:srgbClr val="C9C2EE"/>
+                      </a:solidFill>
+                    </a:lnB>
+                    <a:solidFill>
+                      <a:srgbClr val="FFFFFF"/>
+                    </a:solidFill>
+                  </a:tcPr>
+                </a:tc>
+                <a:tc>
+                  <a:txBody>
+                    <a:bodyPr/>
+                    <a:lstStyle/>
+                    <a:p>
+                      <a:pPr algn="l" marL="0" indent="0">
+                        <a:lnSpc>
+                          <a:spcPct val="105000"/>
+                        </a:lnSpc>
+                        <a:spcAft>
+                          <a:spcPts val="0"/>
+                        </a:spcAft>
+                        <a:buNone/>
+                      </a:pPr>
+                      <a:r>
+                        <a:rPr lang="ru-RU" sz="880" b="0" dirty="0">
+                          <a:solidFill>
+                            <a:srgbClr val="595959"/>
+                          </a:solidFill>
+                          <a:latin typeface="Onest Regular" pitchFamily="2" charset="-52"/>
+                        </a:rPr>
+                        <a:t xml:space="preserve">Telegram и MAX работают на равных: текст, фотография и геометка в одном сообщении</a:t>
+                      </a:r>
+                    </a:p>
+                  </a:txBody>
+                  <a:tcPr marL="45720" marR="45720" marT="27432" marB="27432" anchor="ctr">
+                    <a:lnL w="6350" cap="flat">
+                      <a:solidFill>
+                        <a:srgbClr val="C9C2EE"/>
+                      </a:solidFill>
+                    </a:lnL>
+                    <a:lnR w="6350" cap="flat">
+                      <a:solidFill>
+                        <a:srgbClr val="C9C2EE"/>
+                      </a:solidFill>
+                    </a:lnR>
+                    <a:lnT w="6350" cap="flat">
+                      <a:solidFill>
+                        <a:srgbClr val="C9C2EE"/>
+                      </a:solidFill>
+                    </a:lnT>
+                    <a:lnB w="6350" cap="flat">
+                      <a:solidFill>
+                        <a:srgbClr val="C9C2EE"/>
+                      </a:solidFill>
+                    </a:lnB>
+                    <a:solidFill>
+                      <a:srgbClr val="FFFFFF"/>
+                    </a:solidFill>
+                  </a:tcPr>
+                </a:tc>
+              </a:tr>
+              <a:tr h="502920">
+                <a:tc>
+                  <a:txBody>
+                    <a:bodyPr/>
+                    <a:lstStyle/>
+                    <a:p>
+                      <a:pPr algn="l" marL="0" indent="0">
+                        <a:lnSpc>
+                          <a:spcPct val="105000"/>
+                        </a:lnSpc>
+                        <a:spcAft>
+                          <a:spcPts val="0"/>
+                        </a:spcAft>
+                        <a:buNone/>
+                      </a:pPr>
+                      <a:r>
+                        <a:rPr lang="ru-RU" sz="900" b="0" dirty="0">
+                          <a:solidFill>
+                            <a:srgbClr val="000000"/>
+                          </a:solidFill>
+                          <a:latin typeface="Onest Medium" pitchFamily="2" charset="-52"/>
+                        </a:rPr>
+                        <a:t xml:space="preserve">Регистрация</a:t>
+                      </a:r>
+                    </a:p>
+                  </a:txBody>
+                  <a:tcPr marL="45720" marR="45720" marT="27432" marB="27432" anchor="ctr">
+                    <a:lnL w="6350" cap="flat">
+                      <a:solidFill>
+                        <a:srgbClr val="C9C2EE"/>
+                      </a:solidFill>
+                    </a:lnL>
+                    <a:lnR w="6350" cap="flat">
+                      <a:solidFill>
+                        <a:srgbClr val="C9C2EE"/>
+                      </a:solidFill>
+                    </a:lnR>
+                    <a:lnT w="6350" cap="flat">
+                      <a:solidFill>
+                        <a:srgbClr val="C9C2EE"/>
+                      </a:solidFill>
+                    </a:lnT>
+                    <a:lnB w="6350" cap="flat">
+                      <a:solidFill>
+                        <a:srgbClr val="C9C2EE"/>
+                      </a:solidFill>
+                    </a:lnB>
+                    <a:solidFill>
+                      <a:srgbClr val="FFFFFF"/>
+                    </a:solidFill>
+                  </a:tcPr>
+                </a:tc>
+                <a:tc>
+                  <a:txBody>
+                    <a:bodyPr/>
+                    <a:lstStyle/>
+                    <a:p>
+                      <a:pPr algn="l" marL="0" indent="0">
+                        <a:lnSpc>
+                          <a:spcPct val="105000"/>
+                        </a:lnSpc>
+                        <a:spcAft>
+                          <a:spcPts val="0"/>
+                        </a:spcAft>
+                        <a:buNone/>
+                      </a:pPr>
+                      <a:r>
+                        <a:rPr lang="ru-RU" sz="900" b="1" dirty="0">
+                          <a:solidFill>
+                            <a:srgbClr val="6C5CE0"/>
+                          </a:solidFill>
+                          <a:latin typeface="Onest Black" pitchFamily="2" charset="-52"/>
+                        </a:rPr>
+                        <a:t xml:space="preserve">автоматическая</a:t>
+                      </a:r>
+                    </a:p>
+                  </a:txBody>
+                  <a:tcPr marL="45720" marR="45720" marT="27432" marB="27432" anchor="ctr">
+                    <a:lnL w="6350" cap="flat">
+                      <a:solidFill>
+                        <a:srgbClr val="C9C2EE"/>
+                      </a:solidFill>
+                    </a:lnL>
+                    <a:lnR w="6350" cap="flat">
+                      <a:solidFill>
+                        <a:srgbClr val="C9C2EE"/>
+                      </a:solidFill>
+                    </a:lnR>
+                    <a:lnT w="6350" cap="flat">
+                      <a:solidFill>
+                        <a:srgbClr val="C9C2EE"/>
+                      </a:solidFill>
+                    </a:lnT>
+                    <a:lnB w="6350" cap="flat">
+                      <a:solidFill>
+                        <a:srgbClr val="C9C2EE"/>
+                      </a:solidFill>
+                    </a:lnB>
+                    <a:solidFill>
+                      <a:srgbClr val="FFFFFF"/>
+                    </a:solidFill>
+                  </a:tcPr>
+                </a:tc>
+                <a:tc>
+                  <a:txBody>
+                    <a:bodyPr/>
+                    <a:lstStyle/>
+                    <a:p>
+                      <a:pPr algn="l" marL="0" indent="0">
+                        <a:lnSpc>
+                          <a:spcPct val="105000"/>
+                        </a:lnSpc>
+                        <a:spcAft>
+                          <a:spcPts val="0"/>
+                        </a:spcAft>
+                        <a:buNone/>
+                      </a:pPr>
+                      <a:r>
+                        <a:rPr lang="ru-RU" sz="880" b="0" dirty="0">
+                          <a:solidFill>
+                            <a:srgbClr val="595959"/>
+                          </a:solidFill>
+                          <a:latin typeface="Onest Regular" pitchFamily="2" charset="-52"/>
+                        </a:rPr>
+                        <a:t xml:space="preserve">искусственный интеллект определяет категорию, адрес и срочность; 18 категорий в 4 направлениях</a:t>
+                      </a:r>
+                    </a:p>
+                  </a:txBody>
+                  <a:tcPr marL="45720" marR="45720" marT="27432" marB="27432" anchor="ctr">
+                    <a:lnL w="6350" cap="flat">
+                      <a:solidFill>
+                        <a:srgbClr val="C9C2EE"/>
+                      </a:solidFill>
+                    </a:lnL>
+                    <a:lnR w="6350" cap="flat">
+                      <a:solidFill>
+                        <a:srgbClr val="C9C2EE"/>
+                      </a:solidFill>
+                    </a:lnR>
+                    <a:lnT w="6350" cap="flat">
+                      <a:solidFill>
+                        <a:srgbClr val="C9C2EE"/>
+                      </a:solidFill>
+                    </a:lnT>
+                    <a:lnB w="6350" cap="flat">
+                      <a:solidFill>
+                        <a:srgbClr val="C9C2EE"/>
+                      </a:solidFill>
+                    </a:lnB>
+                    <a:solidFill>
+                      <a:srgbClr val="FFFFFF"/>
+                    </a:solidFill>
+                  </a:tcPr>
+                </a:tc>
+              </a:tr>
+              <a:tr h="502920">
+                <a:tc>
+                  <a:txBody>
+                    <a:bodyPr/>
+                    <a:lstStyle/>
+                    <a:p>
+                      <a:pPr algn="l" marL="0" indent="0">
+                        <a:lnSpc>
+                          <a:spcPct val="105000"/>
+                        </a:lnSpc>
+                        <a:spcAft>
+                          <a:spcPts val="0"/>
+                        </a:spcAft>
+                        <a:buNone/>
+                      </a:pPr>
+                      <a:r>
+                        <a:rPr lang="ru-RU" sz="900" b="0" dirty="0">
+                          <a:solidFill>
+                            <a:srgbClr val="000000"/>
+                          </a:solidFill>
+                          <a:latin typeface="Onest Medium" pitchFamily="2" charset="-52"/>
+                        </a:rPr>
+                        <a:t xml:space="preserve">Маршрут</a:t>
+                      </a:r>
+                    </a:p>
+                  </a:txBody>
+                  <a:tcPr marL="45720" marR="45720" marT="27432" marB="27432" anchor="ctr">
+                    <a:lnL w="6350" cap="flat">
+                      <a:solidFill>
+                        <a:srgbClr val="C9C2EE"/>
+                      </a:solidFill>
+                    </a:lnL>
+                    <a:lnR w="6350" cap="flat">
+                      <a:solidFill>
+                        <a:srgbClr val="C9C2EE"/>
+                      </a:solidFill>
+                    </a:lnR>
+                    <a:lnT w="6350" cap="flat">
+                      <a:solidFill>
+                        <a:srgbClr val="C9C2EE"/>
+                      </a:solidFill>
+                    </a:lnT>
+                    <a:lnB w="6350" cap="flat">
+                      <a:solidFill>
+                        <a:srgbClr val="C9C2EE"/>
+                      </a:solidFill>
+                    </a:lnB>
+                    <a:solidFill>
+                      <a:srgbClr val="FFFFFF"/>
+                    </a:solidFill>
+                  </a:tcPr>
+                </a:tc>
+                <a:tc>
+                  <a:txBody>
+                    <a:bodyPr/>
+                    <a:lstStyle/>
+                    <a:p>
+                      <a:pPr algn="l" marL="0" indent="0">
+                        <a:lnSpc>
+                          <a:spcPct val="105000"/>
+                        </a:lnSpc>
+                        <a:spcAft>
+                          <a:spcPts val="0"/>
+                        </a:spcAft>
+                        <a:buNone/>
+                      </a:pPr>
+                      <a:r>
+                        <a:rPr lang="ru-RU" sz="900" b="1" dirty="0">
+                          <a:solidFill>
+                            <a:srgbClr val="6C5CE0"/>
+                          </a:solidFill>
+                          <a:latin typeface="Onest Black" pitchFamily="2" charset="-52"/>
+                        </a:rPr>
+                        <a:t xml:space="preserve">по цепочке ответственных</a:t>
+                      </a:r>
+                    </a:p>
+                  </a:txBody>
+                  <a:tcPr marL="45720" marR="45720" marT="27432" marB="27432" anchor="ctr">
+                    <a:lnL w="6350" cap="flat">
+                      <a:solidFill>
+                        <a:srgbClr val="C9C2EE"/>
+                      </a:solidFill>
+                    </a:lnL>
+                    <a:lnR w="6350" cap="flat">
+                      <a:solidFill>
+                        <a:srgbClr val="C9C2EE"/>
+                      </a:solidFill>
+                    </a:lnR>
+                    <a:lnT w="6350" cap="flat">
+                      <a:solidFill>
+                        <a:srgbClr val="C9C2EE"/>
+                      </a:solidFill>
+                    </a:lnT>
+                    <a:lnB w="6350" cap="flat">
+                      <a:solidFill>
+                        <a:srgbClr val="C9C2EE"/>
+                      </a:solidFill>
+                    </a:lnB>
+                    <a:solidFill>
+                      <a:srgbClr val="FFFFFF"/>
+                    </a:solidFill>
+                  </a:tcPr>
+                </a:tc>
+                <a:tc>
+                  <a:txBody>
+                    <a:bodyPr/>
+                    <a:lstStyle/>
+                    <a:p>
+                      <a:pPr algn="l" marL="0" indent="0">
+                        <a:lnSpc>
+                          <a:spcPct val="105000"/>
+                        </a:lnSpc>
+                        <a:spcAft>
+                          <a:spcPts val="0"/>
+                        </a:spcAft>
+                        <a:buNone/>
+                      </a:pPr>
+                      <a:r>
+                        <a:rPr lang="ru-RU" sz="880" b="0" dirty="0">
+                          <a:solidFill>
+                            <a:srgbClr val="595959"/>
+                          </a:solidFill>
+                          <a:latin typeface="Onest Regular" pitchFamily="2" charset="-52"/>
+                        </a:rPr>
+                        <a:t xml:space="preserve">без участия первого лица; Глава округа подключается только при эскалации</a:t>
+                      </a:r>
+                    </a:p>
+                  </a:txBody>
+                  <a:tcPr marL="45720" marR="45720" marT="27432" marB="27432" anchor="ctr">
+                    <a:lnL w="6350" cap="flat">
+                      <a:solidFill>
+                        <a:srgbClr val="C9C2EE"/>
+                      </a:solidFill>
+                    </a:lnL>
+                    <a:lnR w="6350" cap="flat">
+                      <a:solidFill>
+                        <a:srgbClr val="C9C2EE"/>
+                      </a:solidFill>
+                    </a:lnR>
+                    <a:lnT w="6350" cap="flat">
+                      <a:solidFill>
+                        <a:srgbClr val="C9C2EE"/>
+                      </a:solidFill>
+                    </a:lnT>
+                    <a:lnB w="6350" cap="flat">
+                      <a:solidFill>
+                        <a:srgbClr val="C9C2EE"/>
+                      </a:solidFill>
+                    </a:lnB>
+                    <a:solidFill>
+                      <a:srgbClr val="FFFFFF"/>
+                    </a:solidFill>
+                  </a:tcPr>
+                </a:tc>
+              </a:tr>
+              <a:tr h="502920">
+                <a:tc>
+                  <a:txBody>
+                    <a:bodyPr/>
+                    <a:lstStyle/>
+                    <a:p>
+                      <a:pPr algn="l" marL="0" indent="0">
+                        <a:lnSpc>
+                          <a:spcPct val="105000"/>
+                        </a:lnSpc>
+                        <a:spcAft>
+                          <a:spcPts val="0"/>
+                        </a:spcAft>
+                        <a:buNone/>
+                      </a:pPr>
+                      <a:r>
+                        <a:rPr lang="ru-RU" sz="900" b="0" dirty="0">
+                          <a:solidFill>
+                            <a:srgbClr val="000000"/>
+                          </a:solidFill>
+                          <a:latin typeface="Onest Medium" pitchFamily="2" charset="-52"/>
+                        </a:rPr>
+                        <a:t xml:space="preserve">Срок</a:t>
+                      </a:r>
+                    </a:p>
+                  </a:txBody>
+                  <a:tcPr marL="45720" marR="45720" marT="27432" marB="27432" anchor="ctr">
+                    <a:lnL w="6350" cap="flat">
+                      <a:solidFill>
+                        <a:srgbClr val="C9C2EE"/>
+                      </a:solidFill>
+                    </a:lnL>
+                    <a:lnR w="6350" cap="flat">
+                      <a:solidFill>
+                        <a:srgbClr val="C9C2EE"/>
+                      </a:solidFill>
+                    </a:lnR>
+                    <a:lnT w="6350" cap="flat">
+                      <a:solidFill>
+                        <a:srgbClr val="C9C2EE"/>
+                      </a:solidFill>
+                    </a:lnT>
+                    <a:lnB w="6350" cap="flat">
+                      <a:solidFill>
+                        <a:srgbClr val="C9C2EE"/>
+                      </a:solidFill>
+                    </a:lnB>
+                    <a:solidFill>
+                      <a:srgbClr val="FFFFFF"/>
+                    </a:solidFill>
+                  </a:tcPr>
+                </a:tc>
+                <a:tc>
+                  <a:txBody>
+                    <a:bodyPr/>
+                    <a:lstStyle/>
+                    <a:p>
+                      <a:pPr algn="l" marL="0" indent="0">
+                        <a:lnSpc>
+                          <a:spcPct val="105000"/>
+                        </a:lnSpc>
+                        <a:spcAft>
+                          <a:spcPts val="0"/>
+                        </a:spcAft>
+                        <a:buNone/>
+                      </a:pPr>
+                      <a:r>
+                        <a:rPr lang="ru-RU" sz="900" b="1" dirty="0">
+                          <a:solidFill>
+                            <a:srgbClr val="6C5CE0"/>
+                          </a:solidFill>
+                          <a:latin typeface="Onest Black" pitchFamily="2" charset="-52"/>
+                        </a:rPr>
+                        <a:t xml:space="preserve">по категории заявки</a:t>
+                      </a:r>
+                    </a:p>
+                  </a:txBody>
+                  <a:tcPr marL="45720" marR="45720" marT="27432" marB="27432" anchor="ctr">
+                    <a:lnL w="6350" cap="flat">
+                      <a:solidFill>
+                        <a:srgbClr val="C9C2EE"/>
+                      </a:solidFill>
+                    </a:lnL>
+                    <a:lnR w="6350" cap="flat">
+                      <a:solidFill>
+                        <a:srgbClr val="C9C2EE"/>
+                      </a:solidFill>
+                    </a:lnR>
+                    <a:lnT w="6350" cap="flat">
+                      <a:solidFill>
+                        <a:srgbClr val="C9C2EE"/>
+                      </a:solidFill>
+                    </a:lnT>
+                    <a:lnB w="6350" cap="flat">
+                      <a:solidFill>
+                        <a:srgbClr val="C9C2EE"/>
+                      </a:solidFill>
+                    </a:lnB>
+                    <a:solidFill>
+                      <a:srgbClr val="FFFFFF"/>
+                    </a:solidFill>
+                  </a:tcPr>
+                </a:tc>
+                <a:tc>
+                  <a:txBody>
+                    <a:bodyPr/>
+                    <a:lstStyle/>
+                    <a:p>
+                      <a:pPr algn="l" marL="0" indent="0">
+                        <a:lnSpc>
+                          <a:spcPct val="105000"/>
+                        </a:lnSpc>
+                        <a:spcAft>
+                          <a:spcPts val="0"/>
+                        </a:spcAft>
+                        <a:buNone/>
+                      </a:pPr>
+                      <a:r>
+                        <a:rPr lang="ru-RU" sz="880" b="0" dirty="0">
+                          <a:solidFill>
+                            <a:srgbClr val="595959"/>
+                          </a:solidFill>
+                          <a:latin typeface="Onest Regular" pitchFamily="2" charset="-52"/>
+                        </a:rPr>
+                        <a:t xml:space="preserve">таймер на каждой заявке; просрочка поднимается заму направления, затем Главе округа</a:t>
+                      </a:r>
+                    </a:p>
+                  </a:txBody>
+                  <a:tcPr marL="45720" marR="45720" marT="27432" marB="27432" anchor="ctr">
+                    <a:lnL w="6350" cap="flat">
+                      <a:solidFill>
+                        <a:srgbClr val="C9C2EE"/>
+                      </a:solidFill>
+                    </a:lnL>
+                    <a:lnR w="6350" cap="flat">
+                      <a:solidFill>
+                        <a:srgbClr val="C9C2EE"/>
+                      </a:solidFill>
+                    </a:lnR>
+                    <a:lnT w="6350" cap="flat">
+                      <a:solidFill>
+                        <a:srgbClr val="C9C2EE"/>
+                      </a:solidFill>
+                    </a:lnT>
+                    <a:lnB w="6350" cap="flat">
+                      <a:solidFill>
+                        <a:srgbClr val="C9C2EE"/>
+                      </a:solidFill>
+                    </a:lnB>
+                    <a:solidFill>
+                      <a:srgbClr val="FFFFFF"/>
+                    </a:solidFill>
+                  </a:tcPr>
+                </a:tc>
+              </a:tr>
+              <a:tr h="502920">
+                <a:tc>
+                  <a:txBody>
+                    <a:bodyPr/>
+                    <a:lstStyle/>
+                    <a:p>
+                      <a:pPr algn="l" marL="0" indent="0">
+                        <a:lnSpc>
+                          <a:spcPct val="105000"/>
+                        </a:lnSpc>
+                        <a:spcAft>
+                          <a:spcPts val="0"/>
+                        </a:spcAft>
+                        <a:buNone/>
+                      </a:pPr>
+                      <a:r>
+                        <a:rPr lang="ru-RU" sz="900" b="0" dirty="0">
+                          <a:solidFill>
+                            <a:srgbClr val="000000"/>
+                          </a:solidFill>
+                          <a:latin typeface="Onest Medium" pitchFamily="2" charset="-52"/>
+                        </a:rPr>
+                        <a:t xml:space="preserve">Ответ</a:t>
+                      </a:r>
+                    </a:p>
+                  </a:txBody>
+                  <a:tcPr marL="45720" marR="45720" marT="27432" marB="27432" anchor="ctr">
+                    <a:lnL w="6350" cap="flat">
+                      <a:solidFill>
+                        <a:srgbClr val="C9C2EE"/>
+                      </a:solidFill>
+                    </a:lnL>
+                    <a:lnR w="6350" cap="flat">
+                      <a:solidFill>
+                        <a:srgbClr val="C9C2EE"/>
+                      </a:solidFill>
+                    </a:lnR>
+                    <a:lnT w="6350" cap="flat">
+                      <a:solidFill>
+                        <a:srgbClr val="C9C2EE"/>
+                      </a:solidFill>
+                    </a:lnT>
+                    <a:lnB w="6350" cap="flat">
+                      <a:solidFill>
+                        <a:srgbClr val="C9C2EE"/>
+                      </a:solidFill>
+                    </a:lnB>
+                    <a:solidFill>
+                      <a:srgbClr val="FFFFFF"/>
+                    </a:solidFill>
+                  </a:tcPr>
+                </a:tc>
+                <a:tc>
+                  <a:txBody>
+                    <a:bodyPr/>
+                    <a:lstStyle/>
+                    <a:p>
+                      <a:pPr algn="l" marL="0" indent="0">
+                        <a:lnSpc>
+                          <a:spcPct val="105000"/>
+                        </a:lnSpc>
+                        <a:spcAft>
+                          <a:spcPts val="0"/>
+                        </a:spcAft>
+                        <a:buNone/>
+                      </a:pPr>
+                      <a:r>
+                        <a:rPr lang="ru-RU" sz="900" b="1" dirty="0">
+                          <a:solidFill>
+                            <a:srgbClr val="6C5CE0"/>
+                          </a:solidFill>
+                          <a:latin typeface="Onest Black" pitchFamily="2" charset="-52"/>
+                        </a:rPr>
+                        <a:t xml:space="preserve">в мессенджер сразу</a:t>
+                      </a:r>
+                    </a:p>
+                  </a:txBody>
+                  <a:tcPr marL="45720" marR="45720" marT="27432" marB="27432" anchor="ctr">
+                    <a:lnL w="6350" cap="flat">
+                      <a:solidFill>
+                        <a:srgbClr val="C9C2EE"/>
+                      </a:solidFill>
+                    </a:lnL>
+                    <a:lnR w="6350" cap="flat">
+                      <a:solidFill>
+                        <a:srgbClr val="C9C2EE"/>
+                      </a:solidFill>
+                    </a:lnR>
+                    <a:lnT w="6350" cap="flat">
+                      <a:solidFill>
+                        <a:srgbClr val="C9C2EE"/>
+                      </a:solidFill>
+                    </a:lnT>
+                    <a:lnB w="6350" cap="flat">
+                      <a:solidFill>
+                        <a:srgbClr val="C9C2EE"/>
+                      </a:solidFill>
+                    </a:lnB>
+                    <a:solidFill>
+                      <a:srgbClr val="FFFFFF"/>
+                    </a:solidFill>
+                  </a:tcPr>
+                </a:tc>
+                <a:tc>
+                  <a:txBody>
+                    <a:bodyPr/>
+                    <a:lstStyle/>
+                    <a:p>
+                      <a:pPr algn="l" marL="0" indent="0">
+                        <a:lnSpc>
+                          <a:spcPct val="105000"/>
+                        </a:lnSpc>
+                        <a:spcAft>
+                          <a:spcPts val="0"/>
+                        </a:spcAft>
+                        <a:buNone/>
+                      </a:pPr>
+                      <a:r>
+                        <a:rPr lang="ru-RU" sz="880" b="0" dirty="0">
+                          <a:solidFill>
+                            <a:srgbClr val="595959"/>
+                          </a:solidFill>
+                          <a:latin typeface="Onest Regular" pitchFamily="2" charset="-52"/>
+                        </a:rPr>
+                        <a:t xml:space="preserve">уведомление о каждом изменении статуса, «до и после» с фотографией</a:t>
+                      </a:r>
+                    </a:p>
+                  </a:txBody>
+                  <a:tcPr marL="45720" marR="45720" marT="27432" marB="27432" anchor="ctr">
+                    <a:lnL w="6350" cap="flat">
+                      <a:solidFill>
+                        <a:srgbClr val="C9C2EE"/>
+                      </a:solidFill>
+                    </a:lnL>
+                    <a:lnR w="6350" cap="flat">
+                      <a:solidFill>
+                        <a:srgbClr val="C9C2EE"/>
+                      </a:solidFill>
+                    </a:lnR>
+                    <a:lnT w="6350" cap="flat">
+                      <a:solidFill>
+                        <a:srgbClr val="C9C2EE"/>
+                      </a:solidFill>
+                    </a:lnT>
+                    <a:lnB w="6350" cap="flat">
+                      <a:solidFill>
+                        <a:srgbClr val="C9C2EE"/>
+                      </a:solidFill>
+                    </a:lnB>
+                    <a:solidFill>
+                      <a:srgbClr val="FFFFFF"/>
+                    </a:solidFill>
+                  </a:tcPr>
+                </a:tc>
+              </a:tr>
+              <a:tr h="502920">
+                <a:tc>
+                  <a:txBody>
+                    <a:bodyPr/>
+                    <a:lstStyle/>
+                    <a:p>
+                      <a:pPr algn="l" marL="0" indent="0">
+                        <a:lnSpc>
+                          <a:spcPct val="105000"/>
+                        </a:lnSpc>
+                        <a:spcAft>
+                          <a:spcPts val="0"/>
+                        </a:spcAft>
+                        <a:buNone/>
+                      </a:pPr>
+                      <a:r>
+                        <a:rPr lang="ru-RU" sz="900" b="0" dirty="0">
+                          <a:solidFill>
+                            <a:srgbClr val="000000"/>
+                          </a:solidFill>
+                          <a:latin typeface="Onest Medium" pitchFamily="2" charset="-52"/>
+                        </a:rPr>
+                        <a:t xml:space="preserve">Подтверждение результата</a:t>
+                      </a:r>
+                    </a:p>
+                  </a:txBody>
+                  <a:tcPr marL="45720" marR="45720" marT="27432" marB="27432" anchor="ctr">
+                    <a:lnL w="6350" cap="flat">
+                      <a:solidFill>
+                        <a:srgbClr val="C9C2EE"/>
+                      </a:solidFill>
+                    </a:lnL>
+                    <a:lnR w="6350" cap="flat">
+                      <a:solidFill>
+                        <a:srgbClr val="C9C2EE"/>
+                      </a:solidFill>
+                    </a:lnR>
+                    <a:lnT w="6350" cap="flat">
+                      <a:solidFill>
+                        <a:srgbClr val="C9C2EE"/>
+                      </a:solidFill>
+                    </a:lnT>
+                    <a:lnB w="6350" cap="flat">
+                      <a:solidFill>
+                        <a:srgbClr val="C9C2EE"/>
+                      </a:solidFill>
+                    </a:lnB>
+                    <a:solidFill>
+                      <a:srgbClr val="FFFFFF"/>
+                    </a:solidFill>
+                  </a:tcPr>
+                </a:tc>
+                <a:tc>
+                  <a:txBody>
+                    <a:bodyPr/>
+                    <a:lstStyle/>
+                    <a:p>
+                      <a:pPr algn="l" marL="0" indent="0">
+                        <a:lnSpc>
+                          <a:spcPct val="105000"/>
+                        </a:lnSpc>
+                        <a:spcAft>
+                          <a:spcPts val="0"/>
+                        </a:spcAft>
+                        <a:buNone/>
+                      </a:pPr>
+                      <a:r>
+                        <a:rPr lang="ru-RU" sz="900" b="1" dirty="0">
+                          <a:solidFill>
+                            <a:srgbClr val="6C5CE0"/>
+                          </a:solidFill>
+                          <a:latin typeface="Onest Black" pitchFamily="2" charset="-52"/>
+                        </a:rPr>
+                        <a:t xml:space="preserve">обязательно</a:t>
+                      </a:r>
+                    </a:p>
+                  </a:txBody>
+                  <a:tcPr marL="45720" marR="45720" marT="27432" marB="27432" anchor="ctr">
+                    <a:lnL w="6350" cap="flat">
+                      <a:solidFill>
+                        <a:srgbClr val="C9C2EE"/>
+                      </a:solidFill>
+                    </a:lnL>
+                    <a:lnR w="6350" cap="flat">
+                      <a:solidFill>
+                        <a:srgbClr val="C9C2EE"/>
+                      </a:solidFill>
+                    </a:lnR>
+                    <a:lnT w="6350" cap="flat">
+                      <a:solidFill>
+                        <a:srgbClr val="C9C2EE"/>
+                      </a:solidFill>
+                    </a:lnT>
+                    <a:lnB w="6350" cap="flat">
+                      <a:solidFill>
+                        <a:srgbClr val="C9C2EE"/>
+                      </a:solidFill>
+                    </a:lnB>
+                    <a:solidFill>
+                      <a:srgbClr val="FFFFFF"/>
+                    </a:solidFill>
+                  </a:tcPr>
+                </a:tc>
+                <a:tc>
+                  <a:txBody>
+                    <a:bodyPr/>
+                    <a:lstStyle/>
+                    <a:p>
+                      <a:pPr algn="l" marL="0" indent="0">
+                        <a:lnSpc>
+                          <a:spcPct val="105000"/>
+                        </a:lnSpc>
+                        <a:spcAft>
+                          <a:spcPts val="0"/>
+                        </a:spcAft>
+                        <a:buNone/>
+                      </a:pPr>
+                      <a:r>
+                        <a:rPr lang="ru-RU" sz="880" b="0" dirty="0">
+                          <a:solidFill>
+                            <a:srgbClr val="595959"/>
+                          </a:solidFill>
+                          <a:latin typeface="Onest Regular" pitchFamily="2" charset="-52"/>
+                        </a:rPr>
+                        <a:t xml:space="preserve">закрыть заявку без фотографии или отчёта нельзя; гражданин ставит оценку от 1 до 5, оценка ≤ 2 возвращает заявку в работу</a:t>
+                      </a:r>
+                    </a:p>
+                  </a:txBody>
+                  <a:tcPr marL="45720" marR="45720" marT="27432" marB="27432" anchor="ctr">
+                    <a:lnL w="6350" cap="flat">
+                      <a:solidFill>
+                        <a:srgbClr val="C9C2EE"/>
+                      </a:solidFill>
+                    </a:lnL>
+                    <a:lnR w="6350" cap="flat">
+                      <a:solidFill>
+                        <a:srgbClr val="C9C2EE"/>
+                      </a:solidFill>
+                    </a:lnR>
+                    <a:lnT w="6350" cap="flat">
+                      <a:solidFill>
+                        <a:srgbClr val="C9C2EE"/>
+                      </a:solidFill>
+                    </a:lnT>
+                    <a:lnB w="6350" cap="flat">
+                      <a:solidFill>
+                        <a:srgbClr val="C9C2EE"/>
+                      </a:solidFill>
+                    </a:lnB>
+                    <a:solidFill>
+                      <a:srgbClr val="FFFFFF"/>
+                    </a:solidFill>
+                  </a:tcPr>
+                </a:tc>
+              </a:tr>
+              <a:tr h="502920">
+                <a:tc>
+                  <a:txBody>
+                    <a:bodyPr/>
+                    <a:lstStyle/>
+                    <a:p>
+                      <a:pPr algn="l" marL="0" indent="0">
+                        <a:lnSpc>
+                          <a:spcPct val="105000"/>
+                        </a:lnSpc>
+                        <a:spcAft>
+                          <a:spcPts val="0"/>
+                        </a:spcAft>
+                        <a:buNone/>
+                      </a:pPr>
+                      <a:r>
+                        <a:rPr lang="ru-RU" sz="900" b="0" dirty="0">
+                          <a:solidFill>
+                            <a:srgbClr val="000000"/>
+                          </a:solidFill>
+                          <a:latin typeface="Onest Medium" pitchFamily="2" charset="-52"/>
+                        </a:rPr>
+                        <a:t xml:space="preserve">Повторные обращения</a:t>
+                      </a:r>
+                    </a:p>
+                  </a:txBody>
+                  <a:tcPr marL="45720" marR="45720" marT="27432" marB="27432" anchor="ctr">
+                    <a:lnL w="6350" cap="flat">
+                      <a:solidFill>
+                        <a:srgbClr val="C9C2EE"/>
+                      </a:solidFill>
+                    </a:lnL>
+                    <a:lnR w="6350" cap="flat">
+                      <a:solidFill>
+                        <a:srgbClr val="C9C2EE"/>
+                      </a:solidFill>
+                    </a:lnR>
+                    <a:lnT w="6350" cap="flat">
+                      <a:solidFill>
+                        <a:srgbClr val="C9C2EE"/>
+                      </a:solidFill>
+                    </a:lnT>
+                    <a:lnB w="6350" cap="flat">
+                      <a:solidFill>
+                        <a:srgbClr val="C9C2EE"/>
+                      </a:solidFill>
+                    </a:lnB>
+                    <a:solidFill>
+                      <a:srgbClr val="FFFFFF"/>
+                    </a:solidFill>
+                  </a:tcPr>
+                </a:tc>
+                <a:tc>
+                  <a:txBody>
+                    <a:bodyPr/>
+                    <a:lstStyle/>
+                    <a:p>
+                      <a:pPr algn="l" marL="0" indent="0">
+                        <a:lnSpc>
+                          <a:spcPct val="105000"/>
+                        </a:lnSpc>
+                        <a:spcAft>
+                          <a:spcPts val="0"/>
+                        </a:spcAft>
+                        <a:buNone/>
+                      </a:pPr>
+                      <a:r>
+                        <a:rPr lang="ru-RU" sz="900" b="1" dirty="0">
+                          <a:solidFill>
+                            <a:srgbClr val="6C5CE0"/>
+                          </a:solidFill>
+                          <a:latin typeface="Onest Black" pitchFamily="2" charset="-52"/>
+                        </a:rPr>
+                        <a:t xml:space="preserve">объединяются</a:t>
+                      </a:r>
+                    </a:p>
+                  </a:txBody>
+                  <a:tcPr marL="45720" marR="45720" marT="27432" marB="27432" anchor="ctr">
+                    <a:lnL w="6350" cap="flat">
+                      <a:solidFill>
+                        <a:srgbClr val="C9C2EE"/>
+                      </a:solidFill>
+                    </a:lnL>
+                    <a:lnR w="6350" cap="flat">
+                      <a:solidFill>
+                        <a:srgbClr val="C9C2EE"/>
+                      </a:solidFill>
+                    </a:lnR>
+                    <a:lnT w="6350" cap="flat">
+                      <a:solidFill>
+                        <a:srgbClr val="C9C2EE"/>
+                      </a:solidFill>
+                    </a:lnT>
+                    <a:lnB w="6350" cap="flat">
+                      <a:solidFill>
+                        <a:srgbClr val="C9C2EE"/>
+                      </a:solidFill>
+                    </a:lnB>
+                    <a:solidFill>
+                      <a:srgbClr val="FFFFFF"/>
+                    </a:solidFill>
+                  </a:tcPr>
+                </a:tc>
+                <a:tc>
+                  <a:txBody>
+                    <a:bodyPr/>
+                    <a:lstStyle/>
+                    <a:p>
+                      <a:pPr algn="l" marL="0" indent="0">
+                        <a:lnSpc>
+                          <a:spcPct val="105000"/>
+                        </a:lnSpc>
+                        <a:spcAft>
+                          <a:spcPts val="0"/>
+                        </a:spcAft>
+                        <a:buNone/>
+                      </a:pPr>
+                      <a:r>
+                        <a:rPr lang="ru-RU" sz="880" b="0" dirty="0">
+                          <a:solidFill>
+                            <a:srgbClr val="595959"/>
+                          </a:solidFill>
+                          <a:latin typeface="Onest Regular" pitchFamily="2" charset="-52"/>
+                        </a:rPr>
+                        <a:t xml:space="preserve">дедупликация по координатам — 100 м за 14 дней — и по адресу, сквозная через оба канала</a:t>
+                      </a:r>
+                    </a:p>
+                  </a:txBody>
+                  <a:tcPr marL="45720" marR="45720" marT="27432" marB="27432" anchor="ctr">
+                    <a:lnL w="6350" cap="flat">
+                      <a:solidFill>
+                        <a:srgbClr val="C9C2EE"/>
+                      </a:solidFill>
+                    </a:lnL>
+                    <a:lnR w="6350" cap="flat">
+                      <a:solidFill>
+                        <a:srgbClr val="C9C2EE"/>
+                      </a:solidFill>
+                    </a:lnR>
+                    <a:lnT w="6350" cap="flat">
+                      <a:solidFill>
+                        <a:srgbClr val="C9C2EE"/>
+                      </a:solidFill>
+                    </a:lnT>
+                    <a:lnB w="6350" cap="flat">
+                      <a:solidFill>
+                        <a:srgbClr val="C9C2EE"/>
+                      </a:solidFill>
+                    </a:lnB>
+                    <a:solidFill>
+                      <a:srgbClr val="FFFFFF"/>
+                    </a:solidFill>
+                  </a:tcPr>
+                </a:tc>
+              </a:tr>
+              <a:tr h="502920">
+                <a:tc>
+                  <a:txBody>
+                    <a:bodyPr/>
+                    <a:lstStyle/>
+                    <a:p>
+                      <a:pPr algn="l" marL="0" indent="0">
+                        <a:lnSpc>
+                          <a:spcPct val="105000"/>
+                        </a:lnSpc>
+                        <a:spcAft>
+                          <a:spcPts val="0"/>
+                        </a:spcAft>
+                        <a:buNone/>
+                      </a:pPr>
+                      <a:r>
+                        <a:rPr lang="ru-RU" sz="900" b="0" dirty="0">
+                          <a:solidFill>
+                            <a:srgbClr val="000000"/>
+                          </a:solidFill>
+                          <a:latin typeface="Onest Medium" pitchFamily="2" charset="-52"/>
+                        </a:rPr>
+                        <a:t xml:space="preserve">Отчётность</a:t>
+                      </a:r>
+                    </a:p>
+                  </a:txBody>
+                  <a:tcPr marL="45720" marR="45720" marT="27432" marB="27432" anchor="ctr">
+                    <a:lnL w="6350" cap="flat">
+                      <a:solidFill>
+                        <a:srgbClr val="C9C2EE"/>
+                      </a:solidFill>
+                    </a:lnL>
+                    <a:lnR w="6350" cap="flat">
+                      <a:solidFill>
+                        <a:srgbClr val="C9C2EE"/>
+                      </a:solidFill>
+                    </a:lnR>
+                    <a:lnT w="6350" cap="flat">
+                      <a:solidFill>
+                        <a:srgbClr val="C9C2EE"/>
+                      </a:solidFill>
+                    </a:lnT>
+                    <a:lnB w="6350" cap="flat">
+                      <a:solidFill>
+                        <a:srgbClr val="C9C2EE"/>
+                      </a:solidFill>
+                    </a:lnB>
+                    <a:solidFill>
+                      <a:srgbClr val="FFFFFF"/>
+                    </a:solidFill>
+                  </a:tcPr>
+                </a:tc>
+                <a:tc>
+                  <a:txBody>
+                    <a:bodyPr/>
+                    <a:lstStyle/>
+                    <a:p>
+                      <a:pPr algn="l" marL="0" indent="0">
+                        <a:lnSpc>
+                          <a:spcPct val="105000"/>
+                        </a:lnSpc>
+                        <a:spcAft>
+                          <a:spcPts val="0"/>
+                        </a:spcAft>
+                        <a:buNone/>
+                      </a:pPr>
+                      <a:r>
+                        <a:rPr lang="ru-RU" sz="900" b="1" dirty="0">
+                          <a:solidFill>
+                            <a:srgbClr val="6C5CE0"/>
+                          </a:solidFill>
+                          <a:latin typeface="Onest Black" pitchFamily="2" charset="-52"/>
+                        </a:rPr>
+                        <a:t xml:space="preserve">в реальном времени</a:t>
+                      </a:r>
+                    </a:p>
+                  </a:txBody>
+                  <a:tcPr marL="45720" marR="45720" marT="27432" marB="27432" anchor="ctr">
+                    <a:lnL w="6350" cap="flat">
+                      <a:solidFill>
+                        <a:srgbClr val="C9C2EE"/>
+                      </a:solidFill>
+                    </a:lnL>
+                    <a:lnR w="6350" cap="flat">
+                      <a:solidFill>
+                        <a:srgbClr val="C9C2EE"/>
+                      </a:solidFill>
+                    </a:lnR>
+                    <a:lnT w="6350" cap="flat">
+                      <a:solidFill>
+                        <a:srgbClr val="C9C2EE"/>
+                      </a:solidFill>
+                    </a:lnT>
+                    <a:lnB w="6350" cap="flat">
+                      <a:solidFill>
+                        <a:srgbClr val="C9C2EE"/>
+                      </a:solidFill>
+                    </a:lnB>
+                    <a:solidFill>
+                      <a:srgbClr val="FFFFFF"/>
+                    </a:solidFill>
+                  </a:tcPr>
+                </a:tc>
+                <a:tc>
+                  <a:txBody>
+                    <a:bodyPr/>
+                    <a:lstStyle/>
+                    <a:p>
+                      <a:pPr algn="l" marL="0" indent="0">
+                        <a:lnSpc>
+                          <a:spcPct val="105000"/>
+                        </a:lnSpc>
+                        <a:spcAft>
+                          <a:spcPts val="0"/>
+                        </a:spcAft>
+                        <a:buNone/>
+                      </a:pPr>
+                      <a:r>
+                        <a:rPr lang="ru-RU" sz="880" b="0" dirty="0">
+                          <a:solidFill>
+                            <a:srgbClr val="595959"/>
+                          </a:solidFill>
+                          <a:latin typeface="Onest Regular" pitchFamily="2" charset="-52"/>
+                        </a:rPr>
+                        <a:t xml:space="preserve">сроки, нагрузка и статистика по направлениям в панели администрации</a:t>
+                      </a:r>
+                    </a:p>
+                  </a:txBody>
+                  <a:tcPr marL="45720" marR="45720" marT="27432" marB="27432" anchor="ctr">
+                    <a:lnL w="6350" cap="flat">
+                      <a:solidFill>
+                        <a:srgbClr val="C9C2EE"/>
+                      </a:solidFill>
+                    </a:lnL>
+                    <a:lnR w="6350" cap="flat">
+                      <a:solidFill>
+                        <a:srgbClr val="C9C2EE"/>
+                      </a:solidFill>
+                    </a:lnR>
+                    <a:lnT w="6350" cap="flat">
+                      <a:solidFill>
+                        <a:srgbClr val="C9C2EE"/>
+                      </a:solidFill>
+                    </a:lnT>
+                    <a:lnB w="6350" cap="flat">
+                      <a:solidFill>
+                        <a:srgbClr val="C9C2EE"/>
+                      </a:solidFill>
+                    </a:lnB>
+                    <a:solidFill>
+                      <a:srgbClr val="FFFFFF"/>
+                    </a:solidFill>
+                  </a:tcPr>
+                </a:tc>
+              </a:tr>
+            </a:tbl>
+          </a:graphicData>
+        </a:graphic>
+      </p:graphicFrame>
       <p:sp>
         <p:nvSpPr>
-          <p:cNvPr id="918" name="Поле 918"/>
+          <p:cNvPr id="921" name="Поле 921"/>
           <p:cNvSpPr txBox="1"/>
           <p:nvPr/>
         </p:nvSpPr>
         <p:spPr>
           <a:xfrm>
-            <a:off x="822960" y="2148840"/>
-            <a:ext cx="10515600" cy="2286000"/>
+            <a:off x="411480" y="987552"/>
+            <a:ext cx="11338560" cy="411480"/>
           </a:xfrm>
-          <a:prstGeom prst="roundRect">
-            <a:avLst>
-              <a:gd name="adj" fmla="val 4000"/>
-            </a:avLst>
+          <a:prstGeom prst="rect">
+            <a:avLst/>
           </a:prstGeom>
-          <a:solidFill>
-            <a:srgbClr val="F7F6FE"/>
-          </a:solidFill>
-          <a:ln w="12700">
-            <a:solidFill>
-              <a:srgbClr val="6C5CE0"/>
-            </a:solidFill>
-            <a:prstDash val="dash"/>
+          <a:noFill/>
+          <a:ln w="0">
+            <a:noFill/>
           </a:ln>
         </p:spPr>
         <p:txBody>
-          <a:bodyPr anchor="ctr" lIns="91440" rIns="91440" tIns="68580" bIns="68580" wrap="square">
+          <a:bodyPr anchor="t" lIns="91440" rIns="91440" tIns="68580" bIns="68580" wrap="square">
             <a:noAutofit/>
           </a:bodyPr>
           <a:lstStyle/>
-          <a:p>
-            <a:pPr algn="l" marL="0" indent="0">
-              <a:lnSpc>
-                <a:spcPct val="100000"/>
-              </a:lnSpc>
-              <a:spcAft>
-                <a:spcPts val="400"/>
-              </a:spcAft>
-              <a:buNone/>
-            </a:pPr>
-            <a:r>
-              <a:rPr lang="ru-RU" sz="1400" b="1" dirty="0">
-                <a:solidFill>
-                  <a:srgbClr val="6C5CE0"/>
-                </a:solidFill>
-                <a:latin typeface="Onest Black" pitchFamily="2" charset="-52"/>
-              </a:rPr>
-              <a:t xml:space="preserve">Как сообщения обрабатываются сейчас</a:t>
-            </a:r>
-          </a:p>
-          <a:p>
-            <a:pPr algn="l" marL="0" indent="0">
-              <a:lnSpc>
-                <a:spcPct val="110000"/>
-              </a:lnSpc>
-              <a:spcAft>
-                <a:spcPts val="200"/>
-              </a:spcAft>
-              <a:buNone/>
-            </a:pPr>
-            <a:r>
-              <a:rPr lang="ru-RU" sz="1100" b="0" dirty="0">
-                <a:solidFill>
-                  <a:srgbClr val="595959"/>
-                </a:solidFill>
-                <a:latin typeface="Onest Medium" pitchFamily="2" charset="-52"/>
-              </a:rPr>
-              <a:t xml:space="preserve">Обезличенные экраны бота: приём сообщения с фото и геометкой, карточка заявки у исполнителя, уведомление гражданину «до / после» с оценкой. Панель администрации: срок на каждой заявке, карта, статистика по направлениям.</a:t>
-            </a:r>
-          </a:p>
-          <a:p>
-            <a:pPr algn="l" marL="0" indent="0">
-              <a:lnSpc>
-                <a:spcPct val="110000"/>
-              </a:lnSpc>
-              <a:spcAft>
-                <a:spcPts val="200"/>
-              </a:spcAft>
-              <a:buNone/>
-            </a:pPr>
-            <a:r>
-              <a:rPr lang="ru-RU" sz="1100" b="0" dirty="0">
-                <a:solidFill>
-                  <a:srgbClr val="595959"/>
-                </a:solidFill>
-                <a:latin typeface="Onest Medium" pitchFamily="2" charset="-52"/>
-              </a:rPr>
-              <a:t xml:space="preserve">Крупные фрагменты интерфейса, а не экран целиком.</a:t>
-            </a:r>
-          </a:p>
-          <a:p>
-            <a:pPr algn="l" marL="0" indent="0">
-              <a:lnSpc>
-                <a:spcPct val="110000"/>
-              </a:lnSpc>
-              <a:spcAft>
-                <a:spcPts val="200"/>
-              </a:spcAft>
-              <a:buNone/>
-            </a:pPr>
-            <a:r>
-              <a:rPr lang="ru-RU" sz="1100" b="0" dirty="0">
-                <a:solidFill>
-                  <a:srgbClr val="595959"/>
-                </a:solidFill>
-                <a:latin typeface="Onest Medium" pitchFamily="2" charset="-52"/>
-              </a:rPr>
-              <a:t xml:space="preserve">Здесь же диаграммы эффекта: сокращение времени протекания процесса и доля заявок, исполненных в срок.</a:t>
-            </a:r>
-          </a:p>
           <a:p>
             <a:pPr algn="l" marL="0" indent="0">
               <a:lnSpc>
@@ -4714,13 +7446,59 @@
               <a:buNone/>
             </a:pPr>
             <a:r>
-              <a:rPr lang="ru-RU" sz="1000" b="0" dirty="0">
+              <a:rPr lang="ru-RU" sz="1050" b="0" dirty="0">
+                <a:solidFill>
+                  <a:srgbClr val="000000"/>
+                </a:solidFill>
+                <a:latin typeface="Onest Medium" pitchFamily="2" charset="-52"/>
+              </a:rPr>
+              <a:t xml:space="preserve">Расчётное время протекания процесса — от 2,5 часов до 10 дней. Охват — 29 населённых пунктов округа.</a:t>
+            </a:r>
+          </a:p>
+        </p:txBody>
+      </p:sp>
+      <p:sp>
+        <p:nvSpPr>
+          <p:cNvPr id="922" name="Поле 922"/>
+          <p:cNvSpPr txBox="1"/>
+          <p:nvPr/>
+        </p:nvSpPr>
+        <p:spPr>
+          <a:xfrm>
+            <a:off x="411480" y="6144768"/>
+            <a:ext cx="11338560" cy="365760"/>
+          </a:xfrm>
+          <a:prstGeom prst="rect">
+            <a:avLst/>
+          </a:prstGeom>
+          <a:noFill/>
+          <a:ln w="0">
+            <a:noFill/>
+          </a:ln>
+        </p:spPr>
+        <p:txBody>
+          <a:bodyPr anchor="t" lIns="91440" rIns="91440" tIns="68580" bIns="68580" wrap="square">
+            <a:noAutofit/>
+          </a:bodyPr>
+          <a:lstStyle/>
+          <a:p>
+            <a:pPr algn="l" marL="0" indent="0">
+              <a:lnSpc>
+                <a:spcPct val="100000"/>
+              </a:lnSpc>
+              <a:spcAft>
+                <a:spcPts val="0"/>
+              </a:spcAft>
+              <a:buNone/>
+            </a:pPr>
+            <a:r>
+              <a:rPr lang="ru-RU" sz="950" b="0" dirty="0">
                 <a:solidFill>
                   <a:srgbClr val="6C5CE0"/>
                 </a:solidFill>
                 <a:latin typeface="Onest Medium" pitchFamily="2" charset="-52"/>
               </a:rPr>
-              <a:t xml:space="preserve">Скриншоты — к 15.09.2026, диаграммы — после мониторинга, 24–28.09.2026</a:t>
+              <a:t xml:space="preserve">Сюда же — обезличенные экраны бота и панели администрации крупными фрагментами и диаграммы эффекта после мониторинга</a:t>
             </a:r>
           </a:p>
         </p:txBody>
@@ -5006,117 +7784,830 @@
           </p:txBody>
         </p:sp>
       </p:grpSp>
+      <p:graphicFrame>
+        <p:nvGraphicFramePr>
+          <p:cNvPr id="923" name="Таблица 923"/>
+          <p:cNvGraphicFramePr>
+            <a:graphicFrameLocks noGrp="1"/>
+          </p:cNvGraphicFramePr>
+          <p:nvPr/>
+        </p:nvGraphicFramePr>
+        <p:xfrm>
+          <a:off x="411480" y="1600200"/>
+          <a:ext cx="11338560" cy="3566160"/>
+        </p:xfrm>
+        <a:graphic>
+          <a:graphicData uri="http://schemas.openxmlformats.org/drawingml/2006/table">
+            <a:tbl>
+              <a:tblPr/>
+              <a:tblGrid>
+                <a:gridCol w="3520440"/>
+                <a:gridCol w="6172200"/>
+                <a:gridCol w="1645920"/>
+              </a:tblGrid>
+              <a:tr h="713232">
+                <a:tc>
+                  <a:txBody>
+                    <a:bodyPr/>
+                    <a:lstStyle/>
+                    <a:p>
+                      <a:pPr algn="l" marL="0" indent="0">
+                        <a:lnSpc>
+                          <a:spcPct val="100000"/>
+                        </a:lnSpc>
+                        <a:spcAft>
+                          <a:spcPts val="0"/>
+                        </a:spcAft>
+                        <a:buNone/>
+                      </a:pPr>
+                      <a:r>
+                        <a:rPr lang="ru-RU" sz="950" b="1" dirty="0">
+                          <a:solidFill>
+                            <a:srgbClr val="000000"/>
+                          </a:solidFill>
+                          <a:latin typeface="Onest Black" pitchFamily="2" charset="-52"/>
+                        </a:rPr>
+                        <a:t xml:space="preserve">Документ</a:t>
+                      </a:r>
+                    </a:p>
+                  </a:txBody>
+                  <a:tcPr marL="45720" marR="45720" marT="27432" marB="27432" anchor="ctr">
+                    <a:lnL w="6350" cap="flat">
+                      <a:solidFill>
+                        <a:srgbClr val="C9C2EE"/>
+                      </a:solidFill>
+                    </a:lnL>
+                    <a:lnR w="6350" cap="flat">
+                      <a:solidFill>
+                        <a:srgbClr val="C9C2EE"/>
+                      </a:solidFill>
+                    </a:lnR>
+                    <a:lnT w="6350" cap="flat">
+                      <a:solidFill>
+                        <a:srgbClr val="C9C2EE"/>
+                      </a:solidFill>
+                    </a:lnT>
+                    <a:lnB w="6350" cap="flat">
+                      <a:solidFill>
+                        <a:srgbClr val="C9C2EE"/>
+                      </a:solidFill>
+                    </a:lnB>
+                    <a:solidFill>
+                      <a:srgbClr val="EFEDFB"/>
+                    </a:solidFill>
+                  </a:tcPr>
+                </a:tc>
+                <a:tc>
+                  <a:txBody>
+                    <a:bodyPr/>
+                    <a:lstStyle/>
+                    <a:p>
+                      <a:pPr algn="l" marL="0" indent="0">
+                        <a:lnSpc>
+                          <a:spcPct val="100000"/>
+                        </a:lnSpc>
+                        <a:spcAft>
+                          <a:spcPts val="0"/>
+                        </a:spcAft>
+                        <a:buNone/>
+                      </a:pPr>
+                      <a:r>
+                        <a:rPr lang="ru-RU" sz="950" b="1" dirty="0">
+                          <a:solidFill>
+                            <a:srgbClr val="000000"/>
+                          </a:solidFill>
+                          <a:latin typeface="Onest Black" pitchFamily="2" charset="-52"/>
+                        </a:rPr>
+                        <a:t xml:space="preserve">Что закрепляет</a:t>
+                      </a:r>
+                    </a:p>
+                  </a:txBody>
+                  <a:tcPr marL="45720" marR="45720" marT="27432" marB="27432" anchor="ctr">
+                    <a:lnL w="6350" cap="flat">
+                      <a:solidFill>
+                        <a:srgbClr val="C9C2EE"/>
+                      </a:solidFill>
+                    </a:lnL>
+                    <a:lnR w="6350" cap="flat">
+                      <a:solidFill>
+                        <a:srgbClr val="C9C2EE"/>
+                      </a:solidFill>
+                    </a:lnR>
+                    <a:lnT w="6350" cap="flat">
+                      <a:solidFill>
+                        <a:srgbClr val="C9C2EE"/>
+                      </a:solidFill>
+                    </a:lnT>
+                    <a:lnB w="6350" cap="flat">
+                      <a:solidFill>
+                        <a:srgbClr val="C9C2EE"/>
+                      </a:solidFill>
+                    </a:lnB>
+                    <a:solidFill>
+                      <a:srgbClr val="EFEDFB"/>
+                    </a:solidFill>
+                  </a:tcPr>
+                </a:tc>
+                <a:tc>
+                  <a:txBody>
+                    <a:bodyPr/>
+                    <a:lstStyle/>
+                    <a:p>
+                      <a:pPr algn="ctr" marL="0" indent="0">
+                        <a:lnSpc>
+                          <a:spcPct val="100000"/>
+                        </a:lnSpc>
+                        <a:spcAft>
+                          <a:spcPts val="0"/>
+                        </a:spcAft>
+                        <a:buNone/>
+                      </a:pPr>
+                      <a:r>
+                        <a:rPr lang="ru-RU" sz="950" b="1" dirty="0">
+                          <a:solidFill>
+                            <a:srgbClr val="000000"/>
+                          </a:solidFill>
+                          <a:latin typeface="Onest Black" pitchFamily="2" charset="-52"/>
+                        </a:rPr>
+                        <a:t xml:space="preserve">Состояние</a:t>
+                      </a:r>
+                    </a:p>
+                  </a:txBody>
+                  <a:tcPr marL="45720" marR="45720" marT="27432" marB="27432" anchor="ctr">
+                    <a:lnL w="6350" cap="flat">
+                      <a:solidFill>
+                        <a:srgbClr val="C9C2EE"/>
+                      </a:solidFill>
+                    </a:lnL>
+                    <a:lnR w="6350" cap="flat">
+                      <a:solidFill>
+                        <a:srgbClr val="C9C2EE"/>
+                      </a:solidFill>
+                    </a:lnR>
+                    <a:lnT w="6350" cap="flat">
+                      <a:solidFill>
+                        <a:srgbClr val="C9C2EE"/>
+                      </a:solidFill>
+                    </a:lnT>
+                    <a:lnB w="6350" cap="flat">
+                      <a:solidFill>
+                        <a:srgbClr val="C9C2EE"/>
+                      </a:solidFill>
+                    </a:lnB>
+                    <a:solidFill>
+                      <a:srgbClr val="EFEDFB"/>
+                    </a:solidFill>
+                  </a:tcPr>
+                </a:tc>
+              </a:tr>
+              <a:tr h="713232">
+                <a:tc>
+                  <a:txBody>
+                    <a:bodyPr/>
+                    <a:lstStyle/>
+                    <a:p>
+                      <a:pPr algn="l" marL="0" indent="0">
+                        <a:lnSpc>
+                          <a:spcPct val="105000"/>
+                        </a:lnSpc>
+                        <a:spcAft>
+                          <a:spcPts val="0"/>
+                        </a:spcAft>
+                        <a:buNone/>
+                      </a:pPr>
+                      <a:r>
+                        <a:rPr lang="ru-RU" sz="920" b="0" dirty="0">
+                          <a:solidFill>
+                            <a:srgbClr val="000000"/>
+                          </a:solidFill>
+                          <a:latin typeface="Onest Medium" pitchFamily="2" charset="-52"/>
+                        </a:rPr>
+                        <a:t xml:space="preserve">Распоряжение об инициировании проекта</a:t>
+                      </a:r>
+                    </a:p>
+                  </a:txBody>
+                  <a:tcPr marL="45720" marR="45720" marT="27432" marB="27432" anchor="ctr">
+                    <a:lnL w="6350" cap="flat">
+                      <a:solidFill>
+                        <a:srgbClr val="C9C2EE"/>
+                      </a:solidFill>
+                    </a:lnL>
+                    <a:lnR w="6350" cap="flat">
+                      <a:solidFill>
+                        <a:srgbClr val="C9C2EE"/>
+                      </a:solidFill>
+                    </a:lnR>
+                    <a:lnT w="6350" cap="flat">
+                      <a:solidFill>
+                        <a:srgbClr val="C9C2EE"/>
+                      </a:solidFill>
+                    </a:lnT>
+                    <a:lnB w="6350" cap="flat">
+                      <a:solidFill>
+                        <a:srgbClr val="C9C2EE"/>
+                      </a:solidFill>
+                    </a:lnB>
+                    <a:solidFill>
+                      <a:srgbClr val="FFFFFF"/>
+                    </a:solidFill>
+                  </a:tcPr>
+                </a:tc>
+                <a:tc>
+                  <a:txBody>
+                    <a:bodyPr/>
+                    <a:lstStyle/>
+                    <a:p>
+                      <a:pPr algn="l" marL="0" indent="0">
+                        <a:lnSpc>
+                          <a:spcPct val="105000"/>
+                        </a:lnSpc>
+                        <a:spcAft>
+                          <a:spcPts val="0"/>
+                        </a:spcAft>
+                        <a:buNone/>
+                      </a:pPr>
+                      <a:r>
+                        <a:rPr lang="ru-RU" sz="900" b="0" dirty="0">
+                          <a:solidFill>
+                            <a:srgbClr val="595959"/>
+                          </a:solidFill>
+                          <a:latin typeface="Onest Regular" pitchFamily="2" charset="-52"/>
+                        </a:rPr>
+                        <a:t xml:space="preserve">Открывает проект, закрепляет состав команды и сроки</a:t>
+                      </a:r>
+                    </a:p>
+                  </a:txBody>
+                  <a:tcPr marL="45720" marR="45720" marT="27432" marB="27432" anchor="ctr">
+                    <a:lnL w="6350" cap="flat">
+                      <a:solidFill>
+                        <a:srgbClr val="C9C2EE"/>
+                      </a:solidFill>
+                    </a:lnL>
+                    <a:lnR w="6350" cap="flat">
+                      <a:solidFill>
+                        <a:srgbClr val="C9C2EE"/>
+                      </a:solidFill>
+                    </a:lnR>
+                    <a:lnT w="6350" cap="flat">
+                      <a:solidFill>
+                        <a:srgbClr val="C9C2EE"/>
+                      </a:solidFill>
+                    </a:lnT>
+                    <a:lnB w="6350" cap="flat">
+                      <a:solidFill>
+                        <a:srgbClr val="C9C2EE"/>
+                      </a:solidFill>
+                    </a:lnB>
+                    <a:solidFill>
+                      <a:srgbClr val="FFFFFF"/>
+                    </a:solidFill>
+                  </a:tcPr>
+                </a:tc>
+                <a:tc>
+                  <a:txBody>
+                    <a:bodyPr/>
+                    <a:lstStyle/>
+                    <a:p>
+                      <a:pPr algn="ctr" marL="0" indent="0">
+                        <a:lnSpc>
+                          <a:spcPct val="100000"/>
+                        </a:lnSpc>
+                        <a:spcAft>
+                          <a:spcPts val="0"/>
+                        </a:spcAft>
+                        <a:buNone/>
+                      </a:pPr>
+                      <a:r>
+                        <a:rPr lang="ru-RU" sz="900" b="0" dirty="0">
+                          <a:solidFill>
+                            <a:srgbClr val="6C5CE0"/>
+                          </a:solidFill>
+                          <a:latin typeface="Onest Medium" pitchFamily="2" charset="-52"/>
+                        </a:rPr>
+                        <a:t xml:space="preserve">проект готов</a:t>
+                      </a:r>
+                    </a:p>
+                  </a:txBody>
+                  <a:tcPr marL="45720" marR="45720" marT="27432" marB="27432" anchor="ctr">
+                    <a:lnL w="6350" cap="flat">
+                      <a:solidFill>
+                        <a:srgbClr val="C9C2EE"/>
+                      </a:solidFill>
+                    </a:lnL>
+                    <a:lnR w="6350" cap="flat">
+                      <a:solidFill>
+                        <a:srgbClr val="C9C2EE"/>
+                      </a:solidFill>
+                    </a:lnR>
+                    <a:lnT w="6350" cap="flat">
+                      <a:solidFill>
+                        <a:srgbClr val="C9C2EE"/>
+                      </a:solidFill>
+                    </a:lnT>
+                    <a:lnB w="6350" cap="flat">
+                      <a:solidFill>
+                        <a:srgbClr val="C9C2EE"/>
+                      </a:solidFill>
+                    </a:lnB>
+                    <a:solidFill>
+                      <a:srgbClr val="FFFFFF"/>
+                    </a:solidFill>
+                  </a:tcPr>
+                </a:tc>
+              </a:tr>
+              <a:tr h="713232">
+                <a:tc>
+                  <a:txBody>
+                    <a:bodyPr/>
+                    <a:lstStyle/>
+                    <a:p>
+                      <a:pPr algn="l" marL="0" indent="0">
+                        <a:lnSpc>
+                          <a:spcPct val="105000"/>
+                        </a:lnSpc>
+                        <a:spcAft>
+                          <a:spcPts val="0"/>
+                        </a:spcAft>
+                        <a:buNone/>
+                      </a:pPr>
+                      <a:r>
+                        <a:rPr lang="ru-RU" sz="920" b="0" dirty="0">
+                          <a:solidFill>
+                            <a:srgbClr val="000000"/>
+                          </a:solidFill>
+                          <a:latin typeface="Onest Medium" pitchFamily="2" charset="-52"/>
+                        </a:rPr>
+                        <a:t xml:space="preserve">Регламент работы сервиса приёма сообщений</a:t>
+                      </a:r>
+                    </a:p>
+                  </a:txBody>
+                  <a:tcPr marL="45720" marR="45720" marT="27432" marB="27432" anchor="ctr">
+                    <a:lnL w="6350" cap="flat">
+                      <a:solidFill>
+                        <a:srgbClr val="C9C2EE"/>
+                      </a:solidFill>
+                    </a:lnL>
+                    <a:lnR w="6350" cap="flat">
+                      <a:solidFill>
+                        <a:srgbClr val="C9C2EE"/>
+                      </a:solidFill>
+                    </a:lnR>
+                    <a:lnT w="6350" cap="flat">
+                      <a:solidFill>
+                        <a:srgbClr val="C9C2EE"/>
+                      </a:solidFill>
+                    </a:lnT>
+                    <a:lnB w="6350" cap="flat">
+                      <a:solidFill>
+                        <a:srgbClr val="C9C2EE"/>
+                      </a:solidFill>
+                    </a:lnB>
+                    <a:solidFill>
+                      <a:srgbClr val="FFFFFF"/>
+                    </a:solidFill>
+                  </a:tcPr>
+                </a:tc>
+                <a:tc>
+                  <a:txBody>
+                    <a:bodyPr/>
+                    <a:lstStyle/>
+                    <a:p>
+                      <a:pPr algn="l" marL="0" indent="0">
+                        <a:lnSpc>
+                          <a:spcPct val="105000"/>
+                        </a:lnSpc>
+                        <a:spcAft>
+                          <a:spcPts val="0"/>
+                        </a:spcAft>
+                        <a:buNone/>
+                      </a:pPr>
+                      <a:r>
+                        <a:rPr lang="ru-RU" sz="900" b="0" dirty="0">
+                          <a:solidFill>
+                            <a:srgbClr val="595959"/>
+                          </a:solidFill>
+                          <a:latin typeface="Onest Regular" pitchFamily="2" charset="-52"/>
+                        </a:rPr>
+                        <a:t xml:space="preserve">Роли и зоны ответственности, сроки по категориям, порядок эскалации, правила закрытия заявки</a:t>
+                      </a:r>
+                    </a:p>
+                  </a:txBody>
+                  <a:tcPr marL="45720" marR="45720" marT="27432" marB="27432" anchor="ctr">
+                    <a:lnL w="6350" cap="flat">
+                      <a:solidFill>
+                        <a:srgbClr val="C9C2EE"/>
+                      </a:solidFill>
+                    </a:lnL>
+                    <a:lnR w="6350" cap="flat">
+                      <a:solidFill>
+                        <a:srgbClr val="C9C2EE"/>
+                      </a:solidFill>
+                    </a:lnR>
+                    <a:lnT w="6350" cap="flat">
+                      <a:solidFill>
+                        <a:srgbClr val="C9C2EE"/>
+                      </a:solidFill>
+                    </a:lnT>
+                    <a:lnB w="6350" cap="flat">
+                      <a:solidFill>
+                        <a:srgbClr val="C9C2EE"/>
+                      </a:solidFill>
+                    </a:lnB>
+                    <a:solidFill>
+                      <a:srgbClr val="FFFFFF"/>
+                    </a:solidFill>
+                  </a:tcPr>
+                </a:tc>
+                <a:tc>
+                  <a:txBody>
+                    <a:bodyPr/>
+                    <a:lstStyle/>
+                    <a:p>
+                      <a:pPr algn="ctr" marL="0" indent="0">
+                        <a:lnSpc>
+                          <a:spcPct val="100000"/>
+                        </a:lnSpc>
+                        <a:spcAft>
+                          <a:spcPts val="0"/>
+                        </a:spcAft>
+                        <a:buNone/>
+                      </a:pPr>
+                      <a:r>
+                        <a:rPr lang="ru-RU" sz="900" b="0" dirty="0">
+                          <a:solidFill>
+                            <a:srgbClr val="6C5CE0"/>
+                          </a:solidFill>
+                          <a:latin typeface="Onest Medium" pitchFamily="2" charset="-52"/>
+                        </a:rPr>
+                        <a:t xml:space="preserve">разрабатывается</a:t>
+                      </a:r>
+                    </a:p>
+                  </a:txBody>
+                  <a:tcPr marL="45720" marR="45720" marT="27432" marB="27432" anchor="ctr">
+                    <a:lnL w="6350" cap="flat">
+                      <a:solidFill>
+                        <a:srgbClr val="C9C2EE"/>
+                      </a:solidFill>
+                    </a:lnL>
+                    <a:lnR w="6350" cap="flat">
+                      <a:solidFill>
+                        <a:srgbClr val="C9C2EE"/>
+                      </a:solidFill>
+                    </a:lnR>
+                    <a:lnT w="6350" cap="flat">
+                      <a:solidFill>
+                        <a:srgbClr val="C9C2EE"/>
+                      </a:solidFill>
+                    </a:lnT>
+                    <a:lnB w="6350" cap="flat">
+                      <a:solidFill>
+                        <a:srgbClr val="C9C2EE"/>
+                      </a:solidFill>
+                    </a:lnB>
+                    <a:solidFill>
+                      <a:srgbClr val="FFFFFF"/>
+                    </a:solidFill>
+                  </a:tcPr>
+                </a:tc>
+              </a:tr>
+              <a:tr h="713232">
+                <a:tc>
+                  <a:txBody>
+                    <a:bodyPr/>
+                    <a:lstStyle/>
+                    <a:p>
+                      <a:pPr algn="l" marL="0" indent="0">
+                        <a:lnSpc>
+                          <a:spcPct val="105000"/>
+                        </a:lnSpc>
+                        <a:spcAft>
+                          <a:spcPts val="0"/>
+                        </a:spcAft>
+                        <a:buNone/>
+                      </a:pPr>
+                      <a:r>
+                        <a:rPr lang="ru-RU" sz="920" b="0" dirty="0">
+                          <a:solidFill>
+                            <a:srgbClr val="000000"/>
+                          </a:solidFill>
+                          <a:latin typeface="Onest Medium" pitchFamily="2" charset="-52"/>
+                        </a:rPr>
+                        <a:t xml:space="preserve">Памятки по ролям</a:t>
+                      </a:r>
+                    </a:p>
+                  </a:txBody>
+                  <a:tcPr marL="45720" marR="45720" marT="27432" marB="27432" anchor="ctr">
+                    <a:lnL w="6350" cap="flat">
+                      <a:solidFill>
+                        <a:srgbClr val="C9C2EE"/>
+                      </a:solidFill>
+                    </a:lnL>
+                    <a:lnR w="6350" cap="flat">
+                      <a:solidFill>
+                        <a:srgbClr val="C9C2EE"/>
+                      </a:solidFill>
+                    </a:lnR>
+                    <a:lnT w="6350" cap="flat">
+                      <a:solidFill>
+                        <a:srgbClr val="C9C2EE"/>
+                      </a:solidFill>
+                    </a:lnT>
+                    <a:lnB w="6350" cap="flat">
+                      <a:solidFill>
+                        <a:srgbClr val="C9C2EE"/>
+                      </a:solidFill>
+                    </a:lnB>
+                    <a:solidFill>
+                      <a:srgbClr val="FFFFFF"/>
+                    </a:solidFill>
+                  </a:tcPr>
+                </a:tc>
+                <a:tc>
+                  <a:txBody>
+                    <a:bodyPr/>
+                    <a:lstStyle/>
+                    <a:p>
+                      <a:pPr algn="l" marL="0" indent="0">
+                        <a:lnSpc>
+                          <a:spcPct val="105000"/>
+                        </a:lnSpc>
+                        <a:spcAft>
+                          <a:spcPts val="0"/>
+                        </a:spcAft>
+                        <a:buNone/>
+                      </a:pPr>
+                      <a:r>
+                        <a:rPr lang="ru-RU" sz="900" b="0" dirty="0">
+                          <a:solidFill>
+                            <a:srgbClr val="595959"/>
+                          </a:solidFill>
+                          <a:latin typeface="Onest Regular" pitchFamily="2" charset="-52"/>
+                        </a:rPr>
+                        <a:t xml:space="preserve">Гражданин, исполнитель, руководитель направления, оператор панели — раздаются самой панелью</a:t>
+                      </a:r>
+                    </a:p>
+                  </a:txBody>
+                  <a:tcPr marL="45720" marR="45720" marT="27432" marB="27432" anchor="ctr">
+                    <a:lnL w="6350" cap="flat">
+                      <a:solidFill>
+                        <a:srgbClr val="C9C2EE"/>
+                      </a:solidFill>
+                    </a:lnL>
+                    <a:lnR w="6350" cap="flat">
+                      <a:solidFill>
+                        <a:srgbClr val="C9C2EE"/>
+                      </a:solidFill>
+                    </a:lnR>
+                    <a:lnT w="6350" cap="flat">
+                      <a:solidFill>
+                        <a:srgbClr val="C9C2EE"/>
+                      </a:solidFill>
+                    </a:lnT>
+                    <a:lnB w="6350" cap="flat">
+                      <a:solidFill>
+                        <a:srgbClr val="C9C2EE"/>
+                      </a:solidFill>
+                    </a:lnB>
+                    <a:solidFill>
+                      <a:srgbClr val="FFFFFF"/>
+                    </a:solidFill>
+                  </a:tcPr>
+                </a:tc>
+                <a:tc>
+                  <a:txBody>
+                    <a:bodyPr/>
+                    <a:lstStyle/>
+                    <a:p>
+                      <a:pPr algn="ctr" marL="0" indent="0">
+                        <a:lnSpc>
+                          <a:spcPct val="100000"/>
+                        </a:lnSpc>
+                        <a:spcAft>
+                          <a:spcPts val="0"/>
+                        </a:spcAft>
+                        <a:buNone/>
+                      </a:pPr>
+                      <a:r>
+                        <a:rPr lang="ru-RU" sz="900" b="0" dirty="0">
+                          <a:solidFill>
+                            <a:srgbClr val="6C5CE0"/>
+                          </a:solidFill>
+                          <a:latin typeface="Onest Medium" pitchFamily="2" charset="-52"/>
+                        </a:rPr>
+                        <a:t xml:space="preserve">применяются</a:t>
+                      </a:r>
+                    </a:p>
+                  </a:txBody>
+                  <a:tcPr marL="45720" marR="45720" marT="27432" marB="27432" anchor="ctr">
+                    <a:lnL w="6350" cap="flat">
+                      <a:solidFill>
+                        <a:srgbClr val="C9C2EE"/>
+                      </a:solidFill>
+                    </a:lnL>
+                    <a:lnR w="6350" cap="flat">
+                      <a:solidFill>
+                        <a:srgbClr val="C9C2EE"/>
+                      </a:solidFill>
+                    </a:lnR>
+                    <a:lnT w="6350" cap="flat">
+                      <a:solidFill>
+                        <a:srgbClr val="C9C2EE"/>
+                      </a:solidFill>
+                    </a:lnT>
+                    <a:lnB w="6350" cap="flat">
+                      <a:solidFill>
+                        <a:srgbClr val="C9C2EE"/>
+                      </a:solidFill>
+                    </a:lnB>
+                    <a:solidFill>
+                      <a:srgbClr val="FFFFFF"/>
+                    </a:solidFill>
+                  </a:tcPr>
+                </a:tc>
+              </a:tr>
+              <a:tr h="713232">
+                <a:tc>
+                  <a:txBody>
+                    <a:bodyPr/>
+                    <a:lstStyle/>
+                    <a:p>
+                      <a:pPr algn="l" marL="0" indent="0">
+                        <a:lnSpc>
+                          <a:spcPct val="105000"/>
+                        </a:lnSpc>
+                        <a:spcAft>
+                          <a:spcPts val="0"/>
+                        </a:spcAft>
+                        <a:buNone/>
+                      </a:pPr>
+                      <a:r>
+                        <a:rPr lang="ru-RU" sz="920" b="0" dirty="0">
+                          <a:solidFill>
+                            <a:srgbClr val="000000"/>
+                          </a:solidFill>
+                          <a:latin typeface="Onest Medium" pitchFamily="2" charset="-52"/>
+                        </a:rPr>
+                        <a:t xml:space="preserve">Приказ об утверждении регламента</a:t>
+                      </a:r>
+                    </a:p>
+                  </a:txBody>
+                  <a:tcPr marL="45720" marR="45720" marT="27432" marB="27432" anchor="ctr">
+                    <a:lnL w="6350" cap="flat">
+                      <a:solidFill>
+                        <a:srgbClr val="C9C2EE"/>
+                      </a:solidFill>
+                    </a:lnL>
+                    <a:lnR w="6350" cap="flat">
+                      <a:solidFill>
+                        <a:srgbClr val="C9C2EE"/>
+                      </a:solidFill>
+                    </a:lnR>
+                    <a:lnT w="6350" cap="flat">
+                      <a:solidFill>
+                        <a:srgbClr val="C9C2EE"/>
+                      </a:solidFill>
+                    </a:lnT>
+                    <a:lnB w="6350" cap="flat">
+                      <a:solidFill>
+                        <a:srgbClr val="C9C2EE"/>
+                      </a:solidFill>
+                    </a:lnB>
+                    <a:solidFill>
+                      <a:srgbClr val="FFFFFF"/>
+                    </a:solidFill>
+                  </a:tcPr>
+                </a:tc>
+                <a:tc>
+                  <a:txBody>
+                    <a:bodyPr/>
+                    <a:lstStyle/>
+                    <a:p>
+                      <a:pPr algn="l" marL="0" indent="0">
+                        <a:lnSpc>
+                          <a:spcPct val="105000"/>
+                        </a:lnSpc>
+                        <a:spcAft>
+                          <a:spcPts val="0"/>
+                        </a:spcAft>
+                        <a:buNone/>
+                      </a:pPr>
+                      <a:r>
+                        <a:rPr lang="ru-RU" sz="900" b="0" dirty="0">
+                          <a:solidFill>
+                            <a:srgbClr val="595959"/>
+                          </a:solidFill>
+                          <a:latin typeface="Onest Regular" pitchFamily="2" charset="-52"/>
+                        </a:rPr>
+                        <a:t xml:space="preserve">Вводит регламент в действие — без этого стандарт не считается применяемым</a:t>
+                      </a:r>
+                    </a:p>
+                  </a:txBody>
+                  <a:tcPr marL="45720" marR="45720" marT="27432" marB="27432" anchor="ctr">
+                    <a:lnL w="6350" cap="flat">
+                      <a:solidFill>
+                        <a:srgbClr val="C9C2EE"/>
+                      </a:solidFill>
+                    </a:lnL>
+                    <a:lnR w="6350" cap="flat">
+                      <a:solidFill>
+                        <a:srgbClr val="C9C2EE"/>
+                      </a:solidFill>
+                    </a:lnR>
+                    <a:lnT w="6350" cap="flat">
+                      <a:solidFill>
+                        <a:srgbClr val="C9C2EE"/>
+                      </a:solidFill>
+                    </a:lnT>
+                    <a:lnB w="6350" cap="flat">
+                      <a:solidFill>
+                        <a:srgbClr val="C9C2EE"/>
+                      </a:solidFill>
+                    </a:lnB>
+                    <a:solidFill>
+                      <a:srgbClr val="FFFFFF"/>
+                    </a:solidFill>
+                  </a:tcPr>
+                </a:tc>
+                <a:tc>
+                  <a:txBody>
+                    <a:bodyPr/>
+                    <a:lstStyle/>
+                    <a:p>
+                      <a:pPr algn="ctr" marL="0" indent="0">
+                        <a:lnSpc>
+                          <a:spcPct val="100000"/>
+                        </a:lnSpc>
+                        <a:spcAft>
+                          <a:spcPts val="0"/>
+                        </a:spcAft>
+                        <a:buNone/>
+                      </a:pPr>
+                      <a:r>
+                        <a:rPr lang="ru-RU" sz="900" b="0" dirty="0">
+                          <a:solidFill>
+                            <a:srgbClr val="6C5CE0"/>
+                          </a:solidFill>
+                          <a:latin typeface="Onest Medium" pitchFamily="2" charset="-52"/>
+                        </a:rPr>
+                        <a:t xml:space="preserve">до 29.09.2026</a:t>
+                      </a:r>
+                    </a:p>
+                  </a:txBody>
+                  <a:tcPr marL="45720" marR="45720" marT="27432" marB="27432" anchor="ctr">
+                    <a:lnL w="6350" cap="flat">
+                      <a:solidFill>
+                        <a:srgbClr val="C9C2EE"/>
+                      </a:solidFill>
+                    </a:lnL>
+                    <a:lnR w="6350" cap="flat">
+                      <a:solidFill>
+                        <a:srgbClr val="C9C2EE"/>
+                      </a:solidFill>
+                    </a:lnR>
+                    <a:lnT w="6350" cap="flat">
+                      <a:solidFill>
+                        <a:srgbClr val="C9C2EE"/>
+                      </a:solidFill>
+                    </a:lnT>
+                    <a:lnB w="6350" cap="flat">
+                      <a:solidFill>
+                        <a:srgbClr val="C9C2EE"/>
+                      </a:solidFill>
+                    </a:lnB>
+                    <a:solidFill>
+                      <a:srgbClr val="FFFFFF"/>
+                    </a:solidFill>
+                  </a:tcPr>
+                </a:tc>
+              </a:tr>
+            </a:tbl>
+          </a:graphicData>
+        </a:graphic>
+      </p:graphicFrame>
       <p:sp>
         <p:nvSpPr>
-          <p:cNvPr id="919" name="Поле 919"/>
+          <p:cNvPr id="924" name="Поле 924"/>
           <p:cNvSpPr txBox="1"/>
           <p:nvPr/>
         </p:nvSpPr>
         <p:spPr>
           <a:xfrm>
-            <a:off x="822960" y="2148840"/>
-            <a:ext cx="10515600" cy="2286000"/>
+            <a:off x="411480" y="1051560"/>
+            <a:ext cx="11338560" cy="411480"/>
           </a:xfrm>
-          <a:prstGeom prst="roundRect">
-            <a:avLst>
-              <a:gd name="adj" fmla="val 4000"/>
-            </a:avLst>
+          <a:prstGeom prst="rect">
+            <a:avLst/>
           </a:prstGeom>
-          <a:solidFill>
-            <a:srgbClr val="F7F6FE"/>
-          </a:solidFill>
-          <a:ln w="12700">
-            <a:solidFill>
-              <a:srgbClr val="6C5CE0"/>
-            </a:solidFill>
-            <a:prstDash val="dash"/>
+          <a:noFill/>
+          <a:ln w="0">
+            <a:noFill/>
           </a:ln>
         </p:spPr>
         <p:txBody>
-          <a:bodyPr anchor="ctr" lIns="91440" rIns="91440" tIns="68580" bIns="68580" wrap="square">
+          <a:bodyPr anchor="t" lIns="91440" rIns="91440" tIns="68580" bIns="68580" wrap="square">
             <a:noAutofit/>
           </a:bodyPr>
           <a:lstStyle/>
-          <a:p>
-            <a:pPr algn="l" marL="0" indent="0">
-              <a:lnSpc>
-                <a:spcPct val="100000"/>
-              </a:lnSpc>
-              <a:spcAft>
-                <a:spcPts val="400"/>
-              </a:spcAft>
-              <a:buNone/>
-            </a:pPr>
-            <a:r>
-              <a:rPr lang="ru-RU" sz="1400" b="1" dirty="0">
-                <a:solidFill>
-                  <a:srgbClr val="6C5CE0"/>
-                </a:solidFill>
-                <a:latin typeface="Onest Black" pitchFamily="2" charset="-52"/>
-              </a:rPr>
-              <a:t xml:space="preserve">Стандарт улучшенного процесса</a:t>
-            </a:r>
-          </a:p>
-          <a:p>
-            <a:pPr algn="l" marL="0" indent="0">
-              <a:lnSpc>
-                <a:spcPct val="110000"/>
-              </a:lnSpc>
-              <a:spcAft>
-                <a:spcPts val="200"/>
-              </a:spcAft>
-              <a:buNone/>
-            </a:pPr>
-            <a:r>
-              <a:rPr lang="ru-RU" sz="1100" b="0" dirty="0">
-                <a:solidFill>
-                  <a:srgbClr val="595959"/>
-                </a:solidFill>
-                <a:latin typeface="Onest Medium" pitchFamily="2" charset="-52"/>
-              </a:rPr>
-              <a:t xml:space="preserve">Регламент работы сервиса приёма сообщений: роли и зоны ответственности, сроки по категориям, порядок эскалации, правила закрытия заявки.</a:t>
-            </a:r>
-          </a:p>
-          <a:p>
-            <a:pPr algn="l" marL="0" indent="0">
-              <a:lnSpc>
-                <a:spcPct val="110000"/>
-              </a:lnSpc>
-              <a:spcAft>
-                <a:spcPts val="200"/>
-              </a:spcAft>
-              <a:buNone/>
-            </a:pPr>
-            <a:r>
-              <a:rPr lang="ru-RU" sz="1100" b="0" dirty="0">
-                <a:solidFill>
-                  <a:srgbClr val="595959"/>
-                </a:solidFill>
-                <a:latin typeface="Onest Medium" pitchFamily="2" charset="-52"/>
-              </a:rPr>
-              <a:t xml:space="preserve">Плюс памятки по ролям — для гражданина, исполнителя, руководителя направления и оператора панели.</a:t>
-            </a:r>
-          </a:p>
-          <a:p>
-            <a:pPr algn="l" marL="0" indent="0">
-              <a:lnSpc>
-                <a:spcPct val="110000"/>
-              </a:lnSpc>
-              <a:spcAft>
-                <a:spcPts val="200"/>
-              </a:spcAft>
-              <a:buNone/>
-            </a:pPr>
-            <a:r>
-              <a:rPr lang="ru-RU" sz="1100" b="0" dirty="0">
-                <a:solidFill>
-                  <a:srgbClr val="595959"/>
-                </a:solidFill>
-                <a:latin typeface="Onest Medium" pitchFamily="2" charset="-52"/>
-              </a:rPr>
-              <a:t xml:space="preserve">Утверждается приказом администрации округа.</a:t>
-            </a:r>
-          </a:p>
           <a:p>
             <a:pPr algn="l" marL="0" indent="0">
               <a:lnSpc>
@@ -5128,13 +8619,59 @@
               <a:buNone/>
             </a:pPr>
             <a:r>
-              <a:rPr lang="ru-RU" sz="1000" b="0" dirty="0">
+              <a:rPr lang="ru-RU" sz="1050" b="0" dirty="0">
+                <a:solidFill>
+                  <a:srgbClr val="000000"/>
+                </a:solidFill>
+                <a:latin typeface="Onest Medium" pitchFamily="2" charset="-52"/>
+              </a:rPr>
+              <a:t xml:space="preserve">Стандартизация результата — обязательное требование методики: улучшение должно быть закреплено документом, который применяется.</a:t>
+            </a:r>
+          </a:p>
+        </p:txBody>
+      </p:sp>
+      <p:sp>
+        <p:nvSpPr>
+          <p:cNvPr id="925" name="Поле 925"/>
+          <p:cNvSpPr txBox="1"/>
+          <p:nvPr/>
+        </p:nvSpPr>
+        <p:spPr>
+          <a:xfrm>
+            <a:off x="411480" y="4709160"/>
+            <a:ext cx="11338560" cy="457200"/>
+          </a:xfrm>
+          <a:prstGeom prst="rect">
+            <a:avLst/>
+          </a:prstGeom>
+          <a:noFill/>
+          <a:ln w="0">
+            <a:noFill/>
+          </a:ln>
+        </p:spPr>
+        <p:txBody>
+          <a:bodyPr anchor="t" lIns="91440" rIns="91440" tIns="68580" bIns="68580" wrap="square">
+            <a:noAutofit/>
+          </a:bodyPr>
+          <a:lstStyle/>
+          <a:p>
+            <a:pPr algn="l" marL="0" indent="0">
+              <a:lnSpc>
+                <a:spcPct val="100000"/>
+              </a:lnSpc>
+              <a:spcAft>
+                <a:spcPts val="0"/>
+              </a:spcAft>
+              <a:buNone/>
+            </a:pPr>
+            <a:r>
+              <a:rPr lang="ru-RU" sz="950" b="0" dirty="0">
                 <a:solidFill>
                   <a:srgbClr val="6C5CE0"/>
                 </a:solidFill>
                 <a:latin typeface="Onest Medium" pitchFamily="2" charset="-52"/>
               </a:rPr>
-              <a:t xml:space="preserve">Разрабатывается 28–29.09.2026 — обязателен по методике и даёт балл на конкурсе</a:t>
+              <a:t xml:space="preserve">Сканы утверждённых документов со ссылками или QR-кодами прикладываются к этому слайду перед сдачей</a:t>
             </a:r>
           </a:p>
         </p:txBody>
@@ -16671,11 +20208,11 @@
                       <a:r>
                         <a:rPr lang="ru-RU" sz="900" b="0" dirty="0">
                           <a:solidFill>
-                            <a:srgbClr val="6C5CE0"/>
+                            <a:srgbClr val="000000"/>
                           </a:solidFill>
                           <a:latin typeface="Onest Medium" pitchFamily="2" charset="-52"/>
                         </a:rPr>
-                        <a:t xml:space="preserve">—</a:t>
+                        <a:t xml:space="preserve">7 — 30</a:t>
                       </a:r>
                     </a:p>
                   </a:txBody>
@@ -16777,7 +20314,7 @@
                           </a:solidFill>
                           <a:latin typeface="Onest Medium" pitchFamily="2" charset="-52"/>
                         </a:rPr>
-                        <a:t xml:space="preserve">—</a:t>
+                        <a:t xml:space="preserve">замер 24–25.09</a:t>
                       </a:r>
                     </a:p>
                   </a:txBody>
@@ -16828,7 +20365,7 @@
                           </a:solidFill>
                           <a:latin typeface="Onest Regular" pitchFamily="2" charset="-52"/>
                         </a:rPr>
-                        <a:t xml:space="preserve">раб. дн.; база — по хронометражу</a:t>
+                        <a:t xml:space="preserve">календ. дн.; база — карта текущего состояния</a:t>
                       </a:r>
                     </a:p>
                   </a:txBody>
@@ -16928,11 +20465,11 @@
                       <a:r>
                         <a:rPr lang="ru-RU" sz="900" b="0" dirty="0">
                           <a:solidFill>
-                            <a:srgbClr val="6C5CE0"/>
+                            <a:srgbClr val="000000"/>
                           </a:solidFill>
                           <a:latin typeface="Onest Medium" pitchFamily="2" charset="-52"/>
                         </a:rPr>
-                        <a:t xml:space="preserve">—</a:t>
+                        <a:t xml:space="preserve">замер</a:t>
                       </a:r>
                     </a:p>
                   </a:txBody>
@@ -17034,7 +20571,7 @@
                           </a:solidFill>
                           <a:latin typeface="Onest Medium" pitchFamily="2" charset="-52"/>
                         </a:rPr>
-                        <a:t xml:space="preserve">—</a:t>
+                        <a:t xml:space="preserve">замер 24–25.09</a:t>
                       </a:r>
                     </a:p>
                   </a:txBody>
@@ -17085,7 +20622,7 @@
                           </a:solidFill>
                           <a:latin typeface="Onest Regular" pitchFamily="2" charset="-52"/>
                         </a:rPr>
-                        <a:t xml:space="preserve">мин.; база — по хронометражу</a:t>
+                        <a:t xml:space="preserve">мин. на одно сообщение</a:t>
                       </a:r>
                     </a:p>
                   </a:txBody>
@@ -17291,7 +20828,7 @@
                           </a:solidFill>
                           <a:latin typeface="Onest Medium" pitchFamily="2" charset="-52"/>
                         </a:rPr>
-                        <a:t xml:space="preserve">—</a:t>
+                        <a:t xml:space="preserve">100</a:t>
                       </a:r>
                     </a:p>
                   </a:txBody>
@@ -17342,7 +20879,7 @@
                           </a:solidFill>
                           <a:latin typeface="Onest Regular" pitchFamily="2" charset="-52"/>
                         </a:rPr>
-                        <a:t xml:space="preserve">%; срок ставится автоматически по категории</a:t>
+                        <a:t xml:space="preserve">%; срок ставится автоматически по категории заявки</a:t>
                       </a:r>
                     </a:p>
                   </a:txBody>
@@ -17442,11 +20979,11 @@
                       <a:r>
                         <a:rPr lang="ru-RU" sz="900" b="0" dirty="0">
                           <a:solidFill>
-                            <a:srgbClr val="6C5CE0"/>
+                            <a:srgbClr val="000000"/>
                           </a:solidFill>
                           <a:latin typeface="Onest Medium" pitchFamily="2" charset="-52"/>
                         </a:rPr>
-                        <a:t xml:space="preserve">—</a:t>
+                        <a:t xml:space="preserve">не измерялась</a:t>
                       </a:r>
                     </a:p>
                   </a:txBody>
@@ -17548,7 +21085,7 @@
                           </a:solidFill>
                           <a:latin typeface="Onest Medium" pitchFamily="2" charset="-52"/>
                         </a:rPr>
-                        <a:t xml:space="preserve">—</a:t>
+                        <a:t xml:space="preserve">замер 24–25.09</a:t>
                       </a:r>
                     </a:p>
                   </a:txBody>
@@ -17599,7 +21136,7 @@
                           </a:solidFill>
                           <a:latin typeface="Onest Regular" pitchFamily="2" charset="-52"/>
                         </a:rPr>
-                        <a:t xml:space="preserve">%</a:t>
+                        <a:t xml:space="preserve">%; просрочка поднимается заму, затем Главе округа</a:t>
                       </a:r>
                     </a:p>
                   </a:txBody>
@@ -17805,7 +21342,7 @@
                           </a:solidFill>
                           <a:latin typeface="Onest Medium" pitchFamily="2" charset="-52"/>
                         </a:rPr>
-                        <a:t xml:space="preserve">—</a:t>
+                        <a:t xml:space="preserve">100</a:t>
                       </a:r>
                     </a:p>
                   </a:txBody>
@@ -17856,7 +21393,7 @@
                           </a:solidFill>
                           <a:latin typeface="Onest Regular" pitchFamily="2" charset="-52"/>
                         </a:rPr>
-                        <a:t xml:space="preserve">%; закрытие только с фото или отчётом</a:t>
+                        <a:t xml:space="preserve">%; закрыть заявку без фото или отчёта нельзя</a:t>
                       </a:r>
                     </a:p>
                   </a:txBody>
@@ -18062,7 +21599,7 @@
                           </a:solidFill>
                           <a:latin typeface="Onest Medium" pitchFamily="2" charset="-52"/>
                         </a:rPr>
-                        <a:t xml:space="preserve">—</a:t>
+                        <a:t xml:space="preserve">замер 24–25.09</a:t>
                       </a:r>
                     </a:p>
                   </a:txBody>
@@ -18113,7 +21650,7 @@
                           </a:solidFill>
                           <a:latin typeface="Onest Regular" pitchFamily="2" charset="-52"/>
                         </a:rPr>
-                        <a:t xml:space="preserve">балл по шкале 1–5</a:t>
+                        <a:t xml:space="preserve">балл по шкале 1–5; оценка ≤ 2 возвращает заявку в работу</a:t>
                       </a:r>
                     </a:p>
                   </a:txBody>
@@ -18213,11 +21750,11 @@
                       <a:r>
                         <a:rPr lang="ru-RU" sz="900" b="0" dirty="0">
                           <a:solidFill>
-                            <a:srgbClr val="6C5CE0"/>
+                            <a:srgbClr val="000000"/>
                           </a:solidFill>
                           <a:latin typeface="Onest Medium" pitchFamily="2" charset="-52"/>
                         </a:rPr>
-                        <a:t xml:space="preserve">—</a:t>
+                        <a:t xml:space="preserve">замер</a:t>
                       </a:r>
                     </a:p>
                   </a:txBody>
@@ -18319,7 +21856,7 @@
                           </a:solidFill>
                           <a:latin typeface="Onest Medium" pitchFamily="2" charset="-52"/>
                         </a:rPr>
-                        <a:t xml:space="preserve">—</a:t>
+                        <a:t xml:space="preserve">замер 24–25.09</a:t>
                       </a:r>
                     </a:p>
                   </a:txBody>
@@ -18370,7 +21907,7 @@
                           </a:solidFill>
                           <a:latin typeface="Onest Regular" pitchFamily="2" charset="-52"/>
                         </a:rPr>
-                        <a:t xml:space="preserve">%; считается по дедупликации</a:t>
+                        <a:t xml:space="preserve">%; дедупликация: 100 м за 14 дней и по адресу</a:t>
                       </a:r>
                     </a:p>
                   </a:txBody>

--- a/файлы/prezentaciya-chernovik.pptx
+++ b/файлы/prezentaciya-chernovik.pptx
@@ -6240,7 +6240,7 @@
                           </a:solidFill>
                           <a:latin typeface="Onest Black" pitchFamily="2" charset="-52"/>
                         </a:rPr>
-                        <a:t xml:space="preserve">один цифровой, два мессенджера</a:t>
+                        <a:t xml:space="preserve">один цифровой</a:t>
                       </a:r>
                     </a:p>
                   </a:txBody>
@@ -6291,7 +6291,7 @@
                           </a:solidFill>
                           <a:latin typeface="Onest Regular" pitchFamily="2" charset="-52"/>
                         </a:rPr>
-                        <a:t xml:space="preserve">Telegram и MAX работают на равных: текст, фотография и геометка в одном сообщении</a:t>
+                        <a:t xml:space="preserve">мессенджер MAX: текст, фотография и геометка в одном сообщении; архитектура канально-независимая, подключение других каналов не требует переделки ядра</a:t>
                       </a:r>
                     </a:p>
                   </a:txBody>
@@ -7221,7 +7221,7 @@
                           </a:solidFill>
                           <a:latin typeface="Onest Regular" pitchFamily="2" charset="-52"/>
                         </a:rPr>
-                        <a:t xml:space="preserve">дедупликация по координатам — 100 м за 14 дней — и по адресу, сквозная через оба канала</a:t>
+                        <a:t xml:space="preserve">дедупликация по координатам — 100 м за 14 дней — и по нормализованному адресу</a:t>
                       </a:r>
                     </a:p>
                   </a:txBody>
@@ -9868,7 +9868,7 @@
                           </a:solidFill>
                           <a:latin typeface="Onest Medium" pitchFamily="2" charset="-52"/>
                         </a:rPr>
-                        <a:t xml:space="preserve">Собственная разработка нового цифрового решения: мультиканальный сервис «Точка перемен» — Telegram и MAX, ИИ-классификация обращений, автоматическая маршрутизация, контроль сроков, панель администрации</a:t>
+                        <a:t xml:space="preserve">Собственная разработка нового цифрового решения: сервис приёма сообщений «Точка перемен» в мессенджере MAX, ИИ-классификация обращений, автоматическая маршрутизация, контроль сроков, панель администрации</a:t>
                       </a:r>
                     </a:p>
                   </a:txBody>
@@ -17135,7 +17135,7 @@
                           </a:solidFill>
                           <a:latin typeface="Onest Medium" pitchFamily="2" charset="-52"/>
                         </a:rPr>
-                        <a:t xml:space="preserve">Единый цифровой канал приёма в двух мессенджерах — Telegram и MAX</a:t>
+                        <a:t xml:space="preserve">Единый цифровой канал приёма в мессенджере MAX</a:t>
                       </a:r>
                     </a:p>
                   </a:txBody>
@@ -18874,7 +18874,7 @@
                           </a:solidFill>
                           <a:latin typeface="Onest Medium" pitchFamily="2" charset="-52"/>
                         </a:rPr>
-                        <a:t xml:space="preserve">Единый цифровой канал приёма в двух мессенджерах — Telegram и MAX</a:t>
+                        <a:t xml:space="preserve">Единый цифровой канал приёма в мессенджере MAX</a:t>
                       </a:r>
                     </a:p>
                   </a:txBody>

--- a/файлы/prezentaciya-chernovik.pptx
+++ b/файлы/prezentaciya-chernovik.pptx
@@ -17172,21 +17172,41 @@
                     <a:p>
                       <a:pPr algn="ctr" marL="0" indent="0">
                         <a:lnSpc>
-                          <a:spcPct val="100000"/>
-                        </a:lnSpc>
-                        <a:spcAft>
-                          <a:spcPts val="0"/>
-                        </a:spcAft>
-                        <a:buNone/>
-                      </a:pPr>
-                      <a:r>
-                        <a:rPr lang="ru-RU" sz="900" b="0" dirty="0">
-                          <a:solidFill>
-                            <a:srgbClr val="6C5CE0"/>
+                          <a:spcPct val="105000"/>
+                        </a:lnSpc>
+                        <a:spcAft>
+                          <a:spcPts val="0"/>
+                        </a:spcAft>
+                        <a:buNone/>
+                      </a:pPr>
+                      <a:r>
+                        <a:rPr lang="ru-RU" sz="880" b="0" dirty="0">
+                          <a:solidFill>
+                            <a:srgbClr val="000000"/>
                           </a:solidFill>
                           <a:latin typeface="Onest Medium" pitchFamily="2" charset="-52"/>
                         </a:rPr>
-                        <a:t xml:space="preserve">—</a:t>
+                        <a:t xml:space="preserve">Уваров Г.Г.</a:t>
+                      </a:r>
+                    </a:p>
+                    <a:p>
+                      <a:pPr algn="ctr" marL="0" indent="0">
+                        <a:lnSpc>
+                          <a:spcPct val="105000"/>
+                        </a:lnSpc>
+                        <a:spcAft>
+                          <a:spcPts val="0"/>
+                        </a:spcAft>
+                        <a:buNone/>
+                      </a:pPr>
+                      <a:r>
+                        <a:rPr lang="ru-RU" sz="880" b="0" dirty="0">
+                          <a:solidFill>
+                            <a:srgbClr val="000000"/>
+                          </a:solidFill>
+                          <a:latin typeface="Onest Medium" pitchFamily="2" charset="-52"/>
+                        </a:rPr>
+                        <a:t xml:space="preserve">Степаненко А.О.</a:t>
                       </a:r>
                     </a:p>
                   </a:txBody>
@@ -17223,21 +17243,21 @@
                     <a:p>
                       <a:pPr algn="ctr" marL="0" indent="0">
                         <a:lnSpc>
-                          <a:spcPct val="100000"/>
-                        </a:lnSpc>
-                        <a:spcAft>
-                          <a:spcPts val="0"/>
-                        </a:spcAft>
-                        <a:buNone/>
-                      </a:pPr>
-                      <a:r>
-                        <a:rPr lang="ru-RU" sz="900" b="0" dirty="0">
-                          <a:solidFill>
-                            <a:srgbClr val="6C5CE0"/>
+                          <a:spcPct val="105000"/>
+                        </a:lnSpc>
+                        <a:spcAft>
+                          <a:spcPts val="0"/>
+                        </a:spcAft>
+                        <a:buNone/>
+                      </a:pPr>
+                      <a:r>
+                        <a:rPr lang="ru-RU" sz="880" b="0" dirty="0">
+                          <a:solidFill>
+                            <a:srgbClr val="000000"/>
                           </a:solidFill>
                           <a:latin typeface="Onest Medium" pitchFamily="2" charset="-52"/>
                         </a:rPr>
-                        <a:t xml:space="preserve">—</a:t>
+                        <a:t xml:space="preserve">08.09 — 12.09.2026</a:t>
                       </a:r>
                     </a:p>
                   </a:txBody>
@@ -17429,21 +17449,41 @@
                     <a:p>
                       <a:pPr algn="ctr" marL="0" indent="0">
                         <a:lnSpc>
-                          <a:spcPct val="100000"/>
-                        </a:lnSpc>
-                        <a:spcAft>
-                          <a:spcPts val="0"/>
-                        </a:spcAft>
-                        <a:buNone/>
-                      </a:pPr>
-                      <a:r>
-                        <a:rPr lang="ru-RU" sz="900" b="0" dirty="0">
-                          <a:solidFill>
-                            <a:srgbClr val="6C5CE0"/>
+                          <a:spcPct val="105000"/>
+                        </a:lnSpc>
+                        <a:spcAft>
+                          <a:spcPts val="0"/>
+                        </a:spcAft>
+                        <a:buNone/>
+                      </a:pPr>
+                      <a:r>
+                        <a:rPr lang="ru-RU" sz="880" b="0" dirty="0">
+                          <a:solidFill>
+                            <a:srgbClr val="000000"/>
                           </a:solidFill>
                           <a:latin typeface="Onest Medium" pitchFamily="2" charset="-52"/>
                         </a:rPr>
-                        <a:t xml:space="preserve">—</a:t>
+                        <a:t xml:space="preserve">Уваров Г.Г.</a:t>
+                      </a:r>
+                    </a:p>
+                    <a:p>
+                      <a:pPr algn="ctr" marL="0" indent="0">
+                        <a:lnSpc>
+                          <a:spcPct val="105000"/>
+                        </a:lnSpc>
+                        <a:spcAft>
+                          <a:spcPts val="0"/>
+                        </a:spcAft>
+                        <a:buNone/>
+                      </a:pPr>
+                      <a:r>
+                        <a:rPr lang="ru-RU" sz="880" b="0" dirty="0">
+                          <a:solidFill>
+                            <a:srgbClr val="000000"/>
+                          </a:solidFill>
+                          <a:latin typeface="Onest Medium" pitchFamily="2" charset="-52"/>
+                        </a:rPr>
+                        <a:t xml:space="preserve">Вихрова А.В.</a:t>
                       </a:r>
                     </a:p>
                   </a:txBody>
@@ -17480,21 +17520,21 @@
                     <a:p>
                       <a:pPr algn="ctr" marL="0" indent="0">
                         <a:lnSpc>
-                          <a:spcPct val="100000"/>
-                        </a:lnSpc>
-                        <a:spcAft>
-                          <a:spcPts val="0"/>
-                        </a:spcAft>
-                        <a:buNone/>
-                      </a:pPr>
-                      <a:r>
-                        <a:rPr lang="ru-RU" sz="900" b="0" dirty="0">
-                          <a:solidFill>
-                            <a:srgbClr val="6C5CE0"/>
+                          <a:spcPct val="105000"/>
+                        </a:lnSpc>
+                        <a:spcAft>
+                          <a:spcPts val="0"/>
+                        </a:spcAft>
+                        <a:buNone/>
+                      </a:pPr>
+                      <a:r>
+                        <a:rPr lang="ru-RU" sz="880" b="0" dirty="0">
+                          <a:solidFill>
+                            <a:srgbClr val="000000"/>
                           </a:solidFill>
                           <a:latin typeface="Onest Medium" pitchFamily="2" charset="-52"/>
                         </a:rPr>
-                        <a:t xml:space="preserve">—</a:t>
+                        <a:t xml:space="preserve">08.09 — 16.09.2026</a:t>
                       </a:r>
                     </a:p>
                   </a:txBody>
@@ -17686,21 +17726,21 @@
                     <a:p>
                       <a:pPr algn="ctr" marL="0" indent="0">
                         <a:lnSpc>
-                          <a:spcPct val="100000"/>
-                        </a:lnSpc>
-                        <a:spcAft>
-                          <a:spcPts val="0"/>
-                        </a:spcAft>
-                        <a:buNone/>
-                      </a:pPr>
-                      <a:r>
-                        <a:rPr lang="ru-RU" sz="900" b="0" dirty="0">
-                          <a:solidFill>
-                            <a:srgbClr val="6C5CE0"/>
+                          <a:spcPct val="105000"/>
+                        </a:lnSpc>
+                        <a:spcAft>
+                          <a:spcPts val="0"/>
+                        </a:spcAft>
+                        <a:buNone/>
+                      </a:pPr>
+                      <a:r>
+                        <a:rPr lang="ru-RU" sz="880" b="0" dirty="0">
+                          <a:solidFill>
+                            <a:srgbClr val="000000"/>
                           </a:solidFill>
                           <a:latin typeface="Onest Medium" pitchFamily="2" charset="-52"/>
                         </a:rPr>
-                        <a:t xml:space="preserve">—</a:t>
+                        <a:t xml:space="preserve">Воронцова Д.С.</a:t>
                       </a:r>
                     </a:p>
                   </a:txBody>
@@ -17737,21 +17777,21 @@
                     <a:p>
                       <a:pPr algn="ctr" marL="0" indent="0">
                         <a:lnSpc>
-                          <a:spcPct val="100000"/>
-                        </a:lnSpc>
-                        <a:spcAft>
-                          <a:spcPts val="0"/>
-                        </a:spcAft>
-                        <a:buNone/>
-                      </a:pPr>
-                      <a:r>
-                        <a:rPr lang="ru-RU" sz="900" b="0" dirty="0">
-                          <a:solidFill>
-                            <a:srgbClr val="6C5CE0"/>
+                          <a:spcPct val="105000"/>
+                        </a:lnSpc>
+                        <a:spcAft>
+                          <a:spcPts val="0"/>
+                        </a:spcAft>
+                        <a:buNone/>
+                      </a:pPr>
+                      <a:r>
+                        <a:rPr lang="ru-RU" sz="880" b="0" dirty="0">
+                          <a:solidFill>
+                            <a:srgbClr val="000000"/>
                           </a:solidFill>
                           <a:latin typeface="Onest Medium" pitchFamily="2" charset="-52"/>
                         </a:rPr>
-                        <a:t xml:space="preserve">—</a:t>
+                        <a:t xml:space="preserve">14.09 — 19.09.2026</a:t>
                       </a:r>
                     </a:p>
                   </a:txBody>
@@ -17906,7 +17946,7 @@
                           </a:solidFill>
                           <a:latin typeface="Onest Medium" pitchFamily="2" charset="-52"/>
                         </a:rPr>
-                        <a:t xml:space="preserve">Сквозная дедупликация по координатам и адресу через оба канала</a:t>
+                        <a:t xml:space="preserve">Дедупликация по координатам и нормализованному адресу</a:t>
                       </a:r>
                     </a:p>
                   </a:txBody>
@@ -17943,21 +17983,21 @@
                     <a:p>
                       <a:pPr algn="ctr" marL="0" indent="0">
                         <a:lnSpc>
-                          <a:spcPct val="100000"/>
-                        </a:lnSpc>
-                        <a:spcAft>
-                          <a:spcPts val="0"/>
-                        </a:spcAft>
-                        <a:buNone/>
-                      </a:pPr>
-                      <a:r>
-                        <a:rPr lang="ru-RU" sz="900" b="0" dirty="0">
-                          <a:solidFill>
-                            <a:srgbClr val="6C5CE0"/>
+                          <a:spcPct val="105000"/>
+                        </a:lnSpc>
+                        <a:spcAft>
+                          <a:spcPts val="0"/>
+                        </a:spcAft>
+                        <a:buNone/>
+                      </a:pPr>
+                      <a:r>
+                        <a:rPr lang="ru-RU" sz="880" b="0" dirty="0">
+                          <a:solidFill>
+                            <a:srgbClr val="000000"/>
                           </a:solidFill>
                           <a:latin typeface="Onest Medium" pitchFamily="2" charset="-52"/>
                         </a:rPr>
-                        <a:t xml:space="preserve">—</a:t>
+                        <a:t xml:space="preserve">Уваров Г.Г.</a:t>
                       </a:r>
                     </a:p>
                   </a:txBody>
@@ -17994,21 +18034,21 @@
                     <a:p>
                       <a:pPr algn="ctr" marL="0" indent="0">
                         <a:lnSpc>
-                          <a:spcPct val="100000"/>
-                        </a:lnSpc>
-                        <a:spcAft>
-                          <a:spcPts val="0"/>
-                        </a:spcAft>
-                        <a:buNone/>
-                      </a:pPr>
-                      <a:r>
-                        <a:rPr lang="ru-RU" sz="900" b="0" dirty="0">
-                          <a:solidFill>
-                            <a:srgbClr val="6C5CE0"/>
+                          <a:spcPct val="105000"/>
+                        </a:lnSpc>
+                        <a:spcAft>
+                          <a:spcPts val="0"/>
+                        </a:spcAft>
+                        <a:buNone/>
+                      </a:pPr>
+                      <a:r>
+                        <a:rPr lang="ru-RU" sz="880" b="0" dirty="0">
+                          <a:solidFill>
+                            <a:srgbClr val="000000"/>
                           </a:solidFill>
                           <a:latin typeface="Onest Medium" pitchFamily="2" charset="-52"/>
                         </a:rPr>
-                        <a:t xml:space="preserve">—</a:t>
+                        <a:t xml:space="preserve">15.09 — 19.09.2026</a:t>
                       </a:r>
                     </a:p>
                   </a:txBody>
@@ -18200,21 +18240,21 @@
                     <a:p>
                       <a:pPr algn="ctr" marL="0" indent="0">
                         <a:lnSpc>
-                          <a:spcPct val="100000"/>
-                        </a:lnSpc>
-                        <a:spcAft>
-                          <a:spcPts val="0"/>
-                        </a:spcAft>
-                        <a:buNone/>
-                      </a:pPr>
-                      <a:r>
-                        <a:rPr lang="ru-RU" sz="900" b="0" dirty="0">
-                          <a:solidFill>
-                            <a:srgbClr val="6C5CE0"/>
+                          <a:spcPct val="105000"/>
+                        </a:lnSpc>
+                        <a:spcAft>
+                          <a:spcPts val="0"/>
+                        </a:spcAft>
+                        <a:buNone/>
+                      </a:pPr>
+                      <a:r>
+                        <a:rPr lang="ru-RU" sz="880" b="0" dirty="0">
+                          <a:solidFill>
+                            <a:srgbClr val="000000"/>
                           </a:solidFill>
                           <a:latin typeface="Onest Medium" pitchFamily="2" charset="-52"/>
                         </a:rPr>
-                        <a:t xml:space="preserve">—</a:t>
+                        <a:t xml:space="preserve">Комчадалова А.А.</a:t>
                       </a:r>
                     </a:p>
                   </a:txBody>
@@ -18251,21 +18291,21 @@
                     <a:p>
                       <a:pPr algn="ctr" marL="0" indent="0">
                         <a:lnSpc>
-                          <a:spcPct val="100000"/>
-                        </a:lnSpc>
-                        <a:spcAft>
-                          <a:spcPts val="0"/>
-                        </a:spcAft>
-                        <a:buNone/>
-                      </a:pPr>
-                      <a:r>
-                        <a:rPr lang="ru-RU" sz="900" b="0" dirty="0">
-                          <a:solidFill>
-                            <a:srgbClr val="6C5CE0"/>
+                          <a:spcPct val="105000"/>
+                        </a:lnSpc>
+                        <a:spcAft>
+                          <a:spcPts val="0"/>
+                        </a:spcAft>
+                        <a:buNone/>
+                      </a:pPr>
+                      <a:r>
+                        <a:rPr lang="ru-RU" sz="880" b="0" dirty="0">
+                          <a:solidFill>
+                            <a:srgbClr val="000000"/>
                           </a:solidFill>
                           <a:latin typeface="Onest Medium" pitchFamily="2" charset="-52"/>
                         </a:rPr>
-                        <a:t xml:space="preserve">—</a:t>
+                        <a:t xml:space="preserve">16.09 — 23.09.2026</a:t>
                       </a:r>
                     </a:p>
                   </a:txBody>
@@ -18341,7 +18381,7 @@
                 </a:solidFill>
                 <a:latin typeface="Onest Medium" pitchFamily="2" charset="-52"/>
               </a:rPr>
-              <a:t xml:space="preserve">Ответственные исполнители и сроки проставляются по приказу об открытии проекта и утверждаются вместе с планом (Приложение № 3)</a:t>
+              <a:t xml:space="preserve">Ответственные — состав проектной команды по распоряжению об инициировании проекта. Сроки внутри этапа «Внедрение мероприятий», 08.09 — 23.09.2026</a:t>
             </a:r>
           </a:p>
         </p:txBody>
@@ -19339,7 +19379,7 @@
                           </a:solidFill>
                           <a:latin typeface="Onest Medium" pitchFamily="2" charset="-52"/>
                         </a:rPr>
-                        <a:t xml:space="preserve">Сквозная дедупликация по координатам и адресу через оба канала</a:t>
+                        <a:t xml:space="preserve">Дедупликация по координатам и нормализованному адресу</a:t>
                       </a:r>
                     </a:p>
                   </a:txBody>

--- a/файлы/prezentaciya-chernovik.pptx
+++ b/файлы/prezentaciya-chernovik.pptx
@@ -22327,119 +22327,30 @@
           </p:txBody>
         </p:sp>
       </p:grpSp>
-      <p:sp>
-        <p:nvSpPr>
-          <p:cNvPr id="916" name="Поле 916"/>
-          <p:cNvSpPr txBox="1"/>
+      <p:pic>
+        <p:nvPicPr>
+          <p:cNvPr id="916" name="Рисунок 916"/>
+          <p:cNvPicPr>
+            <a:picLocks noChangeAspect="1"/>
+          </p:cNvPicPr>
           <p:nvPr/>
-        </p:nvSpPr>
+        </p:nvPicPr>
+        <p:blipFill>
+          <a:blip r:embed="rId5"/>
+          <a:stretch>
+            <a:fillRect/>
+          </a:stretch>
+        </p:blipFill>
         <p:spPr>
           <a:xfrm>
-            <a:off x="822960" y="2148840"/>
-            <a:ext cx="10515600" cy="2286000"/>
+            <a:off x="1363609" y="960120"/>
+            <a:ext cx="9470879" cy="5779008"/>
           </a:xfrm>
-          <a:prstGeom prst="roundRect">
-            <a:avLst>
-              <a:gd name="adj" fmla="val 4000"/>
-            </a:avLst>
+          <a:prstGeom prst="rect">
+            <a:avLst/>
           </a:prstGeom>
-          <a:solidFill>
-            <a:srgbClr val="F7F6FE"/>
-          </a:solidFill>
-          <a:ln w="12700">
-            <a:solidFill>
-              <a:srgbClr val="6C5CE0"/>
-            </a:solidFill>
-            <a:prstDash val="dash"/>
-          </a:ln>
         </p:spPr>
-        <p:txBody>
-          <a:bodyPr anchor="ctr" lIns="91440" rIns="91440" tIns="68580" bIns="68580" wrap="square">
-            <a:noAutofit/>
-          </a:bodyPr>
-          <a:lstStyle/>
-          <a:p>
-            <a:pPr algn="l" marL="0" indent="0">
-              <a:lnSpc>
-                <a:spcPct val="100000"/>
-              </a:lnSpc>
-              <a:spcAft>
-                <a:spcPts val="400"/>
-              </a:spcAft>
-              <a:buNone/>
-            </a:pPr>
-            <a:r>
-              <a:rPr lang="ru-RU" sz="1400" b="1" dirty="0">
-                <a:solidFill>
-                  <a:srgbClr val="6C5CE0"/>
-                </a:solidFill>
-                <a:latin typeface="Onest Black" pitchFamily="2" charset="-52"/>
-              </a:rPr>
-              <a:t xml:space="preserve">Карта достигнутого состояния процесса</a:t>
-            </a:r>
-          </a:p>
-          <a:p>
-            <a:pPr algn="l" marL="0" indent="0">
-              <a:lnSpc>
-                <a:spcPct val="110000"/>
-              </a:lnSpc>
-              <a:spcAft>
-                <a:spcPts val="200"/>
-              </a:spcAft>
-              <a:buNone/>
-            </a:pPr>
-            <a:r>
-              <a:rPr lang="ru-RU" sz="1100" b="0" dirty="0">
-                <a:solidFill>
-                  <a:srgbClr val="595959"/>
-                </a:solidFill>
-                <a:latin typeface="Onest Medium" pitchFamily="2" charset="-52"/>
-              </a:rPr>
-              <a:t xml:space="preserve">Строится как карта текущего состояния, но без проблем и мероприятий — проверка того, что целевое состояние достигнуто.</a:t>
-            </a:r>
-          </a:p>
-          <a:p>
-            <a:pPr algn="l" marL="0" indent="0">
-              <a:lnSpc>
-                <a:spcPct val="110000"/>
-              </a:lnSpc>
-              <a:spcAft>
-                <a:spcPts val="200"/>
-              </a:spcAft>
-              <a:buNone/>
-            </a:pPr>
-            <a:r>
-              <a:rPr lang="ru-RU" sz="1100" b="0" dirty="0">
-                <a:solidFill>
-                  <a:srgbClr val="595959"/>
-                </a:solidFill>
-                <a:latin typeface="Onest Medium" pitchFamily="2" charset="-52"/>
-              </a:rPr>
-              <a:t xml:space="preserve">Внизу — фактическое ВПП после внедрения, для сравнения с исходным.</a:t>
-            </a:r>
-          </a:p>
-          <a:p>
-            <a:pPr algn="l" marL="0" indent="0">
-              <a:lnSpc>
-                <a:spcPct val="100000"/>
-              </a:lnSpc>
-              <a:spcAft>
-                <a:spcPts val="0"/>
-              </a:spcAft>
-              <a:buNone/>
-            </a:pPr>
-            <a:r>
-              <a:rPr lang="ru-RU" sz="1000" b="0" dirty="0">
-                <a:solidFill>
-                  <a:srgbClr val="6C5CE0"/>
-                </a:solidFill>
-                <a:latin typeface="Onest Medium" pitchFamily="2" charset="-52"/>
-              </a:rPr>
-              <a:t xml:space="preserve">Готовится 28.09.2026, после мониторинга достигнутых результатов</a:t>
-            </a:r>
-          </a:p>
-        </p:txBody>
-      </p:sp>
+      </p:pic>
     </p:spTree>
   </p:cSld>
   <p:clrMapOvr>

--- a/файлы/prezentaciya-chernovik.pptx
+++ b/файлы/prezentaciya-chernovik.pptx
@@ -4061,7 +4061,7 @@
       </p:grpSp>
       <p:graphicFrame>
         <p:nvGraphicFramePr>
-          <p:cNvPr id="917" name="Таблица 917"/>
+          <p:cNvPr id="915" name="Таблица 915"/>
           <p:cNvGraphicFramePr>
             <a:graphicFrameLocks noGrp="1"/>
           </p:cNvGraphicFramePr>
@@ -5481,7 +5481,7 @@
       </p:graphicFrame>
       <p:sp>
         <p:nvSpPr>
-          <p:cNvPr id="918" name="Поле 918"/>
+          <p:cNvPr id="916" name="Поле 916"/>
           <p:cNvSpPr txBox="1"/>
           <p:nvPr/>
         </p:nvSpPr>
@@ -5527,7 +5527,7 @@
       </p:sp>
       <p:sp>
         <p:nvSpPr>
-          <p:cNvPr id="919" name="Поле 919"/>
+          <p:cNvPr id="917" name="Поле 917"/>
           <p:cNvSpPr txBox="1"/>
           <p:nvPr/>
         </p:nvSpPr>
@@ -5993,7 +5993,7 @@
       </p:grpSp>
       <p:graphicFrame>
         <p:nvGraphicFramePr>
-          <p:cNvPr id="920" name="Таблица 920"/>
+          <p:cNvPr id="918" name="Таблица 918"/>
           <p:cNvGraphicFramePr>
             <a:graphicFrameLocks noGrp="1"/>
           </p:cNvGraphicFramePr>
@@ -7413,7 +7413,7 @@
       </p:graphicFrame>
       <p:sp>
         <p:nvSpPr>
-          <p:cNvPr id="921" name="Поле 921"/>
+          <p:cNvPr id="919" name="Поле 919"/>
           <p:cNvSpPr txBox="1"/>
           <p:nvPr/>
         </p:nvSpPr>
@@ -7459,7 +7459,7 @@
       </p:sp>
       <p:sp>
         <p:nvSpPr>
-          <p:cNvPr id="922" name="Поле 922"/>
+          <p:cNvPr id="920" name="Поле 920"/>
           <p:cNvSpPr txBox="1"/>
           <p:nvPr/>
         </p:nvSpPr>
@@ -7786,7 +7786,7 @@
       </p:grpSp>
       <p:graphicFrame>
         <p:nvGraphicFramePr>
-          <p:cNvPr id="923" name="Таблица 923"/>
+          <p:cNvPr id="921" name="Таблица 921"/>
           <p:cNvGraphicFramePr>
             <a:graphicFrameLocks noGrp="1"/>
           </p:cNvGraphicFramePr>
@@ -8586,7 +8586,7 @@
       </p:graphicFrame>
       <p:sp>
         <p:nvSpPr>
-          <p:cNvPr id="924" name="Поле 924"/>
+          <p:cNvPr id="922" name="Поле 922"/>
           <p:cNvSpPr txBox="1"/>
           <p:nvPr/>
         </p:nvSpPr>
@@ -8632,7 +8632,7 @@
       </p:sp>
       <p:sp>
         <p:nvSpPr>
-          <p:cNvPr id="925" name="Поле 925"/>
+          <p:cNvPr id="923" name="Поле 923"/>
           <p:cNvSpPr txBox="1"/>
           <p:nvPr/>
         </p:nvSpPr>
@@ -15095,1058 +15095,30 @@
           </p:txBody>
         </p:sp>
       </p:grpSp>
-      <p:sp>
-        <p:nvSpPr>
-          <p:cNvPr id="907" name="Поле 907"/>
-          <p:cNvSpPr txBox="1"/>
+      <p:pic>
+        <p:nvPicPr>
+          <p:cNvPr id="907" name="Рисунок 907"/>
+          <p:cNvPicPr>
+            <a:picLocks noChangeAspect="1"/>
+          </p:cNvPicPr>
           <p:nvPr/>
-        </p:nvSpPr>
+        </p:nvPicPr>
+        <p:blipFill>
+          <a:blip r:embed="rId4"/>
+          <a:stretch>
+            <a:fillRect/>
+          </a:stretch>
+        </p:blipFill>
         <p:spPr>
           <a:xfrm>
-            <a:off x="502920" y="960120"/>
-            <a:ext cx="11155680" cy="457200"/>
+            <a:off x="1955834" y="960120"/>
+            <a:ext cx="8286429" cy="5779008"/>
           </a:xfrm>
           <a:prstGeom prst="rect">
             <a:avLst/>
           </a:prstGeom>
-          <a:noFill/>
-          <a:ln w="0">
-            <a:noFill/>
-          </a:ln>
         </p:spPr>
-        <p:txBody>
-          <a:bodyPr anchor="t" lIns="91440" rIns="91440" tIns="68580" bIns="68580" wrap="square">
-            <a:noAutofit/>
-          </a:bodyPr>
-          <a:lstStyle/>
-          <a:p>
-            <a:pPr algn="l" marL="0" indent="0">
-              <a:lnSpc>
-                <a:spcPct val="105000"/>
-              </a:lnSpc>
-              <a:spcAft>
-                <a:spcPts val="0"/>
-              </a:spcAft>
-              <a:buNone/>
-            </a:pPr>
-            <a:r>
-              <a:rPr lang="ru-RU" sz="1100" b="0" dirty="0">
-                <a:solidFill>
-                  <a:srgbClr val="595959"/>
-                </a:solidFill>
-                <a:latin typeface="Onest Medium" pitchFamily="2" charset="-52"/>
-              </a:rPr>
-              <a:t xml:space="preserve">Восемь видов потерь, выявленных в процессе. Классификация и порядок — официальные, по методике бережливого управления.</a:t>
-            </a:r>
-          </a:p>
-        </p:txBody>
-      </p:sp>
-      <p:graphicFrame>
-        <p:nvGraphicFramePr>
-          <p:cNvPr id="908" name="Таблица 908"/>
-          <p:cNvGraphicFramePr>
-            <a:graphicFrameLocks noGrp="1"/>
-          </p:cNvGraphicFramePr>
-          <p:nvPr/>
-        </p:nvGraphicFramePr>
-        <p:xfrm>
-          <a:off x="502920" y="1481328"/>
-          <a:ext cx="11155680" cy="4608576"/>
-        </p:xfrm>
-        <a:graphic>
-          <a:graphicData uri="http://schemas.openxmlformats.org/drawingml/2006/table">
-            <a:tbl>
-              <a:tblPr/>
-              <a:tblGrid>
-                <a:gridCol w="3246120"/>
-                <a:gridCol w="7909560"/>
-              </a:tblGrid>
-              <a:tr h="512064">
-                <a:tc>
-                  <a:txBody>
-                    <a:bodyPr/>
-                    <a:lstStyle/>
-                    <a:p>
-                      <a:pPr algn="l" marL="0" indent="0">
-                        <a:lnSpc>
-                          <a:spcPct val="100000"/>
-                        </a:lnSpc>
-                        <a:spcAft>
-                          <a:spcPts val="0"/>
-                        </a:spcAft>
-                        <a:buNone/>
-                      </a:pPr>
-                      <a:r>
-                        <a:rPr lang="ru-RU" sz="1000" b="1" dirty="0">
-                          <a:solidFill>
-                            <a:srgbClr val="000000"/>
-                          </a:solidFill>
-                          <a:latin typeface="Onest Black" pitchFamily="2" charset="-52"/>
-                        </a:rPr>
-                        <a:t xml:space="preserve">Вид потери</a:t>
-                      </a:r>
-                    </a:p>
-                  </a:txBody>
-                  <a:tcPr marL="45720" marR="45720" marT="27432" marB="27432" anchor="ctr">
-                    <a:lnL w="6350" cap="flat">
-                      <a:solidFill>
-                        <a:srgbClr val="C9C2EE"/>
-                      </a:solidFill>
-                    </a:lnL>
-                    <a:lnR w="6350" cap="flat">
-                      <a:solidFill>
-                        <a:srgbClr val="C9C2EE"/>
-                      </a:solidFill>
-                    </a:lnR>
-                    <a:lnT w="6350" cap="flat">
-                      <a:solidFill>
-                        <a:srgbClr val="C9C2EE"/>
-                      </a:solidFill>
-                    </a:lnT>
-                    <a:lnB w="6350" cap="flat">
-                      <a:solidFill>
-                        <a:srgbClr val="C9C2EE"/>
-                      </a:solidFill>
-                    </a:lnB>
-                    <a:solidFill>
-                      <a:srgbClr val="EFEDFB"/>
-                    </a:solidFill>
-                  </a:tcPr>
-                </a:tc>
-                <a:tc>
-                  <a:txBody>
-                    <a:bodyPr/>
-                    <a:lstStyle/>
-                    <a:p>
-                      <a:pPr algn="l" marL="0" indent="0">
-                        <a:lnSpc>
-                          <a:spcPct val="100000"/>
-                        </a:lnSpc>
-                        <a:spcAft>
-                          <a:spcPts val="0"/>
-                        </a:spcAft>
-                        <a:buNone/>
-                      </a:pPr>
-                      <a:r>
-                        <a:rPr lang="ru-RU" sz="1000" b="1" dirty="0">
-                          <a:solidFill>
-                            <a:srgbClr val="000000"/>
-                          </a:solidFill>
-                          <a:latin typeface="Onest Black" pitchFamily="2" charset="-52"/>
-                        </a:rPr>
-                        <a:t xml:space="preserve">Как проявляется в процессе</a:t>
-                      </a:r>
-                    </a:p>
-                  </a:txBody>
-                  <a:tcPr marL="45720" marR="45720" marT="27432" marB="27432" anchor="ctr">
-                    <a:lnL w="6350" cap="flat">
-                      <a:solidFill>
-                        <a:srgbClr val="C9C2EE"/>
-                      </a:solidFill>
-                    </a:lnL>
-                    <a:lnR w="6350" cap="flat">
-                      <a:solidFill>
-                        <a:srgbClr val="C9C2EE"/>
-                      </a:solidFill>
-                    </a:lnR>
-                    <a:lnT w="6350" cap="flat">
-                      <a:solidFill>
-                        <a:srgbClr val="C9C2EE"/>
-                      </a:solidFill>
-                    </a:lnT>
-                    <a:lnB w="6350" cap="flat">
-                      <a:solidFill>
-                        <a:srgbClr val="C9C2EE"/>
-                      </a:solidFill>
-                    </a:lnB>
-                    <a:solidFill>
-                      <a:srgbClr val="EFEDFB"/>
-                    </a:solidFill>
-                  </a:tcPr>
-                </a:tc>
-              </a:tr>
-              <a:tr h="512064">
-                <a:tc>
-                  <a:txBody>
-                    <a:bodyPr/>
-                    <a:lstStyle/>
-                    <a:p>
-                      <a:pPr algn="l" marL="0" indent="0">
-                        <a:lnSpc>
-                          <a:spcPct val="100000"/>
-                        </a:lnSpc>
-                        <a:spcAft>
-                          <a:spcPts val="0"/>
-                        </a:spcAft>
-                        <a:buNone/>
-                      </a:pPr>
-                      <a:r>
-                        <a:rPr lang="ru-RU" sz="950" b="0" dirty="0">
-                          <a:solidFill>
-                            <a:srgbClr val="000000"/>
-                          </a:solidFill>
-                          <a:latin typeface="Onest Medium" pitchFamily="2" charset="-52"/>
-                        </a:rPr>
-                        <a:t xml:space="preserve">1. Перепроизводство</a:t>
-                      </a:r>
-                    </a:p>
-                  </a:txBody>
-                  <a:tcPr marL="45720" marR="45720" marT="27432" marB="27432" anchor="ctr">
-                    <a:lnL w="6350" cap="flat">
-                      <a:solidFill>
-                        <a:srgbClr val="C9C2EE"/>
-                      </a:solidFill>
-                    </a:lnL>
-                    <a:lnR w="6350" cap="flat">
-                      <a:solidFill>
-                        <a:srgbClr val="C9C2EE"/>
-                      </a:solidFill>
-                    </a:lnR>
-                    <a:lnT w="6350" cap="flat">
-                      <a:solidFill>
-                        <a:srgbClr val="C9C2EE"/>
-                      </a:solidFill>
-                    </a:lnT>
-                    <a:lnB w="6350" cap="flat">
-                      <a:solidFill>
-                        <a:srgbClr val="C9C2EE"/>
-                      </a:solidFill>
-                    </a:lnB>
-                    <a:solidFill>
-                      <a:srgbClr val="FFFFFF"/>
-                    </a:solidFill>
-                  </a:tcPr>
-                </a:tc>
-                <a:tc>
-                  <a:txBody>
-                    <a:bodyPr/>
-                    <a:lstStyle/>
-                    <a:p>
-                      <a:pPr algn="l" marL="0" indent="0">
-                        <a:lnSpc>
-                          <a:spcPct val="105000"/>
-                        </a:lnSpc>
-                        <a:spcAft>
-                          <a:spcPts val="0"/>
-                        </a:spcAft>
-                        <a:buNone/>
-                      </a:pPr>
-                      <a:r>
-                        <a:rPr lang="ru-RU" sz="950" b="0" dirty="0">
-                          <a:solidFill>
-                            <a:srgbClr val="595959"/>
-                          </a:solidFill>
-                          <a:latin typeface="Onest Regular" pitchFamily="2" charset="-52"/>
-                        </a:rPr>
-                        <a:t xml:space="preserve">Несколько граждан сообщают об одной проблеме — по каждому заводится отдельная работа и отдельно выезжает исполнитель</a:t>
-                      </a:r>
-                    </a:p>
-                  </a:txBody>
-                  <a:tcPr marL="45720" marR="45720" marT="27432" marB="27432" anchor="ctr">
-                    <a:lnL w="6350" cap="flat">
-                      <a:solidFill>
-                        <a:srgbClr val="C9C2EE"/>
-                      </a:solidFill>
-                    </a:lnL>
-                    <a:lnR w="6350" cap="flat">
-                      <a:solidFill>
-                        <a:srgbClr val="C9C2EE"/>
-                      </a:solidFill>
-                    </a:lnR>
-                    <a:lnT w="6350" cap="flat">
-                      <a:solidFill>
-                        <a:srgbClr val="C9C2EE"/>
-                      </a:solidFill>
-                    </a:lnT>
-                    <a:lnB w="6350" cap="flat">
-                      <a:solidFill>
-                        <a:srgbClr val="C9C2EE"/>
-                      </a:solidFill>
-                    </a:lnB>
-                    <a:solidFill>
-                      <a:srgbClr val="FFFFFF"/>
-                    </a:solidFill>
-                  </a:tcPr>
-                </a:tc>
-              </a:tr>
-              <a:tr h="512064">
-                <a:tc>
-                  <a:txBody>
-                    <a:bodyPr/>
-                    <a:lstStyle/>
-                    <a:p>
-                      <a:pPr algn="l" marL="0" indent="0">
-                        <a:lnSpc>
-                          <a:spcPct val="100000"/>
-                        </a:lnSpc>
-                        <a:spcAft>
-                          <a:spcPts val="0"/>
-                        </a:spcAft>
-                        <a:buNone/>
-                      </a:pPr>
-                      <a:r>
-                        <a:rPr lang="ru-RU" sz="950" b="0" dirty="0">
-                          <a:solidFill>
-                            <a:srgbClr val="000000"/>
-                          </a:solidFill>
-                          <a:latin typeface="Onest Medium" pitchFamily="2" charset="-52"/>
-                        </a:rPr>
-                        <a:t xml:space="preserve">2. Лишние движения</a:t>
-                      </a:r>
-                    </a:p>
-                  </a:txBody>
-                  <a:tcPr marL="45720" marR="45720" marT="27432" marB="27432" anchor="ctr">
-                    <a:lnL w="6350" cap="flat">
-                      <a:solidFill>
-                        <a:srgbClr val="C9C2EE"/>
-                      </a:solidFill>
-                    </a:lnL>
-                    <a:lnR w="6350" cap="flat">
-                      <a:solidFill>
-                        <a:srgbClr val="C9C2EE"/>
-                      </a:solidFill>
-                    </a:lnR>
-                    <a:lnT w="6350" cap="flat">
-                      <a:solidFill>
-                        <a:srgbClr val="C9C2EE"/>
-                      </a:solidFill>
-                    </a:lnT>
-                    <a:lnB w="6350" cap="flat">
-                      <a:solidFill>
-                        <a:srgbClr val="C9C2EE"/>
-                      </a:solidFill>
-                    </a:lnB>
-                    <a:solidFill>
-                      <a:srgbClr val="FFFFFF"/>
-                    </a:solidFill>
-                  </a:tcPr>
-                </a:tc>
-                <a:tc>
-                  <a:txBody>
-                    <a:bodyPr/>
-                    <a:lstStyle/>
-                    <a:p>
-                      <a:pPr algn="l" marL="0" indent="0">
-                        <a:lnSpc>
-                          <a:spcPct val="105000"/>
-                        </a:lnSpc>
-                        <a:spcAft>
-                          <a:spcPts val="0"/>
-                        </a:spcAft>
-                        <a:buNone/>
-                      </a:pPr>
-                      <a:r>
-                        <a:rPr lang="ru-RU" sz="950" b="0" dirty="0">
-                          <a:solidFill>
-                            <a:srgbClr val="595959"/>
-                          </a:solidFill>
-                          <a:latin typeface="Onest Regular" pitchFamily="2" charset="-52"/>
-                        </a:rPr>
-                        <a:t xml:space="preserve">Сотрудник вручную ищет, чья это зона ответственности, и поднимает историю прежних обращений</a:t>
-                      </a:r>
-                    </a:p>
-                  </a:txBody>
-                  <a:tcPr marL="45720" marR="45720" marT="27432" marB="27432" anchor="ctr">
-                    <a:lnL w="6350" cap="flat">
-                      <a:solidFill>
-                        <a:srgbClr val="C9C2EE"/>
-                      </a:solidFill>
-                    </a:lnL>
-                    <a:lnR w="6350" cap="flat">
-                      <a:solidFill>
-                        <a:srgbClr val="C9C2EE"/>
-                      </a:solidFill>
-                    </a:lnR>
-                    <a:lnT w="6350" cap="flat">
-                      <a:solidFill>
-                        <a:srgbClr val="C9C2EE"/>
-                      </a:solidFill>
-                    </a:lnT>
-                    <a:lnB w="6350" cap="flat">
-                      <a:solidFill>
-                        <a:srgbClr val="C9C2EE"/>
-                      </a:solidFill>
-                    </a:lnB>
-                    <a:solidFill>
-                      <a:srgbClr val="FFFFFF"/>
-                    </a:solidFill>
-                  </a:tcPr>
-                </a:tc>
-              </a:tr>
-              <a:tr h="512064">
-                <a:tc>
-                  <a:txBody>
-                    <a:bodyPr/>
-                    <a:lstStyle/>
-                    <a:p>
-                      <a:pPr algn="l" marL="0" indent="0">
-                        <a:lnSpc>
-                          <a:spcPct val="100000"/>
-                        </a:lnSpc>
-                        <a:spcAft>
-                          <a:spcPts val="0"/>
-                        </a:spcAft>
-                        <a:buNone/>
-                      </a:pPr>
-                      <a:r>
-                        <a:rPr lang="ru-RU" sz="950" b="0" dirty="0">
-                          <a:solidFill>
-                            <a:srgbClr val="000000"/>
-                          </a:solidFill>
-                          <a:latin typeface="Onest Medium" pitchFamily="2" charset="-52"/>
-                        </a:rPr>
-                        <a:t xml:space="preserve">3. Ненужная транспортировка</a:t>
-                      </a:r>
-                    </a:p>
-                  </a:txBody>
-                  <a:tcPr marL="45720" marR="45720" marT="27432" marB="27432" anchor="ctr">
-                    <a:lnL w="6350" cap="flat">
-                      <a:solidFill>
-                        <a:srgbClr val="C9C2EE"/>
-                      </a:solidFill>
-                    </a:lnL>
-                    <a:lnR w="6350" cap="flat">
-                      <a:solidFill>
-                        <a:srgbClr val="C9C2EE"/>
-                      </a:solidFill>
-                    </a:lnR>
-                    <a:lnT w="6350" cap="flat">
-                      <a:solidFill>
-                        <a:srgbClr val="C9C2EE"/>
-                      </a:solidFill>
-                    </a:lnT>
-                    <a:lnB w="6350" cap="flat">
-                      <a:solidFill>
-                        <a:srgbClr val="C9C2EE"/>
-                      </a:solidFill>
-                    </a:lnB>
-                    <a:solidFill>
-                      <a:srgbClr val="FFFFFF"/>
-                    </a:solidFill>
-                  </a:tcPr>
-                </a:tc>
-                <a:tc>
-                  <a:txBody>
-                    <a:bodyPr/>
-                    <a:lstStyle/>
-                    <a:p>
-                      <a:pPr algn="l" marL="0" indent="0">
-                        <a:lnSpc>
-                          <a:spcPct val="105000"/>
-                        </a:lnSpc>
-                        <a:spcAft>
-                          <a:spcPts val="0"/>
-                        </a:spcAft>
-                        <a:buNone/>
-                      </a:pPr>
-                      <a:r>
-                        <a:rPr lang="ru-RU" sz="950" b="0" dirty="0">
-                          <a:solidFill>
-                            <a:srgbClr val="595959"/>
-                          </a:solidFill>
-                          <a:latin typeface="Onest Regular" pitchFamily="2" charset="-52"/>
-                        </a:rPr>
-                        <a:t xml:space="preserve">Суть пересказывается по цепочке: гражданин → приёмная → записка или звонок → исполнитель, с потерей деталей</a:t>
-                      </a:r>
-                    </a:p>
-                  </a:txBody>
-                  <a:tcPr marL="45720" marR="45720" marT="27432" marB="27432" anchor="ctr">
-                    <a:lnL w="6350" cap="flat">
-                      <a:solidFill>
-                        <a:srgbClr val="C9C2EE"/>
-                      </a:solidFill>
-                    </a:lnL>
-                    <a:lnR w="6350" cap="flat">
-                      <a:solidFill>
-                        <a:srgbClr val="C9C2EE"/>
-                      </a:solidFill>
-                    </a:lnR>
-                    <a:lnT w="6350" cap="flat">
-                      <a:solidFill>
-                        <a:srgbClr val="C9C2EE"/>
-                      </a:solidFill>
-                    </a:lnT>
-                    <a:lnB w="6350" cap="flat">
-                      <a:solidFill>
-                        <a:srgbClr val="C9C2EE"/>
-                      </a:solidFill>
-                    </a:lnB>
-                    <a:solidFill>
-                      <a:srgbClr val="FFFFFF"/>
-                    </a:solidFill>
-                  </a:tcPr>
-                </a:tc>
-              </a:tr>
-              <a:tr h="512064">
-                <a:tc>
-                  <a:txBody>
-                    <a:bodyPr/>
-                    <a:lstStyle/>
-                    <a:p>
-                      <a:pPr algn="l" marL="0" indent="0">
-                        <a:lnSpc>
-                          <a:spcPct val="100000"/>
-                        </a:lnSpc>
-                        <a:spcAft>
-                          <a:spcPts val="0"/>
-                        </a:spcAft>
-                        <a:buNone/>
-                      </a:pPr>
-                      <a:r>
-                        <a:rPr lang="ru-RU" sz="950" b="0" dirty="0">
-                          <a:solidFill>
-                            <a:srgbClr val="000000"/>
-                          </a:solidFill>
-                          <a:latin typeface="Onest Medium" pitchFamily="2" charset="-52"/>
-                        </a:rPr>
-                        <a:t xml:space="preserve">4. Излишние запасы</a:t>
-                      </a:r>
-                    </a:p>
-                  </a:txBody>
-                  <a:tcPr marL="45720" marR="45720" marT="27432" marB="27432" anchor="ctr">
-                    <a:lnL w="6350" cap="flat">
-                      <a:solidFill>
-                        <a:srgbClr val="C9C2EE"/>
-                      </a:solidFill>
-                    </a:lnL>
-                    <a:lnR w="6350" cap="flat">
-                      <a:solidFill>
-                        <a:srgbClr val="C9C2EE"/>
-                      </a:solidFill>
-                    </a:lnR>
-                    <a:lnT w="6350" cap="flat">
-                      <a:solidFill>
-                        <a:srgbClr val="C9C2EE"/>
-                      </a:solidFill>
-                    </a:lnT>
-                    <a:lnB w="6350" cap="flat">
-                      <a:solidFill>
-                        <a:srgbClr val="C9C2EE"/>
-                      </a:solidFill>
-                    </a:lnB>
-                    <a:solidFill>
-                      <a:srgbClr val="FFFFFF"/>
-                    </a:solidFill>
-                  </a:tcPr>
-                </a:tc>
-                <a:tc>
-                  <a:txBody>
-                    <a:bodyPr/>
-                    <a:lstStyle/>
-                    <a:p>
-                      <a:pPr algn="l" marL="0" indent="0">
-                        <a:lnSpc>
-                          <a:spcPct val="105000"/>
-                        </a:lnSpc>
-                        <a:spcAft>
-                          <a:spcPts val="0"/>
-                        </a:spcAft>
-                        <a:buNone/>
-                      </a:pPr>
-                      <a:r>
-                        <a:rPr lang="ru-RU" sz="950" b="0" dirty="0">
-                          <a:solidFill>
-                            <a:srgbClr val="595959"/>
-                          </a:solidFill>
-                          <a:latin typeface="Onest Regular" pitchFamily="2" charset="-52"/>
-                        </a:rPr>
-                        <a:t xml:space="preserve">Необработанные сообщения копятся в разных каналах и на разных столах, объём очереди никому не виден</a:t>
-                      </a:r>
-                    </a:p>
-                  </a:txBody>
-                  <a:tcPr marL="45720" marR="45720" marT="27432" marB="27432" anchor="ctr">
-                    <a:lnL w="6350" cap="flat">
-                      <a:solidFill>
-                        <a:srgbClr val="C9C2EE"/>
-                      </a:solidFill>
-                    </a:lnL>
-                    <a:lnR w="6350" cap="flat">
-                      <a:solidFill>
-                        <a:srgbClr val="C9C2EE"/>
-                      </a:solidFill>
-                    </a:lnR>
-                    <a:lnT w="6350" cap="flat">
-                      <a:solidFill>
-                        <a:srgbClr val="C9C2EE"/>
-                      </a:solidFill>
-                    </a:lnT>
-                    <a:lnB w="6350" cap="flat">
-                      <a:solidFill>
-                        <a:srgbClr val="C9C2EE"/>
-                      </a:solidFill>
-                    </a:lnB>
-                    <a:solidFill>
-                      <a:srgbClr val="FFFFFF"/>
-                    </a:solidFill>
-                  </a:tcPr>
-                </a:tc>
-              </a:tr>
-              <a:tr h="512064">
-                <a:tc>
-                  <a:txBody>
-                    <a:bodyPr/>
-                    <a:lstStyle/>
-                    <a:p>
-                      <a:pPr algn="l" marL="0" indent="0">
-                        <a:lnSpc>
-                          <a:spcPct val="100000"/>
-                        </a:lnSpc>
-                        <a:spcAft>
-                          <a:spcPts val="0"/>
-                        </a:spcAft>
-                        <a:buNone/>
-                      </a:pPr>
-                      <a:r>
-                        <a:rPr lang="ru-RU" sz="950" b="0" dirty="0">
-                          <a:solidFill>
-                            <a:srgbClr val="000000"/>
-                          </a:solidFill>
-                          <a:latin typeface="Onest Medium" pitchFamily="2" charset="-52"/>
-                        </a:rPr>
-                        <a:t xml:space="preserve">5. Избыточная обработка</a:t>
-                      </a:r>
-                    </a:p>
-                  </a:txBody>
-                  <a:tcPr marL="45720" marR="45720" marT="27432" marB="27432" anchor="ctr">
-                    <a:lnL w="6350" cap="flat">
-                      <a:solidFill>
-                        <a:srgbClr val="C9C2EE"/>
-                      </a:solidFill>
-                    </a:lnL>
-                    <a:lnR w="6350" cap="flat">
-                      <a:solidFill>
-                        <a:srgbClr val="C9C2EE"/>
-                      </a:solidFill>
-                    </a:lnR>
-                    <a:lnT w="6350" cap="flat">
-                      <a:solidFill>
-                        <a:srgbClr val="C9C2EE"/>
-                      </a:solidFill>
-                    </a:lnT>
-                    <a:lnB w="6350" cap="flat">
-                      <a:solidFill>
-                        <a:srgbClr val="C9C2EE"/>
-                      </a:solidFill>
-                    </a:lnB>
-                    <a:solidFill>
-                      <a:srgbClr val="FFFFFF"/>
-                    </a:solidFill>
-                  </a:tcPr>
-                </a:tc>
-                <a:tc>
-                  <a:txBody>
-                    <a:bodyPr/>
-                    <a:lstStyle/>
-                    <a:p>
-                      <a:pPr algn="l" marL="0" indent="0">
-                        <a:lnSpc>
-                          <a:spcPct val="105000"/>
-                        </a:lnSpc>
-                        <a:spcAft>
-                          <a:spcPts val="0"/>
-                        </a:spcAft>
-                        <a:buNone/>
-                      </a:pPr>
-                      <a:r>
-                        <a:rPr lang="ru-RU" sz="950" b="0" dirty="0">
-                          <a:solidFill>
-                            <a:srgbClr val="595959"/>
-                          </a:solidFill>
-                          <a:latin typeface="Onest Regular" pitchFamily="2" charset="-52"/>
-                        </a:rPr>
-                        <a:t xml:space="preserve">Одно сообщение переписывается трижды: в журнал, исполнителю, в отчётность</a:t>
-                      </a:r>
-                    </a:p>
-                  </a:txBody>
-                  <a:tcPr marL="45720" marR="45720" marT="27432" marB="27432" anchor="ctr">
-                    <a:lnL w="6350" cap="flat">
-                      <a:solidFill>
-                        <a:srgbClr val="C9C2EE"/>
-                      </a:solidFill>
-                    </a:lnL>
-                    <a:lnR w="6350" cap="flat">
-                      <a:solidFill>
-                        <a:srgbClr val="C9C2EE"/>
-                      </a:solidFill>
-                    </a:lnR>
-                    <a:lnT w="6350" cap="flat">
-                      <a:solidFill>
-                        <a:srgbClr val="C9C2EE"/>
-                      </a:solidFill>
-                    </a:lnT>
-                    <a:lnB w="6350" cap="flat">
-                      <a:solidFill>
-                        <a:srgbClr val="C9C2EE"/>
-                      </a:solidFill>
-                    </a:lnB>
-                    <a:solidFill>
-                      <a:srgbClr val="FFFFFF"/>
-                    </a:solidFill>
-                  </a:tcPr>
-                </a:tc>
-              </a:tr>
-              <a:tr h="512064">
-                <a:tc>
-                  <a:txBody>
-                    <a:bodyPr/>
-                    <a:lstStyle/>
-                    <a:p>
-                      <a:pPr algn="l" marL="0" indent="0">
-                        <a:lnSpc>
-                          <a:spcPct val="100000"/>
-                        </a:lnSpc>
-                        <a:spcAft>
-                          <a:spcPts val="0"/>
-                        </a:spcAft>
-                        <a:buNone/>
-                      </a:pPr>
-                      <a:r>
-                        <a:rPr lang="ru-RU" sz="950" b="0" dirty="0">
-                          <a:solidFill>
-                            <a:srgbClr val="000000"/>
-                          </a:solidFill>
-                          <a:latin typeface="Onest Medium" pitchFamily="2" charset="-52"/>
-                        </a:rPr>
-                        <a:t xml:space="preserve">6. Ожидание</a:t>
-                      </a:r>
-                    </a:p>
-                  </a:txBody>
-                  <a:tcPr marL="45720" marR="45720" marT="27432" marB="27432" anchor="ctr">
-                    <a:lnL w="6350" cap="flat">
-                      <a:solidFill>
-                        <a:srgbClr val="C9C2EE"/>
-                      </a:solidFill>
-                    </a:lnL>
-                    <a:lnR w="6350" cap="flat">
-                      <a:solidFill>
-                        <a:srgbClr val="C9C2EE"/>
-                      </a:solidFill>
-                    </a:lnR>
-                    <a:lnT w="6350" cap="flat">
-                      <a:solidFill>
-                        <a:srgbClr val="C9C2EE"/>
-                      </a:solidFill>
-                    </a:lnT>
-                    <a:lnB w="6350" cap="flat">
-                      <a:solidFill>
-                        <a:srgbClr val="C9C2EE"/>
-                      </a:solidFill>
-                    </a:lnB>
-                    <a:solidFill>
-                      <a:srgbClr val="FFFFFF"/>
-                    </a:solidFill>
-                  </a:tcPr>
-                </a:tc>
-                <a:tc>
-                  <a:txBody>
-                    <a:bodyPr/>
-                    <a:lstStyle/>
-                    <a:p>
-                      <a:pPr algn="l" marL="0" indent="0">
-                        <a:lnSpc>
-                          <a:spcPct val="105000"/>
-                        </a:lnSpc>
-                        <a:spcAft>
-                          <a:spcPts val="0"/>
-                        </a:spcAft>
-                        <a:buNone/>
-                      </a:pPr>
-                      <a:r>
-                        <a:rPr lang="ru-RU" sz="950" b="0" dirty="0">
-                          <a:solidFill>
-                            <a:srgbClr val="595959"/>
-                          </a:solidFill>
-                          <a:latin typeface="Onest Regular" pitchFamily="2" charset="-52"/>
-                        </a:rPr>
-                        <a:t xml:space="preserve">Сообщение ждёт ручной регистрации и передачи; исполнение идёт без установленного срока</a:t>
-                      </a:r>
-                    </a:p>
-                  </a:txBody>
-                  <a:tcPr marL="45720" marR="45720" marT="27432" marB="27432" anchor="ctr">
-                    <a:lnL w="6350" cap="flat">
-                      <a:solidFill>
-                        <a:srgbClr val="C9C2EE"/>
-                      </a:solidFill>
-                    </a:lnL>
-                    <a:lnR w="6350" cap="flat">
-                      <a:solidFill>
-                        <a:srgbClr val="C9C2EE"/>
-                      </a:solidFill>
-                    </a:lnR>
-                    <a:lnT w="6350" cap="flat">
-                      <a:solidFill>
-                        <a:srgbClr val="C9C2EE"/>
-                      </a:solidFill>
-                    </a:lnT>
-                    <a:lnB w="6350" cap="flat">
-                      <a:solidFill>
-                        <a:srgbClr val="C9C2EE"/>
-                      </a:solidFill>
-                    </a:lnB>
-                    <a:solidFill>
-                      <a:srgbClr val="FFFFFF"/>
-                    </a:solidFill>
-                  </a:tcPr>
-                </a:tc>
-              </a:tr>
-              <a:tr h="512064">
-                <a:tc>
-                  <a:txBody>
-                    <a:bodyPr/>
-                    <a:lstStyle/>
-                    <a:p>
-                      <a:pPr algn="l" marL="0" indent="0">
-                        <a:lnSpc>
-                          <a:spcPct val="100000"/>
-                        </a:lnSpc>
-                        <a:spcAft>
-                          <a:spcPts val="0"/>
-                        </a:spcAft>
-                        <a:buNone/>
-                      </a:pPr>
-                      <a:r>
-                        <a:rPr lang="ru-RU" sz="950" b="0" dirty="0">
-                          <a:solidFill>
-                            <a:srgbClr val="000000"/>
-                          </a:solidFill>
-                          <a:latin typeface="Onest Medium" pitchFamily="2" charset="-52"/>
-                        </a:rPr>
-                        <a:t xml:space="preserve">7. Переделка и брак</a:t>
-                      </a:r>
-                    </a:p>
-                  </a:txBody>
-                  <a:tcPr marL="45720" marR="45720" marT="27432" marB="27432" anchor="ctr">
-                    <a:lnL w="6350" cap="flat">
-                      <a:solidFill>
-                        <a:srgbClr val="C9C2EE"/>
-                      </a:solidFill>
-                    </a:lnL>
-                    <a:lnR w="6350" cap="flat">
-                      <a:solidFill>
-                        <a:srgbClr val="C9C2EE"/>
-                      </a:solidFill>
-                    </a:lnR>
-                    <a:lnT w="6350" cap="flat">
-                      <a:solidFill>
-                        <a:srgbClr val="C9C2EE"/>
-                      </a:solidFill>
-                    </a:lnT>
-                    <a:lnB w="6350" cap="flat">
-                      <a:solidFill>
-                        <a:srgbClr val="C9C2EE"/>
-                      </a:solidFill>
-                    </a:lnB>
-                    <a:solidFill>
-                      <a:srgbClr val="FFFFFF"/>
-                    </a:solidFill>
-                  </a:tcPr>
-                </a:tc>
-                <a:tc>
-                  <a:txBody>
-                    <a:bodyPr/>
-                    <a:lstStyle/>
-                    <a:p>
-                      <a:pPr algn="l" marL="0" indent="0">
-                        <a:lnSpc>
-                          <a:spcPct val="105000"/>
-                        </a:lnSpc>
-                        <a:spcAft>
-                          <a:spcPts val="0"/>
-                        </a:spcAft>
-                        <a:buNone/>
-                      </a:pPr>
-                      <a:r>
-                        <a:rPr lang="ru-RU" sz="950" b="0" dirty="0">
-                          <a:solidFill>
-                            <a:srgbClr val="595959"/>
-                          </a:solidFill>
-                          <a:latin typeface="Onest Regular" pitchFamily="2" charset="-52"/>
-                        </a:rPr>
-                        <a:t xml:space="preserve">Формальное закрытие без результата — гражданин обращается повторно</a:t>
-                      </a:r>
-                    </a:p>
-                  </a:txBody>
-                  <a:tcPr marL="45720" marR="45720" marT="27432" marB="27432" anchor="ctr">
-                    <a:lnL w="6350" cap="flat">
-                      <a:solidFill>
-                        <a:srgbClr val="C9C2EE"/>
-                      </a:solidFill>
-                    </a:lnL>
-                    <a:lnR w="6350" cap="flat">
-                      <a:solidFill>
-                        <a:srgbClr val="C9C2EE"/>
-                      </a:solidFill>
-                    </a:lnR>
-                    <a:lnT w="6350" cap="flat">
-                      <a:solidFill>
-                        <a:srgbClr val="C9C2EE"/>
-                      </a:solidFill>
-                    </a:lnT>
-                    <a:lnB w="6350" cap="flat">
-                      <a:solidFill>
-                        <a:srgbClr val="C9C2EE"/>
-                      </a:solidFill>
-                    </a:lnB>
-                    <a:solidFill>
-                      <a:srgbClr val="FFFFFF"/>
-                    </a:solidFill>
-                  </a:tcPr>
-                </a:tc>
-              </a:tr>
-              <a:tr h="512064">
-                <a:tc>
-                  <a:txBody>
-                    <a:bodyPr/>
-                    <a:lstStyle/>
-                    <a:p>
-                      <a:pPr algn="l" marL="0" indent="0">
-                        <a:lnSpc>
-                          <a:spcPct val="100000"/>
-                        </a:lnSpc>
-                        <a:spcAft>
-                          <a:spcPts val="0"/>
-                        </a:spcAft>
-                        <a:buNone/>
-                      </a:pPr>
-                      <a:r>
-                        <a:rPr lang="ru-RU" sz="950" b="0" dirty="0">
-                          <a:solidFill>
-                            <a:srgbClr val="000000"/>
-                          </a:solidFill>
-                          <a:latin typeface="Onest Medium" pitchFamily="2" charset="-52"/>
-                        </a:rPr>
-                        <a:t xml:space="preserve">8. Неиспользование человеческого потенциала</a:t>
-                      </a:r>
-                    </a:p>
-                  </a:txBody>
-                  <a:tcPr marL="45720" marR="45720" marT="27432" marB="27432" anchor="ctr">
-                    <a:lnL w="6350" cap="flat">
-                      <a:solidFill>
-                        <a:srgbClr val="C9C2EE"/>
-                      </a:solidFill>
-                    </a:lnL>
-                    <a:lnR w="6350" cap="flat">
-                      <a:solidFill>
-                        <a:srgbClr val="C9C2EE"/>
-                      </a:solidFill>
-                    </a:lnR>
-                    <a:lnT w="6350" cap="flat">
-                      <a:solidFill>
-                        <a:srgbClr val="C9C2EE"/>
-                      </a:solidFill>
-                    </a:lnT>
-                    <a:lnB w="6350" cap="flat">
-                      <a:solidFill>
-                        <a:srgbClr val="C9C2EE"/>
-                      </a:solidFill>
-                    </a:lnB>
-                    <a:solidFill>
-                      <a:srgbClr val="FFFFFF"/>
-                    </a:solidFill>
-                  </a:tcPr>
-                </a:tc>
-                <a:tc>
-                  <a:txBody>
-                    <a:bodyPr/>
-                    <a:lstStyle/>
-                    <a:p>
-                      <a:pPr algn="l" marL="0" indent="0">
-                        <a:lnSpc>
-                          <a:spcPct val="105000"/>
-                        </a:lnSpc>
-                        <a:spcAft>
-                          <a:spcPts val="0"/>
-                        </a:spcAft>
-                        <a:buNone/>
-                      </a:pPr>
-                      <a:r>
-                        <a:rPr lang="ru-RU" sz="950" b="0" dirty="0">
-                          <a:solidFill>
-                            <a:srgbClr val="595959"/>
-                          </a:solidFill>
-                          <a:latin typeface="Onest Regular" pitchFamily="2" charset="-52"/>
-                        </a:rPr>
-                        <a:t xml:space="preserve">Квалифицированный сотрудник занят механической регистрацией и диспетчеризацией</a:t>
-                      </a:r>
-                    </a:p>
-                  </a:txBody>
-                  <a:tcPr marL="45720" marR="45720" marT="27432" marB="27432" anchor="ctr">
-                    <a:lnL w="6350" cap="flat">
-                      <a:solidFill>
-                        <a:srgbClr val="C9C2EE"/>
-                      </a:solidFill>
-                    </a:lnL>
-                    <a:lnR w="6350" cap="flat">
-                      <a:solidFill>
-                        <a:srgbClr val="C9C2EE"/>
-                      </a:solidFill>
-                    </a:lnR>
-                    <a:lnT w="6350" cap="flat">
-                      <a:solidFill>
-                        <a:srgbClr val="C9C2EE"/>
-                      </a:solidFill>
-                    </a:lnT>
-                    <a:lnB w="6350" cap="flat">
-                      <a:solidFill>
-                        <a:srgbClr val="C9C2EE"/>
-                      </a:solidFill>
-                    </a:lnB>
-                    <a:solidFill>
-                      <a:srgbClr val="FFFFFF"/>
-                    </a:solidFill>
-                  </a:tcPr>
-                </a:tc>
-              </a:tr>
-            </a:tbl>
-          </a:graphicData>
-        </a:graphic>
-      </p:graphicFrame>
-      <p:sp>
-        <p:nvSpPr>
-          <p:cNvPr id="909" name="Поле 909"/>
-          <p:cNvSpPr txBox="1"/>
-          <p:nvPr/>
-        </p:nvSpPr>
-        <p:spPr>
-          <a:xfrm>
-            <a:off x="502920" y="6355080"/>
-            <a:ext cx="11155680" cy="411480"/>
-          </a:xfrm>
-          <a:prstGeom prst="rect">
-            <a:avLst/>
-          </a:prstGeom>
-          <a:noFill/>
-          <a:ln w="0">
-            <a:noFill/>
-          </a:ln>
-        </p:spPr>
-        <p:txBody>
-          <a:bodyPr anchor="t" lIns="91440" rIns="91440" tIns="68580" bIns="68580" wrap="square">
-            <a:noAutofit/>
-          </a:bodyPr>
-          <a:lstStyle/>
-          <a:p>
-            <a:pPr algn="l" marL="0" indent="0">
-              <a:lnSpc>
-                <a:spcPct val="100000"/>
-              </a:lnSpc>
-              <a:spcAft>
-                <a:spcPts val="0"/>
-              </a:spcAft>
-              <a:buNone/>
-            </a:pPr>
-            <a:r>
-              <a:rPr lang="ru-RU" sz="1000" b="0" dirty="0">
-                <a:solidFill>
-                  <a:srgbClr val="6C5CE0"/>
-                </a:solidFill>
-                <a:latin typeface="Onest Medium" pitchFamily="2" charset="-52"/>
-              </a:rPr>
-              <a:t xml:space="preserve">Корневые причины — метод «5 почему» и диаграмма Исикавы — готовятся к 31.08.2026</a:t>
-            </a:r>
-          </a:p>
-        </p:txBody>
-      </p:sp>
+      </p:pic>
     </p:spTree>
   </p:cSld>
   <p:clrMapOvr>
@@ -16430,7 +15402,7 @@
       </p:grpSp>
       <p:pic>
         <p:nvPicPr>
-          <p:cNvPr id="910" name="Рисунок 910"/>
+          <p:cNvPr id="908" name="Рисунок 908"/>
           <p:cNvPicPr>
             <a:picLocks noChangeAspect="1"/>
           </p:cNvPicPr>
@@ -16733,7 +15705,7 @@
       </p:grpSp>
       <p:graphicFrame>
         <p:nvGraphicFramePr>
-          <p:cNvPr id="911" name="Таблица 911"/>
+          <p:cNvPr id="909" name="Таблица 909"/>
           <p:cNvGraphicFramePr>
             <a:graphicFrameLocks noGrp="1"/>
           </p:cNvGraphicFramePr>
@@ -18342,7 +17314,7 @@
       </p:graphicFrame>
       <p:sp>
         <p:nvSpPr>
-          <p:cNvPr id="912" name="Поле 912"/>
+          <p:cNvPr id="910" name="Поле 910"/>
           <p:cNvSpPr txBox="1"/>
           <p:nvPr/>
         </p:nvSpPr>
@@ -18667,7 +17639,7 @@
       </p:grpSp>
       <p:graphicFrame>
         <p:nvGraphicFramePr>
-          <p:cNvPr id="913" name="Таблица 913"/>
+          <p:cNvPr id="911" name="Таблица 911"/>
           <p:cNvGraphicFramePr>
             <a:graphicFrameLocks noGrp="1"/>
           </p:cNvGraphicFramePr>
@@ -19901,7 +18873,7 @@
       </p:grpSp>
       <p:graphicFrame>
         <p:nvGraphicFramePr>
-          <p:cNvPr id="914" name="Таблица 914"/>
+          <p:cNvPr id="912" name="Таблица 912"/>
           <p:cNvGraphicFramePr>
             <a:graphicFrameLocks noGrp="1"/>
           </p:cNvGraphicFramePr>
@@ -21984,7 +20956,7 @@
       </p:graphicFrame>
       <p:sp>
         <p:nvSpPr>
-          <p:cNvPr id="915" name="Поле 915"/>
+          <p:cNvPr id="913" name="Поле 913"/>
           <p:cNvSpPr txBox="1"/>
           <p:nvPr/>
         </p:nvSpPr>
@@ -22329,7 +21301,7 @@
       </p:grpSp>
       <p:pic>
         <p:nvPicPr>
-          <p:cNvPr id="916" name="Рисунок 916"/>
+          <p:cNvPr id="914" name="Рисунок 914"/>
           <p:cNvPicPr>
             <a:picLocks noChangeAspect="1"/>
           </p:cNvPicPr>

--- a/файлы/prezentaciya-chernovik.pptx
+++ b/файлы/prezentaciya-chernovik.pptx
@@ -3330,7 +3330,7 @@
                 <a:latin typeface="Calibri" panose="020F0502020204030204" pitchFamily="34" charset="0"/>
                 <a:ea typeface="Calibri" panose="020F0502020204030204" pitchFamily="34" charset="0"/>
               </a:rPr>
-              <a:t>Оптимизация процесса приёма, маршрутизации и контроля исполнения сообщений граждан о проблемах благоустройства и жизнеобеспечения на территории Благовещенского муниципального округа</a:t>
+              <a:t xml:space="preserve">Оптимизация процесса содержания территории Благовещенского муниципального округа за счёт перехода от реагирования на обращения к раннему выявлению проблем, их оперативному устранению и контролю результата</a:t>
             </a:r>
             <a:endParaRPr lang="ru-RU" sz="2400" dirty="0">
               <a:latin typeface="Onest Black" pitchFamily="2" charset="-52"/>
@@ -3636,7 +3636,7 @@
                 </a:solidFill>
                 <a:latin typeface="Onest Medium" pitchFamily="2" charset="-52"/>
               </a:rPr>
-              <a:t xml:space="preserve">Администрация Благовещенского муниципального округа: приём сообщений, четыре направления, подразделения-исполнители, Глава округа</a:t>
+              <a:t xml:space="preserve">Администрация Благовещенского муниципального округа: наблюдатели, приём сообщений, четыре направления, подразделения-исполнители, Глава округа. Охват — 27 населённых пунктов</a:t>
             </a:r>
           </a:p>
         </p:txBody>
@@ -4068,8 +4068,8 @@
           <p:nvPr/>
         </p:nvGraphicFramePr>
         <p:xfrm>
-          <a:off x="411480" y="1444752"/>
-          <a:ext cx="11338560" cy="4526280"/>
+          <a:off x="411480" y="1389888"/>
+          <a:ext cx="11338560" cy="4727448"/>
         </p:xfrm>
         <a:graphic>
           <a:graphicData uri="http://schemas.openxmlformats.org/drawingml/2006/table">
@@ -4080,7 +4080,7 @@
                 <a:gridCol w="2377440"/>
                 <a:gridCol w="6720840"/>
               </a:tblGrid>
-              <a:tr h="502920">
+              <a:tr h="429768">
                 <a:tc>
                   <a:txBody>
                     <a:bodyPr/>
@@ -4235,7 +4235,7 @@
                   </a:tcPr>
                 </a:tc>
               </a:tr>
-              <a:tr h="502920">
+              <a:tr h="429768">
                 <a:tc>
                   <a:txBody>
                     <a:bodyPr/>
@@ -4257,7 +4257,7 @@
                           </a:solidFill>
                           <a:latin typeface="Onest Medium" pitchFamily="2" charset="-52"/>
                         </a:rPr>
-                        <a:t xml:space="preserve">Каналов приёма</a:t>
+                        <a:t xml:space="preserve">Выявление проблемы</a:t>
                       </a:r>
                     </a:p>
                   </a:txBody>
@@ -4308,7 +4308,7 @@
                           </a:solidFill>
                           <a:latin typeface="Onest Black" pitchFamily="2" charset="-52"/>
                         </a:rPr>
-                        <a:t xml:space="preserve">четыре разрозненных</a:t>
+                        <a:t xml:space="preserve">только по жалобе</a:t>
                       </a:r>
                     </a:p>
                   </a:txBody>
@@ -4359,7 +4359,7 @@
                           </a:solidFill>
                           <a:latin typeface="Onest Regular" pitchFamily="2" charset="-52"/>
                         </a:rPr>
-                        <a:t xml:space="preserve">личный приём, письменное заявление, социальные сети, платформа обратной связи</a:t>
+                        <a:t xml:space="preserve">планового обхода территории нет; в сёлах округа проблема существует до месяца, прежде чем житель решится написать обращение</a:t>
                       </a:r>
                     </a:p>
                   </a:txBody>
@@ -4390,7 +4390,7 @@
                   </a:tcPr>
                 </a:tc>
               </a:tr>
-              <a:tr h="502920">
+              <a:tr h="429768">
                 <a:tc>
                   <a:txBody>
                     <a:bodyPr/>
@@ -4412,7 +4412,7 @@
                           </a:solidFill>
                           <a:latin typeface="Onest Medium" pitchFamily="2" charset="-52"/>
                         </a:rPr>
-                        <a:t xml:space="preserve">Регистрация</a:t>
+                        <a:t xml:space="preserve">Кто сообщает</a:t>
                       </a:r>
                     </a:p>
                   </a:txBody>
@@ -4463,7 +4463,7 @@
                           </a:solidFill>
                           <a:latin typeface="Onest Black" pitchFamily="2" charset="-52"/>
                         </a:rPr>
-                        <a:t xml:space="preserve">вручную</a:t>
+                        <a:t xml:space="preserve">только заявитель</a:t>
                       </a:r>
                     </a:p>
                   </a:txBody>
@@ -4514,7 +4514,7 @@
                           </a:solidFill>
                           <a:latin typeface="Onest Regular" pitchFamily="2" charset="-52"/>
                         </a:rPr>
-                        <a:t xml:space="preserve">журнал входящих и карточка в системе документооборота, суть и адрес записываются в свободной форме</a:t>
+                        <a:t xml:space="preserve">старосты сёл, депутаты и общественники видят проблемы каждый день, но канала, чтобы передать их в работу, у них нет</a:t>
                       </a:r>
                     </a:p>
                   </a:txBody>
@@ -4545,7 +4545,7 @@
                   </a:tcPr>
                 </a:tc>
               </a:tr>
-              <a:tr h="502920">
+              <a:tr h="429768">
                 <a:tc>
                   <a:txBody>
                     <a:bodyPr/>
@@ -4567,7 +4567,7 @@
                           </a:solidFill>
                           <a:latin typeface="Onest Medium" pitchFamily="2" charset="-52"/>
                         </a:rPr>
-                        <a:t xml:space="preserve">Маршрут</a:t>
+                        <a:t xml:space="preserve">Каналов приёма</a:t>
                       </a:r>
                     </a:p>
                   </a:txBody>
@@ -4618,7 +4618,7 @@
                           </a:solidFill>
                           <a:latin typeface="Onest Black" pitchFamily="2" charset="-52"/>
                         </a:rPr>
-                        <a:t xml:space="preserve">через первое лицо</a:t>
+                        <a:t xml:space="preserve">четыре разрозненных</a:t>
                       </a:r>
                     </a:p>
                   </a:txBody>
@@ -4669,7 +4669,7 @@
                           </a:solidFill>
                           <a:latin typeface="Onest Regular" pitchFamily="2" charset="-52"/>
                         </a:rPr>
-                        <a:t xml:space="preserve">ответственного заместителя определяет лично Глава округа — и для сложного вопроса, и для заявки о яме</a:t>
+                        <a:t xml:space="preserve">личный приём, письменное заявление, социальные сети, платформа обратной связи</a:t>
                       </a:r>
                     </a:p>
                   </a:txBody>
@@ -4700,7 +4700,7 @@
                   </a:tcPr>
                 </a:tc>
               </a:tr>
-              <a:tr h="502920">
+              <a:tr h="429768">
                 <a:tc>
                   <a:txBody>
                     <a:bodyPr/>
@@ -4722,7 +4722,7 @@
                           </a:solidFill>
                           <a:latin typeface="Onest Medium" pitchFamily="2" charset="-52"/>
                         </a:rPr>
-                        <a:t xml:space="preserve">Срок</a:t>
+                        <a:t xml:space="preserve">Регистрация</a:t>
                       </a:r>
                     </a:p>
                   </a:txBody>
@@ -4773,7 +4773,7 @@
                           </a:solidFill>
                           <a:latin typeface="Onest Black" pitchFamily="2" charset="-52"/>
                         </a:rPr>
-                        <a:t xml:space="preserve">30 календарных дней</a:t>
+                        <a:t xml:space="preserve">вручную</a:t>
                       </a:r>
                     </a:p>
                   </a:txBody>
@@ -4824,7 +4824,7 @@
                           </a:solidFill>
                           <a:latin typeface="Onest Regular" pitchFamily="2" charset="-52"/>
                         </a:rPr>
-                        <a:t xml:space="preserve">один на любое обращение; о ходе работы гражданин не информируется</a:t>
+                        <a:t xml:space="preserve">журнал входящих и карточка в системе документооборота, суть и адрес записываются в свободной форме</a:t>
                       </a:r>
                     </a:p>
                   </a:txBody>
@@ -4855,7 +4855,7 @@
                   </a:tcPr>
                 </a:tc>
               </a:tr>
-              <a:tr h="502920">
+              <a:tr h="429768">
                 <a:tc>
                   <a:txBody>
                     <a:bodyPr/>
@@ -4877,7 +4877,7 @@
                           </a:solidFill>
                           <a:latin typeface="Onest Medium" pitchFamily="2" charset="-52"/>
                         </a:rPr>
-                        <a:t xml:space="preserve">Ответ</a:t>
+                        <a:t xml:space="preserve">Маршрут</a:t>
                       </a:r>
                     </a:p>
                   </a:txBody>
@@ -4928,7 +4928,7 @@
                           </a:solidFill>
                           <a:latin typeface="Onest Black" pitchFamily="2" charset="-52"/>
                         </a:rPr>
-                        <a:t xml:space="preserve">почтой</a:t>
+                        <a:t xml:space="preserve">через первое лицо</a:t>
                       </a:r>
                     </a:p>
                   </a:txBody>
@@ -4979,7 +4979,7 @@
                           </a:solidFill>
                           <a:latin typeface="Onest Regular" pitchFamily="2" charset="-52"/>
                         </a:rPr>
-                        <a:t xml:space="preserve">до недели сверх нормативного срока, в зависимости от населённого пункта</a:t>
+                        <a:t xml:space="preserve">ответственного заместителя определяет лично Глава округа — и для сложного вопроса, и для заявки о яме</a:t>
                       </a:r>
                     </a:p>
                   </a:txBody>
@@ -5010,7 +5010,7 @@
                   </a:tcPr>
                 </a:tc>
               </a:tr>
-              <a:tr h="502920">
+              <a:tr h="429768">
                 <a:tc>
                   <a:txBody>
                     <a:bodyPr/>
@@ -5032,7 +5032,7 @@
                           </a:solidFill>
                           <a:latin typeface="Onest Medium" pitchFamily="2" charset="-52"/>
                         </a:rPr>
-                        <a:t xml:space="preserve">Подтверждение результата</a:t>
+                        <a:t xml:space="preserve">Срок</a:t>
                       </a:r>
                     </a:p>
                   </a:txBody>
@@ -5083,7 +5083,7 @@
                           </a:solidFill>
                           <a:latin typeface="Onest Black" pitchFamily="2" charset="-52"/>
                         </a:rPr>
-                        <a:t xml:space="preserve">нет</a:t>
+                        <a:t xml:space="preserve">30 календарных дней</a:t>
                       </a:r>
                     </a:p>
                   </a:txBody>
@@ -5134,7 +5134,7 @@
                           </a:solidFill>
                           <a:latin typeface="Onest Regular" pitchFamily="2" charset="-52"/>
                         </a:rPr>
-                        <a:t xml:space="preserve">фотографии или акта об устранении нет ни у исполнителя, ни у руководителя</a:t>
+                        <a:t xml:space="preserve">один на любое обращение; о ходе работы житель не информируется</a:t>
                       </a:r>
                     </a:p>
                   </a:txBody>
@@ -5165,7 +5165,7 @@
                   </a:tcPr>
                 </a:tc>
               </a:tr>
-              <a:tr h="502920">
+              <a:tr h="429768">
                 <a:tc>
                   <a:txBody>
                     <a:bodyPr/>
@@ -5187,7 +5187,7 @@
                           </a:solidFill>
                           <a:latin typeface="Onest Medium" pitchFamily="2" charset="-52"/>
                         </a:rPr>
-                        <a:t xml:space="preserve">Повторные обращения</a:t>
+                        <a:t xml:space="preserve">Ответ</a:t>
                       </a:r>
                     </a:p>
                   </a:txBody>
@@ -5238,7 +5238,7 @@
                           </a:solidFill>
                           <a:latin typeface="Onest Black" pitchFamily="2" charset="-52"/>
                         </a:rPr>
-                        <a:t xml:space="preserve">не выявляются</a:t>
+                        <a:t xml:space="preserve">почтой</a:t>
                       </a:r>
                     </a:p>
                   </a:txBody>
@@ -5289,7 +5289,7 @@
                           </a:solidFill>
                           <a:latin typeface="Onest Regular" pitchFamily="2" charset="-52"/>
                         </a:rPr>
-                        <a:t xml:space="preserve">работа по одному объекту заводится и выполняется несколько раз</a:t>
+                        <a:t xml:space="preserve">до недели сверх нормативного срока, в зависимости от населённого пункта</a:t>
                       </a:r>
                     </a:p>
                   </a:txBody>
@@ -5320,7 +5320,317 @@
                   </a:tcPr>
                 </a:tc>
               </a:tr>
-              <a:tr h="502920">
+              <a:tr h="429768">
+                <a:tc>
+                  <a:txBody>
+                    <a:bodyPr/>
+                    <a:lstStyle/>
+                    <a:p>
+                      <a:pPr algn="l" marL="0" indent="0">
+                        <a:lnSpc>
+                          <a:spcPct val="105000"/>
+                        </a:lnSpc>
+                        <a:spcAft>
+                          <a:spcPts val="0"/>
+                        </a:spcAft>
+                        <a:buNone/>
+                      </a:pPr>
+                      <a:r>
+                        <a:rPr lang="ru-RU" sz="900" b="0" dirty="0">
+                          <a:solidFill>
+                            <a:srgbClr val="000000"/>
+                          </a:solidFill>
+                          <a:latin typeface="Onest Medium" pitchFamily="2" charset="-52"/>
+                        </a:rPr>
+                        <a:t xml:space="preserve">Подтверждение результата</a:t>
+                      </a:r>
+                    </a:p>
+                  </a:txBody>
+                  <a:tcPr marL="45720" marR="45720" marT="27432" marB="27432" anchor="ctr">
+                    <a:lnL w="6350" cap="flat">
+                      <a:solidFill>
+                        <a:srgbClr val="C9C2EE"/>
+                      </a:solidFill>
+                    </a:lnL>
+                    <a:lnR w="6350" cap="flat">
+                      <a:solidFill>
+                        <a:srgbClr val="C9C2EE"/>
+                      </a:solidFill>
+                    </a:lnR>
+                    <a:lnT w="6350" cap="flat">
+                      <a:solidFill>
+                        <a:srgbClr val="C9C2EE"/>
+                      </a:solidFill>
+                    </a:lnT>
+                    <a:lnB w="6350" cap="flat">
+                      <a:solidFill>
+                        <a:srgbClr val="C9C2EE"/>
+                      </a:solidFill>
+                    </a:lnB>
+                    <a:solidFill>
+                      <a:srgbClr val="FFFFFF"/>
+                    </a:solidFill>
+                  </a:tcPr>
+                </a:tc>
+                <a:tc>
+                  <a:txBody>
+                    <a:bodyPr/>
+                    <a:lstStyle/>
+                    <a:p>
+                      <a:pPr algn="l" marL="0" indent="0">
+                        <a:lnSpc>
+                          <a:spcPct val="105000"/>
+                        </a:lnSpc>
+                        <a:spcAft>
+                          <a:spcPts val="0"/>
+                        </a:spcAft>
+                        <a:buNone/>
+                      </a:pPr>
+                      <a:r>
+                        <a:rPr lang="ru-RU" sz="900" b="1" dirty="0">
+                          <a:solidFill>
+                            <a:srgbClr val="6C5CE0"/>
+                          </a:solidFill>
+                          <a:latin typeface="Onest Black" pitchFamily="2" charset="-52"/>
+                        </a:rPr>
+                        <a:t xml:space="preserve">нет</a:t>
+                      </a:r>
+                    </a:p>
+                  </a:txBody>
+                  <a:tcPr marL="45720" marR="45720" marT="27432" marB="27432" anchor="ctr">
+                    <a:lnL w="6350" cap="flat">
+                      <a:solidFill>
+                        <a:srgbClr val="C9C2EE"/>
+                      </a:solidFill>
+                    </a:lnL>
+                    <a:lnR w="6350" cap="flat">
+                      <a:solidFill>
+                        <a:srgbClr val="C9C2EE"/>
+                      </a:solidFill>
+                    </a:lnR>
+                    <a:lnT w="6350" cap="flat">
+                      <a:solidFill>
+                        <a:srgbClr val="C9C2EE"/>
+                      </a:solidFill>
+                    </a:lnT>
+                    <a:lnB w="6350" cap="flat">
+                      <a:solidFill>
+                        <a:srgbClr val="C9C2EE"/>
+                      </a:solidFill>
+                    </a:lnB>
+                    <a:solidFill>
+                      <a:srgbClr val="FFFFFF"/>
+                    </a:solidFill>
+                  </a:tcPr>
+                </a:tc>
+                <a:tc>
+                  <a:txBody>
+                    <a:bodyPr/>
+                    <a:lstStyle/>
+                    <a:p>
+                      <a:pPr algn="l" marL="0" indent="0">
+                        <a:lnSpc>
+                          <a:spcPct val="105000"/>
+                        </a:lnSpc>
+                        <a:spcAft>
+                          <a:spcPts val="0"/>
+                        </a:spcAft>
+                        <a:buNone/>
+                      </a:pPr>
+                      <a:r>
+                        <a:rPr lang="ru-RU" sz="880" b="0" dirty="0">
+                          <a:solidFill>
+                            <a:srgbClr val="595959"/>
+                          </a:solidFill>
+                          <a:latin typeface="Onest Regular" pitchFamily="2" charset="-52"/>
+                        </a:rPr>
+                        <a:t xml:space="preserve">фотографии или акта об устранении нет ни у исполнителя, ни у руководителя</a:t>
+                      </a:r>
+                    </a:p>
+                  </a:txBody>
+                  <a:tcPr marL="45720" marR="45720" marT="27432" marB="27432" anchor="ctr">
+                    <a:lnL w="6350" cap="flat">
+                      <a:solidFill>
+                        <a:srgbClr val="C9C2EE"/>
+                      </a:solidFill>
+                    </a:lnL>
+                    <a:lnR w="6350" cap="flat">
+                      <a:solidFill>
+                        <a:srgbClr val="C9C2EE"/>
+                      </a:solidFill>
+                    </a:lnR>
+                    <a:lnT w="6350" cap="flat">
+                      <a:solidFill>
+                        <a:srgbClr val="C9C2EE"/>
+                      </a:solidFill>
+                    </a:lnT>
+                    <a:lnB w="6350" cap="flat">
+                      <a:solidFill>
+                        <a:srgbClr val="C9C2EE"/>
+                      </a:solidFill>
+                    </a:lnB>
+                    <a:solidFill>
+                      <a:srgbClr val="FFFFFF"/>
+                    </a:solidFill>
+                  </a:tcPr>
+                </a:tc>
+              </a:tr>
+              <a:tr h="429768">
+                <a:tc>
+                  <a:txBody>
+                    <a:bodyPr/>
+                    <a:lstStyle/>
+                    <a:p>
+                      <a:pPr algn="l" marL="0" indent="0">
+                        <a:lnSpc>
+                          <a:spcPct val="105000"/>
+                        </a:lnSpc>
+                        <a:spcAft>
+                          <a:spcPts val="0"/>
+                        </a:spcAft>
+                        <a:buNone/>
+                      </a:pPr>
+                      <a:r>
+                        <a:rPr lang="ru-RU" sz="900" b="0" dirty="0">
+                          <a:solidFill>
+                            <a:srgbClr val="000000"/>
+                          </a:solidFill>
+                          <a:latin typeface="Onest Medium" pitchFamily="2" charset="-52"/>
+                        </a:rPr>
+                        <a:t xml:space="preserve">Повторные обращения</a:t>
+                      </a:r>
+                    </a:p>
+                  </a:txBody>
+                  <a:tcPr marL="45720" marR="45720" marT="27432" marB="27432" anchor="ctr">
+                    <a:lnL w="6350" cap="flat">
+                      <a:solidFill>
+                        <a:srgbClr val="C9C2EE"/>
+                      </a:solidFill>
+                    </a:lnL>
+                    <a:lnR w="6350" cap="flat">
+                      <a:solidFill>
+                        <a:srgbClr val="C9C2EE"/>
+                      </a:solidFill>
+                    </a:lnR>
+                    <a:lnT w="6350" cap="flat">
+                      <a:solidFill>
+                        <a:srgbClr val="C9C2EE"/>
+                      </a:solidFill>
+                    </a:lnT>
+                    <a:lnB w="6350" cap="flat">
+                      <a:solidFill>
+                        <a:srgbClr val="C9C2EE"/>
+                      </a:solidFill>
+                    </a:lnB>
+                    <a:solidFill>
+                      <a:srgbClr val="FFFFFF"/>
+                    </a:solidFill>
+                  </a:tcPr>
+                </a:tc>
+                <a:tc>
+                  <a:txBody>
+                    <a:bodyPr/>
+                    <a:lstStyle/>
+                    <a:p>
+                      <a:pPr algn="l" marL="0" indent="0">
+                        <a:lnSpc>
+                          <a:spcPct val="105000"/>
+                        </a:lnSpc>
+                        <a:spcAft>
+                          <a:spcPts val="0"/>
+                        </a:spcAft>
+                        <a:buNone/>
+                      </a:pPr>
+                      <a:r>
+                        <a:rPr lang="ru-RU" sz="900" b="1" dirty="0">
+                          <a:solidFill>
+                            <a:srgbClr val="6C5CE0"/>
+                          </a:solidFill>
+                          <a:latin typeface="Onest Black" pitchFamily="2" charset="-52"/>
+                        </a:rPr>
+                        <a:t xml:space="preserve">не выявляются</a:t>
+                      </a:r>
+                    </a:p>
+                  </a:txBody>
+                  <a:tcPr marL="45720" marR="45720" marT="27432" marB="27432" anchor="ctr">
+                    <a:lnL w="6350" cap="flat">
+                      <a:solidFill>
+                        <a:srgbClr val="C9C2EE"/>
+                      </a:solidFill>
+                    </a:lnL>
+                    <a:lnR w="6350" cap="flat">
+                      <a:solidFill>
+                        <a:srgbClr val="C9C2EE"/>
+                      </a:solidFill>
+                    </a:lnR>
+                    <a:lnT w="6350" cap="flat">
+                      <a:solidFill>
+                        <a:srgbClr val="C9C2EE"/>
+                      </a:solidFill>
+                    </a:lnT>
+                    <a:lnB w="6350" cap="flat">
+                      <a:solidFill>
+                        <a:srgbClr val="C9C2EE"/>
+                      </a:solidFill>
+                    </a:lnB>
+                    <a:solidFill>
+                      <a:srgbClr val="FFFFFF"/>
+                    </a:solidFill>
+                  </a:tcPr>
+                </a:tc>
+                <a:tc>
+                  <a:txBody>
+                    <a:bodyPr/>
+                    <a:lstStyle/>
+                    <a:p>
+                      <a:pPr algn="l" marL="0" indent="0">
+                        <a:lnSpc>
+                          <a:spcPct val="105000"/>
+                        </a:lnSpc>
+                        <a:spcAft>
+                          <a:spcPts val="0"/>
+                        </a:spcAft>
+                        <a:buNone/>
+                      </a:pPr>
+                      <a:r>
+                        <a:rPr lang="ru-RU" sz="880" b="0" dirty="0">
+                          <a:solidFill>
+                            <a:srgbClr val="595959"/>
+                          </a:solidFill>
+                          <a:latin typeface="Onest Regular" pitchFamily="2" charset="-52"/>
+                        </a:rPr>
+                        <a:t xml:space="preserve">работа по одному объекту заводится и выполняется несколько раз</a:t>
+                      </a:r>
+                    </a:p>
+                  </a:txBody>
+                  <a:tcPr marL="45720" marR="45720" marT="27432" marB="27432" anchor="ctr">
+                    <a:lnL w="6350" cap="flat">
+                      <a:solidFill>
+                        <a:srgbClr val="C9C2EE"/>
+                      </a:solidFill>
+                    </a:lnL>
+                    <a:lnR w="6350" cap="flat">
+                      <a:solidFill>
+                        <a:srgbClr val="C9C2EE"/>
+                      </a:solidFill>
+                    </a:lnR>
+                    <a:lnT w="6350" cap="flat">
+                      <a:solidFill>
+                        <a:srgbClr val="C9C2EE"/>
+                      </a:solidFill>
+                    </a:lnT>
+                    <a:lnB w="6350" cap="flat">
+                      <a:solidFill>
+                        <a:srgbClr val="C9C2EE"/>
+                      </a:solidFill>
+                    </a:lnB>
+                    <a:solidFill>
+                      <a:srgbClr val="FFFFFF"/>
+                    </a:solidFill>
+                  </a:tcPr>
+                </a:tc>
+              </a:tr>
+              <a:tr h="429768">
                 <a:tc>
                   <a:txBody>
                     <a:bodyPr/>
@@ -5520,7 +5830,7 @@
                 </a:solidFill>
                 <a:latin typeface="Onest Medium" pitchFamily="2" charset="-52"/>
               </a:rPr>
-              <a:t xml:space="preserve">Время протекания процесса — от 7 до 30 календарных дней. В очереди на разбор постоянно 2–8 сообщений.</a:t>
+              <a:t xml:space="preserve">Время протекания процесса — от 10 до 60 календарных дней, из них до 30 дней проблема не выявлена. Очередь на разбор — 2–8 сообщений.</a:t>
             </a:r>
           </a:p>
         </p:txBody>
@@ -5533,7 +5843,7 @@
         </p:nvSpPr>
         <p:spPr>
           <a:xfrm>
-            <a:off x="411480" y="6144768"/>
+            <a:off x="411480" y="6291072"/>
             <a:ext cx="11338560" cy="365760"/>
           </a:xfrm>
           <a:prstGeom prst="rect">
@@ -6000,8 +6310,8 @@
           <p:nvPr/>
         </p:nvGraphicFramePr>
         <p:xfrm>
-          <a:off x="411480" y="1444752"/>
-          <a:ext cx="11338560" cy="4526280"/>
+          <a:off x="411480" y="1389888"/>
+          <a:ext cx="11338560" cy="4727448"/>
         </p:xfrm>
         <a:graphic>
           <a:graphicData uri="http://schemas.openxmlformats.org/drawingml/2006/table">
@@ -6012,7 +6322,7 @@
                 <a:gridCol w="2377440"/>
                 <a:gridCol w="6720840"/>
               </a:tblGrid>
-              <a:tr h="502920">
+              <a:tr h="429768">
                 <a:tc>
                   <a:txBody>
                     <a:bodyPr/>
@@ -6167,7 +6477,7 @@
                   </a:tcPr>
                 </a:tc>
               </a:tr>
-              <a:tr h="502920">
+              <a:tr h="429768">
                 <a:tc>
                   <a:txBody>
                     <a:bodyPr/>
@@ -6189,7 +6499,7 @@
                           </a:solidFill>
                           <a:latin typeface="Onest Medium" pitchFamily="2" charset="-52"/>
                         </a:rPr>
-                        <a:t xml:space="preserve">Каналов приёма</a:t>
+                        <a:t xml:space="preserve">Выявление проблемы</a:t>
                       </a:r>
                     </a:p>
                   </a:txBody>
@@ -6240,7 +6550,7 @@
                           </a:solidFill>
                           <a:latin typeface="Onest Black" pitchFamily="2" charset="-52"/>
                         </a:rPr>
-                        <a:t xml:space="preserve">один цифровой</a:t>
+                        <a:t xml:space="preserve">плановое, до жалобы</a:t>
                       </a:r>
                     </a:p>
                   </a:txBody>
@@ -6291,7 +6601,7 @@
                           </a:solidFill>
                           <a:latin typeface="Onest Regular" pitchFamily="2" charset="-52"/>
                         </a:rPr>
-                        <a:t xml:space="preserve">мессенджер MAX: текст, фотография и геометка в одном сообщении; архитектура канально-независимая, подключение других каналов не требует переделки ядра</a:t>
+                        <a:t xml:space="preserve">наблюдатели обходят закреплённую территорию и подают заявки сами; жалоба жителя перестаёт быть единственным входом в процесс</a:t>
                       </a:r>
                     </a:p>
                   </a:txBody>
@@ -6322,7 +6632,7 @@
                   </a:tcPr>
                 </a:tc>
               </a:tr>
-              <a:tr h="502920">
+              <a:tr h="429768">
                 <a:tc>
                   <a:txBody>
                     <a:bodyPr/>
@@ -6344,7 +6654,7 @@
                           </a:solidFill>
                           <a:latin typeface="Onest Medium" pitchFamily="2" charset="-52"/>
                         </a:rPr>
-                        <a:t xml:space="preserve">Регистрация</a:t>
+                        <a:t xml:space="preserve">Кто сообщает</a:t>
                       </a:r>
                     </a:p>
                   </a:txBody>
@@ -6395,7 +6705,7 @@
                           </a:solidFill>
                           <a:latin typeface="Onest Black" pitchFamily="2" charset="-52"/>
                         </a:rPr>
-                        <a:t xml:space="preserve">автоматическая</a:t>
+                        <a:t xml:space="preserve">наблюдатели и жители</a:t>
                       </a:r>
                     </a:p>
                   </a:txBody>
@@ -6446,7 +6756,7 @@
                           </a:solidFill>
                           <a:latin typeface="Onest Regular" pitchFamily="2" charset="-52"/>
                         </a:rPr>
-                        <a:t xml:space="preserve">искусственный интеллект определяет категорию, адрес и срочность; 18 категорий в 4 направлениях</a:t>
+                        <a:t xml:space="preserve">активные жители и сотрудники, ежедневно бывающие на территории, получают роль в сервисе — отдельной системы для этого не требуется</a:t>
                       </a:r>
                     </a:p>
                   </a:txBody>
@@ -6477,7 +6787,7 @@
                   </a:tcPr>
                 </a:tc>
               </a:tr>
-              <a:tr h="502920">
+              <a:tr h="429768">
                 <a:tc>
                   <a:txBody>
                     <a:bodyPr/>
@@ -6499,7 +6809,7 @@
                           </a:solidFill>
                           <a:latin typeface="Onest Medium" pitchFamily="2" charset="-52"/>
                         </a:rPr>
-                        <a:t xml:space="preserve">Маршрут</a:t>
+                        <a:t xml:space="preserve">Каналов приёма</a:t>
                       </a:r>
                     </a:p>
                   </a:txBody>
@@ -6550,7 +6860,7 @@
                           </a:solidFill>
                           <a:latin typeface="Onest Black" pitchFamily="2" charset="-52"/>
                         </a:rPr>
-                        <a:t xml:space="preserve">по цепочке ответственных</a:t>
+                        <a:t xml:space="preserve">один цифровой</a:t>
                       </a:r>
                     </a:p>
                   </a:txBody>
@@ -6601,7 +6911,7 @@
                           </a:solidFill>
                           <a:latin typeface="Onest Regular" pitchFamily="2" charset="-52"/>
                         </a:rPr>
-                        <a:t xml:space="preserve">без участия первого лица; Глава округа подключается только при эскалации</a:t>
+                        <a:t xml:space="preserve">мессенджер MAX: текст, фотография и геометка в одном сообщении; архитектура канально-независимая, подключение других каналов не требует переделки ядра</a:t>
                       </a:r>
                     </a:p>
                   </a:txBody>
@@ -6632,7 +6942,7 @@
                   </a:tcPr>
                 </a:tc>
               </a:tr>
-              <a:tr h="502920">
+              <a:tr h="429768">
                 <a:tc>
                   <a:txBody>
                     <a:bodyPr/>
@@ -6654,7 +6964,7 @@
                           </a:solidFill>
                           <a:latin typeface="Onest Medium" pitchFamily="2" charset="-52"/>
                         </a:rPr>
-                        <a:t xml:space="preserve">Срок</a:t>
+                        <a:t xml:space="preserve">Регистрация</a:t>
                       </a:r>
                     </a:p>
                   </a:txBody>
@@ -6705,7 +7015,7 @@
                           </a:solidFill>
                           <a:latin typeface="Onest Black" pitchFamily="2" charset="-52"/>
                         </a:rPr>
-                        <a:t xml:space="preserve">по категории заявки</a:t>
+                        <a:t xml:space="preserve">автоматическая</a:t>
                       </a:r>
                     </a:p>
                   </a:txBody>
@@ -6756,7 +7066,7 @@
                           </a:solidFill>
                           <a:latin typeface="Onest Regular" pitchFamily="2" charset="-52"/>
                         </a:rPr>
-                        <a:t xml:space="preserve">таймер на каждой заявке; просрочка поднимается заму направления, затем Главе округа</a:t>
+                        <a:t xml:space="preserve">искусственный интеллект определяет категорию, адрес и срочность; 18 категорий в 4 направлениях</a:t>
                       </a:r>
                     </a:p>
                   </a:txBody>
@@ -6787,7 +7097,7 @@
                   </a:tcPr>
                 </a:tc>
               </a:tr>
-              <a:tr h="502920">
+              <a:tr h="429768">
                 <a:tc>
                   <a:txBody>
                     <a:bodyPr/>
@@ -6809,7 +7119,7 @@
                           </a:solidFill>
                           <a:latin typeface="Onest Medium" pitchFamily="2" charset="-52"/>
                         </a:rPr>
-                        <a:t xml:space="preserve">Ответ</a:t>
+                        <a:t xml:space="preserve">Маршрут</a:t>
                       </a:r>
                     </a:p>
                   </a:txBody>
@@ -6860,7 +7170,7 @@
                           </a:solidFill>
                           <a:latin typeface="Onest Black" pitchFamily="2" charset="-52"/>
                         </a:rPr>
-                        <a:t xml:space="preserve">в мессенджер сразу</a:t>
+                        <a:t xml:space="preserve">по цепочке ответственных</a:t>
                       </a:r>
                     </a:p>
                   </a:txBody>
@@ -6911,7 +7221,7 @@
                           </a:solidFill>
                           <a:latin typeface="Onest Regular" pitchFamily="2" charset="-52"/>
                         </a:rPr>
-                        <a:t xml:space="preserve">уведомление о каждом изменении статуса, «до и после» с фотографией</a:t>
+                        <a:t xml:space="preserve">без участия первого лица; Глава округа подключается только при эскалации</a:t>
                       </a:r>
                     </a:p>
                   </a:txBody>
@@ -6942,7 +7252,7 @@
                   </a:tcPr>
                 </a:tc>
               </a:tr>
-              <a:tr h="502920">
+              <a:tr h="429768">
                 <a:tc>
                   <a:txBody>
                     <a:bodyPr/>
@@ -6964,7 +7274,7 @@
                           </a:solidFill>
                           <a:latin typeface="Onest Medium" pitchFamily="2" charset="-52"/>
                         </a:rPr>
-                        <a:t xml:space="preserve">Подтверждение результата</a:t>
+                        <a:t xml:space="preserve">Срок</a:t>
                       </a:r>
                     </a:p>
                   </a:txBody>
@@ -7015,7 +7325,7 @@
                           </a:solidFill>
                           <a:latin typeface="Onest Black" pitchFamily="2" charset="-52"/>
                         </a:rPr>
-                        <a:t xml:space="preserve">обязательно</a:t>
+                        <a:t xml:space="preserve">по категории заявки</a:t>
                       </a:r>
                     </a:p>
                   </a:txBody>
@@ -7066,7 +7376,7 @@
                           </a:solidFill>
                           <a:latin typeface="Onest Regular" pitchFamily="2" charset="-52"/>
                         </a:rPr>
-                        <a:t xml:space="preserve">закрыть заявку без фотографии или отчёта нельзя; гражданин ставит оценку от 1 до 5, оценка ≤ 2 возвращает заявку в работу</a:t>
+                        <a:t xml:space="preserve">таймер на каждой заявке; просрочка поднимается заму направления, затем Главе округа</a:t>
                       </a:r>
                     </a:p>
                   </a:txBody>
@@ -7097,7 +7407,7 @@
                   </a:tcPr>
                 </a:tc>
               </a:tr>
-              <a:tr h="502920">
+              <a:tr h="429768">
                 <a:tc>
                   <a:txBody>
                     <a:bodyPr/>
@@ -7119,7 +7429,7 @@
                           </a:solidFill>
                           <a:latin typeface="Onest Medium" pitchFamily="2" charset="-52"/>
                         </a:rPr>
-                        <a:t xml:space="preserve">Повторные обращения</a:t>
+                        <a:t xml:space="preserve">Ответ</a:t>
                       </a:r>
                     </a:p>
                   </a:txBody>
@@ -7170,7 +7480,7 @@
                           </a:solidFill>
                           <a:latin typeface="Onest Black" pitchFamily="2" charset="-52"/>
                         </a:rPr>
-                        <a:t xml:space="preserve">объединяются</a:t>
+                        <a:t xml:space="preserve">в мессенджер сразу</a:t>
                       </a:r>
                     </a:p>
                   </a:txBody>
@@ -7221,7 +7531,7 @@
                           </a:solidFill>
                           <a:latin typeface="Onest Regular" pitchFamily="2" charset="-52"/>
                         </a:rPr>
-                        <a:t xml:space="preserve">дедупликация по координатам — 100 м за 14 дней — и по нормализованному адресу</a:t>
+                        <a:t xml:space="preserve">уведомление о каждом изменении статуса, «до и после» с фотографией</a:t>
                       </a:r>
                     </a:p>
                   </a:txBody>
@@ -7252,7 +7562,317 @@
                   </a:tcPr>
                 </a:tc>
               </a:tr>
-              <a:tr h="502920">
+              <a:tr h="429768">
+                <a:tc>
+                  <a:txBody>
+                    <a:bodyPr/>
+                    <a:lstStyle/>
+                    <a:p>
+                      <a:pPr algn="l" marL="0" indent="0">
+                        <a:lnSpc>
+                          <a:spcPct val="105000"/>
+                        </a:lnSpc>
+                        <a:spcAft>
+                          <a:spcPts val="0"/>
+                        </a:spcAft>
+                        <a:buNone/>
+                      </a:pPr>
+                      <a:r>
+                        <a:rPr lang="ru-RU" sz="900" b="0" dirty="0">
+                          <a:solidFill>
+                            <a:srgbClr val="000000"/>
+                          </a:solidFill>
+                          <a:latin typeface="Onest Medium" pitchFamily="2" charset="-52"/>
+                        </a:rPr>
+                        <a:t xml:space="preserve">Подтверждение результата</a:t>
+                      </a:r>
+                    </a:p>
+                  </a:txBody>
+                  <a:tcPr marL="45720" marR="45720" marT="27432" marB="27432" anchor="ctr">
+                    <a:lnL w="6350" cap="flat">
+                      <a:solidFill>
+                        <a:srgbClr val="C9C2EE"/>
+                      </a:solidFill>
+                    </a:lnL>
+                    <a:lnR w="6350" cap="flat">
+                      <a:solidFill>
+                        <a:srgbClr val="C9C2EE"/>
+                      </a:solidFill>
+                    </a:lnR>
+                    <a:lnT w="6350" cap="flat">
+                      <a:solidFill>
+                        <a:srgbClr val="C9C2EE"/>
+                      </a:solidFill>
+                    </a:lnT>
+                    <a:lnB w="6350" cap="flat">
+                      <a:solidFill>
+                        <a:srgbClr val="C9C2EE"/>
+                      </a:solidFill>
+                    </a:lnB>
+                    <a:solidFill>
+                      <a:srgbClr val="FFFFFF"/>
+                    </a:solidFill>
+                  </a:tcPr>
+                </a:tc>
+                <a:tc>
+                  <a:txBody>
+                    <a:bodyPr/>
+                    <a:lstStyle/>
+                    <a:p>
+                      <a:pPr algn="l" marL="0" indent="0">
+                        <a:lnSpc>
+                          <a:spcPct val="105000"/>
+                        </a:lnSpc>
+                        <a:spcAft>
+                          <a:spcPts val="0"/>
+                        </a:spcAft>
+                        <a:buNone/>
+                      </a:pPr>
+                      <a:r>
+                        <a:rPr lang="ru-RU" sz="900" b="1" dirty="0">
+                          <a:solidFill>
+                            <a:srgbClr val="6C5CE0"/>
+                          </a:solidFill>
+                          <a:latin typeface="Onest Black" pitchFamily="2" charset="-52"/>
+                        </a:rPr>
+                        <a:t xml:space="preserve">обязательно</a:t>
+                      </a:r>
+                    </a:p>
+                  </a:txBody>
+                  <a:tcPr marL="45720" marR="45720" marT="27432" marB="27432" anchor="ctr">
+                    <a:lnL w="6350" cap="flat">
+                      <a:solidFill>
+                        <a:srgbClr val="C9C2EE"/>
+                      </a:solidFill>
+                    </a:lnL>
+                    <a:lnR w="6350" cap="flat">
+                      <a:solidFill>
+                        <a:srgbClr val="C9C2EE"/>
+                      </a:solidFill>
+                    </a:lnR>
+                    <a:lnT w="6350" cap="flat">
+                      <a:solidFill>
+                        <a:srgbClr val="C9C2EE"/>
+                      </a:solidFill>
+                    </a:lnT>
+                    <a:lnB w="6350" cap="flat">
+                      <a:solidFill>
+                        <a:srgbClr val="C9C2EE"/>
+                      </a:solidFill>
+                    </a:lnB>
+                    <a:solidFill>
+                      <a:srgbClr val="FFFFFF"/>
+                    </a:solidFill>
+                  </a:tcPr>
+                </a:tc>
+                <a:tc>
+                  <a:txBody>
+                    <a:bodyPr/>
+                    <a:lstStyle/>
+                    <a:p>
+                      <a:pPr algn="l" marL="0" indent="0">
+                        <a:lnSpc>
+                          <a:spcPct val="105000"/>
+                        </a:lnSpc>
+                        <a:spcAft>
+                          <a:spcPts val="0"/>
+                        </a:spcAft>
+                        <a:buNone/>
+                      </a:pPr>
+                      <a:r>
+                        <a:rPr lang="ru-RU" sz="880" b="0" dirty="0">
+                          <a:solidFill>
+                            <a:srgbClr val="595959"/>
+                          </a:solidFill>
+                          <a:latin typeface="Onest Regular" pitchFamily="2" charset="-52"/>
+                        </a:rPr>
+                        <a:t xml:space="preserve">закрыть заявку без фотографии или отчёта нельзя; автор заявки ставит оценку от 1 до 5, оценка ≤ 2 возвращает заявку в работу</a:t>
+                      </a:r>
+                    </a:p>
+                  </a:txBody>
+                  <a:tcPr marL="45720" marR="45720" marT="27432" marB="27432" anchor="ctr">
+                    <a:lnL w="6350" cap="flat">
+                      <a:solidFill>
+                        <a:srgbClr val="C9C2EE"/>
+                      </a:solidFill>
+                    </a:lnL>
+                    <a:lnR w="6350" cap="flat">
+                      <a:solidFill>
+                        <a:srgbClr val="C9C2EE"/>
+                      </a:solidFill>
+                    </a:lnR>
+                    <a:lnT w="6350" cap="flat">
+                      <a:solidFill>
+                        <a:srgbClr val="C9C2EE"/>
+                      </a:solidFill>
+                    </a:lnT>
+                    <a:lnB w="6350" cap="flat">
+                      <a:solidFill>
+                        <a:srgbClr val="C9C2EE"/>
+                      </a:solidFill>
+                    </a:lnB>
+                    <a:solidFill>
+                      <a:srgbClr val="FFFFFF"/>
+                    </a:solidFill>
+                  </a:tcPr>
+                </a:tc>
+              </a:tr>
+              <a:tr h="429768">
+                <a:tc>
+                  <a:txBody>
+                    <a:bodyPr/>
+                    <a:lstStyle/>
+                    <a:p>
+                      <a:pPr algn="l" marL="0" indent="0">
+                        <a:lnSpc>
+                          <a:spcPct val="105000"/>
+                        </a:lnSpc>
+                        <a:spcAft>
+                          <a:spcPts val="0"/>
+                        </a:spcAft>
+                        <a:buNone/>
+                      </a:pPr>
+                      <a:r>
+                        <a:rPr lang="ru-RU" sz="900" b="0" dirty="0">
+                          <a:solidFill>
+                            <a:srgbClr val="000000"/>
+                          </a:solidFill>
+                          <a:latin typeface="Onest Medium" pitchFamily="2" charset="-52"/>
+                        </a:rPr>
+                        <a:t xml:space="preserve">Повторные обращения</a:t>
+                      </a:r>
+                    </a:p>
+                  </a:txBody>
+                  <a:tcPr marL="45720" marR="45720" marT="27432" marB="27432" anchor="ctr">
+                    <a:lnL w="6350" cap="flat">
+                      <a:solidFill>
+                        <a:srgbClr val="C9C2EE"/>
+                      </a:solidFill>
+                    </a:lnL>
+                    <a:lnR w="6350" cap="flat">
+                      <a:solidFill>
+                        <a:srgbClr val="C9C2EE"/>
+                      </a:solidFill>
+                    </a:lnR>
+                    <a:lnT w="6350" cap="flat">
+                      <a:solidFill>
+                        <a:srgbClr val="C9C2EE"/>
+                      </a:solidFill>
+                    </a:lnT>
+                    <a:lnB w="6350" cap="flat">
+                      <a:solidFill>
+                        <a:srgbClr val="C9C2EE"/>
+                      </a:solidFill>
+                    </a:lnB>
+                    <a:solidFill>
+                      <a:srgbClr val="FFFFFF"/>
+                    </a:solidFill>
+                  </a:tcPr>
+                </a:tc>
+                <a:tc>
+                  <a:txBody>
+                    <a:bodyPr/>
+                    <a:lstStyle/>
+                    <a:p>
+                      <a:pPr algn="l" marL="0" indent="0">
+                        <a:lnSpc>
+                          <a:spcPct val="105000"/>
+                        </a:lnSpc>
+                        <a:spcAft>
+                          <a:spcPts val="0"/>
+                        </a:spcAft>
+                        <a:buNone/>
+                      </a:pPr>
+                      <a:r>
+                        <a:rPr lang="ru-RU" sz="900" b="1" dirty="0">
+                          <a:solidFill>
+                            <a:srgbClr val="6C5CE0"/>
+                          </a:solidFill>
+                          <a:latin typeface="Onest Black" pitchFamily="2" charset="-52"/>
+                        </a:rPr>
+                        <a:t xml:space="preserve">объединяются</a:t>
+                      </a:r>
+                    </a:p>
+                  </a:txBody>
+                  <a:tcPr marL="45720" marR="45720" marT="27432" marB="27432" anchor="ctr">
+                    <a:lnL w="6350" cap="flat">
+                      <a:solidFill>
+                        <a:srgbClr val="C9C2EE"/>
+                      </a:solidFill>
+                    </a:lnL>
+                    <a:lnR w="6350" cap="flat">
+                      <a:solidFill>
+                        <a:srgbClr val="C9C2EE"/>
+                      </a:solidFill>
+                    </a:lnR>
+                    <a:lnT w="6350" cap="flat">
+                      <a:solidFill>
+                        <a:srgbClr val="C9C2EE"/>
+                      </a:solidFill>
+                    </a:lnT>
+                    <a:lnB w="6350" cap="flat">
+                      <a:solidFill>
+                        <a:srgbClr val="C9C2EE"/>
+                      </a:solidFill>
+                    </a:lnB>
+                    <a:solidFill>
+                      <a:srgbClr val="FFFFFF"/>
+                    </a:solidFill>
+                  </a:tcPr>
+                </a:tc>
+                <a:tc>
+                  <a:txBody>
+                    <a:bodyPr/>
+                    <a:lstStyle/>
+                    <a:p>
+                      <a:pPr algn="l" marL="0" indent="0">
+                        <a:lnSpc>
+                          <a:spcPct val="105000"/>
+                        </a:lnSpc>
+                        <a:spcAft>
+                          <a:spcPts val="0"/>
+                        </a:spcAft>
+                        <a:buNone/>
+                      </a:pPr>
+                      <a:r>
+                        <a:rPr lang="ru-RU" sz="880" b="0" dirty="0">
+                          <a:solidFill>
+                            <a:srgbClr val="595959"/>
+                          </a:solidFill>
+                          <a:latin typeface="Onest Regular" pitchFamily="2" charset="-52"/>
+                        </a:rPr>
+                        <a:t xml:space="preserve">дедупликация по координатам — 100 м за 14 дней — и по нормализованному адресу</a:t>
+                      </a:r>
+                    </a:p>
+                  </a:txBody>
+                  <a:tcPr marL="45720" marR="45720" marT="27432" marB="27432" anchor="ctr">
+                    <a:lnL w="6350" cap="flat">
+                      <a:solidFill>
+                        <a:srgbClr val="C9C2EE"/>
+                      </a:solidFill>
+                    </a:lnL>
+                    <a:lnR w="6350" cap="flat">
+                      <a:solidFill>
+                        <a:srgbClr val="C9C2EE"/>
+                      </a:solidFill>
+                    </a:lnR>
+                    <a:lnT w="6350" cap="flat">
+                      <a:solidFill>
+                        <a:srgbClr val="C9C2EE"/>
+                      </a:solidFill>
+                    </a:lnT>
+                    <a:lnB w="6350" cap="flat">
+                      <a:solidFill>
+                        <a:srgbClr val="C9C2EE"/>
+                      </a:solidFill>
+                    </a:lnB>
+                    <a:solidFill>
+                      <a:srgbClr val="FFFFFF"/>
+                    </a:solidFill>
+                  </a:tcPr>
+                </a:tc>
+              </a:tr>
+              <a:tr h="429768">
                 <a:tc>
                   <a:txBody>
                     <a:bodyPr/>
@@ -7452,7 +8072,7 @@
                 </a:solidFill>
                 <a:latin typeface="Onest Medium" pitchFamily="2" charset="-52"/>
               </a:rPr>
-              <a:t xml:space="preserve">Расчётное время протекания процесса — от 2,5 часов до 10 дней. Охват — 29 населённых пунктов округа.</a:t>
+              <a:t xml:space="preserve">Расчётное время протекания процесса — от 1 до 17 дней против 10–60. Очередь на разбор — ноль. Охват — 29 населённых пунктов.</a:t>
             </a:r>
           </a:p>
         </p:txBody>
@@ -7465,7 +8085,7 @@
         </p:nvSpPr>
         <p:spPr>
           <a:xfrm>
-            <a:off x="411480" y="6144768"/>
+            <a:off x="411480" y="6291072"/>
             <a:ext cx="11338560" cy="365760"/>
           </a:xfrm>
           <a:prstGeom prst="rect">
@@ -8343,7 +8963,7 @@
                           </a:solidFill>
                           <a:latin typeface="Onest Regular" pitchFamily="2" charset="-52"/>
                         </a:rPr>
-                        <a:t xml:space="preserve">Гражданин, исполнитель, руководитель направления, оператор панели — раздаются самой панелью</a:t>
+                        <a:t xml:space="preserve">Наблюдатель, житель, исполнитель, руководитель направления, оператор панели — раздаются самой панелью</a:t>
                       </a:r>
                     </a:p>
                   </a:txBody>
@@ -8638,7 +9258,7 @@
         </p:nvSpPr>
         <p:spPr>
           <a:xfrm>
-            <a:off x="411480" y="4709160"/>
+            <a:off x="411480" y="5394960"/>
             <a:ext cx="11338560" cy="457200"/>
           </a:xfrm>
           <a:prstGeom prst="rect">
@@ -9320,7 +9940,7 @@
                           </a:solidFill>
                           <a:latin typeface="Onest Medium" pitchFamily="2" charset="-52"/>
                         </a:rPr>
-                        <a:t xml:space="preserve">Администрация Благовещенского муниципального округа: подразделение приёма сообщений, четыре направления с головными заместителями, подразделения-исполнители, Глава округа. Охват — 27 населённых пунктов</a:t>
+                        <a:t xml:space="preserve">Администрация Благовещенского муниципального округа: наблюдатели, выявляющие проблемы на территории; подразделение приёма сообщений, четыре направления с головными заместителями, подразделения-исполнители, Глава округа. Охват — 27 населённых пунктов</a:t>
                       </a:r>
                     </a:p>
                   </a:txBody>
@@ -10765,7 +11385,7 @@
                           </a:solidFill>
                           <a:latin typeface="Onest Medium" pitchFamily="2" charset="-52"/>
                         </a:rPr>
-                        <a:t xml:space="preserve">от поступления сообщения гражданина о проблеме благоустройства или жизнеобеспечения — до подтверждения гражданином устранения и выставления оценки</a:t>
+                        <a:t xml:space="preserve">от возникновения проблемы содержания территории округа — до подтверждённого устранения и оценки результата жителем</a:t>
                       </a:r>
                     </a:p>
                     <a:p>
@@ -10794,7 +11414,7 @@
                           </a:solidFill>
                           <a:latin typeface="Onest Medium" pitchFamily="2" charset="-52"/>
                         </a:rPr>
-                        <a:t xml:space="preserve">администрация округа: приём сообщений, четыре направления с головными заместителями и подразделения-исполнители, Глава округа. Охват — 27 населённых пунктов</a:t>
+                        <a:t xml:space="preserve">администрация округа: наблюдатели, выявляющие проблемы на территории; приём сообщений, четыре направления с головными заместителями и подразделения-исполнители, Глава округа. Охват — 27 населённых пунктов</a:t>
                       </a:r>
                     </a:p>
                   </a:txBody>
@@ -10872,7 +11492,7 @@
                           </a:solidFill>
                           <a:latin typeface="Onest Medium" pitchFamily="2" charset="-52"/>
                         </a:rPr>
-                        <a:t xml:space="preserve">сообщения граждан поступают по разрозненным каналам — телефон приёмной, личный приём, письменные заявления, социальные сети. Регистрация, определение сути и адреса, поиск ответственного и передача поручения выполняются вручную; единый учёт сроков отсутствует, результат гражданину не сообщается</a:t>
+                        <a:t xml:space="preserve">планового выявления проблем нет — администрация узнаёт о проблеме только из обращения жителя, в сёлах округа это до месяца. Ресурс активных жителей не задействован. Поступившее обращение регистрируется вручную, маршрут определяет лично Глава округа, срок один для всего — 30 дней, результат не подтверждается</a:t>
                       </a:r>
                     </a:p>
                     <a:p>
@@ -10930,7 +11550,7 @@
                           </a:solidFill>
                           <a:latin typeface="Onest Medium" pitchFamily="2" charset="-52"/>
                         </a:rPr>
-                        <a:t xml:space="preserve">потеря и «зависание» сообщений при отсутствии сквозного учёта: нарушение сроков устранения, рост повторных и вышестоящих обращений, снижение доверия жителей</a:t>
+                        <a:t xml:space="preserve">проблема остаётся невыявленной, пока житель не напишет обращение: нарушение сроков устранения, рост повторных и вышестоящих обращений, снижение доверия жителей</a:t>
                       </a:r>
                     </a:p>
                     <a:p>
@@ -11025,7 +11645,7 @@
         </p:nvGraphicFramePr>
         <p:xfrm>
           <a:off x="347472" y="3529584"/>
-          <a:ext cx="5029200" cy="2770632"/>
+          <a:ext cx="5029200" cy="3099816"/>
         </p:xfrm>
         <a:graphic>
           <a:graphicData uri="http://schemas.openxmlformats.org/drawingml/2006/table">
@@ -11302,7 +11922,7 @@
                           </a:solidFill>
                           <a:latin typeface="Onest Medium" pitchFamily="2" charset="-52"/>
                         </a:rPr>
-                        <a:t xml:space="preserve">Время протекания процесса: сообщение → подтверждённое устранение</a:t>
+                        <a:t xml:space="preserve">Время протекания: возникновение проблемы → подтверждённое устранение</a:t>
                       </a:r>
                     </a:p>
                   </a:txBody>
@@ -11345,7 +11965,7 @@
                           </a:solidFill>
                           <a:latin typeface="Onest Medium" pitchFamily="2" charset="-52"/>
                         </a:rPr>
-                        <a:t xml:space="preserve">раб. дн.</a:t>
+                        <a:t xml:space="preserve">календ. дн.</a:t>
                       </a:r>
                     </a:p>
                   </a:txBody>
@@ -11384,11 +12004,11 @@
                       <a:r>
                         <a:rPr lang="ru-RU" sz="900" b="0" dirty="0">
                           <a:solidFill>
-                            <a:srgbClr val="6C5CE0"/>
+                            <a:srgbClr val="000000"/>
                           </a:solidFill>
                           <a:latin typeface="Onest Medium" pitchFamily="2" charset="-52"/>
                         </a:rPr>
-                        <a:t xml:space="preserve">—</a:t>
+                        <a:t xml:space="preserve">10 — 60</a:t>
                       </a:r>
                     </a:p>
                   </a:txBody>
@@ -11431,7 +12051,7 @@
                           </a:solidFill>
                           <a:latin typeface="Onest Black" pitchFamily="2" charset="-52"/>
                         </a:rPr>
-                        <a:t xml:space="preserve">−30 %</a:t>
+                        <a:t xml:space="preserve">−50 %</a:t>
                       </a:r>
                     </a:p>
                   </a:txBody>
@@ -11476,7 +12096,7 @@
                           </a:solidFill>
                           <a:latin typeface="Onest Medium" pitchFamily="2" charset="-52"/>
                         </a:rPr>
-                        <a:t xml:space="preserve">Трудозатраты на регистрацию сообщения и передачу исполнителю</a:t>
+                        <a:t xml:space="preserve">Проблемы, выявленные до обращения жителя</a:t>
                       </a:r>
                     </a:p>
                   </a:txBody>
@@ -11517,7 +12137,7 @@
                           </a:solidFill>
                           <a:latin typeface="Onest Medium" pitchFamily="2" charset="-52"/>
                         </a:rPr>
-                        <a:t xml:space="preserve">мин.</a:t>
+                        <a:t xml:space="preserve">%</a:t>
                       </a:r>
                     </a:p>
                   </a:txBody>
@@ -11554,11 +12174,11 @@
                       <a:r>
                         <a:rPr lang="ru-RU" sz="900" b="0" dirty="0">
                           <a:solidFill>
-                            <a:srgbClr val="6C5CE0"/>
+                            <a:srgbClr val="000000"/>
                           </a:solidFill>
                           <a:latin typeface="Onest Medium" pitchFamily="2" charset="-52"/>
                         </a:rPr>
-                        <a:t xml:space="preserve">—</a:t>
+                        <a:t xml:space="preserve">0</a:t>
                       </a:r>
                     </a:p>
                   </a:txBody>
@@ -11599,7 +12219,7 @@
                           </a:solidFill>
                           <a:latin typeface="Onest Black" pitchFamily="2" charset="-52"/>
                         </a:rPr>
-                        <a:t xml:space="preserve">не более 1</a:t>
+                        <a:t xml:space="preserve">не менее 50</a:t>
                       </a:r>
                     </a:p>
                   </a:txBody>
@@ -11642,7 +12262,7 @@
                           </a:solidFill>
                           <a:latin typeface="Onest Medium" pitchFamily="2" charset="-52"/>
                         </a:rPr>
-                        <a:t xml:space="preserve">Заявки с установленным сроком исполнения</a:t>
+                        <a:t xml:space="preserve">Обращения граждан по благоустройству и ЖКХ</a:t>
                       </a:r>
                     </a:p>
                   </a:txBody>
@@ -11685,7 +12305,7 @@
                           </a:solidFill>
                           <a:latin typeface="Onest Medium" pitchFamily="2" charset="-52"/>
                         </a:rPr>
-                        <a:t xml:space="preserve">%</a:t>
+                        <a:t xml:space="preserve">шт./мес.</a:t>
                       </a:r>
                     </a:p>
                   </a:txBody>
@@ -11724,11 +12344,11 @@
                       <a:r>
                         <a:rPr lang="ru-RU" sz="900" b="0" dirty="0">
                           <a:solidFill>
-                            <a:srgbClr val="000000"/>
+                            <a:srgbClr val="6C5CE0"/>
                           </a:solidFill>
                           <a:latin typeface="Onest Medium" pitchFamily="2" charset="-52"/>
                         </a:rPr>
-                        <a:t xml:space="preserve">0</a:t>
+                        <a:t xml:space="preserve">—</a:t>
                       </a:r>
                     </a:p>
                   </a:txBody>
@@ -11771,7 +12391,7 @@
                           </a:solidFill>
                           <a:latin typeface="Onest Black" pitchFamily="2" charset="-52"/>
                         </a:rPr>
-                        <a:t xml:space="preserve">100</a:t>
+                        <a:t xml:space="preserve">−30 %</a:t>
                       </a:r>
                     </a:p>
                   </a:txBody>
@@ -11816,7 +12436,7 @@
                           </a:solidFill>
                           <a:latin typeface="Onest Medium" pitchFamily="2" charset="-52"/>
                         </a:rPr>
-                        <a:t xml:space="preserve">Заявки, исполненные в установленный срок</a:t>
+                        <a:t xml:space="preserve">Трудозатраты на регистрацию сообщения и передачу исполнителю</a:t>
                       </a:r>
                     </a:p>
                   </a:txBody>
@@ -11857,7 +12477,7 @@
                           </a:solidFill>
                           <a:latin typeface="Onest Medium" pitchFamily="2" charset="-52"/>
                         </a:rPr>
-                        <a:t xml:space="preserve">%</a:t>
+                        <a:t xml:space="preserve">мин.</a:t>
                       </a:r>
                     </a:p>
                   </a:txBody>
@@ -11939,7 +12559,7 @@
                           </a:solidFill>
                           <a:latin typeface="Onest Black" pitchFamily="2" charset="-52"/>
                         </a:rPr>
-                        <a:t xml:space="preserve">не менее 90</a:t>
+                        <a:t xml:space="preserve">не более 1</a:t>
                       </a:r>
                     </a:p>
                   </a:txBody>
@@ -11982,7 +12602,7 @@
                           </a:solidFill>
                           <a:latin typeface="Onest Medium" pitchFamily="2" charset="-52"/>
                         </a:rPr>
-                        <a:t xml:space="preserve">Закрытые заявки с подтверждением результата</a:t>
+                        <a:t xml:space="preserve">Заявки с установленным сроком исполнения</a:t>
                       </a:r>
                     </a:p>
                   </a:txBody>
@@ -12156,7 +12776,7 @@
                           </a:solidFill>
                           <a:latin typeface="Onest Medium" pitchFamily="2" charset="-52"/>
                         </a:rPr>
-                        <a:t xml:space="preserve">Средняя оценка гражданином результата, шкала 1–5</a:t>
+                        <a:t xml:space="preserve">Заявки, исполненные в установленный срок</a:t>
                       </a:r>
                     </a:p>
                   </a:txBody>
@@ -12197,7 +12817,7 @@
                           </a:solidFill>
                           <a:latin typeface="Onest Medium" pitchFamily="2" charset="-52"/>
                         </a:rPr>
-                        <a:t xml:space="preserve">балл</a:t>
+                        <a:t xml:space="preserve">%</a:t>
                       </a:r>
                     </a:p>
                   </a:txBody>
@@ -12279,7 +12899,7 @@
                           </a:solidFill>
                           <a:latin typeface="Onest Black" pitchFamily="2" charset="-52"/>
                         </a:rPr>
-                        <a:t xml:space="preserve">не менее 4,0</a:t>
+                        <a:t xml:space="preserve">не менее 90</a:t>
                       </a:r>
                     </a:p>
                   </a:txBody>
@@ -12322,7 +12942,7 @@
                           </a:solidFill>
                           <a:latin typeface="Onest Medium" pitchFamily="2" charset="-52"/>
                         </a:rPr>
-                        <a:t xml:space="preserve">Повторные обращения об одной и той же проблеме</a:t>
+                        <a:t xml:space="preserve">Закрытые заявки с подтверждением результата</a:t>
                       </a:r>
                     </a:p>
                   </a:txBody>
@@ -12404,11 +13024,11 @@
                       <a:r>
                         <a:rPr lang="ru-RU" sz="900" b="0" dirty="0">
                           <a:solidFill>
-                            <a:srgbClr val="6C5CE0"/>
+                            <a:srgbClr val="000000"/>
                           </a:solidFill>
                           <a:latin typeface="Onest Medium" pitchFamily="2" charset="-52"/>
                         </a:rPr>
-                        <a:t xml:space="preserve">—</a:t>
+                        <a:t xml:space="preserve">0</a:t>
                       </a:r>
                     </a:p>
                   </a:txBody>
@@ -12451,7 +13071,7 @@
                           </a:solidFill>
                           <a:latin typeface="Onest Black" pitchFamily="2" charset="-52"/>
                         </a:rPr>
-                        <a:t xml:space="preserve">−50 %</a:t>
+                        <a:t xml:space="preserve">100</a:t>
                       </a:r>
                     </a:p>
                   </a:txBody>
@@ -12471,6 +13091,172 @@
                     <a:solidFill>
                       <a:srgbClr val="FBFAFF"/>
                     </a:solidFill>
+                  </a:tcPr>
+                </a:tc>
+              </a:tr>
+              <a:tr h="329184">
+                <a:tc>
+                  <a:txBody>
+                    <a:bodyPr/>
+                    <a:lstStyle/>
+                    <a:p>
+                      <a:pPr algn="l" marL="0" indent="0">
+                        <a:lnSpc>
+                          <a:spcPct val="100000"/>
+                        </a:lnSpc>
+                        <a:spcAft>
+                          <a:spcPts val="0"/>
+                        </a:spcAft>
+                        <a:buNone/>
+                      </a:pPr>
+                      <a:r>
+                        <a:rPr lang="ru-RU" sz="900" b="0" dirty="0">
+                          <a:solidFill>
+                            <a:srgbClr val="000000"/>
+                          </a:solidFill>
+                          <a:latin typeface="Onest Medium" pitchFamily="2" charset="-52"/>
+                        </a:rPr>
+                        <a:t xml:space="preserve">Средняя оценка жителем результата, шкала 1–5</a:t>
+                      </a:r>
+                    </a:p>
+                  </a:txBody>
+                  <a:tcPr marL="45720" marR="45720" marT="27432" marB="27432" anchor="ctr">
+                    <a:lnL w="12700">
+                      <a:noFill/>
+                    </a:lnL>
+                    <a:lnR w="12700">
+                      <a:noFill/>
+                    </a:lnR>
+                    <a:lnT w="12700">
+                      <a:noFill/>
+                    </a:lnT>
+                    <a:lnB w="12700">
+                      <a:noFill/>
+                    </a:lnB>
+                    <a:noFill/>
+                  </a:tcPr>
+                </a:tc>
+                <a:tc>
+                  <a:txBody>
+                    <a:bodyPr/>
+                    <a:lstStyle/>
+                    <a:p>
+                      <a:pPr algn="ctr" marL="0" indent="0">
+                        <a:lnSpc>
+                          <a:spcPct val="100000"/>
+                        </a:lnSpc>
+                        <a:spcAft>
+                          <a:spcPts val="0"/>
+                        </a:spcAft>
+                        <a:buNone/>
+                      </a:pPr>
+                      <a:r>
+                        <a:rPr lang="ru-RU" sz="900" b="0" dirty="0">
+                          <a:solidFill>
+                            <a:srgbClr val="000000"/>
+                          </a:solidFill>
+                          <a:latin typeface="Onest Medium" pitchFamily="2" charset="-52"/>
+                        </a:rPr>
+                        <a:t xml:space="preserve">балл</a:t>
+                      </a:r>
+                    </a:p>
+                  </a:txBody>
+                  <a:tcPr marL="45720" marR="45720" marT="27432" marB="27432" anchor="ctr">
+                    <a:lnL w="12700">
+                      <a:noFill/>
+                    </a:lnL>
+                    <a:lnR w="12700">
+                      <a:noFill/>
+                    </a:lnR>
+                    <a:lnT w="12700">
+                      <a:noFill/>
+                    </a:lnT>
+                    <a:lnB w="12700">
+                      <a:noFill/>
+                    </a:lnB>
+                    <a:noFill/>
+                  </a:tcPr>
+                </a:tc>
+                <a:tc>
+                  <a:txBody>
+                    <a:bodyPr/>
+                    <a:lstStyle/>
+                    <a:p>
+                      <a:pPr algn="ctr" marL="0" indent="0">
+                        <a:lnSpc>
+                          <a:spcPct val="100000"/>
+                        </a:lnSpc>
+                        <a:spcAft>
+                          <a:spcPts val="0"/>
+                        </a:spcAft>
+                        <a:buNone/>
+                      </a:pPr>
+                      <a:r>
+                        <a:rPr lang="ru-RU" sz="900" b="0" dirty="0">
+                          <a:solidFill>
+                            <a:srgbClr val="6C5CE0"/>
+                          </a:solidFill>
+                          <a:latin typeface="Onest Medium" pitchFamily="2" charset="-52"/>
+                        </a:rPr>
+                        <a:t xml:space="preserve">—</a:t>
+                      </a:r>
+                    </a:p>
+                  </a:txBody>
+                  <a:tcPr marL="45720" marR="45720" marT="27432" marB="27432" anchor="ctr">
+                    <a:lnL w="12700">
+                      <a:noFill/>
+                    </a:lnL>
+                    <a:lnR w="12700">
+                      <a:noFill/>
+                    </a:lnR>
+                    <a:lnT w="12700">
+                      <a:noFill/>
+                    </a:lnT>
+                    <a:lnB w="12700">
+                      <a:noFill/>
+                    </a:lnB>
+                    <a:noFill/>
+                  </a:tcPr>
+                </a:tc>
+                <a:tc>
+                  <a:txBody>
+                    <a:bodyPr/>
+                    <a:lstStyle/>
+                    <a:p>
+                      <a:pPr algn="ctr" marL="0" indent="0">
+                        <a:lnSpc>
+                          <a:spcPct val="100000"/>
+                        </a:lnSpc>
+                        <a:spcAft>
+                          <a:spcPts val="0"/>
+                        </a:spcAft>
+                        <a:buNone/>
+                      </a:pPr>
+                      <a:r>
+                        <a:rPr lang="ru-RU" sz="900" b="1" dirty="0">
+                          <a:solidFill>
+                            <a:srgbClr val="000000"/>
+                          </a:solidFill>
+                          <a:latin typeface="Onest Black" pitchFamily="2" charset="-52"/>
+                        </a:rPr>
+                        <a:t xml:space="preserve">не менее 4,0</a:t>
+                      </a:r>
+                    </a:p>
+                  </a:txBody>
+                  <a:tcPr marL="45720" marR="45720" marT="27432" marB="27432" anchor="ctr">
+                    <a:lnL w="12700">
+                      <a:noFill/>
+                    </a:lnL>
+                    <a:lnR w="12700">
+                      <a:noFill/>
+                    </a:lnR>
+                    <a:lnT w="12700">
+                      <a:noFill/>
+                    </a:lnT>
+                    <a:lnB w="12700">
+                      <a:noFill/>
+                    </a:lnB>
+                    <a:noFill/>
                   </a:tcPr>
                 </a:tc>
               </a:tr>
@@ -12486,7 +13272,7 @@
         </p:nvSpPr>
         <p:spPr>
           <a:xfrm>
-            <a:off x="347472" y="6336792"/>
+            <a:off x="347472" y="6665976"/>
             <a:ext cx="5029200" cy="320040"/>
           </a:xfrm>
           <a:prstGeom prst="rect">
@@ -14806,8 +15592,8 @@
         </p:blipFill>
         <p:spPr>
           <a:xfrm>
-            <a:off x="1302376" y="960120"/>
-            <a:ext cx="9593345" cy="5779008"/>
+            <a:off x="924381" y="960120"/>
+            <a:ext cx="10349335" cy="5779008"/>
           </a:xfrm>
           <a:prstGeom prst="rect">
             <a:avLst/>
@@ -15416,8 +16202,8 @@
         </p:blipFill>
         <p:spPr>
           <a:xfrm>
-            <a:off x="1322926" y="960120"/>
-            <a:ext cx="9552243" cy="5779008"/>
+            <a:off x="1108516" y="960120"/>
+            <a:ext cx="9981064" cy="5779008"/>
           </a:xfrm>
           <a:prstGeom prst="rect">
             <a:avLst/>
@@ -15712,8 +16498,8 @@
           <p:nvPr/>
         </p:nvGraphicFramePr>
         <p:xfrm>
-          <a:off x="338328" y="1280160"/>
-          <a:ext cx="11301984" cy="5047488"/>
+          <a:off x="338328" y="1225296"/>
+          <a:ext cx="11301984" cy="4864608"/>
         </p:xfrm>
         <a:graphic>
           <a:graphicData uri="http://schemas.openxmlformats.org/drawingml/2006/table">
@@ -15726,7 +16512,7 @@
                 <a:gridCol w="2249424"/>
                 <a:gridCol w="2194560"/>
               </a:tblGrid>
-              <a:tr h="841248">
+              <a:tr h="694944">
                 <a:tc>
                   <a:txBody>
                     <a:bodyPr/>
@@ -15983,7 +16769,7 @@
                   </a:tcPr>
                 </a:tc>
               </a:tr>
-              <a:tr h="841248">
+              <a:tr h="694944">
                 <a:tc>
                   <a:txBody>
                     <a:bodyPr/>
@@ -16056,7 +16842,7 @@
                           </a:solidFill>
                           <a:latin typeface="Onest Regular" pitchFamily="2" charset="-52"/>
                         </a:rPr>
-                        <a:t xml:space="preserve">Разрозненные каналы приёма, ручная регистрация</a:t>
+                        <a:t xml:space="preserve">Проблема выявляется только по жалобе жителя: планового обхода территории нет</a:t>
                       </a:r>
                     </a:p>
                   </a:txBody>
@@ -16107,7 +16893,7 @@
                           </a:solidFill>
                           <a:latin typeface="Onest Medium" pitchFamily="2" charset="-52"/>
                         </a:rPr>
-                        <a:t xml:space="preserve">Единый цифровой канал приёма в мессенджере MAX</a:t>
+                        <a:t xml:space="preserve">Институт наблюдателей: активные жители и сотрудники получают роль в сервисе и подают заявки с обхода</a:t>
                       </a:r>
                     </a:p>
                   </a:txBody>
@@ -16158,7 +16944,7 @@
                           </a:solidFill>
                           <a:latin typeface="Onest Medium" pitchFamily="2" charset="-52"/>
                         </a:rPr>
-                        <a:t xml:space="preserve">Уваров Г.Г.</a:t>
+                        <a:t xml:space="preserve">Степаненко А.О.</a:t>
                       </a:r>
                     </a:p>
                     <a:p>
@@ -16178,7 +16964,7 @@
                           </a:solidFill>
                           <a:latin typeface="Onest Medium" pitchFamily="2" charset="-52"/>
                         </a:rPr>
-                        <a:t xml:space="preserve">Степаненко А.О.</a:t>
+                        <a:t xml:space="preserve">Воронцова Д.С.</a:t>
                       </a:r>
                     </a:p>
                   </a:txBody>
@@ -16229,7 +17015,7 @@
                           </a:solidFill>
                           <a:latin typeface="Onest Medium" pitchFamily="2" charset="-52"/>
                         </a:rPr>
-                        <a:t xml:space="preserve">08.09 — 12.09.2026</a:t>
+                        <a:t xml:space="preserve">08.09 — 19.09.2026</a:t>
                       </a:r>
                     </a:p>
                   </a:txBody>
@@ -16260,7 +17046,7 @@
                   </a:tcPr>
                 </a:tc>
               </a:tr>
-              <a:tr h="841248">
+              <a:tr h="694944">
                 <a:tc>
                   <a:txBody>
                     <a:bodyPr/>
@@ -16333,7 +17119,7 @@
                           </a:solidFill>
                           <a:latin typeface="Onest Regular" pitchFamily="2" charset="-52"/>
                         </a:rPr>
-                        <a:t xml:space="preserve">Ручное определение сути, адреса и ответственного</a:t>
+                        <a:t xml:space="preserve">Разрозненные каналы приёма, ручная регистрация</a:t>
                       </a:r>
                     </a:p>
                   </a:txBody>
@@ -16384,7 +17170,7 @@
                           </a:solidFill>
                           <a:latin typeface="Onest Medium" pitchFamily="2" charset="-52"/>
                         </a:rPr>
-                        <a:t xml:space="preserve">ИИ-классификация обращения, каскад геопривязки, слова-подсказки категорий</a:t>
+                        <a:t xml:space="preserve">Единый цифровой канал приёма в мессенджере MAX</a:t>
                       </a:r>
                     </a:p>
                   </a:txBody>
@@ -16455,7 +17241,7 @@
                           </a:solidFill>
                           <a:latin typeface="Onest Medium" pitchFamily="2" charset="-52"/>
                         </a:rPr>
-                        <a:t xml:space="preserve">Вихрова А.В.</a:t>
+                        <a:t xml:space="preserve">Степаненко А.О.</a:t>
                       </a:r>
                     </a:p>
                   </a:txBody>
@@ -16506,7 +17292,7 @@
                           </a:solidFill>
                           <a:latin typeface="Onest Medium" pitchFamily="2" charset="-52"/>
                         </a:rPr>
-                        <a:t xml:space="preserve">08.09 — 16.09.2026</a:t>
+                        <a:t xml:space="preserve">08.09 — 12.09.2026</a:t>
                       </a:r>
                     </a:p>
                   </a:txBody>
@@ -16537,7 +17323,7 @@
                   </a:tcPr>
                 </a:tc>
               </a:tr>
-              <a:tr h="841248">
+              <a:tr h="694944">
                 <a:tc>
                   <a:txBody>
                     <a:bodyPr/>
@@ -16610,7 +17396,7 @@
                           </a:solidFill>
                           <a:latin typeface="Onest Regular" pitchFamily="2" charset="-52"/>
                         </a:rPr>
-                        <a:t xml:space="preserve">Потеря сообщений при передаче, отсутствие учёта сроков</a:t>
+                        <a:t xml:space="preserve">Ручное определение сути, адреса и ответственного</a:t>
                       </a:r>
                     </a:p>
                   </a:txBody>
@@ -16661,7 +17447,7 @@
                           </a:solidFill>
                           <a:latin typeface="Onest Medium" pitchFamily="2" charset="-52"/>
                         </a:rPr>
-                        <a:t xml:space="preserve">Маршрутизация по цепочкам ответственных, SLA-таймеры, ступенчатая эскалация</a:t>
+                        <a:t xml:space="preserve">ИИ-классификация обращения, каскад геопривязки, слова-подсказки категорий</a:t>
                       </a:r>
                     </a:p>
                   </a:txBody>
@@ -16712,7 +17498,27 @@
                           </a:solidFill>
                           <a:latin typeface="Onest Medium" pitchFamily="2" charset="-52"/>
                         </a:rPr>
-                        <a:t xml:space="preserve">Воронцова Д.С.</a:t>
+                        <a:t xml:space="preserve">Уваров Г.Г.</a:t>
+                      </a:r>
+                    </a:p>
+                    <a:p>
+                      <a:pPr algn="ctr" marL="0" indent="0">
+                        <a:lnSpc>
+                          <a:spcPct val="105000"/>
+                        </a:lnSpc>
+                        <a:spcAft>
+                          <a:spcPts val="0"/>
+                        </a:spcAft>
+                        <a:buNone/>
+                      </a:pPr>
+                      <a:r>
+                        <a:rPr lang="ru-RU" sz="880" b="0" dirty="0">
+                          <a:solidFill>
+                            <a:srgbClr val="000000"/>
+                          </a:solidFill>
+                          <a:latin typeface="Onest Medium" pitchFamily="2" charset="-52"/>
+                        </a:rPr>
+                        <a:t xml:space="preserve">Вихрова А.В.</a:t>
                       </a:r>
                     </a:p>
                   </a:txBody>
@@ -16763,7 +17569,7 @@
                           </a:solidFill>
                           <a:latin typeface="Onest Medium" pitchFamily="2" charset="-52"/>
                         </a:rPr>
-                        <a:t xml:space="preserve">14.09 — 19.09.2026</a:t>
+                        <a:t xml:space="preserve">08.09 — 16.09.2026</a:t>
                       </a:r>
                     </a:p>
                   </a:txBody>
@@ -16794,7 +17600,7 @@
                   </a:tcPr>
                 </a:tc>
               </a:tr>
-              <a:tr h="841248">
+              <a:tr h="694944">
                 <a:tc>
                   <a:txBody>
                     <a:bodyPr/>
@@ -16867,7 +17673,7 @@
                           </a:solidFill>
                           <a:latin typeface="Onest Regular" pitchFamily="2" charset="-52"/>
                         </a:rPr>
-                        <a:t xml:space="preserve">Дублирование работ по повторным обращениям</a:t>
+                        <a:t xml:space="preserve">Потеря сообщений при передаче, отсутствие учёта сроков</a:t>
                       </a:r>
                     </a:p>
                   </a:txBody>
@@ -16918,7 +17724,7 @@
                           </a:solidFill>
                           <a:latin typeface="Onest Medium" pitchFamily="2" charset="-52"/>
                         </a:rPr>
-                        <a:t xml:space="preserve">Дедупликация по координатам и нормализованному адресу</a:t>
+                        <a:t xml:space="preserve">Маршрутизация по цепочкам ответственных, SLA-таймеры, ступенчатая эскалация</a:t>
                       </a:r>
                     </a:p>
                   </a:txBody>
@@ -16969,7 +17775,7 @@
                           </a:solidFill>
                           <a:latin typeface="Onest Medium" pitchFamily="2" charset="-52"/>
                         </a:rPr>
-                        <a:t xml:space="preserve">Уваров Г.Г.</a:t>
+                        <a:t xml:space="preserve">Воронцова Д.С.</a:t>
                       </a:r>
                     </a:p>
                   </a:txBody>
@@ -17020,7 +17826,7 @@
                           </a:solidFill>
                           <a:latin typeface="Onest Medium" pitchFamily="2" charset="-52"/>
                         </a:rPr>
-                        <a:t xml:space="preserve">15.09 — 19.09.2026</a:t>
+                        <a:t xml:space="preserve">14.09 — 19.09.2026</a:t>
                       </a:r>
                     </a:p>
                   </a:txBody>
@@ -17051,7 +17857,7 @@
                   </a:tcPr>
                 </a:tc>
               </a:tr>
-              <a:tr h="841248">
+              <a:tr h="694944">
                 <a:tc>
                   <a:txBody>
                     <a:bodyPr/>
@@ -17124,7 +17930,264 @@
                           </a:solidFill>
                           <a:latin typeface="Onest Regular" pitchFamily="2" charset="-52"/>
                         </a:rPr>
-                        <a:t xml:space="preserve">Формальное закрытие, отсутствие обратной связи гражданину</a:t>
+                        <a:t xml:space="preserve">Дублирование работ по повторным обращениям</a:t>
+                      </a:r>
+                    </a:p>
+                  </a:txBody>
+                  <a:tcPr marL="45720" marR="45720" marT="27432" marB="27432" anchor="ctr">
+                    <a:lnL w="6350" cap="flat">
+                      <a:solidFill>
+                        <a:srgbClr val="C9C2EE"/>
+                      </a:solidFill>
+                    </a:lnL>
+                    <a:lnR w="6350" cap="flat">
+                      <a:solidFill>
+                        <a:srgbClr val="C9C2EE"/>
+                      </a:solidFill>
+                    </a:lnR>
+                    <a:lnT w="6350" cap="flat">
+                      <a:solidFill>
+                        <a:srgbClr val="C9C2EE"/>
+                      </a:solidFill>
+                    </a:lnT>
+                    <a:lnB w="6350" cap="flat">
+                      <a:solidFill>
+                        <a:srgbClr val="C9C2EE"/>
+                      </a:solidFill>
+                    </a:lnB>
+                    <a:solidFill>
+                      <a:srgbClr val="FFFFFF"/>
+                    </a:solidFill>
+                  </a:tcPr>
+                </a:tc>
+                <a:tc>
+                  <a:txBody>
+                    <a:bodyPr/>
+                    <a:lstStyle/>
+                    <a:p>
+                      <a:pPr algn="l" marL="0" indent="0">
+                        <a:lnSpc>
+                          <a:spcPct val="105000"/>
+                        </a:lnSpc>
+                        <a:spcAft>
+                          <a:spcPts val="0"/>
+                        </a:spcAft>
+                        <a:buNone/>
+                      </a:pPr>
+                      <a:r>
+                        <a:rPr lang="ru-RU" sz="900" b="0" dirty="0">
+                          <a:solidFill>
+                            <a:srgbClr val="000000"/>
+                          </a:solidFill>
+                          <a:latin typeface="Onest Medium" pitchFamily="2" charset="-52"/>
+                        </a:rPr>
+                        <a:t xml:space="preserve">Дедупликация по координатам и нормализованному адресу</a:t>
+                      </a:r>
+                    </a:p>
+                  </a:txBody>
+                  <a:tcPr marL="45720" marR="45720" marT="27432" marB="27432" anchor="ctr">
+                    <a:lnL w="6350" cap="flat">
+                      <a:solidFill>
+                        <a:srgbClr val="C9C2EE"/>
+                      </a:solidFill>
+                    </a:lnL>
+                    <a:lnR w="6350" cap="flat">
+                      <a:solidFill>
+                        <a:srgbClr val="C9C2EE"/>
+                      </a:solidFill>
+                    </a:lnR>
+                    <a:lnT w="6350" cap="flat">
+                      <a:solidFill>
+                        <a:srgbClr val="C9C2EE"/>
+                      </a:solidFill>
+                    </a:lnT>
+                    <a:lnB w="6350" cap="flat">
+                      <a:solidFill>
+                        <a:srgbClr val="C9C2EE"/>
+                      </a:solidFill>
+                    </a:lnB>
+                    <a:solidFill>
+                      <a:srgbClr val="FFFFFF"/>
+                    </a:solidFill>
+                  </a:tcPr>
+                </a:tc>
+                <a:tc>
+                  <a:txBody>
+                    <a:bodyPr/>
+                    <a:lstStyle/>
+                    <a:p>
+                      <a:pPr algn="ctr" marL="0" indent="0">
+                        <a:lnSpc>
+                          <a:spcPct val="105000"/>
+                        </a:lnSpc>
+                        <a:spcAft>
+                          <a:spcPts val="0"/>
+                        </a:spcAft>
+                        <a:buNone/>
+                      </a:pPr>
+                      <a:r>
+                        <a:rPr lang="ru-RU" sz="880" b="0" dirty="0">
+                          <a:solidFill>
+                            <a:srgbClr val="000000"/>
+                          </a:solidFill>
+                          <a:latin typeface="Onest Medium" pitchFamily="2" charset="-52"/>
+                        </a:rPr>
+                        <a:t xml:space="preserve">Уваров Г.Г.</a:t>
+                      </a:r>
+                    </a:p>
+                  </a:txBody>
+                  <a:tcPr marL="45720" marR="45720" marT="27432" marB="27432" anchor="ctr">
+                    <a:lnL w="6350" cap="flat">
+                      <a:solidFill>
+                        <a:srgbClr val="C9C2EE"/>
+                      </a:solidFill>
+                    </a:lnL>
+                    <a:lnR w="6350" cap="flat">
+                      <a:solidFill>
+                        <a:srgbClr val="C9C2EE"/>
+                      </a:solidFill>
+                    </a:lnR>
+                    <a:lnT w="6350" cap="flat">
+                      <a:solidFill>
+                        <a:srgbClr val="C9C2EE"/>
+                      </a:solidFill>
+                    </a:lnT>
+                    <a:lnB w="6350" cap="flat">
+                      <a:solidFill>
+                        <a:srgbClr val="C9C2EE"/>
+                      </a:solidFill>
+                    </a:lnB>
+                    <a:solidFill>
+                      <a:srgbClr val="FFFFFF"/>
+                    </a:solidFill>
+                  </a:tcPr>
+                </a:tc>
+                <a:tc>
+                  <a:txBody>
+                    <a:bodyPr/>
+                    <a:lstStyle/>
+                    <a:p>
+                      <a:pPr algn="ctr" marL="0" indent="0">
+                        <a:lnSpc>
+                          <a:spcPct val="105000"/>
+                        </a:lnSpc>
+                        <a:spcAft>
+                          <a:spcPts val="0"/>
+                        </a:spcAft>
+                        <a:buNone/>
+                      </a:pPr>
+                      <a:r>
+                        <a:rPr lang="ru-RU" sz="880" b="0" dirty="0">
+                          <a:solidFill>
+                            <a:srgbClr val="000000"/>
+                          </a:solidFill>
+                          <a:latin typeface="Onest Medium" pitchFamily="2" charset="-52"/>
+                        </a:rPr>
+                        <a:t xml:space="preserve">15.09 — 19.09.2026</a:t>
+                      </a:r>
+                    </a:p>
+                  </a:txBody>
+                  <a:tcPr marL="45720" marR="45720" marT="27432" marB="27432" anchor="ctr">
+                    <a:lnL w="6350" cap="flat">
+                      <a:solidFill>
+                        <a:srgbClr val="C9C2EE"/>
+                      </a:solidFill>
+                    </a:lnL>
+                    <a:lnR w="6350" cap="flat">
+                      <a:solidFill>
+                        <a:srgbClr val="C9C2EE"/>
+                      </a:solidFill>
+                    </a:lnR>
+                    <a:lnT w="6350" cap="flat">
+                      <a:solidFill>
+                        <a:srgbClr val="C9C2EE"/>
+                      </a:solidFill>
+                    </a:lnT>
+                    <a:lnB w="6350" cap="flat">
+                      <a:solidFill>
+                        <a:srgbClr val="C9C2EE"/>
+                      </a:solidFill>
+                    </a:lnB>
+                    <a:solidFill>
+                      <a:srgbClr val="FFFFFF"/>
+                    </a:solidFill>
+                  </a:tcPr>
+                </a:tc>
+              </a:tr>
+              <a:tr h="694944">
+                <a:tc>
+                  <a:txBody>
+                    <a:bodyPr/>
+                    <a:lstStyle/>
+                    <a:p>
+                      <a:pPr algn="ctr" marL="0" indent="0">
+                        <a:lnSpc>
+                          <a:spcPct val="100000"/>
+                        </a:lnSpc>
+                        <a:spcAft>
+                          <a:spcPts val="0"/>
+                        </a:spcAft>
+                        <a:buNone/>
+                      </a:pPr>
+                      <a:r>
+                        <a:rPr lang="ru-RU" sz="900" b="0" dirty="0">
+                          <a:solidFill>
+                            <a:srgbClr val="000000"/>
+                          </a:solidFill>
+                          <a:latin typeface="Onest Medium" pitchFamily="2" charset="-52"/>
+                        </a:rPr>
+                        <a:t xml:space="preserve">6</a:t>
+                      </a:r>
+                    </a:p>
+                  </a:txBody>
+                  <a:tcPr marL="45720" marR="45720" marT="27432" marB="27432" anchor="ctr">
+                    <a:lnL w="6350" cap="flat">
+                      <a:solidFill>
+                        <a:srgbClr val="C9C2EE"/>
+                      </a:solidFill>
+                    </a:lnL>
+                    <a:lnR w="6350" cap="flat">
+                      <a:solidFill>
+                        <a:srgbClr val="C9C2EE"/>
+                      </a:solidFill>
+                    </a:lnR>
+                    <a:lnT w="6350" cap="flat">
+                      <a:solidFill>
+                        <a:srgbClr val="C9C2EE"/>
+                      </a:solidFill>
+                    </a:lnT>
+                    <a:lnB w="6350" cap="flat">
+                      <a:solidFill>
+                        <a:srgbClr val="C9C2EE"/>
+                      </a:solidFill>
+                    </a:lnB>
+                    <a:solidFill>
+                      <a:srgbClr val="FFFFFF"/>
+                    </a:solidFill>
+                  </a:tcPr>
+                </a:tc>
+                <a:tc>
+                  <a:txBody>
+                    <a:bodyPr/>
+                    <a:lstStyle/>
+                    <a:p>
+                      <a:pPr algn="l" marL="0" indent="0">
+                        <a:lnSpc>
+                          <a:spcPct val="105000"/>
+                        </a:lnSpc>
+                        <a:spcAft>
+                          <a:spcPts val="0"/>
+                        </a:spcAft>
+                        <a:buNone/>
+                      </a:pPr>
+                      <a:r>
+                        <a:rPr lang="ru-RU" sz="900" b="0" dirty="0">
+                          <a:solidFill>
+                            <a:srgbClr val="595959"/>
+                          </a:solidFill>
+                          <a:latin typeface="Onest Regular" pitchFamily="2" charset="-52"/>
+                        </a:rPr>
+                        <a:t xml:space="preserve">Формальное закрытие, отсутствие обратной связи автору заявки</a:t>
                       </a:r>
                     </a:p>
                   </a:txBody>
@@ -17646,8 +18709,8 @@
           <p:nvPr/>
         </p:nvGraphicFramePr>
         <p:xfrm>
-          <a:off x="237744" y="1581912"/>
-          <a:ext cx="11576304" cy="4279392"/>
+          <a:off x="237744" y="1490472"/>
+          <a:ext cx="11576304" cy="4608576"/>
         </p:xfrm>
         <a:graphic>
           <a:graphicData uri="http://schemas.openxmlformats.org/drawingml/2006/table">
@@ -17658,7 +18721,7 @@
                 <a:gridCol w="4581144"/>
                 <a:gridCol w="6291072"/>
               </a:tblGrid>
-              <a:tr h="713232">
+              <a:tr h="658368">
                 <a:tc>
                   <a:txBody>
                     <a:bodyPr/>
@@ -17813,7 +18876,7 @@
                   </a:tcPr>
                 </a:tc>
               </a:tr>
-              <a:tr h="713232">
+              <a:tr h="658368">
                 <a:tc>
                   <a:txBody>
                     <a:bodyPr/>
@@ -17886,7 +18949,7 @@
                           </a:solidFill>
                           <a:latin typeface="Onest Medium" pitchFamily="2" charset="-52"/>
                         </a:rPr>
-                        <a:t xml:space="preserve">Единый цифровой канал приёма в мессенджере MAX</a:t>
+                        <a:t xml:space="preserve">Институт наблюдателей: активные жители и сотрудники получают роль в сервисе и подают заявки с обхода</a:t>
                       </a:r>
                     </a:p>
                   </a:txBody>
@@ -17937,7 +19000,7 @@
                           </a:solidFill>
                           <a:latin typeface="Onest Regular" pitchFamily="2" charset="-52"/>
                         </a:rPr>
-                        <a:t xml:space="preserve">Регистрация без участия сотрудника, время регистрации — секунды</a:t>
+                        <a:t xml:space="preserve">Проблема попадает в работу до обращения жителя; ресурс активных жителей включён в процесс</a:t>
                       </a:r>
                     </a:p>
                   </a:txBody>
@@ -17968,7 +19031,7 @@
                   </a:tcPr>
                 </a:tc>
               </a:tr>
-              <a:tr h="713232">
+              <a:tr h="658368">
                 <a:tc>
                   <a:txBody>
                     <a:bodyPr/>
@@ -18041,7 +19104,7 @@
                           </a:solidFill>
                           <a:latin typeface="Onest Medium" pitchFamily="2" charset="-52"/>
                         </a:rPr>
-                        <a:t xml:space="preserve">ИИ-классификация обращения, каскад геопривязки, слова-подсказки категорий</a:t>
+                        <a:t xml:space="preserve">Единый цифровой канал приёма в мессенджере MAX</a:t>
                       </a:r>
                     </a:p>
                   </a:txBody>
@@ -18092,7 +19155,7 @@
                           </a:solidFill>
                           <a:latin typeface="Onest Regular" pitchFamily="2" charset="-52"/>
                         </a:rPr>
-                        <a:t xml:space="preserve">Категория, адрес и срочность определяются автоматически</a:t>
+                        <a:t xml:space="preserve">Регистрация без участия сотрудника, время регистрации — секунды</a:t>
                       </a:r>
                     </a:p>
                   </a:txBody>
@@ -18123,7 +19186,7 @@
                   </a:tcPr>
                 </a:tc>
               </a:tr>
-              <a:tr h="713232">
+              <a:tr h="658368">
                 <a:tc>
                   <a:txBody>
                     <a:bodyPr/>
@@ -18196,7 +19259,7 @@
                           </a:solidFill>
                           <a:latin typeface="Onest Medium" pitchFamily="2" charset="-52"/>
                         </a:rPr>
-                        <a:t xml:space="preserve">Маршрутизация по цепочкам ответственных, SLA-таймеры, ступенчатая эскалация</a:t>
+                        <a:t xml:space="preserve">ИИ-классификация обращения, каскад геопривязки, слова-подсказки категорий</a:t>
                       </a:r>
                     </a:p>
                   </a:txBody>
@@ -18247,7 +19310,7 @@
                           </a:solidFill>
                           <a:latin typeface="Onest Regular" pitchFamily="2" charset="-52"/>
                         </a:rPr>
-                        <a:t xml:space="preserve">Доведение до исполнителя без ручной передачи, срок на каждой заявке</a:t>
+                        <a:t xml:space="preserve">Категория, адрес и срочность определяются автоматически</a:t>
                       </a:r>
                     </a:p>
                   </a:txBody>
@@ -18278,7 +19341,7 @@
                   </a:tcPr>
                 </a:tc>
               </a:tr>
-              <a:tr h="713232">
+              <a:tr h="658368">
                 <a:tc>
                   <a:txBody>
                     <a:bodyPr/>
@@ -18351,7 +19414,7 @@
                           </a:solidFill>
                           <a:latin typeface="Onest Medium" pitchFamily="2" charset="-52"/>
                         </a:rPr>
-                        <a:t xml:space="preserve">Дедупликация по координатам и нормализованному адресу</a:t>
+                        <a:t xml:space="preserve">Маршрутизация по цепочкам ответственных, SLA-таймеры, ступенчатая эскалация</a:t>
                       </a:r>
                     </a:p>
                   </a:txBody>
@@ -18402,7 +19465,7 @@
                           </a:solidFill>
                           <a:latin typeface="Onest Regular" pitchFamily="2" charset="-52"/>
                         </a:rPr>
-                        <a:t xml:space="preserve">Обращения об одной проблеме склеиваются автоматически</a:t>
+                        <a:t xml:space="preserve">Доведение до исполнителя без ручной передачи, срок на каждой заявке</a:t>
                       </a:r>
                     </a:p>
                   </a:txBody>
@@ -18433,7 +19496,7 @@
                   </a:tcPr>
                 </a:tc>
               </a:tr>
-              <a:tr h="713232">
+              <a:tr h="658368">
                 <a:tc>
                   <a:txBody>
                     <a:bodyPr/>
@@ -18456,6 +19519,161 @@
                           <a:latin typeface="Onest Medium" pitchFamily="2" charset="-52"/>
                         </a:rPr>
                         <a:t xml:space="preserve">5</a:t>
+                      </a:r>
+                    </a:p>
+                  </a:txBody>
+                  <a:tcPr marL="45720" marR="45720" marT="27432" marB="27432" anchor="ctr">
+                    <a:lnL w="6350" cap="flat">
+                      <a:solidFill>
+                        <a:srgbClr val="C9C2EE"/>
+                      </a:solidFill>
+                    </a:lnL>
+                    <a:lnR w="6350" cap="flat">
+                      <a:solidFill>
+                        <a:srgbClr val="C9C2EE"/>
+                      </a:solidFill>
+                    </a:lnR>
+                    <a:lnT w="6350" cap="flat">
+                      <a:solidFill>
+                        <a:srgbClr val="C9C2EE"/>
+                      </a:solidFill>
+                    </a:lnT>
+                    <a:lnB w="6350" cap="flat">
+                      <a:solidFill>
+                        <a:srgbClr val="C9C2EE"/>
+                      </a:solidFill>
+                    </a:lnB>
+                    <a:solidFill>
+                      <a:srgbClr val="FFFFFF"/>
+                    </a:solidFill>
+                  </a:tcPr>
+                </a:tc>
+                <a:tc>
+                  <a:txBody>
+                    <a:bodyPr/>
+                    <a:lstStyle/>
+                    <a:p>
+                      <a:pPr algn="l" marL="0" indent="0">
+                        <a:lnSpc>
+                          <a:spcPct val="105000"/>
+                        </a:lnSpc>
+                        <a:spcAft>
+                          <a:spcPts val="0"/>
+                        </a:spcAft>
+                        <a:buNone/>
+                      </a:pPr>
+                      <a:r>
+                        <a:rPr lang="ru-RU" sz="950" b="0" dirty="0">
+                          <a:solidFill>
+                            <a:srgbClr val="000000"/>
+                          </a:solidFill>
+                          <a:latin typeface="Onest Medium" pitchFamily="2" charset="-52"/>
+                        </a:rPr>
+                        <a:t xml:space="preserve">Дедупликация по координатам и нормализованному адресу</a:t>
+                      </a:r>
+                    </a:p>
+                  </a:txBody>
+                  <a:tcPr marL="45720" marR="45720" marT="27432" marB="27432" anchor="ctr">
+                    <a:lnL w="6350" cap="flat">
+                      <a:solidFill>
+                        <a:srgbClr val="C9C2EE"/>
+                      </a:solidFill>
+                    </a:lnL>
+                    <a:lnR w="6350" cap="flat">
+                      <a:solidFill>
+                        <a:srgbClr val="C9C2EE"/>
+                      </a:solidFill>
+                    </a:lnR>
+                    <a:lnT w="6350" cap="flat">
+                      <a:solidFill>
+                        <a:srgbClr val="C9C2EE"/>
+                      </a:solidFill>
+                    </a:lnT>
+                    <a:lnB w="6350" cap="flat">
+                      <a:solidFill>
+                        <a:srgbClr val="C9C2EE"/>
+                      </a:solidFill>
+                    </a:lnB>
+                    <a:solidFill>
+                      <a:srgbClr val="FFFFFF"/>
+                    </a:solidFill>
+                  </a:tcPr>
+                </a:tc>
+                <a:tc>
+                  <a:txBody>
+                    <a:bodyPr/>
+                    <a:lstStyle/>
+                    <a:p>
+                      <a:pPr algn="l" marL="0" indent="0">
+                        <a:lnSpc>
+                          <a:spcPct val="105000"/>
+                        </a:lnSpc>
+                        <a:spcAft>
+                          <a:spcPts val="0"/>
+                        </a:spcAft>
+                        <a:buNone/>
+                      </a:pPr>
+                      <a:r>
+                        <a:rPr lang="ru-RU" sz="950" b="0" dirty="0">
+                          <a:solidFill>
+                            <a:srgbClr val="595959"/>
+                          </a:solidFill>
+                          <a:latin typeface="Onest Regular" pitchFamily="2" charset="-52"/>
+                        </a:rPr>
+                        <a:t xml:space="preserve">Обращения об одной проблеме склеиваются автоматически</a:t>
+                      </a:r>
+                    </a:p>
+                  </a:txBody>
+                  <a:tcPr marL="45720" marR="45720" marT="27432" marB="27432" anchor="ctr">
+                    <a:lnL w="6350" cap="flat">
+                      <a:solidFill>
+                        <a:srgbClr val="C9C2EE"/>
+                      </a:solidFill>
+                    </a:lnL>
+                    <a:lnR w="6350" cap="flat">
+                      <a:solidFill>
+                        <a:srgbClr val="C9C2EE"/>
+                      </a:solidFill>
+                    </a:lnR>
+                    <a:lnT w="6350" cap="flat">
+                      <a:solidFill>
+                        <a:srgbClr val="C9C2EE"/>
+                      </a:solidFill>
+                    </a:lnT>
+                    <a:lnB w="6350" cap="flat">
+                      <a:solidFill>
+                        <a:srgbClr val="C9C2EE"/>
+                      </a:solidFill>
+                    </a:lnB>
+                    <a:solidFill>
+                      <a:srgbClr val="FFFFFF"/>
+                    </a:solidFill>
+                  </a:tcPr>
+                </a:tc>
+              </a:tr>
+              <a:tr h="658368">
+                <a:tc>
+                  <a:txBody>
+                    <a:bodyPr/>
+                    <a:lstStyle/>
+                    <a:p>
+                      <a:pPr algn="ctr" marL="0" indent="0">
+                        <a:lnSpc>
+                          <a:spcPct val="100000"/>
+                        </a:lnSpc>
+                        <a:spcAft>
+                          <a:spcPts val="0"/>
+                        </a:spcAft>
+                        <a:buNone/>
+                      </a:pPr>
+                      <a:r>
+                        <a:rPr lang="ru-RU" sz="950" b="0" dirty="0">
+                          <a:solidFill>
+                            <a:srgbClr val="000000"/>
+                          </a:solidFill>
+                          <a:latin typeface="Onest Medium" pitchFamily="2" charset="-52"/>
+                        </a:rPr>
+                        <a:t xml:space="preserve">6</a:t>
                       </a:r>
                     </a:p>
                   </a:txBody>
@@ -18880,8 +20098,8 @@
           <p:nvPr/>
         </p:nvGraphicFramePr>
         <p:xfrm>
-          <a:off x="374904" y="1325880"/>
-          <a:ext cx="11292840" cy="4535424"/>
+          <a:off x="374904" y="1280160"/>
+          <a:ext cx="11292840" cy="4526280"/>
         </p:xfrm>
         <a:graphic>
           <a:graphicData uri="http://schemas.openxmlformats.org/drawingml/2006/table">
@@ -18894,7 +20112,7 @@
                 <a:gridCol w="1673352"/>
                 <a:gridCol w="2002536"/>
               </a:tblGrid>
-              <a:tr h="566928">
+              <a:tr h="502920">
                 <a:tc>
                   <a:txBody>
                     <a:bodyPr/>
@@ -19151,7 +20369,7 @@
                   </a:tcPr>
                 </a:tc>
               </a:tr>
-              <a:tr h="566928">
+              <a:tr h="502920">
                 <a:tc>
                   <a:txBody>
                     <a:bodyPr/>
@@ -19173,7 +20391,7 @@
                           </a:solidFill>
                           <a:latin typeface="Onest Regular" pitchFamily="2" charset="-52"/>
                         </a:rPr>
-                        <a:t xml:space="preserve">Время протекания процесса: от сообщения гражданина до подтверждённого устранения</a:t>
+                        <a:t xml:space="preserve">Время протекания процесса: от возникновения проблемы до подтверждённого устранения</a:t>
                       </a:r>
                     </a:p>
                   </a:txBody>
@@ -19224,7 +20442,7 @@
                           </a:solidFill>
                           <a:latin typeface="Onest Medium" pitchFamily="2" charset="-52"/>
                         </a:rPr>
-                        <a:t xml:space="preserve">7 — 30</a:t>
+                        <a:t xml:space="preserve">10 — 60</a:t>
                       </a:r>
                     </a:p>
                   </a:txBody>
@@ -19275,7 +20493,7 @@
                           </a:solidFill>
                           <a:latin typeface="Onest Medium" pitchFamily="2" charset="-52"/>
                         </a:rPr>
-                        <a:t xml:space="preserve">сокращение ≥ 30 %</a:t>
+                        <a:t xml:space="preserve">сокращение ≥ 50 %</a:t>
                       </a:r>
                     </a:p>
                   </a:txBody>
@@ -19408,7 +20626,7 @@
                   </a:tcPr>
                 </a:tc>
               </a:tr>
-              <a:tr h="566928">
+              <a:tr h="502920">
                 <a:tc>
                   <a:txBody>
                     <a:bodyPr/>
@@ -19430,7 +20648,7 @@
                           </a:solidFill>
                           <a:latin typeface="Onest Regular" pitchFamily="2" charset="-52"/>
                         </a:rPr>
-                        <a:t xml:space="preserve">Трудозатраты сотрудника на регистрацию одного сообщения и передачу исполнителю</a:t>
+                        <a:t xml:space="preserve">Доля проблем, выявленных до обращения жителя</a:t>
                       </a:r>
                     </a:p>
                   </a:txBody>
@@ -19481,7 +20699,7 @@
                           </a:solidFill>
                           <a:latin typeface="Onest Medium" pitchFamily="2" charset="-52"/>
                         </a:rPr>
-                        <a:t xml:space="preserve">замер</a:t>
+                        <a:t xml:space="preserve">0</a:t>
                       </a:r>
                     </a:p>
                   </a:txBody>
@@ -19532,7 +20750,7 @@
                           </a:solidFill>
                           <a:latin typeface="Onest Medium" pitchFamily="2" charset="-52"/>
                         </a:rPr>
-                        <a:t xml:space="preserve">не более 1</a:t>
+                        <a:t xml:space="preserve">не менее 50</a:t>
                       </a:r>
                     </a:p>
                   </a:txBody>
@@ -19634,7 +20852,7 @@
                           </a:solidFill>
                           <a:latin typeface="Onest Regular" pitchFamily="2" charset="-52"/>
                         </a:rPr>
-                        <a:t xml:space="preserve">мин. на одно сообщение</a:t>
+                        <a:t xml:space="preserve">%; заявки от наблюдателей в общем числе заявок</a:t>
                       </a:r>
                     </a:p>
                   </a:txBody>
@@ -19665,7 +20883,7 @@
                   </a:tcPr>
                 </a:tc>
               </a:tr>
-              <a:tr h="566928">
+              <a:tr h="502920">
                 <a:tc>
                   <a:txBody>
                     <a:bodyPr/>
@@ -19687,7 +20905,7 @@
                           </a:solidFill>
                           <a:latin typeface="Onest Regular" pitchFamily="2" charset="-52"/>
                         </a:rPr>
-                        <a:t xml:space="preserve">Доля заявок с установленным сроком исполнения</a:t>
+                        <a:t xml:space="preserve">Количество обращений граждан по благоустройству и ЖКХ</a:t>
                       </a:r>
                     </a:p>
                   </a:txBody>
@@ -19738,7 +20956,7 @@
                           </a:solidFill>
                           <a:latin typeface="Onest Medium" pitchFamily="2" charset="-52"/>
                         </a:rPr>
-                        <a:t xml:space="preserve">0</a:t>
+                        <a:t xml:space="preserve">замер</a:t>
                       </a:r>
                     </a:p>
                   </a:txBody>
@@ -19789,7 +21007,7 @@
                           </a:solidFill>
                           <a:latin typeface="Onest Medium" pitchFamily="2" charset="-52"/>
                         </a:rPr>
-                        <a:t xml:space="preserve">100</a:t>
+                        <a:t xml:space="preserve">снижение ≥ 30 %</a:t>
                       </a:r>
                     </a:p>
                   </a:txBody>
@@ -19840,7 +21058,7 @@
                           </a:solidFill>
                           <a:latin typeface="Onest Medium" pitchFamily="2" charset="-52"/>
                         </a:rPr>
-                        <a:t xml:space="preserve">100</a:t>
+                        <a:t xml:space="preserve">замер 24–25.09</a:t>
                       </a:r>
                     </a:p>
                   </a:txBody>
@@ -19891,7 +21109,7 @@
                           </a:solidFill>
                           <a:latin typeface="Onest Regular" pitchFamily="2" charset="-52"/>
                         </a:rPr>
-                        <a:t xml:space="preserve">%; срок ставится автоматически по категории заявки</a:t>
+                        <a:t xml:space="preserve">шт./мес.; база — выгрузка из системы документооборота</a:t>
                       </a:r>
                     </a:p>
                   </a:txBody>
@@ -19922,7 +21140,7 @@
                   </a:tcPr>
                 </a:tc>
               </a:tr>
-              <a:tr h="566928">
+              <a:tr h="502920">
                 <a:tc>
                   <a:txBody>
                     <a:bodyPr/>
@@ -19944,7 +21162,7 @@
                           </a:solidFill>
                           <a:latin typeface="Onest Regular" pitchFamily="2" charset="-52"/>
                         </a:rPr>
-                        <a:t xml:space="preserve">Доля заявок, исполненных в установленный срок</a:t>
+                        <a:t xml:space="preserve">Трудозатраты сотрудника на регистрацию одного сообщения и передачу исполнителю</a:t>
                       </a:r>
                     </a:p>
                   </a:txBody>
@@ -19995,7 +21213,7 @@
                           </a:solidFill>
                           <a:latin typeface="Onest Medium" pitchFamily="2" charset="-52"/>
                         </a:rPr>
-                        <a:t xml:space="preserve">не измерялась</a:t>
+                        <a:t xml:space="preserve">замер</a:t>
                       </a:r>
                     </a:p>
                   </a:txBody>
@@ -20046,7 +21264,7 @@
                           </a:solidFill>
                           <a:latin typeface="Onest Medium" pitchFamily="2" charset="-52"/>
                         </a:rPr>
-                        <a:t xml:space="preserve">не менее 90</a:t>
+                        <a:t xml:space="preserve">не более 1</a:t>
                       </a:r>
                     </a:p>
                   </a:txBody>
@@ -20148,7 +21366,7 @@
                           </a:solidFill>
                           <a:latin typeface="Onest Regular" pitchFamily="2" charset="-52"/>
                         </a:rPr>
-                        <a:t xml:space="preserve">%; просрочка поднимается заму, затем Главе округа</a:t>
+                        <a:t xml:space="preserve">мин. на одно сообщение</a:t>
                       </a:r>
                     </a:p>
                   </a:txBody>
@@ -20179,7 +21397,7 @@
                   </a:tcPr>
                 </a:tc>
               </a:tr>
-              <a:tr h="566928">
+              <a:tr h="502920">
                 <a:tc>
                   <a:txBody>
                     <a:bodyPr/>
@@ -20201,7 +21419,7 @@
                           </a:solidFill>
                           <a:latin typeface="Onest Regular" pitchFamily="2" charset="-52"/>
                         </a:rPr>
-                        <a:t xml:space="preserve">Доля закрытых заявок с документальным подтверждением результата</a:t>
+                        <a:t xml:space="preserve">Доля заявок с установленным сроком исполнения</a:t>
                       </a:r>
                     </a:p>
                   </a:txBody>
@@ -20405,7 +21623,7 @@
                           </a:solidFill>
                           <a:latin typeface="Onest Regular" pitchFamily="2" charset="-52"/>
                         </a:rPr>
-                        <a:t xml:space="preserve">%; закрыть заявку без фото или отчёта нельзя</a:t>
+                        <a:t xml:space="preserve">%; срок ставится автоматически по категории заявки</a:t>
                       </a:r>
                     </a:p>
                   </a:txBody>
@@ -20436,7 +21654,7 @@
                   </a:tcPr>
                 </a:tc>
               </a:tr>
-              <a:tr h="566928">
+              <a:tr h="502920">
                 <a:tc>
                   <a:txBody>
                     <a:bodyPr/>
@@ -20458,7 +21676,7 @@
                           </a:solidFill>
                           <a:latin typeface="Onest Regular" pitchFamily="2" charset="-52"/>
                         </a:rPr>
-                        <a:t xml:space="preserve">Средняя оценка гражданином результата отработки обращения</a:t>
+                        <a:t xml:space="preserve">Доля заявок, исполненных в установленный срок</a:t>
                       </a:r>
                     </a:p>
                   </a:txBody>
@@ -20560,7 +21778,7 @@
                           </a:solidFill>
                           <a:latin typeface="Onest Medium" pitchFamily="2" charset="-52"/>
                         </a:rPr>
-                        <a:t xml:space="preserve">не менее 4,0</a:t>
+                        <a:t xml:space="preserve">не менее 90</a:t>
                       </a:r>
                     </a:p>
                   </a:txBody>
@@ -20662,7 +21880,7 @@
                           </a:solidFill>
                           <a:latin typeface="Onest Regular" pitchFamily="2" charset="-52"/>
                         </a:rPr>
-                        <a:t xml:space="preserve">балл по шкале 1–5; оценка ≤ 2 возвращает заявку в работу</a:t>
+                        <a:t xml:space="preserve">%; просрочка поднимается заму, затем Главе округа</a:t>
                       </a:r>
                     </a:p>
                   </a:txBody>
@@ -20693,7 +21911,7 @@
                   </a:tcPr>
                 </a:tc>
               </a:tr>
-              <a:tr h="566928">
+              <a:tr h="502920">
                 <a:tc>
                   <a:txBody>
                     <a:bodyPr/>
@@ -20715,7 +21933,7 @@
                           </a:solidFill>
                           <a:latin typeface="Onest Regular" pitchFamily="2" charset="-52"/>
                         </a:rPr>
-                        <a:t xml:space="preserve">Доля повторных обращений об одной и той же проблеме</a:t>
+                        <a:t xml:space="preserve">Доля закрытых заявок с документальным подтверждением результата</a:t>
                       </a:r>
                     </a:p>
                   </a:txBody>
@@ -20766,7 +21984,7 @@
                           </a:solidFill>
                           <a:latin typeface="Onest Medium" pitchFamily="2" charset="-52"/>
                         </a:rPr>
-                        <a:t xml:space="preserve">замер</a:t>
+                        <a:t xml:space="preserve">0</a:t>
                       </a:r>
                     </a:p>
                   </a:txBody>
@@ -20817,7 +22035,7 @@
                           </a:solidFill>
                           <a:latin typeface="Onest Medium" pitchFamily="2" charset="-52"/>
                         </a:rPr>
-                        <a:t xml:space="preserve">снижение ≥ 50 %</a:t>
+                        <a:t xml:space="preserve">100</a:t>
                       </a:r>
                     </a:p>
                   </a:txBody>
@@ -20868,7 +22086,7 @@
                           </a:solidFill>
                           <a:latin typeface="Onest Medium" pitchFamily="2" charset="-52"/>
                         </a:rPr>
-                        <a:t xml:space="preserve">замер 24–25.09</a:t>
+                        <a:t xml:space="preserve">100</a:t>
                       </a:r>
                     </a:p>
                   </a:txBody>
@@ -20919,7 +22137,264 @@
                           </a:solidFill>
                           <a:latin typeface="Onest Regular" pitchFamily="2" charset="-52"/>
                         </a:rPr>
-                        <a:t xml:space="preserve">%; дедупликация: 100 м за 14 дней и по адресу</a:t>
+                        <a:t xml:space="preserve">%; закрыть заявку без фото или отчёта нельзя</a:t>
+                      </a:r>
+                    </a:p>
+                  </a:txBody>
+                  <a:tcPr marL="45720" marR="45720" marT="27432" marB="27432" anchor="ctr">
+                    <a:lnL w="6350" cap="flat">
+                      <a:solidFill>
+                        <a:srgbClr val="C9C2EE"/>
+                      </a:solidFill>
+                    </a:lnL>
+                    <a:lnR w="6350" cap="flat">
+                      <a:solidFill>
+                        <a:srgbClr val="C9C2EE"/>
+                      </a:solidFill>
+                    </a:lnR>
+                    <a:lnT w="6350" cap="flat">
+                      <a:solidFill>
+                        <a:srgbClr val="C9C2EE"/>
+                      </a:solidFill>
+                    </a:lnT>
+                    <a:lnB w="6350" cap="flat">
+                      <a:solidFill>
+                        <a:srgbClr val="C9C2EE"/>
+                      </a:solidFill>
+                    </a:lnB>
+                    <a:solidFill>
+                      <a:srgbClr val="FFFFFF"/>
+                    </a:solidFill>
+                  </a:tcPr>
+                </a:tc>
+              </a:tr>
+              <a:tr h="502920">
+                <a:tc>
+                  <a:txBody>
+                    <a:bodyPr/>
+                    <a:lstStyle/>
+                    <a:p>
+                      <a:pPr algn="l" marL="0" indent="0">
+                        <a:lnSpc>
+                          <a:spcPct val="105000"/>
+                        </a:lnSpc>
+                        <a:spcAft>
+                          <a:spcPts val="0"/>
+                        </a:spcAft>
+                        <a:buNone/>
+                      </a:pPr>
+                      <a:r>
+                        <a:rPr lang="ru-RU" sz="900" b="0" dirty="0">
+                          <a:solidFill>
+                            <a:srgbClr val="595959"/>
+                          </a:solidFill>
+                          <a:latin typeface="Onest Regular" pitchFamily="2" charset="-52"/>
+                        </a:rPr>
+                        <a:t xml:space="preserve">Средняя оценка жителем результата</a:t>
+                      </a:r>
+                    </a:p>
+                  </a:txBody>
+                  <a:tcPr marL="45720" marR="45720" marT="27432" marB="27432" anchor="ctr">
+                    <a:lnL w="6350" cap="flat">
+                      <a:solidFill>
+                        <a:srgbClr val="C9C2EE"/>
+                      </a:solidFill>
+                    </a:lnL>
+                    <a:lnR w="6350" cap="flat">
+                      <a:solidFill>
+                        <a:srgbClr val="C9C2EE"/>
+                      </a:solidFill>
+                    </a:lnR>
+                    <a:lnT w="6350" cap="flat">
+                      <a:solidFill>
+                        <a:srgbClr val="C9C2EE"/>
+                      </a:solidFill>
+                    </a:lnT>
+                    <a:lnB w="6350" cap="flat">
+                      <a:solidFill>
+                        <a:srgbClr val="C9C2EE"/>
+                      </a:solidFill>
+                    </a:lnB>
+                    <a:solidFill>
+                      <a:srgbClr val="FFFFFF"/>
+                    </a:solidFill>
+                  </a:tcPr>
+                </a:tc>
+                <a:tc>
+                  <a:txBody>
+                    <a:bodyPr/>
+                    <a:lstStyle/>
+                    <a:p>
+                      <a:pPr algn="ctr" marL="0" indent="0">
+                        <a:lnSpc>
+                          <a:spcPct val="100000"/>
+                        </a:lnSpc>
+                        <a:spcAft>
+                          <a:spcPts val="0"/>
+                        </a:spcAft>
+                        <a:buNone/>
+                      </a:pPr>
+                      <a:r>
+                        <a:rPr lang="ru-RU" sz="900" b="0" dirty="0">
+                          <a:solidFill>
+                            <a:srgbClr val="000000"/>
+                          </a:solidFill>
+                          <a:latin typeface="Onest Medium" pitchFamily="2" charset="-52"/>
+                        </a:rPr>
+                        <a:t xml:space="preserve">не измерялась</a:t>
+                      </a:r>
+                    </a:p>
+                  </a:txBody>
+                  <a:tcPr marL="45720" marR="45720" marT="27432" marB="27432" anchor="ctr">
+                    <a:lnL w="6350" cap="flat">
+                      <a:solidFill>
+                        <a:srgbClr val="C9C2EE"/>
+                      </a:solidFill>
+                    </a:lnL>
+                    <a:lnR w="6350" cap="flat">
+                      <a:solidFill>
+                        <a:srgbClr val="C9C2EE"/>
+                      </a:solidFill>
+                    </a:lnR>
+                    <a:lnT w="6350" cap="flat">
+                      <a:solidFill>
+                        <a:srgbClr val="C9C2EE"/>
+                      </a:solidFill>
+                    </a:lnT>
+                    <a:lnB w="6350" cap="flat">
+                      <a:solidFill>
+                        <a:srgbClr val="C9C2EE"/>
+                      </a:solidFill>
+                    </a:lnB>
+                    <a:solidFill>
+                      <a:srgbClr val="FFFFFF"/>
+                    </a:solidFill>
+                  </a:tcPr>
+                </a:tc>
+                <a:tc>
+                  <a:txBody>
+                    <a:bodyPr/>
+                    <a:lstStyle/>
+                    <a:p>
+                      <a:pPr algn="ctr" marL="0" indent="0">
+                        <a:lnSpc>
+                          <a:spcPct val="100000"/>
+                        </a:lnSpc>
+                        <a:spcAft>
+                          <a:spcPts val="0"/>
+                        </a:spcAft>
+                        <a:buNone/>
+                      </a:pPr>
+                      <a:r>
+                        <a:rPr lang="ru-RU" sz="900" b="0" dirty="0">
+                          <a:solidFill>
+                            <a:srgbClr val="000000"/>
+                          </a:solidFill>
+                          <a:latin typeface="Onest Medium" pitchFamily="2" charset="-52"/>
+                        </a:rPr>
+                        <a:t xml:space="preserve">не менее 4,0</a:t>
+                      </a:r>
+                    </a:p>
+                  </a:txBody>
+                  <a:tcPr marL="45720" marR="45720" marT="27432" marB="27432" anchor="ctr">
+                    <a:lnL w="6350" cap="flat">
+                      <a:solidFill>
+                        <a:srgbClr val="C9C2EE"/>
+                      </a:solidFill>
+                    </a:lnL>
+                    <a:lnR w="6350" cap="flat">
+                      <a:solidFill>
+                        <a:srgbClr val="C9C2EE"/>
+                      </a:solidFill>
+                    </a:lnR>
+                    <a:lnT w="6350" cap="flat">
+                      <a:solidFill>
+                        <a:srgbClr val="C9C2EE"/>
+                      </a:solidFill>
+                    </a:lnT>
+                    <a:lnB w="6350" cap="flat">
+                      <a:solidFill>
+                        <a:srgbClr val="C9C2EE"/>
+                      </a:solidFill>
+                    </a:lnB>
+                    <a:solidFill>
+                      <a:srgbClr val="FFFFFF"/>
+                    </a:solidFill>
+                  </a:tcPr>
+                </a:tc>
+                <a:tc>
+                  <a:txBody>
+                    <a:bodyPr/>
+                    <a:lstStyle/>
+                    <a:p>
+                      <a:pPr algn="ctr" marL="0" indent="0">
+                        <a:lnSpc>
+                          <a:spcPct val="100000"/>
+                        </a:lnSpc>
+                        <a:spcAft>
+                          <a:spcPts val="0"/>
+                        </a:spcAft>
+                        <a:buNone/>
+                      </a:pPr>
+                      <a:r>
+                        <a:rPr lang="ru-RU" sz="900" b="0" dirty="0">
+                          <a:solidFill>
+                            <a:srgbClr val="6C5CE0"/>
+                          </a:solidFill>
+                          <a:latin typeface="Onest Medium" pitchFamily="2" charset="-52"/>
+                        </a:rPr>
+                        <a:t xml:space="preserve">замер 24–25.09</a:t>
+                      </a:r>
+                    </a:p>
+                  </a:txBody>
+                  <a:tcPr marL="45720" marR="45720" marT="27432" marB="27432" anchor="ctr">
+                    <a:lnL w="6350" cap="flat">
+                      <a:solidFill>
+                        <a:srgbClr val="C9C2EE"/>
+                      </a:solidFill>
+                    </a:lnL>
+                    <a:lnR w="6350" cap="flat">
+                      <a:solidFill>
+                        <a:srgbClr val="C9C2EE"/>
+                      </a:solidFill>
+                    </a:lnR>
+                    <a:lnT w="6350" cap="flat">
+                      <a:solidFill>
+                        <a:srgbClr val="C9C2EE"/>
+                      </a:solidFill>
+                    </a:lnT>
+                    <a:lnB w="6350" cap="flat">
+                      <a:solidFill>
+                        <a:srgbClr val="C9C2EE"/>
+                      </a:solidFill>
+                    </a:lnB>
+                    <a:solidFill>
+                      <a:srgbClr val="FFFFFF"/>
+                    </a:solidFill>
+                  </a:tcPr>
+                </a:tc>
+                <a:tc>
+                  <a:txBody>
+                    <a:bodyPr/>
+                    <a:lstStyle/>
+                    <a:p>
+                      <a:pPr algn="l" marL="0" indent="0">
+                        <a:lnSpc>
+                          <a:spcPct val="105000"/>
+                        </a:lnSpc>
+                        <a:spcAft>
+                          <a:spcPts val="0"/>
+                        </a:spcAft>
+                        <a:buNone/>
+                      </a:pPr>
+                      <a:r>
+                        <a:rPr lang="ru-RU" sz="850" b="0" dirty="0">
+                          <a:solidFill>
+                            <a:srgbClr val="595959"/>
+                          </a:solidFill>
+                          <a:latin typeface="Onest Regular" pitchFamily="2" charset="-52"/>
+                        </a:rPr>
+                        <a:t xml:space="preserve">балл по шкале 1–5; оценка ≤ 2 возвращает заявку в работу</a:t>
                       </a:r>
                     </a:p>
                   </a:txBody>
@@ -21315,8 +22790,8 @@
         </p:blipFill>
         <p:spPr>
           <a:xfrm>
-            <a:off x="1363609" y="960120"/>
-            <a:ext cx="9470879" cy="5779008"/>
+            <a:off x="1180842" y="960120"/>
+            <a:ext cx="9836411" cy="5779008"/>
           </a:xfrm>
           <a:prstGeom prst="rect">
             <a:avLst/>

--- a/файлы/prezentaciya-chernovik.pptx
+++ b/файлы/prezentaciya-chernovik.pptx
@@ -4061,7 +4061,7 @@
       </p:grpSp>
       <p:graphicFrame>
         <p:nvGraphicFramePr>
-          <p:cNvPr id="915" name="Таблица 915"/>
+          <p:cNvPr id="916" name="Таблица 916"/>
           <p:cNvGraphicFramePr>
             <a:graphicFrameLocks noGrp="1"/>
           </p:cNvGraphicFramePr>
@@ -5791,7 +5791,7 @@
       </p:graphicFrame>
       <p:sp>
         <p:nvSpPr>
-          <p:cNvPr id="916" name="Поле 916"/>
+          <p:cNvPr id="917" name="Поле 917"/>
           <p:cNvSpPr txBox="1"/>
           <p:nvPr/>
         </p:nvSpPr>
@@ -5837,7 +5837,7 @@
       </p:sp>
       <p:sp>
         <p:nvSpPr>
-          <p:cNvPr id="917" name="Поле 917"/>
+          <p:cNvPr id="918" name="Поле 918"/>
           <p:cNvSpPr txBox="1"/>
           <p:nvPr/>
         </p:nvSpPr>
@@ -6303,7 +6303,7 @@
       </p:grpSp>
       <p:graphicFrame>
         <p:nvGraphicFramePr>
-          <p:cNvPr id="918" name="Таблица 918"/>
+          <p:cNvPr id="919" name="Таблица 919"/>
           <p:cNvGraphicFramePr>
             <a:graphicFrameLocks noGrp="1"/>
           </p:cNvGraphicFramePr>
@@ -8033,7 +8033,7 @@
       </p:graphicFrame>
       <p:sp>
         <p:nvSpPr>
-          <p:cNvPr id="919" name="Поле 919"/>
+          <p:cNvPr id="920" name="Поле 920"/>
           <p:cNvSpPr txBox="1"/>
           <p:nvPr/>
         </p:nvSpPr>
@@ -8079,7 +8079,7 @@
       </p:sp>
       <p:sp>
         <p:nvSpPr>
-          <p:cNvPr id="920" name="Поле 920"/>
+          <p:cNvPr id="921" name="Поле 921"/>
           <p:cNvSpPr txBox="1"/>
           <p:nvPr/>
         </p:nvSpPr>
@@ -8406,15 +8406,15 @@
       </p:grpSp>
       <p:graphicFrame>
         <p:nvGraphicFramePr>
-          <p:cNvPr id="921" name="Таблица 921"/>
+          <p:cNvPr id="922" name="Таблица 922"/>
           <p:cNvGraphicFramePr>
             <a:graphicFrameLocks noGrp="1"/>
           </p:cNvGraphicFramePr>
           <p:nvPr/>
         </p:nvGraphicFramePr>
         <p:xfrm>
-          <a:off x="411480" y="1600200"/>
-          <a:ext cx="11338560" cy="3566160"/>
+          <a:off x="411480" y="1536192"/>
+          <a:ext cx="11338560" cy="2743200"/>
         </p:xfrm>
         <a:graphic>
           <a:graphicData uri="http://schemas.openxmlformats.org/drawingml/2006/table">
@@ -8425,7 +8425,7 @@
                 <a:gridCol w="6172200"/>
                 <a:gridCol w="1645920"/>
               </a:tblGrid>
-              <a:tr h="713232">
+              <a:tr h="548640">
                 <a:tc>
                   <a:txBody>
                     <a:bodyPr/>
@@ -8580,7 +8580,7 @@
                   </a:tcPr>
                 </a:tc>
               </a:tr>
-              <a:tr h="713232">
+              <a:tr h="548640">
                 <a:tc>
                   <a:txBody>
                     <a:bodyPr/>
@@ -8735,7 +8735,7 @@
                   </a:tcPr>
                 </a:tc>
               </a:tr>
-              <a:tr h="713232">
+              <a:tr h="548640">
                 <a:tc>
                   <a:txBody>
                     <a:bodyPr/>
@@ -8890,7 +8890,7 @@
                   </a:tcPr>
                 </a:tc>
               </a:tr>
-              <a:tr h="713232">
+              <a:tr h="548640">
                 <a:tc>
                   <a:txBody>
                     <a:bodyPr/>
@@ -9045,7 +9045,7 @@
                   </a:tcPr>
                 </a:tc>
               </a:tr>
-              <a:tr h="713232">
+              <a:tr h="548640">
                 <a:tc>
                   <a:txBody>
                     <a:bodyPr/>
@@ -9206,7 +9206,7 @@
       </p:graphicFrame>
       <p:sp>
         <p:nvSpPr>
-          <p:cNvPr id="922" name="Поле 922"/>
+          <p:cNvPr id="923" name="Поле 923"/>
           <p:cNvSpPr txBox="1"/>
           <p:nvPr/>
         </p:nvSpPr>
@@ -9252,14 +9252,14 @@
       </p:sp>
       <p:sp>
         <p:nvSpPr>
-          <p:cNvPr id="923" name="Поле 923"/>
+          <p:cNvPr id="924" name="Поле 924"/>
           <p:cNvSpPr txBox="1"/>
           <p:nvPr/>
         </p:nvSpPr>
         <p:spPr>
           <a:xfrm>
-            <a:off x="411480" y="5394960"/>
-            <a:ext cx="11338560" cy="457200"/>
+            <a:off x="411480" y="4498848"/>
+            <a:ext cx="11338560" cy="329184"/>
           </a:xfrm>
           <a:prstGeom prst="rect">
             <a:avLst/>
@@ -9285,7 +9285,395 @@
               <a:buNone/>
             </a:pPr>
             <a:r>
-              <a:rPr lang="ru-RU" sz="950" b="0" dirty="0">
+              <a:rPr lang="ru-RU" sz="1000" b="1" dirty="0">
+                <a:solidFill>
+                  <a:srgbClr val="6C5CE0"/>
+                </a:solidFill>
+                <a:latin typeface="Onest Black" pitchFamily="2" charset="-52"/>
+              </a:rPr>
+              <a:t xml:space="preserve">ИНСТРУМЕНТЫ БЕРЕЖЛИВОГО УПРАВЛЕНИЯ, ПРИМЕНЁННЫЕ В ПРОЕКТЕ — десять при пороге в пять</a:t>
+            </a:r>
+          </a:p>
+        </p:txBody>
+      </p:sp>
+      <p:sp>
+        <p:nvSpPr>
+          <p:cNvPr id="925" name="Поле 925"/>
+          <p:cNvSpPr txBox="1"/>
+          <p:nvPr/>
+        </p:nvSpPr>
+        <p:spPr>
+          <a:xfrm>
+            <a:off x="411480" y="4864608"/>
+            <a:ext cx="5559552" cy="1554480"/>
+          </a:xfrm>
+          <a:prstGeom prst="rect">
+            <a:avLst/>
+          </a:prstGeom>
+          <a:noFill/>
+          <a:ln w="0">
+            <a:noFill/>
+          </a:ln>
+        </p:spPr>
+        <p:txBody>
+          <a:bodyPr anchor="t" lIns="91440" rIns="91440" tIns="68580" bIns="68580" wrap="square">
+            <a:noAutofit/>
+          </a:bodyPr>
+          <a:lstStyle/>
+          <a:p>
+            <a:pPr algn="l" marL="0" indent="0">
+              <a:lnSpc>
+                <a:spcPct val="102000"/>
+              </a:lnSpc>
+              <a:spcAft>
+                <a:spcPts val="140"/>
+              </a:spcAft>
+              <a:buNone/>
+            </a:pPr>
+            <a:r>
+              <a:rPr lang="ru-RU" sz="880" b="1" dirty="0">
+                <a:solidFill>
+                  <a:srgbClr val="000000"/>
+                </a:solidFill>
+                <a:latin typeface="Onest Black" pitchFamily="2" charset="-52"/>
+              </a:rPr>
+              <a:t xml:space="preserve">1. Картирование процесса — </a:t>
+            </a:r>
+            <a:r>
+              <a:rPr lang="ru-RU" sz="880" b="0" dirty="0">
+                <a:solidFill>
+                  <a:srgbClr val="595959"/>
+                </a:solidFill>
+                <a:latin typeface="Onest Medium" pitchFamily="2" charset="-52"/>
+              </a:rPr>
+              <a:t xml:space="preserve">три карты: текущее, целевое, достигнутое</a:t>
+            </a:r>
+          </a:p>
+          <a:p>
+            <a:pPr algn="l" marL="0" indent="0">
+              <a:lnSpc>
+                <a:spcPct val="102000"/>
+              </a:lnSpc>
+              <a:spcAft>
+                <a:spcPts val="140"/>
+              </a:spcAft>
+              <a:buNone/>
+            </a:pPr>
+            <a:r>
+              <a:rPr lang="ru-RU" sz="880" b="1" dirty="0">
+                <a:solidFill>
+                  <a:srgbClr val="000000"/>
+                </a:solidFill>
+                <a:latin typeface="Onest Black" pitchFamily="2" charset="-52"/>
+              </a:rPr>
+              <a:t xml:space="preserve">2. Хронометраж — </a:t>
+            </a:r>
+            <a:r>
+              <a:rPr lang="ru-RU" sz="880" b="0" dirty="0">
+                <a:solidFill>
+                  <a:srgbClr val="595959"/>
+                </a:solidFill>
+                <a:latin typeface="Onest Medium" pitchFamily="2" charset="-52"/>
+              </a:rPr>
+              <a:t xml:space="preserve">длительности этапов, лист гембы</a:t>
+            </a:r>
+          </a:p>
+          <a:p>
+            <a:pPr algn="l" marL="0" indent="0">
+              <a:lnSpc>
+                <a:spcPct val="102000"/>
+              </a:lnSpc>
+              <a:spcAft>
+                <a:spcPts val="140"/>
+              </a:spcAft>
+              <a:buNone/>
+            </a:pPr>
+            <a:r>
+              <a:rPr lang="ru-RU" sz="880" b="1" dirty="0">
+                <a:solidFill>
+                  <a:srgbClr val="000000"/>
+                </a:solidFill>
+                <a:latin typeface="Onest Black" pitchFamily="2" charset="-52"/>
+              </a:rPr>
+              <a:t xml:space="preserve">3. Гемба — </a:t>
+            </a:r>
+            <a:r>
+              <a:rPr lang="ru-RU" sz="880" b="0" dirty="0">
+                <a:solidFill>
+                  <a:srgbClr val="595959"/>
+                </a:solidFill>
+                <a:latin typeface="Onest Medium" pitchFamily="2" charset="-52"/>
+              </a:rPr>
+              <a:t xml:space="preserve">обход процесса на месте, потери подтверждены наблюдением</a:t>
+            </a:r>
+          </a:p>
+          <a:p>
+            <a:pPr algn="l" marL="0" indent="0">
+              <a:lnSpc>
+                <a:spcPct val="102000"/>
+              </a:lnSpc>
+              <a:spcAft>
+                <a:spcPts val="140"/>
+              </a:spcAft>
+              <a:buNone/>
+            </a:pPr>
+            <a:r>
+              <a:rPr lang="ru-RU" sz="880" b="1" dirty="0">
+                <a:solidFill>
+                  <a:srgbClr val="000000"/>
+                </a:solidFill>
+                <a:latin typeface="Onest Black" pitchFamily="2" charset="-52"/>
+              </a:rPr>
+              <a:t xml:space="preserve">4. «Пять почему» — </a:t>
+            </a:r>
+            <a:r>
+              <a:rPr lang="ru-RU" sz="880" b="0" dirty="0">
+                <a:solidFill>
+                  <a:srgbClr val="595959"/>
+                </a:solidFill>
+                <a:latin typeface="Onest Medium" pitchFamily="2" charset="-52"/>
+              </a:rPr>
+              <a:t xml:space="preserve">цепочка до коренной причины</a:t>
+            </a:r>
+          </a:p>
+          <a:p>
+            <a:pPr algn="l" marL="0" indent="0">
+              <a:lnSpc>
+                <a:spcPct val="102000"/>
+              </a:lnSpc>
+              <a:spcAft>
+                <a:spcPts val="140"/>
+              </a:spcAft>
+              <a:buNone/>
+            </a:pPr>
+            <a:r>
+              <a:rPr lang="ru-RU" sz="880" b="1" dirty="0">
+                <a:solidFill>
+                  <a:srgbClr val="000000"/>
+                </a:solidFill>
+                <a:latin typeface="Onest Black" pitchFamily="2" charset="-52"/>
+              </a:rPr>
+              <a:t xml:space="preserve">5. Диаграмма Исикавы — </a:t>
+            </a:r>
+            <a:r>
+              <a:rPr lang="ru-RU" sz="880" b="0" dirty="0">
+                <a:solidFill>
+                  <a:srgbClr val="595959"/>
+                </a:solidFill>
+                <a:latin typeface="Onest Medium" pitchFamily="2" charset="-52"/>
+              </a:rPr>
+              <a:t xml:space="preserve">13 факторов по пяти категориям</a:t>
+            </a:r>
+          </a:p>
+        </p:txBody>
+      </p:sp>
+      <p:sp>
+        <p:nvSpPr>
+          <p:cNvPr id="926" name="Поле 926"/>
+          <p:cNvSpPr txBox="1"/>
+          <p:nvPr/>
+        </p:nvSpPr>
+        <p:spPr>
+          <a:xfrm>
+            <a:off x="6190488" y="4864608"/>
+            <a:ext cx="5559552" cy="1554480"/>
+          </a:xfrm>
+          <a:prstGeom prst="rect">
+            <a:avLst/>
+          </a:prstGeom>
+          <a:noFill/>
+          <a:ln w="0">
+            <a:noFill/>
+          </a:ln>
+        </p:spPr>
+        <p:txBody>
+          <a:bodyPr anchor="t" lIns="91440" rIns="91440" tIns="68580" bIns="68580" wrap="square">
+            <a:noAutofit/>
+          </a:bodyPr>
+          <a:lstStyle/>
+          <a:p>
+            <a:pPr algn="l" marL="0" indent="0">
+              <a:lnSpc>
+                <a:spcPct val="102000"/>
+              </a:lnSpc>
+              <a:spcAft>
+                <a:spcPts val="140"/>
+              </a:spcAft>
+              <a:buNone/>
+            </a:pPr>
+            <a:r>
+              <a:rPr lang="ru-RU" sz="880" b="1" dirty="0">
+                <a:solidFill>
+                  <a:srgbClr val="000000"/>
+                </a:solidFill>
+                <a:latin typeface="Onest Black" pitchFamily="2" charset="-52"/>
+              </a:rPr>
+              <a:t xml:space="preserve">6. Голос клиента — </a:t>
+            </a:r>
+            <a:r>
+              <a:rPr lang="ru-RU" sz="880" b="0" dirty="0">
+                <a:solidFill>
+                  <a:srgbClr val="595959"/>
+                </a:solidFill>
+                <a:latin typeface="Onest Medium" pitchFamily="2" charset="-52"/>
+              </a:rPr>
+              <a:t xml:space="preserve">оценка жителя 1–5, оценка ≤ 2 возвращает заявку</a:t>
+            </a:r>
+          </a:p>
+          <a:p>
+            <a:pPr algn="l" marL="0" indent="0">
+              <a:lnSpc>
+                <a:spcPct val="102000"/>
+              </a:lnSpc>
+              <a:spcAft>
+                <a:spcPts val="140"/>
+              </a:spcAft>
+              <a:buNone/>
+            </a:pPr>
+            <a:r>
+              <a:rPr lang="ru-RU" sz="880" b="1" dirty="0">
+                <a:solidFill>
+                  <a:srgbClr val="000000"/>
+                </a:solidFill>
+                <a:latin typeface="Onest Black" pitchFamily="2" charset="-52"/>
+              </a:rPr>
+              <a:t xml:space="preserve">7. Визуализация — </a:t>
+            </a:r>
+            <a:r>
+              <a:rPr lang="ru-RU" sz="880" b="0" dirty="0">
+                <a:solidFill>
+                  <a:srgbClr val="595959"/>
+                </a:solidFill>
+                <a:latin typeface="Onest Medium" pitchFamily="2" charset="-52"/>
+              </a:rPr>
+              <a:t xml:space="preserve">панель: статусы, сроки, карта заявок</a:t>
+            </a:r>
+          </a:p>
+          <a:p>
+            <a:pPr algn="l" marL="0" indent="0">
+              <a:lnSpc>
+                <a:spcPct val="102000"/>
+              </a:lnSpc>
+              <a:spcAft>
+                <a:spcPts val="140"/>
+              </a:spcAft>
+              <a:buNone/>
+            </a:pPr>
+            <a:r>
+              <a:rPr lang="ru-RU" sz="880" b="1" dirty="0">
+                <a:solidFill>
+                  <a:srgbClr val="000000"/>
+                </a:solidFill>
+                <a:latin typeface="Onest Black" pitchFamily="2" charset="-52"/>
+              </a:rPr>
+              <a:t xml:space="preserve">8. Канбан — </a:t>
+            </a:r>
+            <a:r>
+              <a:rPr lang="ru-RU" sz="880" b="0" dirty="0">
+                <a:solidFill>
+                  <a:srgbClr val="595959"/>
+                </a:solidFill>
+                <a:latin typeface="Onest Medium" pitchFamily="2" charset="-52"/>
+              </a:rPr>
+              <a:t xml:space="preserve">доска заявок по статусам</a:t>
+            </a:r>
+          </a:p>
+          <a:p>
+            <a:pPr algn="l" marL="0" indent="0">
+              <a:lnSpc>
+                <a:spcPct val="102000"/>
+              </a:lnSpc>
+              <a:spcAft>
+                <a:spcPts val="140"/>
+              </a:spcAft>
+              <a:buNone/>
+            </a:pPr>
+            <a:r>
+              <a:rPr lang="ru-RU" sz="880" b="1" dirty="0">
+                <a:solidFill>
+                  <a:srgbClr val="000000"/>
+                </a:solidFill>
+                <a:latin typeface="Onest Black" pitchFamily="2" charset="-52"/>
+              </a:rPr>
+              <a:t xml:space="preserve">9. Стандартизация — </a:t>
+            </a:r>
+            <a:r>
+              <a:rPr lang="ru-RU" sz="880" b="0" dirty="0">
+                <a:solidFill>
+                  <a:srgbClr val="595959"/>
+                </a:solidFill>
+                <a:latin typeface="Onest Medium" pitchFamily="2" charset="-52"/>
+              </a:rPr>
+              <a:t xml:space="preserve">регламент процесса и памятки по ролям</a:t>
+            </a:r>
+          </a:p>
+          <a:p>
+            <a:pPr algn="l" marL="0" indent="0">
+              <a:lnSpc>
+                <a:spcPct val="102000"/>
+              </a:lnSpc>
+              <a:spcAft>
+                <a:spcPts val="140"/>
+              </a:spcAft>
+              <a:buNone/>
+            </a:pPr>
+            <a:r>
+              <a:rPr lang="ru-RU" sz="880" b="1" dirty="0">
+                <a:solidFill>
+                  <a:srgbClr val="000000"/>
+                </a:solidFill>
+                <a:latin typeface="Onest Black" pitchFamily="2" charset="-52"/>
+              </a:rPr>
+              <a:t xml:space="preserve">10. Защита от ошибок — </a:t>
+            </a:r>
+            <a:r>
+              <a:rPr lang="ru-RU" sz="880" b="0" dirty="0">
+                <a:solidFill>
+                  <a:srgbClr val="595959"/>
+                </a:solidFill>
+                <a:latin typeface="Onest Medium" pitchFamily="2" charset="-52"/>
+              </a:rPr>
+              <a:t xml:space="preserve">закрыть без фото нельзя; сквозная дедупликация</a:t>
+            </a:r>
+          </a:p>
+        </p:txBody>
+      </p:sp>
+      <p:sp>
+        <p:nvSpPr>
+          <p:cNvPr id="927" name="Поле 927"/>
+          <p:cNvSpPr txBox="1"/>
+          <p:nvPr/>
+        </p:nvSpPr>
+        <p:spPr>
+          <a:xfrm>
+            <a:off x="411480" y="6419088"/>
+            <a:ext cx="11338560" cy="365760"/>
+          </a:xfrm>
+          <a:prstGeom prst="rect">
+            <a:avLst/>
+          </a:prstGeom>
+          <a:noFill/>
+          <a:ln w="0">
+            <a:noFill/>
+          </a:ln>
+        </p:spPr>
+        <p:txBody>
+          <a:bodyPr anchor="t" lIns="91440" rIns="91440" tIns="68580" bIns="68580" wrap="square">
+            <a:noAutofit/>
+          </a:bodyPr>
+          <a:lstStyle/>
+          <a:p>
+            <a:pPr algn="l" marL="0" indent="0">
+              <a:lnSpc>
+                <a:spcPct val="100000"/>
+              </a:lnSpc>
+              <a:spcAft>
+                <a:spcPts val="0"/>
+              </a:spcAft>
+              <a:buNone/>
+            </a:pPr>
+            <a:r>
+              <a:rPr lang="ru-RU" sz="900" b="0" dirty="0">
                 <a:solidFill>
                   <a:srgbClr val="6C5CE0"/>
                 </a:solidFill>
@@ -9613,7 +10001,7 @@
                 <a:gridCol w="3566403"/>
                 <a:gridCol w="6383478"/>
               </a:tblGrid>
-              <a:tr h="792000">
+              <a:tr h="530352">
                 <a:tc>
                   <a:txBody>
                     <a:bodyPr/>
@@ -9791,7 +10179,7 @@
                   </a:tcPr>
                 </a:tc>
               </a:tr>
-              <a:tr h="792000">
+              <a:tr h="530352">
                 <a:tc>
                   <a:txBody>
                     <a:bodyPr/>
@@ -9975,7 +10363,7 @@
                   </a:tcPr>
                 </a:tc>
               </a:tr>
-              <a:tr h="792000">
+              <a:tr h="530352">
                 <a:tc>
                   <a:txBody>
                     <a:bodyPr/>
@@ -10159,7 +10547,7 @@
                   </a:tcPr>
                 </a:tc>
               </a:tr>
-              <a:tr h="792000">
+              <a:tr h="530352">
                 <a:tc>
                   <a:txBody>
                     <a:bodyPr/>
@@ -10343,7 +10731,7 @@
                   </a:tcPr>
                 </a:tc>
               </a:tr>
-              <a:tr h="792000">
+              <a:tr h="530352">
                 <a:tc>
                   <a:txBody>
                     <a:bodyPr/>
@@ -10635,6 +11023,114 @@
           </a:prstGeom>
         </p:spPr>
       </p:pic>
+      <p:sp>
+        <p:nvSpPr>
+          <p:cNvPr id="928" name="Поле 928"/>
+          <p:cNvSpPr txBox="1"/>
+          <p:nvPr/>
+        </p:nvSpPr>
+        <p:spPr>
+          <a:xfrm>
+            <a:off x="384048" y="5321808"/>
+            <a:ext cx="11420856" cy="1325880"/>
+          </a:xfrm>
+          <a:prstGeom prst="roundRect">
+            <a:avLst>
+              <a:gd name="adj" fmla="val 4000"/>
+            </a:avLst>
+          </a:prstGeom>
+          <a:solidFill>
+            <a:srgbClr val="F7F6FE"/>
+          </a:solidFill>
+          <a:ln w="12700">
+            <a:solidFill>
+              <a:srgbClr val="C9C2EE"/>
+            </a:solidFill>
+          </a:ln>
+        </p:spPr>
+        <p:txBody>
+          <a:bodyPr anchor="t" lIns="91440" rIns="91440" tIns="68580" bIns="68580" wrap="square">
+            <a:noAutofit/>
+          </a:bodyPr>
+          <a:lstStyle/>
+          <a:p>
+            <a:pPr algn="l" marL="0" indent="0">
+              <a:lnSpc>
+                <a:spcPct val="104000"/>
+              </a:lnSpc>
+              <a:spcAft>
+                <a:spcPts val="220"/>
+              </a:spcAft>
+              <a:buNone/>
+            </a:pPr>
+            <a:r>
+              <a:rPr lang="ru-RU" sz="880" b="1" dirty="0">
+                <a:solidFill>
+                  <a:srgbClr val="6C5CE0"/>
+                </a:solidFill>
+                <a:latin typeface="Onest Black" pitchFamily="2" charset="-52"/>
+              </a:rPr>
+              <a:t xml:space="preserve">ОБУЧЕНИЕ КОМАНДЫ ПРОЕКТА.  </a:t>
+            </a:r>
+            <a:r>
+              <a:rPr lang="ru-RU" sz="880" b="0" dirty="0">
+                <a:solidFill>
+                  <a:srgbClr val="595959"/>
+                </a:solidFill>
+                <a:latin typeface="Onest Medium" pitchFamily="2" charset="-52"/>
+              </a:rPr>
+              <a:t xml:space="preserve">Команда «Лидеры перемен», 5 человек — курс «Как внедрить инструменты бережливого производства в свою работу» Мастерской управления «Сенеж», платформа «Россия — страна возможностей». </a:t>
+            </a:r>
+            <a:r>
+              <a:rPr lang="ru-RU" sz="880" b="1" dirty="0">
+                <a:solidFill>
+                  <a:srgbClr val="000000"/>
+                </a:solidFill>
+                <a:latin typeface="Onest Black" pitchFamily="2" charset="-52"/>
+              </a:rPr>
+              <a:t xml:space="preserve">Обучение прошли все пятеро</a:t>
+            </a:r>
+            <a:r>
+              <a:rPr lang="ru-RU" sz="880" b="0" dirty="0">
+                <a:solidFill>
+                  <a:srgbClr val="595959"/>
+                </a:solidFill>
+                <a:latin typeface="Onest Medium" pitchFamily="2" charset="-52"/>
+              </a:rPr>
+              <a:t xml:space="preserve">; сертификаты прилагаются к справке проекта.</a:t>
+            </a:r>
+          </a:p>
+          <a:p>
+            <a:pPr algn="l" marL="0" indent="0">
+              <a:lnSpc>
+                <a:spcPct val="104000"/>
+              </a:lnSpc>
+              <a:spcAft>
+                <a:spcPts val="0"/>
+              </a:spcAft>
+              <a:buNone/>
+            </a:pPr>
+            <a:r>
+              <a:rPr lang="ru-RU" sz="880" b="1" dirty="0">
+                <a:solidFill>
+                  <a:srgbClr val="6C5CE0"/>
+                </a:solidFill>
+                <a:latin typeface="Onest Black" pitchFamily="2" charset="-52"/>
+              </a:rPr>
+              <a:t xml:space="preserve">АКТУАЛЬНОСТЬ ПРОЕКТА.  </a:t>
+            </a:r>
+            <a:r>
+              <a:rPr lang="ru-RU" sz="880" b="0" dirty="0">
+                <a:solidFill>
+                  <a:srgbClr val="595959"/>
+                </a:solidFill>
+                <a:latin typeface="Onest Medium" pitchFamily="2" charset="-52"/>
+              </a:rPr>
+              <a:t xml:space="preserve">Содержание территории — то, что жители видят каждый день; охват 27 населённых пунктов округа, большинство — сёла, где канала обращения фактически не было. Проект отвечает клиентоцентричности федерального проекта «Государство для людей» и практике платформы обратной связи. Процесс типовой для муниципальных образований области — результаты воспроизводимы без изменения методики.</a:t>
+            </a:r>
+          </a:p>
+        </p:txBody>
+      </p:sp>
     </p:spTree>
   </p:cSld>
   <p:clrMapOvr>
@@ -15881,9 +16377,313 @@
           </p:txBody>
         </p:sp>
       </p:grpSp>
+      <p:sp>
+        <p:nvSpPr>
+          <p:cNvPr id="907" name="Поле 907"/>
+          <p:cNvSpPr txBox="1"/>
+          <p:nvPr/>
+        </p:nvSpPr>
+        <p:spPr>
+          <a:xfrm>
+            <a:off x="8705088" y="960120"/>
+            <a:ext cx="3218688" cy="5779008"/>
+          </a:xfrm>
+          <a:prstGeom prst="roundRect">
+            <a:avLst>
+              <a:gd name="adj" fmla="val 4000"/>
+            </a:avLst>
+          </a:prstGeom>
+          <a:solidFill>
+            <a:srgbClr val="F7F6FE"/>
+          </a:solidFill>
+          <a:ln w="12700">
+            <a:solidFill>
+              <a:srgbClr val="C9C2EE"/>
+            </a:solidFill>
+          </a:ln>
+        </p:spPr>
+        <p:txBody>
+          <a:bodyPr anchor="t" lIns="91440" rIns="91440" tIns="68580" bIns="68580" wrap="square">
+            <a:noAutofit/>
+          </a:bodyPr>
+          <a:lstStyle/>
+          <a:p>
+            <a:pPr algn="l" marL="0" indent="0">
+              <a:lnSpc>
+                <a:spcPct val="100000"/>
+              </a:lnSpc>
+              <a:spcAft>
+                <a:spcPts val="180"/>
+              </a:spcAft>
+              <a:buNone/>
+            </a:pPr>
+            <a:r>
+              <a:rPr lang="ru-RU" sz="850" b="1" dirty="0">
+                <a:solidFill>
+                  <a:srgbClr val="6C5CE0"/>
+                </a:solidFill>
+                <a:latin typeface="Onest Black" pitchFamily="2" charset="-52"/>
+              </a:rPr>
+              <a:t xml:space="preserve">ВОСЕМЬ ВИДОВ ПОТЕРЬ</a:t>
+            </a:r>
+          </a:p>
+          <a:p>
+            <a:pPr algn="l" marL="0" indent="0">
+              <a:lnSpc>
+                <a:spcPct val="100000"/>
+              </a:lnSpc>
+              <a:spcAft>
+                <a:spcPts val="120"/>
+              </a:spcAft>
+              <a:buNone/>
+            </a:pPr>
+            <a:r>
+              <a:rPr lang="ru-RU" sz="780" b="1" dirty="0">
+                <a:solidFill>
+                  <a:srgbClr val="000000"/>
+                </a:solidFill>
+                <a:latin typeface="Onest Black" pitchFamily="2" charset="-52"/>
+              </a:rPr>
+              <a:t xml:space="preserve">1. Перепроизводство — </a:t>
+            </a:r>
+            <a:r>
+              <a:rPr lang="ru-RU" sz="780" b="0" dirty="0">
+                <a:solidFill>
+                  <a:srgbClr val="595959"/>
+                </a:solidFill>
+                <a:latin typeface="Onest Medium" pitchFamily="2" charset="-52"/>
+              </a:rPr>
+              <a:t xml:space="preserve">по каждому сообщению об одной проблеме заводится отдельная работа</a:t>
+            </a:r>
+          </a:p>
+          <a:p>
+            <a:pPr algn="l" marL="0" indent="0">
+              <a:lnSpc>
+                <a:spcPct val="100000"/>
+              </a:lnSpc>
+              <a:spcAft>
+                <a:spcPts val="120"/>
+              </a:spcAft>
+              <a:buNone/>
+            </a:pPr>
+            <a:r>
+              <a:rPr lang="ru-RU" sz="780" b="1" dirty="0">
+                <a:solidFill>
+                  <a:srgbClr val="000000"/>
+                </a:solidFill>
+                <a:latin typeface="Onest Black" pitchFamily="2" charset="-52"/>
+              </a:rPr>
+              <a:t xml:space="preserve">2. Лишние движения — </a:t>
+            </a:r>
+            <a:r>
+              <a:rPr lang="ru-RU" sz="780" b="0" dirty="0">
+                <a:solidFill>
+                  <a:srgbClr val="595959"/>
+                </a:solidFill>
+                <a:latin typeface="Onest Medium" pitchFamily="2" charset="-52"/>
+              </a:rPr>
+              <a:t xml:space="preserve">зона ответственности и история обращений ищутся вручную</a:t>
+            </a:r>
+          </a:p>
+          <a:p>
+            <a:pPr algn="l" marL="0" indent="0">
+              <a:lnSpc>
+                <a:spcPct val="100000"/>
+              </a:lnSpc>
+              <a:spcAft>
+                <a:spcPts val="120"/>
+              </a:spcAft>
+              <a:buNone/>
+            </a:pPr>
+            <a:r>
+              <a:rPr lang="ru-RU" sz="780" b="1" dirty="0">
+                <a:solidFill>
+                  <a:srgbClr val="000000"/>
+                </a:solidFill>
+                <a:latin typeface="Onest Black" pitchFamily="2" charset="-52"/>
+              </a:rPr>
+              <a:t xml:space="preserve">3. Ненужная транспортировка — </a:t>
+            </a:r>
+            <a:r>
+              <a:rPr lang="ru-RU" sz="780" b="0" dirty="0">
+                <a:solidFill>
+                  <a:srgbClr val="595959"/>
+                </a:solidFill>
+                <a:latin typeface="Onest Medium" pitchFamily="2" charset="-52"/>
+              </a:rPr>
+              <a:t xml:space="preserve">суть пересказывается по цепочке, детали теряются</a:t>
+            </a:r>
+          </a:p>
+          <a:p>
+            <a:pPr algn="l" marL="0" indent="0">
+              <a:lnSpc>
+                <a:spcPct val="100000"/>
+              </a:lnSpc>
+              <a:spcAft>
+                <a:spcPts val="120"/>
+              </a:spcAft>
+              <a:buNone/>
+            </a:pPr>
+            <a:r>
+              <a:rPr lang="ru-RU" sz="780" b="1" dirty="0">
+                <a:solidFill>
+                  <a:srgbClr val="000000"/>
+                </a:solidFill>
+                <a:latin typeface="Onest Black" pitchFamily="2" charset="-52"/>
+              </a:rPr>
+              <a:t xml:space="preserve">4. Излишние запасы — </a:t>
+            </a:r>
+            <a:r>
+              <a:rPr lang="ru-RU" sz="780" b="0" dirty="0">
+                <a:solidFill>
+                  <a:srgbClr val="595959"/>
+                </a:solidFill>
+                <a:latin typeface="Onest Medium" pitchFamily="2" charset="-52"/>
+              </a:rPr>
+              <a:t xml:space="preserve">очередь 2–8 сообщений, объём работы никому не виден</a:t>
+            </a:r>
+          </a:p>
+          <a:p>
+            <a:pPr algn="l" marL="0" indent="0">
+              <a:lnSpc>
+                <a:spcPct val="100000"/>
+              </a:lnSpc>
+              <a:spcAft>
+                <a:spcPts val="120"/>
+              </a:spcAft>
+              <a:buNone/>
+            </a:pPr>
+            <a:r>
+              <a:rPr lang="ru-RU" sz="780" b="1" dirty="0">
+                <a:solidFill>
+                  <a:srgbClr val="000000"/>
+                </a:solidFill>
+                <a:latin typeface="Onest Black" pitchFamily="2" charset="-52"/>
+              </a:rPr>
+              <a:t xml:space="preserve">5. Избыточная обработка — </a:t>
+            </a:r>
+            <a:r>
+              <a:rPr lang="ru-RU" sz="780" b="0" dirty="0">
+                <a:solidFill>
+                  <a:srgbClr val="595959"/>
+                </a:solidFill>
+                <a:latin typeface="Onest Medium" pitchFamily="2" charset="-52"/>
+              </a:rPr>
+              <a:t xml:space="preserve">одно сообщение переписывается трижды</a:t>
+            </a:r>
+          </a:p>
+          <a:p>
+            <a:pPr algn="l" marL="0" indent="0">
+              <a:lnSpc>
+                <a:spcPct val="100000"/>
+              </a:lnSpc>
+              <a:spcAft>
+                <a:spcPts val="120"/>
+              </a:spcAft>
+              <a:buNone/>
+            </a:pPr>
+            <a:r>
+              <a:rPr lang="ru-RU" sz="780" b="1" dirty="0">
+                <a:solidFill>
+                  <a:srgbClr val="000000"/>
+                </a:solidFill>
+                <a:latin typeface="Onest Black" pitchFamily="2" charset="-52"/>
+              </a:rPr>
+              <a:t xml:space="preserve">6. Ожидание — </a:t>
+            </a:r>
+            <a:r>
+              <a:rPr lang="ru-RU" sz="780" b="0" dirty="0">
+                <a:solidFill>
+                  <a:srgbClr val="595959"/>
+                </a:solidFill>
+                <a:latin typeface="Onest Medium" pitchFamily="2" charset="-52"/>
+              </a:rPr>
+              <a:t xml:space="preserve">ГЛАВНАЯ: до 30 дней проблема не выявлена и ещё до 30 — рассмотрение</a:t>
+            </a:r>
+          </a:p>
+          <a:p>
+            <a:pPr algn="l" marL="0" indent="0">
+              <a:lnSpc>
+                <a:spcPct val="100000"/>
+              </a:lnSpc>
+              <a:spcAft>
+                <a:spcPts val="120"/>
+              </a:spcAft>
+              <a:buNone/>
+            </a:pPr>
+            <a:r>
+              <a:rPr lang="ru-RU" sz="780" b="1" dirty="0">
+                <a:solidFill>
+                  <a:srgbClr val="000000"/>
+                </a:solidFill>
+                <a:latin typeface="Onest Black" pitchFamily="2" charset="-52"/>
+              </a:rPr>
+              <a:t xml:space="preserve">7. Переделка и брак — </a:t>
+            </a:r>
+            <a:r>
+              <a:rPr lang="ru-RU" sz="780" b="0" dirty="0">
+                <a:solidFill>
+                  <a:srgbClr val="595959"/>
+                </a:solidFill>
+                <a:latin typeface="Onest Medium" pitchFamily="2" charset="-52"/>
+              </a:rPr>
+              <a:t xml:space="preserve">закрытие без подтверждения — житель обращается повторно</a:t>
+            </a:r>
+          </a:p>
+          <a:p>
+            <a:pPr algn="l" marL="0" indent="0">
+              <a:lnSpc>
+                <a:spcPct val="100000"/>
+              </a:lnSpc>
+              <a:spcAft>
+                <a:spcPts val="120"/>
+              </a:spcAft>
+              <a:buNone/>
+            </a:pPr>
+            <a:r>
+              <a:rPr lang="ru-RU" sz="780" b="1" dirty="0">
+                <a:solidFill>
+                  <a:srgbClr val="000000"/>
+                </a:solidFill>
+                <a:latin typeface="Onest Black" pitchFamily="2" charset="-52"/>
+              </a:rPr>
+              <a:t xml:space="preserve">8. Неиспользование потенциала — </a:t>
+            </a:r>
+            <a:r>
+              <a:rPr lang="ru-RU" sz="780" b="0" dirty="0">
+                <a:solidFill>
+                  <a:srgbClr val="595959"/>
+                </a:solidFill>
+                <a:latin typeface="Onest Medium" pitchFamily="2" charset="-52"/>
+              </a:rPr>
+              <a:t xml:space="preserve">ресурс активных жителей не задействован вовсе</a:t>
+            </a:r>
+          </a:p>
+          <a:p>
+            <a:pPr algn="l" marL="0" indent="0">
+              <a:lnSpc>
+                <a:spcPct val="100000"/>
+              </a:lnSpc>
+              <a:spcAft>
+                <a:spcPts val="0"/>
+              </a:spcAft>
+              <a:buNone/>
+            </a:pPr>
+            <a:r>
+              <a:rPr lang="ru-RU" sz="700" b="0" dirty="0">
+                <a:solidFill>
+                  <a:srgbClr val="595959"/>
+                </a:solidFill>
+                <a:latin typeface="Onest Medium" pitchFamily="2" charset="-52"/>
+              </a:rPr>
+              <a:t xml:space="preserve">Классификация и порядок — обучающая презентация «Эффективного региона». Привязка к этапам — на карте текущего состояния.</a:t>
+            </a:r>
+          </a:p>
+        </p:txBody>
+      </p:sp>
       <p:pic>
         <p:nvPicPr>
-          <p:cNvPr id="907" name="Рисунок 907"/>
+          <p:cNvPr id="908" name="Рисунок 908"/>
           <p:cNvPicPr>
             <a:picLocks noChangeAspect="1"/>
           </p:cNvPicPr>
@@ -15897,8 +16697,8 @@
         </p:blipFill>
         <p:spPr>
           <a:xfrm>
-            <a:off x="1955834" y="960120"/>
-            <a:ext cx="8286429" cy="5779008"/>
+            <a:off x="265176" y="963994"/>
+            <a:ext cx="8275320" cy="5771261"/>
           </a:xfrm>
           <a:prstGeom prst="rect">
             <a:avLst/>
@@ -16188,7 +16988,7 @@
       </p:grpSp>
       <p:pic>
         <p:nvPicPr>
-          <p:cNvPr id="908" name="Рисунок 908"/>
+          <p:cNvPr id="909" name="Рисунок 909"/>
           <p:cNvPicPr>
             <a:picLocks noChangeAspect="1"/>
           </p:cNvPicPr>
@@ -16491,7 +17291,7 @@
       </p:grpSp>
       <p:graphicFrame>
         <p:nvGraphicFramePr>
-          <p:cNvPr id="909" name="Таблица 909"/>
+          <p:cNvPr id="910" name="Таблица 910"/>
           <p:cNvGraphicFramePr>
             <a:graphicFrameLocks noGrp="1"/>
           </p:cNvGraphicFramePr>
@@ -18377,7 +19177,7 @@
       </p:graphicFrame>
       <p:sp>
         <p:nvSpPr>
-          <p:cNvPr id="910" name="Поле 910"/>
+          <p:cNvPr id="911" name="Поле 911"/>
           <p:cNvSpPr txBox="1"/>
           <p:nvPr/>
         </p:nvSpPr>
@@ -18702,7 +19502,7 @@
       </p:grpSp>
       <p:graphicFrame>
         <p:nvGraphicFramePr>
-          <p:cNvPr id="911" name="Таблица 911"/>
+          <p:cNvPr id="912" name="Таблица 912"/>
           <p:cNvGraphicFramePr>
             <a:graphicFrameLocks noGrp="1"/>
           </p:cNvGraphicFramePr>
@@ -20091,7 +20891,7 @@
       </p:grpSp>
       <p:graphicFrame>
         <p:nvGraphicFramePr>
-          <p:cNvPr id="912" name="Таблица 912"/>
+          <p:cNvPr id="913" name="Таблица 913"/>
           <p:cNvGraphicFramePr>
             <a:graphicFrameLocks noGrp="1"/>
           </p:cNvGraphicFramePr>
@@ -22431,7 +23231,7 @@
       </p:graphicFrame>
       <p:sp>
         <p:nvSpPr>
-          <p:cNvPr id="913" name="Поле 913"/>
+          <p:cNvPr id="914" name="Поле 914"/>
           <p:cNvSpPr txBox="1"/>
           <p:nvPr/>
         </p:nvSpPr>
@@ -22776,7 +23576,7 @@
       </p:grpSp>
       <p:pic>
         <p:nvPicPr>
-          <p:cNvPr id="914" name="Рисунок 914"/>
+          <p:cNvPr id="915" name="Рисунок 915"/>
           <p:cNvPicPr>
             <a:picLocks noChangeAspect="1"/>
           </p:cNvPicPr>

--- a/файлы/prezentaciya-chernovik.pptx
+++ b/файлы/prezentaciya-chernovik.pptx
@@ -11126,7 +11126,7 @@
                 </a:solidFill>
                 <a:latin typeface="Onest Medium" pitchFamily="2" charset="-52"/>
               </a:rPr>
-              <a:t xml:space="preserve">Содержание территории — то, что жители видят каждый день; охват 27 населённых пунктов округа, большинство — сёла, где канала обращения фактически не было. Проект отвечает клиентоцентричности федерального проекта «Государство для людей» и практике платформы обратной связи. Процесс типовой для муниципальных образований области — результаты воспроизводимы без изменения методики.</a:t>
+              <a:t xml:space="preserve">Содержание территории — то, что жители видят каждый день; охват 27 населённых пунктов округа, большинство — сёла, где канала обращения фактически не было. Проект отвечает клиентоцентричности федерального проекта «Государство для людей» и практике платформы обратной связи. Процесс исполняется во всех муниципальных образованиях области.</a:t>
             </a:r>
           </a:p>
         </p:txBody>
@@ -12046,7 +12046,7 @@
                           </a:solidFill>
                           <a:latin typeface="Onest Medium" pitchFamily="2" charset="-52"/>
                         </a:rPr>
-                        <a:t xml:space="preserve">проблема остаётся невыявленной, пока житель не напишет обращение: нарушение сроков устранения, рост повторных и вышестоящих обращений, снижение доверия жителей</a:t>
+                        <a:t xml:space="preserve">устранение проблемы начинается после обращения жителя; срок рассмотрения не зависит от сложности обращения; повторные обращения об одном объекте исполняются как отдельные</a:t>
                       </a:r>
                     </a:p>
                     <a:p>
@@ -12075,7 +12075,7 @@
                           </a:solidFill>
                           <a:latin typeface="Onest Medium" pitchFamily="2" charset="-52"/>
                         </a:rPr>
-                        <a:t xml:space="preserve">удовлетворённость жителей содержанием территории; клиентоцентричность по федеральному проекту «Государство для людей»</a:t>
+                        <a:t xml:space="preserve">содержание территории округа; клиентоцентричность — федеральный проект «Государство для людей»</a:t>
                       </a:r>
                     </a:p>
                     <a:p>
@@ -12104,7 +12104,7 @@
                           </a:solidFill>
                           <a:latin typeface="Onest Medium" pitchFamily="2" charset="-52"/>
                         </a:rPr>
-                        <a:t xml:space="preserve">процесс типовой для муниципальных образований области</a:t>
+                        <a:t xml:space="preserve">процесс исполняется во всех муниципальных образованиях области</a:t>
                       </a:r>
                     </a:p>
                   </a:txBody>

--- a/файлы/prezentaciya-chernovik.pptx
+++ b/файлы/prezentaciya-chernovik.pptx
@@ -8704,7 +8704,7 @@
                           </a:solidFill>
                           <a:latin typeface="Onest Medium" pitchFamily="2" charset="-52"/>
                         </a:rPr>
-                        <a:t xml:space="preserve">проект готов</a:t>
+                        <a:t xml:space="preserve">на бланке, к подписи</a:t>
                       </a:r>
                     </a:p>
                   </a:txBody>

--- a/файлы/prezentaciya-chernovik.pptx
+++ b/файлы/prezentaciya-chernovik.pptx
@@ -3330,7 +3330,7 @@
                 <a:latin typeface="Calibri" panose="020F0502020204030204" pitchFamily="34" charset="0"/>
                 <a:ea typeface="Calibri" panose="020F0502020204030204" pitchFamily="34" charset="0"/>
               </a:rPr>
-              <a:t xml:space="preserve">Оптимизация процесса содержания территории Благовещенского муниципального округа за счёт перехода от реагирования на обращения к раннему выявлению проблем, их оперативному устранению и контролю результата</a:t>
+              <a:t xml:space="preserve">Оптимизация процесса устранения проблем благоустройства и содержания территории Благовещенского муниципального округа за счёт перехода от реагирования на обращения к их плановому выявлению и контролю результата</a:t>
             </a:r>
             <a:endParaRPr lang="ru-RU" sz="2400" dirty="0">
               <a:latin typeface="Onest Black" pitchFamily="2" charset="-52"/>

--- a/файлы/prezentaciya-chernovik.pptx
+++ b/файлы/prezentaciya-chernovik.pptx
@@ -3636,7 +3636,7 @@
                 </a:solidFill>
                 <a:latin typeface="Onest Medium" pitchFamily="2" charset="-52"/>
               </a:rPr>
-              <a:t xml:space="preserve">Администрация Благовещенского муниципального округа: наблюдатели, приём сообщений, четыре направления, подразделения-исполнители, Глава округа. Охват — 27 населённых пунктов</a:t>
+              <a:t xml:space="preserve">Администрация Благовещенского муниципального округа: инициативные группы граждан, приём сообщений, четыре направления, подразделения-исполнители, Глава округа. Охват — 27 населённых пунктов</a:t>
             </a:r>
           </a:p>
         </p:txBody>
@@ -4514,7 +4514,7 @@
                           </a:solidFill>
                           <a:latin typeface="Onest Regular" pitchFamily="2" charset="-52"/>
                         </a:rPr>
-                        <a:t xml:space="preserve">старосты сёл, депутаты и общественники видят проблемы каждый день, но канала, чтобы передать их в работу, у них нет</a:t>
+                        <a:t xml:space="preserve">инициативные группы граждан и активные жители видят проблемы каждый день, но канала, чтобы передать их в работу, у них нет</a:t>
                       </a:r>
                     </a:p>
                   </a:txBody>
@@ -5830,7 +5830,7 @@
                 </a:solidFill>
                 <a:latin typeface="Onest Medium" pitchFamily="2" charset="-52"/>
               </a:rPr>
-              <a:t xml:space="preserve">Время протекания процесса — от 10 до 60 календарных дней, из них до 30 дней проблема не выявлена. Очередь на разбор — 2–8 сообщений.</a:t>
+              <a:t xml:space="preserve">Время протекания процесса — от 10 до 44 календарных дней, из них до 14 дней проблема не выявлена. Очередь на разбор — 2–8 сообщений.</a:t>
             </a:r>
           </a:p>
         </p:txBody>
@@ -6601,7 +6601,7 @@
                           </a:solidFill>
                           <a:latin typeface="Onest Regular" pitchFamily="2" charset="-52"/>
                         </a:rPr>
-                        <a:t xml:space="preserve">наблюдатели обходят закреплённую территорию и подают заявки сами; жалоба жителя перестаёт быть единственным входом в процесс</a:t>
+                        <a:t xml:space="preserve">инициативные группы обходят закреплённую территорию и подают заявки сами; обращение жителя перестаёт быть единственным входом в процесс</a:t>
                       </a:r>
                     </a:p>
                   </a:txBody>
@@ -6705,7 +6705,7 @@
                           </a:solidFill>
                           <a:latin typeface="Onest Black" pitchFamily="2" charset="-52"/>
                         </a:rPr>
-                        <a:t xml:space="preserve">наблюдатели и жители</a:t>
+                        <a:t xml:space="preserve">инициативные группы и жители</a:t>
                       </a:r>
                     </a:p>
                   </a:txBody>
@@ -6756,7 +6756,7 @@
                           </a:solidFill>
                           <a:latin typeface="Onest Regular" pitchFamily="2" charset="-52"/>
                         </a:rPr>
-                        <a:t xml:space="preserve">активные жители и сотрудники, ежедневно бывающие на территории, получают роль в сервисе — отдельной системы для этого не требуется</a:t>
+                        <a:t xml:space="preserve">инициативные группы граждан и жители, чаще других сообщавшие о проблемах, получают роль в сервисе — отдельной системы не требуется</a:t>
                       </a:r>
                     </a:p>
                   </a:txBody>
@@ -8963,7 +8963,7 @@
                           </a:solidFill>
                           <a:latin typeface="Onest Regular" pitchFamily="2" charset="-52"/>
                         </a:rPr>
-                        <a:t xml:space="preserve">Наблюдатель, житель, исполнитель, руководитель направления, оператор панели — раздаются самой панелью</a:t>
+                        <a:t xml:space="preserve">Участник инициативной группы, житель, исполнитель, руководитель направления, оператор панели — раздаются самой панелью</a:t>
                       </a:r>
                     </a:p>
                   </a:txBody>
@@ -10328,7 +10328,7 @@
                           </a:solidFill>
                           <a:latin typeface="Onest Medium" pitchFamily="2" charset="-52"/>
                         </a:rPr>
-                        <a:t xml:space="preserve">Администрация Благовещенского муниципального округа: наблюдатели, выявляющие проблемы на территории; подразделение приёма сообщений, четыре направления с головными заместителями, подразделения-исполнители, Глава округа. Охват — 27 населённых пунктов</a:t>
+                        <a:t xml:space="preserve">Администрация Благовещенского муниципального округа: инициативные группы граждан, выявляющие проблемы на территории; подразделение приёма сообщений, четыре направления с головными заместителями, подразделения-исполнители, Глава округа. Охват — 27 населённых пунктов</a:t>
                       </a:r>
                     </a:p>
                   </a:txBody>
@@ -11910,7 +11910,7 @@
                           </a:solidFill>
                           <a:latin typeface="Onest Medium" pitchFamily="2" charset="-52"/>
                         </a:rPr>
-                        <a:t xml:space="preserve">администрация округа: наблюдатели, выявляющие проблемы на территории; приём сообщений, четыре направления с головными заместителями и подразделения-исполнители, Глава округа. Охват — 27 населённых пунктов</a:t>
+                        <a:t xml:space="preserve">администрация округа: инициативные группы граждан, выявляющие проблемы на территории; приём сообщений, четыре направления с головными заместителями и подразделения-исполнители, Глава округа. Охват — 27 населённых пунктов</a:t>
                       </a:r>
                     </a:p>
                   </a:txBody>
@@ -11988,7 +11988,7 @@
                           </a:solidFill>
                           <a:latin typeface="Onest Medium" pitchFamily="2" charset="-52"/>
                         </a:rPr>
-                        <a:t xml:space="preserve">планового выявления проблем нет — администрация узнаёт о проблеме только из обращения жителя, в сёлах округа это до месяца. Ресурс активных жителей не задействован. Поступившее обращение регистрируется вручную, маршрут определяет лично Глава округа, срок один для всего — 30 дней, результат не подтверждается</a:t>
+                        <a:t xml:space="preserve">плановое выявление проблем не ведётся — проблема попадает в работу после обращения жителя; канала для сообщений от инициативных групп граждан не предусмотрено; весь объём обращений вручную распределяет Глава округа; срок рассмотрения — 30 календарных дней, единый для обращений любой сложности; распределение проблем по объектам возникновения не ведётся; связь с заявителем ограничена письменным ответом по итогам</a:t>
                       </a:r>
                     </a:p>
                     <a:p>
@@ -12504,7 +12504,7 @@
                           </a:solidFill>
                           <a:latin typeface="Onest Medium" pitchFamily="2" charset="-52"/>
                         </a:rPr>
-                        <a:t xml:space="preserve">10 — 60</a:t>
+                        <a:t xml:space="preserve">10 — 44</a:t>
                       </a:r>
                     </a:p>
                   </a:txBody>
@@ -17693,7 +17693,7 @@
                           </a:solidFill>
                           <a:latin typeface="Onest Medium" pitchFamily="2" charset="-52"/>
                         </a:rPr>
-                        <a:t xml:space="preserve">Институт наблюдателей: активные жители и сотрудники получают роль в сервисе и подают заявки с обхода</a:t>
+                        <a:t xml:space="preserve">Инициативные группы граждан: получают роль в сервисе и подают заявки по итогам обхода территории</a:t>
                       </a:r>
                     </a:p>
                   </a:txBody>
@@ -19749,7 +19749,7 @@
                           </a:solidFill>
                           <a:latin typeface="Onest Medium" pitchFamily="2" charset="-52"/>
                         </a:rPr>
-                        <a:t xml:space="preserve">Институт наблюдателей: активные жители и сотрудники получают роль в сервисе и подают заявки с обхода</a:t>
+                        <a:t xml:space="preserve">Инициативные группы граждан: получают роль в сервисе и подают заявки по итогам обхода территории</a:t>
                       </a:r>
                     </a:p>
                   </a:txBody>
@@ -21242,7 +21242,7 @@
                           </a:solidFill>
                           <a:latin typeface="Onest Medium" pitchFamily="2" charset="-52"/>
                         </a:rPr>
-                        <a:t xml:space="preserve">10 — 60</a:t>
+                        <a:t xml:space="preserve">10 — 44</a:t>
                       </a:r>
                     </a:p>
                   </a:txBody>
@@ -21652,7 +21652,7 @@
                           </a:solidFill>
                           <a:latin typeface="Onest Regular" pitchFamily="2" charset="-52"/>
                         </a:rPr>
-                        <a:t xml:space="preserve">%; заявки от наблюдателей в общем числе заявок</a:t>
+                        <a:t xml:space="preserve">%; заявки от инициативных групп в общем числе заявок</a:t>
                       </a:r>
                     </a:p>
                   </a:txBody>

--- a/файлы/prezentaciya-chernovik.pptx
+++ b/файлы/prezentaciya-chernovik.pptx
@@ -8072,7 +8072,7 @@
                 </a:solidFill>
                 <a:latin typeface="Onest Medium" pitchFamily="2" charset="-52"/>
               </a:rPr>
-              <a:t xml:space="preserve">Расчётное время протекания процесса — от 1 до 17 дней против 10–60. Очередь на разбор — ноль. Охват — 29 населённых пунктов.</a:t>
+              <a:t xml:space="preserve">Расчётное время протекания процесса — от 1 до 17 дней против 10–44. Очередь на разбор — ноль. Охват — 27 населённых пунктов.</a:t>
             </a:r>
           </a:p>
         </p:txBody>
@@ -16598,7 +16598,7 @@
                 </a:solidFill>
                 <a:latin typeface="Onest Medium" pitchFamily="2" charset="-52"/>
               </a:rPr>
-              <a:t xml:space="preserve">ГЛАВНАЯ: до 30 дней проблема не выявлена и ещё до 30 — рассмотрение</a:t>
+              <a:t xml:space="preserve">ГЛАВНАЯ: до 14 дней проблема не выявлена и ещё до 30 — рассмотрение</a:t>
             </a:r>
           </a:p>
           <a:p>
@@ -16627,7 +16627,7 @@
                 </a:solidFill>
                 <a:latin typeface="Onest Medium" pitchFamily="2" charset="-52"/>
               </a:rPr>
-              <a:t xml:space="preserve">закрытие без подтверждения — житель обращается повторно</a:t>
+              <a:t xml:space="preserve">фотофиксация устранения не предусмотрена — обращение поступает повторно</a:t>
             </a:r>
           </a:p>
           <a:p>
@@ -16656,7 +16656,7 @@
                 </a:solidFill>
                 <a:latin typeface="Onest Medium" pitchFamily="2" charset="-52"/>
               </a:rPr>
-              <a:t xml:space="preserve">ресурс активных жителей не задействован вовсе</a:t>
+              <a:t xml:space="preserve">сообщения инициативных групп в процесс не поступают; объём обращений распределяет Глава округа</a:t>
             </a:r>
           </a:p>
           <a:p>

--- a/файлы/prezentaciya-chernovik.pptx
+++ b/файлы/prezentaciya-chernovik.pptx
@@ -18,6 +18,9 @@
     <p:sldId id="266" r:id="rId13"/>
     <p:sldId id="267" r:id="rId14"/>
     <p:sldId id="268" r:id="rId15"/>
+    <p:sldId id="270" r:id="rId20"/>
+    <p:sldId id="271" r:id="rId21"/>
+    <p:sldId id="272" r:id="rId22"/>
     <p:sldId id="269" r:id="rId16"/>
   </p:sldIdLst>
   <p:sldSz cx="12192000" cy="6858000"/>
@@ -11343,6 +11346,2238 @@
 </p:sld>
 </file>
 
+<file path=ppt/slides/slide15.xml><?xml version="1.0" encoding="utf-8"?>
+<p:sld xmlns:a="http://schemas.openxmlformats.org/drawingml/2006/main" xmlns:r="http://schemas.openxmlformats.org/officeDocument/2006/relationships" xmlns:p="http://schemas.openxmlformats.org/presentationml/2006/main" xmlns:m="http://schemas.openxmlformats.org/officeDocument/2006/math" xmlns:w="http://schemas.openxmlformats.org/wordprocessingml/2006/main" showMasterPhAnim="0" show="1">
+  <p:cSld name="">
+    <p:spTree>
+      <p:nvGrpSpPr>
+        <p:cNvPr id="1" name=""/>
+        <p:cNvGrpSpPr/>
+        <p:nvPr/>
+      </p:nvGrpSpPr>
+      <p:grpSpPr bwMode="auto">
+        <a:xfrm>
+          <a:off x="0" y="0"/>
+          <a:ext cx="0" cy="0"/>
+          <a:chOff x="0" y="0"/>
+          <a:chExt cx="0" cy="0"/>
+        </a:xfrm>
+      </p:grpSpPr>
+      <p:sp>
+        <p:nvSpPr>
+          <p:cNvPr id="8" name="Прямоугольник 2"/>
+          <p:cNvSpPr/>
+          <p:nvPr/>
+        </p:nvSpPr>
+        <p:spPr bwMode="auto">
+          <a:xfrm rot="5400000">
+            <a:off x="2436608" y="-2112865"/>
+            <a:ext cx="656216" cy="5529430"/>
+          </a:xfrm>
+          <a:prstGeom prst="round2SameRect">
+            <a:avLst>
+              <a:gd name="adj1" fmla="val 18167"/>
+              <a:gd name="adj2" fmla="val 0"/>
+            </a:avLst>
+          </a:prstGeom>
+          <a:blipFill>
+            <a:blip r:embed="rId2">
+              <a:alphaModFix amt="63000"/>
+            </a:blip>
+            <a:stretch/>
+          </a:blipFill>
+          <a:ln>
+            <a:noFill/>
+          </a:ln>
+        </p:spPr>
+        <p:style>
+          <a:lnRef idx="2">
+            <a:schemeClr val="accent1">
+              <a:shade val="50000"/>
+            </a:schemeClr>
+          </a:lnRef>
+          <a:fillRef idx="1">
+            <a:schemeClr val="accent1"/>
+          </a:fillRef>
+          <a:effectRef idx="0">
+            <a:schemeClr val="accent1"/>
+          </a:effectRef>
+          <a:fontRef idx="minor"/>
+        </p:style>
+        <p:txBody>
+          <a:bodyPr lIns="90000" tIns="45000" rIns="90000" bIns="45000" anchor="ctr">
+            <a:noAutofit/>
+          </a:bodyPr>
+          <a:lstStyle/>
+          <a:p>
+            <a:pPr algn="ctr" defTabSz="914400">
+              <a:lnSpc>
+                <a:spcPct val="100000"/>
+              </a:lnSpc>
+              <a:defRPr/>
+            </a:pPr>
+            <a:endParaRPr lang="ru-RU" sz="1800" b="1" strike="noStrike" spc="-1">
+              <a:solidFill>
+                <a:schemeClr val="lt1"/>
+              </a:solidFill>
+              <a:latin typeface="Arial"/>
+              <a:ea typeface="DejaVu Sans"/>
+            </a:endParaRPr>
+          </a:p>
+        </p:txBody>
+      </p:sp>
+      <p:sp>
+        <p:nvSpPr>
+          <p:cNvPr id="9" name="Заголовок 1"/>
+          <p:cNvSpPr/>
+          <p:nvPr/>
+        </p:nvSpPr>
+        <p:spPr bwMode="auto">
+          <a:xfrm>
+            <a:off x="236667" y="481750"/>
+            <a:ext cx="5755341" cy="340200"/>
+          </a:xfrm>
+          <a:prstGeom prst="rect">
+            <a:avLst/>
+          </a:prstGeom>
+          <a:noFill/>
+          <a:ln w="0">
+            <a:noFill/>
+          </a:ln>
+        </p:spPr>
+        <p:style>
+          <a:lnRef idx="0">
+            <a:srgbClr val="000000"/>
+          </a:lnRef>
+          <a:fillRef idx="0">
+            <a:srgbClr val="000000"/>
+          </a:fillRef>
+          <a:effectRef idx="0">
+            <a:srgbClr val="000000"/>
+          </a:effectRef>
+          <a:fontRef idx="minor"/>
+        </p:style>
+        <p:txBody>
+          <a:bodyPr anchor="t">
+            <a:noAutofit/>
+          </a:bodyPr>
+          <a:lstStyle/>
+          <a:p>
+            <a:pPr>
+              <a:lnSpc>
+                <a:spcPct val="90000"/>
+              </a:lnSpc>
+              <a:defRPr/>
+            </a:pPr>
+            <a:r>
+              <a:rPr lang="ru-RU" sz="2400">
+                <a:latin typeface="Onest Black"/>
+              </a:rPr>
+              <a:t xml:space="preserve">ПРИЛОЖЕНИЕ. Сервис глазами жителя</a:t>
+            </a:r>
+            <a:endParaRPr lang="ru-RU" sz="2400">
+              <a:latin typeface="Onest Black"/>
+            </a:endParaRPr>
+          </a:p>
+        </p:txBody>
+      </p:sp>
+      <p:grpSp>
+        <p:nvGrpSpPr>
+          <p:cNvPr id="16" name="Группа 15"/>
+          <p:cNvGrpSpPr/>
+          <p:nvPr/>
+        </p:nvGrpSpPr>
+        <p:grpSpPr bwMode="auto">
+          <a:xfrm>
+            <a:off x="11345720" y="339877"/>
+            <a:ext cx="623944" cy="623943"/>
+            <a:chOff x="11482442" y="369793"/>
+            <a:chExt cx="623944" cy="623943"/>
+          </a:xfrm>
+        </p:grpSpPr>
+        <p:sp>
+          <p:nvSpPr>
+            <p:cNvPr id="17" name="Овал 16"/>
+            <p:cNvSpPr/>
+            <p:nvPr/>
+          </p:nvSpPr>
+          <p:spPr bwMode="auto">
+            <a:xfrm>
+              <a:off x="11510840" y="369793"/>
+              <a:ext cx="567147" cy="567147"/>
+            </a:xfrm>
+            <a:prstGeom prst="ellipse">
+              <a:avLst/>
+            </a:prstGeom>
+            <a:blipFill>
+              <a:blip r:embed="rId3">
+                <a:alphaModFix amt="63000"/>
+              </a:blip>
+              <a:stretch/>
+            </a:blipFill>
+            <a:ln>
+              <a:noFill/>
+            </a:ln>
+          </p:spPr>
+          <p:style>
+            <a:lnRef idx="2">
+              <a:schemeClr val="accent1">
+                <a:shade val="50000"/>
+              </a:schemeClr>
+            </a:lnRef>
+            <a:fillRef idx="1">
+              <a:schemeClr val="accent1"/>
+            </a:fillRef>
+            <a:effectRef idx="0">
+              <a:schemeClr val="accent1"/>
+            </a:effectRef>
+            <a:fontRef idx="minor">
+              <a:schemeClr val="lt1"/>
+            </a:fontRef>
+          </p:style>
+          <p:txBody>
+            <a:bodyPr rtlCol="0" anchor="ctr"/>
+            <a:lstStyle/>
+            <a:p>
+              <a:pPr algn="ctr">
+                <a:defRPr/>
+              </a:pPr>
+              <a:endParaRPr lang="ru-RU">
+                <a:latin typeface="Onest ExtraBold"/>
+              </a:endParaRPr>
+            </a:p>
+          </p:txBody>
+        </p:sp>
+        <p:sp>
+          <p:nvSpPr>
+            <p:cNvPr id="18" name="Заголовок 1"/>
+            <p:cNvSpPr/>
+            <p:nvPr/>
+          </p:nvSpPr>
+          <p:spPr bwMode="auto">
+            <a:xfrm>
+              <a:off x="11482442" y="369793"/>
+              <a:ext cx="623944" cy="623943"/>
+            </a:xfrm>
+            <a:prstGeom prst="rect">
+              <a:avLst/>
+            </a:prstGeom>
+            <a:noFill/>
+            <a:ln w="0">
+              <a:noFill/>
+            </a:ln>
+          </p:spPr>
+          <p:style>
+            <a:lnRef idx="0">
+              <a:srgbClr val="000000"/>
+            </a:lnRef>
+            <a:fillRef idx="0">
+              <a:srgbClr val="000000"/>
+            </a:fillRef>
+            <a:effectRef idx="0">
+              <a:srgbClr val="000000"/>
+            </a:effectRef>
+            <a:fontRef idx="minor"/>
+          </p:style>
+          <p:txBody>
+            <a:bodyPr anchor="ctr">
+              <a:noAutofit/>
+            </a:bodyPr>
+            <a:lstStyle/>
+            <a:p>
+              <a:pPr algn="ctr">
+                <a:lnSpc>
+                  <a:spcPct val="90000"/>
+                </a:lnSpc>
+                <a:defRPr/>
+              </a:pPr>
+              <a:r>
+                <a:rPr lang="en-US" sz="2400">
+                  <a:latin typeface="Onest ExtraBold"/>
+                </a:rPr>
+                <a:t>13</a:t>
+              </a:r>
+              <a:endParaRPr lang="ru-RU" sz="2400">
+                <a:latin typeface="Onest ExtraBold"/>
+              </a:endParaRPr>
+            </a:p>
+          </p:txBody>
+        </p:sp>
+      </p:grpSp>
+      <p:sp>
+        <p:nvSpPr>
+          <p:cNvPr id="929" name="Поле 929"/>
+          <p:cNvSpPr txBox="1"/>
+          <p:nvPr/>
+        </p:nvSpPr>
+        <p:spPr>
+          <a:xfrm>
+            <a:off x="411480" y="1234440"/>
+            <a:ext cx="3596640" cy="4023360"/>
+          </a:xfrm>
+          <a:prstGeom prst="roundRect">
+            <a:avLst>
+              <a:gd name="adj" fmla="val 4000"/>
+            </a:avLst>
+          </a:prstGeom>
+          <a:solidFill>
+            <a:srgbClr val="F7F6FE"/>
+          </a:solidFill>
+          <a:ln w="12700">
+            <a:solidFill>
+              <a:srgbClr val="6C5CE0"/>
+            </a:solidFill>
+            <a:prstDash val="dash"/>
+          </a:ln>
+        </p:spPr>
+        <p:txBody>
+          <a:bodyPr anchor="ctr" lIns="91440" rIns="91440" tIns="68580" bIns="68580" wrap="square">
+            <a:noAutofit/>
+          </a:bodyPr>
+          <a:lstStyle/>
+          <a:p>
+            <a:pPr algn="l" marL="0" indent="0">
+              <a:lnSpc>
+                <a:spcPct val="100000"/>
+              </a:lnSpc>
+              <a:spcAft>
+                <a:spcPts val="300"/>
+              </a:spcAft>
+              <a:buNone/>
+            </a:pPr>
+            <a:r>
+              <a:rPr lang="ru-RU" sz="1000" b="1" dirty="0">
+                <a:solidFill>
+                  <a:srgbClr val="6C5CE0"/>
+                </a:solidFill>
+                <a:latin typeface="Onest Black" pitchFamily="2" charset="-52"/>
+              </a:rPr>
+              <a:t xml:space="preserve">НУЖЕН СНИМОК</a:t>
+            </a:r>
+          </a:p>
+          <a:p>
+            <a:pPr algn="l" marL="0" indent="0">
+              <a:lnSpc>
+                <a:spcPct val="112000"/>
+              </a:lnSpc>
+              <a:spcAft>
+                <a:spcPts val="400"/>
+              </a:spcAft>
+              <a:buNone/>
+            </a:pPr>
+            <a:r>
+              <a:rPr lang="ru-RU" sz="900" b="0" dirty="0">
+                <a:solidFill>
+                  <a:srgbClr val="595959"/>
+                </a:solidFill>
+                <a:latin typeface="Onest Medium" pitchFamily="2" charset="-52"/>
+              </a:rPr>
+              <a:t xml:space="preserve">Сообщение о проблеме с фотографией и геометкой; бот принял заявку и присвоил номер</a:t>
+            </a:r>
+          </a:p>
+          <a:p>
+            <a:pPr algn="l" marL="0" indent="0">
+              <a:lnSpc>
+                <a:spcPct val="100000"/>
+              </a:lnSpc>
+              <a:spcAft>
+                <a:spcPts val="0"/>
+              </a:spcAft>
+              <a:buNone/>
+            </a:pPr>
+            <a:r>
+              <a:rPr lang="ru-RU" sz="800" b="0" dirty="0">
+                <a:solidFill>
+                  <a:srgbClr val="595959"/>
+                </a:solidFill>
+                <a:latin typeface="Onest Medium" pitchFamily="2" charset="-52"/>
+              </a:rPr>
+              <a:t xml:space="preserve">житель-1-подача.png</a:t>
+            </a:r>
+          </a:p>
+        </p:txBody>
+      </p:sp>
+      <p:sp>
+        <p:nvSpPr>
+          <p:cNvPr id="930" name="Поле 930"/>
+          <p:cNvSpPr txBox="1"/>
+          <p:nvPr/>
+        </p:nvSpPr>
+        <p:spPr>
+          <a:xfrm>
+            <a:off x="411480" y="5303520"/>
+            <a:ext cx="3596640" cy="411480"/>
+          </a:xfrm>
+          <a:prstGeom prst="rect">
+            <a:avLst/>
+          </a:prstGeom>
+          <a:noFill/>
+          <a:ln w="0">
+            <a:noFill/>
+          </a:ln>
+        </p:spPr>
+        <p:txBody>
+          <a:bodyPr anchor="t" lIns="91440" rIns="91440" tIns="68580" bIns="68580" wrap="square">
+            <a:noAutofit/>
+          </a:bodyPr>
+          <a:lstStyle/>
+          <a:p>
+            <a:pPr algn="l" marL="0" indent="0">
+              <a:lnSpc>
+                <a:spcPct val="105000"/>
+              </a:lnSpc>
+              <a:spcAft>
+                <a:spcPts val="0"/>
+              </a:spcAft>
+              <a:buNone/>
+            </a:pPr>
+            <a:r>
+              <a:rPr lang="ru-RU" sz="850" b="0" dirty="0">
+                <a:solidFill>
+                  <a:srgbClr val="595959"/>
+                </a:solidFill>
+                <a:latin typeface="Onest Medium" pitchFamily="2" charset="-52"/>
+              </a:rPr>
+              <a:t xml:space="preserve"/>
+            </a:r>
+          </a:p>
+        </p:txBody>
+      </p:sp>
+      <p:sp>
+        <p:nvSpPr>
+          <p:cNvPr id="931" name="Поле 931"/>
+          <p:cNvSpPr txBox="1"/>
+          <p:nvPr/>
+        </p:nvSpPr>
+        <p:spPr>
+          <a:xfrm>
+            <a:off x="4282440" y="1234440"/>
+            <a:ext cx="3596640" cy="4023360"/>
+          </a:xfrm>
+          <a:prstGeom prst="roundRect">
+            <a:avLst>
+              <a:gd name="adj" fmla="val 4000"/>
+            </a:avLst>
+          </a:prstGeom>
+          <a:solidFill>
+            <a:srgbClr val="F7F6FE"/>
+          </a:solidFill>
+          <a:ln w="12700">
+            <a:solidFill>
+              <a:srgbClr val="6C5CE0"/>
+            </a:solidFill>
+            <a:prstDash val="dash"/>
+          </a:ln>
+        </p:spPr>
+        <p:txBody>
+          <a:bodyPr anchor="ctr" lIns="91440" rIns="91440" tIns="68580" bIns="68580" wrap="square">
+            <a:noAutofit/>
+          </a:bodyPr>
+          <a:lstStyle/>
+          <a:p>
+            <a:pPr algn="l" marL="0" indent="0">
+              <a:lnSpc>
+                <a:spcPct val="100000"/>
+              </a:lnSpc>
+              <a:spcAft>
+                <a:spcPts val="300"/>
+              </a:spcAft>
+              <a:buNone/>
+            </a:pPr>
+            <a:r>
+              <a:rPr lang="ru-RU" sz="1000" b="1" dirty="0">
+                <a:solidFill>
+                  <a:srgbClr val="6C5CE0"/>
+                </a:solidFill>
+                <a:latin typeface="Onest Black" pitchFamily="2" charset="-52"/>
+              </a:rPr>
+              <a:t xml:space="preserve">НУЖЕН СНИМОК</a:t>
+            </a:r>
+          </a:p>
+          <a:p>
+            <a:pPr algn="l" marL="0" indent="0">
+              <a:lnSpc>
+                <a:spcPct val="112000"/>
+              </a:lnSpc>
+              <a:spcAft>
+                <a:spcPts val="400"/>
+              </a:spcAft>
+              <a:buNone/>
+            </a:pPr>
+            <a:r>
+              <a:rPr lang="ru-RU" sz="900" b="0" dirty="0">
+                <a:solidFill>
+                  <a:srgbClr val="595959"/>
+                </a:solidFill>
+                <a:latin typeface="Onest Medium" pitchFamily="2" charset="-52"/>
+              </a:rPr>
+              <a:t xml:space="preserve">Уведомление автору: заявка взята в работу, назначен исполнитель и срок</a:t>
+            </a:r>
+          </a:p>
+          <a:p>
+            <a:pPr algn="l" marL="0" indent="0">
+              <a:lnSpc>
+                <a:spcPct val="100000"/>
+              </a:lnSpc>
+              <a:spcAft>
+                <a:spcPts val="0"/>
+              </a:spcAft>
+              <a:buNone/>
+            </a:pPr>
+            <a:r>
+              <a:rPr lang="ru-RU" sz="800" b="0" dirty="0">
+                <a:solidFill>
+                  <a:srgbClr val="595959"/>
+                </a:solidFill>
+                <a:latin typeface="Onest Medium" pitchFamily="2" charset="-52"/>
+              </a:rPr>
+              <a:t xml:space="preserve">житель-2-статус.png</a:t>
+            </a:r>
+          </a:p>
+        </p:txBody>
+      </p:sp>
+      <p:sp>
+        <p:nvSpPr>
+          <p:cNvPr id="932" name="Поле 932"/>
+          <p:cNvSpPr txBox="1"/>
+          <p:nvPr/>
+        </p:nvSpPr>
+        <p:spPr>
+          <a:xfrm>
+            <a:off x="4282440" y="5303520"/>
+            <a:ext cx="3596640" cy="411480"/>
+          </a:xfrm>
+          <a:prstGeom prst="rect">
+            <a:avLst/>
+          </a:prstGeom>
+          <a:noFill/>
+          <a:ln w="0">
+            <a:noFill/>
+          </a:ln>
+        </p:spPr>
+        <p:txBody>
+          <a:bodyPr anchor="t" lIns="91440" rIns="91440" tIns="68580" bIns="68580" wrap="square">
+            <a:noAutofit/>
+          </a:bodyPr>
+          <a:lstStyle/>
+          <a:p>
+            <a:pPr algn="l" marL="0" indent="0">
+              <a:lnSpc>
+                <a:spcPct val="105000"/>
+              </a:lnSpc>
+              <a:spcAft>
+                <a:spcPts val="0"/>
+              </a:spcAft>
+              <a:buNone/>
+            </a:pPr>
+            <a:r>
+              <a:rPr lang="ru-RU" sz="850" b="0" dirty="0">
+                <a:solidFill>
+                  <a:srgbClr val="595959"/>
+                </a:solidFill>
+                <a:latin typeface="Onest Medium" pitchFamily="2" charset="-52"/>
+              </a:rPr>
+              <a:t xml:space="preserve"/>
+            </a:r>
+          </a:p>
+        </p:txBody>
+      </p:sp>
+      <p:sp>
+        <p:nvSpPr>
+          <p:cNvPr id="933" name="Поле 933"/>
+          <p:cNvSpPr txBox="1"/>
+          <p:nvPr/>
+        </p:nvSpPr>
+        <p:spPr>
+          <a:xfrm>
+            <a:off x="8153400" y="1234440"/>
+            <a:ext cx="3596640" cy="4023360"/>
+          </a:xfrm>
+          <a:prstGeom prst="roundRect">
+            <a:avLst>
+              <a:gd name="adj" fmla="val 4000"/>
+            </a:avLst>
+          </a:prstGeom>
+          <a:solidFill>
+            <a:srgbClr val="F7F6FE"/>
+          </a:solidFill>
+          <a:ln w="12700">
+            <a:solidFill>
+              <a:srgbClr val="6C5CE0"/>
+            </a:solidFill>
+            <a:prstDash val="dash"/>
+          </a:ln>
+        </p:spPr>
+        <p:txBody>
+          <a:bodyPr anchor="ctr" lIns="91440" rIns="91440" tIns="68580" bIns="68580" wrap="square">
+            <a:noAutofit/>
+          </a:bodyPr>
+          <a:lstStyle/>
+          <a:p>
+            <a:pPr algn="l" marL="0" indent="0">
+              <a:lnSpc>
+                <a:spcPct val="100000"/>
+              </a:lnSpc>
+              <a:spcAft>
+                <a:spcPts val="300"/>
+              </a:spcAft>
+              <a:buNone/>
+            </a:pPr>
+            <a:r>
+              <a:rPr lang="ru-RU" sz="1000" b="1" dirty="0">
+                <a:solidFill>
+                  <a:srgbClr val="6C5CE0"/>
+                </a:solidFill>
+                <a:latin typeface="Onest Black" pitchFamily="2" charset="-52"/>
+              </a:rPr>
+              <a:t xml:space="preserve">НУЖЕН СНИМОК</a:t>
+            </a:r>
+          </a:p>
+          <a:p>
+            <a:pPr algn="l" marL="0" indent="0">
+              <a:lnSpc>
+                <a:spcPct val="112000"/>
+              </a:lnSpc>
+              <a:spcAft>
+                <a:spcPts val="400"/>
+              </a:spcAft>
+              <a:buNone/>
+            </a:pPr>
+            <a:r>
+              <a:rPr lang="ru-RU" sz="900" b="0" dirty="0">
+                <a:solidFill>
+                  <a:srgbClr val="595959"/>
+                </a:solidFill>
+                <a:latin typeface="Onest Medium" pitchFamily="2" charset="-52"/>
+              </a:rPr>
+              <a:t xml:space="preserve">Фотография «после» от исполнителя и оценка результата по шкале 1–5</a:t>
+            </a:r>
+          </a:p>
+          <a:p>
+            <a:pPr algn="l" marL="0" indent="0">
+              <a:lnSpc>
+                <a:spcPct val="100000"/>
+              </a:lnSpc>
+              <a:spcAft>
+                <a:spcPts val="0"/>
+              </a:spcAft>
+              <a:buNone/>
+            </a:pPr>
+            <a:r>
+              <a:rPr lang="ru-RU" sz="800" b="0" dirty="0">
+                <a:solidFill>
+                  <a:srgbClr val="595959"/>
+                </a:solidFill>
+                <a:latin typeface="Onest Medium" pitchFamily="2" charset="-52"/>
+              </a:rPr>
+              <a:t xml:space="preserve">житель-3-результат.png</a:t>
+            </a:r>
+          </a:p>
+        </p:txBody>
+      </p:sp>
+      <p:sp>
+        <p:nvSpPr>
+          <p:cNvPr id="934" name="Поле 934"/>
+          <p:cNvSpPr txBox="1"/>
+          <p:nvPr/>
+        </p:nvSpPr>
+        <p:spPr>
+          <a:xfrm>
+            <a:off x="8153400" y="5303520"/>
+            <a:ext cx="3596640" cy="411480"/>
+          </a:xfrm>
+          <a:prstGeom prst="rect">
+            <a:avLst/>
+          </a:prstGeom>
+          <a:noFill/>
+          <a:ln w="0">
+            <a:noFill/>
+          </a:ln>
+        </p:spPr>
+        <p:txBody>
+          <a:bodyPr anchor="t" lIns="91440" rIns="91440" tIns="68580" bIns="68580" wrap="square">
+            <a:noAutofit/>
+          </a:bodyPr>
+          <a:lstStyle/>
+          <a:p>
+            <a:pPr algn="l" marL="0" indent="0">
+              <a:lnSpc>
+                <a:spcPct val="105000"/>
+              </a:lnSpc>
+              <a:spcAft>
+                <a:spcPts val="0"/>
+              </a:spcAft>
+              <a:buNone/>
+            </a:pPr>
+            <a:r>
+              <a:rPr lang="ru-RU" sz="850" b="0" dirty="0">
+                <a:solidFill>
+                  <a:srgbClr val="595959"/>
+                </a:solidFill>
+                <a:latin typeface="Onest Medium" pitchFamily="2" charset="-52"/>
+              </a:rPr>
+              <a:t xml:space="preserve"/>
+            </a:r>
+          </a:p>
+        </p:txBody>
+      </p:sp>
+      <p:sp>
+        <p:nvSpPr>
+          <p:cNvPr id="935" name="Поле 935"/>
+          <p:cNvSpPr txBox="1"/>
+          <p:nvPr/>
+        </p:nvSpPr>
+        <p:spPr>
+          <a:xfrm>
+            <a:off x="411480" y="6053328"/>
+            <a:ext cx="11338560" cy="457200"/>
+          </a:xfrm>
+          <a:prstGeom prst="rect">
+            <a:avLst/>
+          </a:prstGeom>
+          <a:noFill/>
+          <a:ln w="0">
+            <a:noFill/>
+          </a:ln>
+        </p:spPr>
+        <p:txBody>
+          <a:bodyPr anchor="t" lIns="91440" rIns="91440" tIns="68580" bIns="68580" wrap="square">
+            <a:noAutofit/>
+          </a:bodyPr>
+          <a:lstStyle/>
+          <a:p>
+            <a:pPr algn="l" marL="0" indent="0">
+              <a:lnSpc>
+                <a:spcPct val="105000"/>
+              </a:lnSpc>
+              <a:spcAft>
+                <a:spcPts val="0"/>
+              </a:spcAft>
+              <a:buNone/>
+            </a:pPr>
+            <a:r>
+              <a:rPr lang="ru-RU" sz="950" b="0" dirty="0">
+                <a:solidFill>
+                  <a:srgbClr val="6C5CE0"/>
+                </a:solidFill>
+                <a:latin typeface="Onest Medium" pitchFamily="2" charset="-52"/>
+              </a:rPr>
+              <a:t xml:space="preserve">Весь путь жителя — в мессенджере: подача с фотографией и геометкой, уведомление о работе, фотография результата и оценка. Личные данные на снимках обезличены.</a:t>
+            </a:r>
+          </a:p>
+        </p:txBody>
+      </p:sp>
+    </p:spTree>
+  </p:cSld>
+  <p:clrMapOvr>
+    <a:masterClrMapping/>
+  </p:clrMapOvr>
+  <mc:AlternateContent xmlns:mc="http://schemas.openxmlformats.org/markup-compatibility/2006">
+    <mc:Choice xmlns:p14="http://schemas.microsoft.com/office/powerpoint/2010/main" Requires="p14">
+      <p:transition p14:dur="2000" advClick="1"/>
+    </mc:Choice>
+    <mc:Fallback>
+      <p:transition advClick="1"/>
+    </mc:Fallback>
+  </mc:AlternateContent>
+  <p:timing>
+    <p:tnLst>
+      <p:par>
+        <p:cTn id="1" dur="indefinite" restart="never" nodeType="tmRoot"/>
+      </p:par>
+    </p:tnLst>
+  </p:timing>
+</p:sld>
+</file>
+
+<file path=ppt/slides/slide16.xml><?xml version="1.0" encoding="utf-8"?>
+<p:sld xmlns:a="http://schemas.openxmlformats.org/drawingml/2006/main" xmlns:r="http://schemas.openxmlformats.org/officeDocument/2006/relationships" xmlns:p="http://schemas.openxmlformats.org/presentationml/2006/main" xmlns:m="http://schemas.openxmlformats.org/officeDocument/2006/math" xmlns:w="http://schemas.openxmlformats.org/wordprocessingml/2006/main" showMasterPhAnim="0" show="1">
+  <p:cSld name="">
+    <p:spTree>
+      <p:nvGrpSpPr>
+        <p:cNvPr id="1" name=""/>
+        <p:cNvGrpSpPr/>
+        <p:nvPr/>
+      </p:nvGrpSpPr>
+      <p:grpSpPr bwMode="auto">
+        <a:xfrm>
+          <a:off x="0" y="0"/>
+          <a:ext cx="0" cy="0"/>
+          <a:chOff x="0" y="0"/>
+          <a:chExt cx="0" cy="0"/>
+        </a:xfrm>
+      </p:grpSpPr>
+      <p:sp>
+        <p:nvSpPr>
+          <p:cNvPr id="8" name="Прямоугольник 2"/>
+          <p:cNvSpPr/>
+          <p:nvPr/>
+        </p:nvSpPr>
+        <p:spPr bwMode="auto">
+          <a:xfrm rot="5400000">
+            <a:off x="2436608" y="-2112865"/>
+            <a:ext cx="656216" cy="5529430"/>
+          </a:xfrm>
+          <a:prstGeom prst="round2SameRect">
+            <a:avLst>
+              <a:gd name="adj1" fmla="val 18167"/>
+              <a:gd name="adj2" fmla="val 0"/>
+            </a:avLst>
+          </a:prstGeom>
+          <a:blipFill>
+            <a:blip r:embed="rId2">
+              <a:alphaModFix amt="63000"/>
+            </a:blip>
+            <a:stretch/>
+          </a:blipFill>
+          <a:ln>
+            <a:noFill/>
+          </a:ln>
+        </p:spPr>
+        <p:style>
+          <a:lnRef idx="2">
+            <a:schemeClr val="accent1">
+              <a:shade val="50000"/>
+            </a:schemeClr>
+          </a:lnRef>
+          <a:fillRef idx="1">
+            <a:schemeClr val="accent1"/>
+          </a:fillRef>
+          <a:effectRef idx="0">
+            <a:schemeClr val="accent1"/>
+          </a:effectRef>
+          <a:fontRef idx="minor"/>
+        </p:style>
+        <p:txBody>
+          <a:bodyPr lIns="90000" tIns="45000" rIns="90000" bIns="45000" anchor="ctr">
+            <a:noAutofit/>
+          </a:bodyPr>
+          <a:lstStyle/>
+          <a:p>
+            <a:pPr algn="ctr" defTabSz="914400">
+              <a:lnSpc>
+                <a:spcPct val="100000"/>
+              </a:lnSpc>
+              <a:defRPr/>
+            </a:pPr>
+            <a:endParaRPr lang="ru-RU" sz="1800" b="1" strike="noStrike" spc="-1">
+              <a:solidFill>
+                <a:schemeClr val="lt1"/>
+              </a:solidFill>
+              <a:latin typeface="Arial"/>
+              <a:ea typeface="DejaVu Sans"/>
+            </a:endParaRPr>
+          </a:p>
+        </p:txBody>
+      </p:sp>
+      <p:sp>
+        <p:nvSpPr>
+          <p:cNvPr id="9" name="Заголовок 1"/>
+          <p:cNvSpPr/>
+          <p:nvPr/>
+        </p:nvSpPr>
+        <p:spPr bwMode="auto">
+          <a:xfrm>
+            <a:off x="236667" y="481750"/>
+            <a:ext cx="5755341" cy="340200"/>
+          </a:xfrm>
+          <a:prstGeom prst="rect">
+            <a:avLst/>
+          </a:prstGeom>
+          <a:noFill/>
+          <a:ln w="0">
+            <a:noFill/>
+          </a:ln>
+        </p:spPr>
+        <p:style>
+          <a:lnRef idx="0">
+            <a:srgbClr val="000000"/>
+          </a:lnRef>
+          <a:fillRef idx="0">
+            <a:srgbClr val="000000"/>
+          </a:fillRef>
+          <a:effectRef idx="0">
+            <a:srgbClr val="000000"/>
+          </a:effectRef>
+          <a:fontRef idx="minor"/>
+        </p:style>
+        <p:txBody>
+          <a:bodyPr anchor="t">
+            <a:noAutofit/>
+          </a:bodyPr>
+          <a:lstStyle/>
+          <a:p>
+            <a:pPr>
+              <a:lnSpc>
+                <a:spcPct val="90000"/>
+              </a:lnSpc>
+              <a:defRPr/>
+            </a:pPr>
+            <a:r>
+              <a:rPr lang="ru-RU" sz="2400">
+                <a:latin typeface="Onest Black"/>
+              </a:rPr>
+              <a:t xml:space="preserve">ПРИЛОЖЕНИЕ. Панель администрации</a:t>
+            </a:r>
+            <a:endParaRPr lang="ru-RU" sz="2400">
+              <a:latin typeface="Onest Black"/>
+            </a:endParaRPr>
+          </a:p>
+        </p:txBody>
+      </p:sp>
+      <p:grpSp>
+        <p:nvGrpSpPr>
+          <p:cNvPr id="16" name="Группа 15"/>
+          <p:cNvGrpSpPr/>
+          <p:nvPr/>
+        </p:nvGrpSpPr>
+        <p:grpSpPr bwMode="auto">
+          <a:xfrm>
+            <a:off x="11345720" y="339877"/>
+            <a:ext cx="623944" cy="623943"/>
+            <a:chOff x="11482442" y="369793"/>
+            <a:chExt cx="623944" cy="623943"/>
+          </a:xfrm>
+        </p:grpSpPr>
+        <p:sp>
+          <p:nvSpPr>
+            <p:cNvPr id="17" name="Овал 16"/>
+            <p:cNvSpPr/>
+            <p:nvPr/>
+          </p:nvSpPr>
+          <p:spPr bwMode="auto">
+            <a:xfrm>
+              <a:off x="11510840" y="369793"/>
+              <a:ext cx="567147" cy="567147"/>
+            </a:xfrm>
+            <a:prstGeom prst="ellipse">
+              <a:avLst/>
+            </a:prstGeom>
+            <a:blipFill>
+              <a:blip r:embed="rId3">
+                <a:alphaModFix amt="63000"/>
+              </a:blip>
+              <a:stretch/>
+            </a:blipFill>
+            <a:ln>
+              <a:noFill/>
+            </a:ln>
+          </p:spPr>
+          <p:style>
+            <a:lnRef idx="2">
+              <a:schemeClr val="accent1">
+                <a:shade val="50000"/>
+              </a:schemeClr>
+            </a:lnRef>
+            <a:fillRef idx="1">
+              <a:schemeClr val="accent1"/>
+            </a:fillRef>
+            <a:effectRef idx="0">
+              <a:schemeClr val="accent1"/>
+            </a:effectRef>
+            <a:fontRef idx="minor">
+              <a:schemeClr val="lt1"/>
+            </a:fontRef>
+          </p:style>
+          <p:txBody>
+            <a:bodyPr rtlCol="0" anchor="ctr"/>
+            <a:lstStyle/>
+            <a:p>
+              <a:pPr algn="ctr">
+                <a:defRPr/>
+              </a:pPr>
+              <a:endParaRPr lang="ru-RU">
+                <a:latin typeface="Onest ExtraBold"/>
+              </a:endParaRPr>
+            </a:p>
+          </p:txBody>
+        </p:sp>
+        <p:sp>
+          <p:nvSpPr>
+            <p:cNvPr id="18" name="Заголовок 1"/>
+            <p:cNvSpPr/>
+            <p:nvPr/>
+          </p:nvSpPr>
+          <p:spPr bwMode="auto">
+            <a:xfrm>
+              <a:off x="11482442" y="369793"/>
+              <a:ext cx="623944" cy="623943"/>
+            </a:xfrm>
+            <a:prstGeom prst="rect">
+              <a:avLst/>
+            </a:prstGeom>
+            <a:noFill/>
+            <a:ln w="0">
+              <a:noFill/>
+            </a:ln>
+          </p:spPr>
+          <p:style>
+            <a:lnRef idx="0">
+              <a:srgbClr val="000000"/>
+            </a:lnRef>
+            <a:fillRef idx="0">
+              <a:srgbClr val="000000"/>
+            </a:fillRef>
+            <a:effectRef idx="0">
+              <a:srgbClr val="000000"/>
+            </a:effectRef>
+            <a:fontRef idx="minor"/>
+          </p:style>
+          <p:txBody>
+            <a:bodyPr anchor="ctr">
+              <a:noAutofit/>
+            </a:bodyPr>
+            <a:lstStyle/>
+            <a:p>
+              <a:pPr algn="ctr">
+                <a:lnSpc>
+                  <a:spcPct val="90000"/>
+                </a:lnSpc>
+                <a:defRPr/>
+              </a:pPr>
+              <a:r>
+                <a:rPr lang="en-US" sz="2400">
+                  <a:latin typeface="Onest ExtraBold"/>
+                </a:rPr>
+                <a:t>14</a:t>
+              </a:r>
+              <a:endParaRPr lang="ru-RU" sz="2400">
+                <a:latin typeface="Onest ExtraBold"/>
+              </a:endParaRPr>
+            </a:p>
+          </p:txBody>
+        </p:sp>
+      </p:grpSp>
+      <p:sp>
+        <p:nvSpPr>
+          <p:cNvPr id="936" name="Поле 936"/>
+          <p:cNvSpPr txBox="1"/>
+          <p:nvPr/>
+        </p:nvSpPr>
+        <p:spPr>
+          <a:xfrm>
+            <a:off x="411480" y="1234440"/>
+            <a:ext cx="3596640" cy="4023360"/>
+          </a:xfrm>
+          <a:prstGeom prst="roundRect">
+            <a:avLst>
+              <a:gd name="adj" fmla="val 4000"/>
+            </a:avLst>
+          </a:prstGeom>
+          <a:solidFill>
+            <a:srgbClr val="F7F6FE"/>
+          </a:solidFill>
+          <a:ln w="12700">
+            <a:solidFill>
+              <a:srgbClr val="6C5CE0"/>
+            </a:solidFill>
+            <a:prstDash val="dash"/>
+          </a:ln>
+        </p:spPr>
+        <p:txBody>
+          <a:bodyPr anchor="ctr" lIns="91440" rIns="91440" tIns="68580" bIns="68580" wrap="square">
+            <a:noAutofit/>
+          </a:bodyPr>
+          <a:lstStyle/>
+          <a:p>
+            <a:pPr algn="l" marL="0" indent="0">
+              <a:lnSpc>
+                <a:spcPct val="100000"/>
+              </a:lnSpc>
+              <a:spcAft>
+                <a:spcPts val="300"/>
+              </a:spcAft>
+              <a:buNone/>
+            </a:pPr>
+            <a:r>
+              <a:rPr lang="ru-RU" sz="1000" b="1" dirty="0">
+                <a:solidFill>
+                  <a:srgbClr val="6C5CE0"/>
+                </a:solidFill>
+                <a:latin typeface="Onest Black" pitchFamily="2" charset="-52"/>
+              </a:rPr>
+              <a:t xml:space="preserve">НУЖЕН СНИМОК</a:t>
+            </a:r>
+          </a:p>
+          <a:p>
+            <a:pPr algn="l" marL="0" indent="0">
+              <a:lnSpc>
+                <a:spcPct val="112000"/>
+              </a:lnSpc>
+              <a:spcAft>
+                <a:spcPts val="400"/>
+              </a:spcAft>
+              <a:buNone/>
+            </a:pPr>
+            <a:r>
+              <a:rPr lang="ru-RU" sz="900" b="0" dirty="0">
+                <a:solidFill>
+                  <a:srgbClr val="595959"/>
+                </a:solidFill>
+                <a:latin typeface="Onest Medium" pitchFamily="2" charset="-52"/>
+              </a:rPr>
+              <a:t xml:space="preserve">Карта заявок по территории округа — распределение проблем по объектам возникновения</a:t>
+            </a:r>
+          </a:p>
+          <a:p>
+            <a:pPr algn="l" marL="0" indent="0">
+              <a:lnSpc>
+                <a:spcPct val="100000"/>
+              </a:lnSpc>
+              <a:spcAft>
+                <a:spcPts val="0"/>
+              </a:spcAft>
+              <a:buNone/>
+            </a:pPr>
+            <a:r>
+              <a:rPr lang="ru-RU" sz="800" b="0" dirty="0">
+                <a:solidFill>
+                  <a:srgbClr val="595959"/>
+                </a:solidFill>
+                <a:latin typeface="Onest Medium" pitchFamily="2" charset="-52"/>
+              </a:rPr>
+              <a:t xml:space="preserve">панель-1-карта.png</a:t>
+            </a:r>
+          </a:p>
+        </p:txBody>
+      </p:sp>
+      <p:sp>
+        <p:nvSpPr>
+          <p:cNvPr id="937" name="Поле 937"/>
+          <p:cNvSpPr txBox="1"/>
+          <p:nvPr/>
+        </p:nvSpPr>
+        <p:spPr>
+          <a:xfrm>
+            <a:off x="411480" y="5303520"/>
+            <a:ext cx="3596640" cy="411480"/>
+          </a:xfrm>
+          <a:prstGeom prst="rect">
+            <a:avLst/>
+          </a:prstGeom>
+          <a:noFill/>
+          <a:ln w="0">
+            <a:noFill/>
+          </a:ln>
+        </p:spPr>
+        <p:txBody>
+          <a:bodyPr anchor="t" lIns="91440" rIns="91440" tIns="68580" bIns="68580" wrap="square">
+            <a:noAutofit/>
+          </a:bodyPr>
+          <a:lstStyle/>
+          <a:p>
+            <a:pPr algn="l" marL="0" indent="0">
+              <a:lnSpc>
+                <a:spcPct val="105000"/>
+              </a:lnSpc>
+              <a:spcAft>
+                <a:spcPts val="0"/>
+              </a:spcAft>
+              <a:buNone/>
+            </a:pPr>
+            <a:r>
+              <a:rPr lang="ru-RU" sz="850" b="0" dirty="0">
+                <a:solidFill>
+                  <a:srgbClr val="595959"/>
+                </a:solidFill>
+                <a:latin typeface="Onest Medium" pitchFamily="2" charset="-52"/>
+              </a:rPr>
+              <a:t xml:space="preserve"/>
+            </a:r>
+          </a:p>
+        </p:txBody>
+      </p:sp>
+      <p:sp>
+        <p:nvSpPr>
+          <p:cNvPr id="938" name="Поле 938"/>
+          <p:cNvSpPr txBox="1"/>
+          <p:nvPr/>
+        </p:nvSpPr>
+        <p:spPr>
+          <a:xfrm>
+            <a:off x="4282440" y="1234440"/>
+            <a:ext cx="3596640" cy="4023360"/>
+          </a:xfrm>
+          <a:prstGeom prst="roundRect">
+            <a:avLst>
+              <a:gd name="adj" fmla="val 4000"/>
+            </a:avLst>
+          </a:prstGeom>
+          <a:solidFill>
+            <a:srgbClr val="F7F6FE"/>
+          </a:solidFill>
+          <a:ln w="12700">
+            <a:solidFill>
+              <a:srgbClr val="6C5CE0"/>
+            </a:solidFill>
+            <a:prstDash val="dash"/>
+          </a:ln>
+        </p:spPr>
+        <p:txBody>
+          <a:bodyPr anchor="ctr" lIns="91440" rIns="91440" tIns="68580" bIns="68580" wrap="square">
+            <a:noAutofit/>
+          </a:bodyPr>
+          <a:lstStyle/>
+          <a:p>
+            <a:pPr algn="l" marL="0" indent="0">
+              <a:lnSpc>
+                <a:spcPct val="100000"/>
+              </a:lnSpc>
+              <a:spcAft>
+                <a:spcPts val="300"/>
+              </a:spcAft>
+              <a:buNone/>
+            </a:pPr>
+            <a:r>
+              <a:rPr lang="ru-RU" sz="1000" b="1" dirty="0">
+                <a:solidFill>
+                  <a:srgbClr val="6C5CE0"/>
+                </a:solidFill>
+                <a:latin typeface="Onest Black" pitchFamily="2" charset="-52"/>
+              </a:rPr>
+              <a:t xml:space="preserve">НУЖЕН СНИМОК</a:t>
+            </a:r>
+          </a:p>
+          <a:p>
+            <a:pPr algn="l" marL="0" indent="0">
+              <a:lnSpc>
+                <a:spcPct val="112000"/>
+              </a:lnSpc>
+              <a:spcAft>
+                <a:spcPts val="400"/>
+              </a:spcAft>
+              <a:buNone/>
+            </a:pPr>
+            <a:r>
+              <a:rPr lang="ru-RU" sz="900" b="0" dirty="0">
+                <a:solidFill>
+                  <a:srgbClr val="595959"/>
+                </a:solidFill>
+                <a:latin typeface="Onest Medium" pitchFamily="2" charset="-52"/>
+              </a:rPr>
+              <a:t xml:space="preserve">Сроки, нагрузка на исполнителей и статистика по направлениям</a:t>
+            </a:r>
+          </a:p>
+          <a:p>
+            <a:pPr algn="l" marL="0" indent="0">
+              <a:lnSpc>
+                <a:spcPct val="100000"/>
+              </a:lnSpc>
+              <a:spcAft>
+                <a:spcPts val="0"/>
+              </a:spcAft>
+              <a:buNone/>
+            </a:pPr>
+            <a:r>
+              <a:rPr lang="ru-RU" sz="800" b="0" dirty="0">
+                <a:solidFill>
+                  <a:srgbClr val="595959"/>
+                </a:solidFill>
+                <a:latin typeface="Onest Medium" pitchFamily="2" charset="-52"/>
+              </a:rPr>
+              <a:t xml:space="preserve">панель-2-статистика.png</a:t>
+            </a:r>
+          </a:p>
+        </p:txBody>
+      </p:sp>
+      <p:sp>
+        <p:nvSpPr>
+          <p:cNvPr id="939" name="Поле 939"/>
+          <p:cNvSpPr txBox="1"/>
+          <p:nvPr/>
+        </p:nvSpPr>
+        <p:spPr>
+          <a:xfrm>
+            <a:off x="4282440" y="5303520"/>
+            <a:ext cx="3596640" cy="411480"/>
+          </a:xfrm>
+          <a:prstGeom prst="rect">
+            <a:avLst/>
+          </a:prstGeom>
+          <a:noFill/>
+          <a:ln w="0">
+            <a:noFill/>
+          </a:ln>
+        </p:spPr>
+        <p:txBody>
+          <a:bodyPr anchor="t" lIns="91440" rIns="91440" tIns="68580" bIns="68580" wrap="square">
+            <a:noAutofit/>
+          </a:bodyPr>
+          <a:lstStyle/>
+          <a:p>
+            <a:pPr algn="l" marL="0" indent="0">
+              <a:lnSpc>
+                <a:spcPct val="105000"/>
+              </a:lnSpc>
+              <a:spcAft>
+                <a:spcPts val="0"/>
+              </a:spcAft>
+              <a:buNone/>
+            </a:pPr>
+            <a:r>
+              <a:rPr lang="ru-RU" sz="850" b="0" dirty="0">
+                <a:solidFill>
+                  <a:srgbClr val="595959"/>
+                </a:solidFill>
+                <a:latin typeface="Onest Medium" pitchFamily="2" charset="-52"/>
+              </a:rPr>
+              <a:t xml:space="preserve"/>
+            </a:r>
+          </a:p>
+        </p:txBody>
+      </p:sp>
+      <p:sp>
+        <p:nvSpPr>
+          <p:cNvPr id="940" name="Поле 940"/>
+          <p:cNvSpPr txBox="1"/>
+          <p:nvPr/>
+        </p:nvSpPr>
+        <p:spPr>
+          <a:xfrm>
+            <a:off x="8153400" y="1234440"/>
+            <a:ext cx="3596640" cy="4023360"/>
+          </a:xfrm>
+          <a:prstGeom prst="roundRect">
+            <a:avLst>
+              <a:gd name="adj" fmla="val 4000"/>
+            </a:avLst>
+          </a:prstGeom>
+          <a:solidFill>
+            <a:srgbClr val="F7F6FE"/>
+          </a:solidFill>
+          <a:ln w="12700">
+            <a:solidFill>
+              <a:srgbClr val="6C5CE0"/>
+            </a:solidFill>
+            <a:prstDash val="dash"/>
+          </a:ln>
+        </p:spPr>
+        <p:txBody>
+          <a:bodyPr anchor="ctr" lIns="91440" rIns="91440" tIns="68580" bIns="68580" wrap="square">
+            <a:noAutofit/>
+          </a:bodyPr>
+          <a:lstStyle/>
+          <a:p>
+            <a:pPr algn="l" marL="0" indent="0">
+              <a:lnSpc>
+                <a:spcPct val="100000"/>
+              </a:lnSpc>
+              <a:spcAft>
+                <a:spcPts val="300"/>
+              </a:spcAft>
+              <a:buNone/>
+            </a:pPr>
+            <a:r>
+              <a:rPr lang="ru-RU" sz="1000" b="1" dirty="0">
+                <a:solidFill>
+                  <a:srgbClr val="6C5CE0"/>
+                </a:solidFill>
+                <a:latin typeface="Onest Black" pitchFamily="2" charset="-52"/>
+              </a:rPr>
+              <a:t xml:space="preserve">НУЖЕН СНИМОК</a:t>
+            </a:r>
+          </a:p>
+          <a:p>
+            <a:pPr algn="l" marL="0" indent="0">
+              <a:lnSpc>
+                <a:spcPct val="112000"/>
+              </a:lnSpc>
+              <a:spcAft>
+                <a:spcPts val="400"/>
+              </a:spcAft>
+              <a:buNone/>
+            </a:pPr>
+            <a:r>
+              <a:rPr lang="ru-RU" sz="900" b="0" dirty="0">
+                <a:solidFill>
+                  <a:srgbClr val="595959"/>
+                </a:solidFill>
+                <a:latin typeface="Onest Medium" pitchFamily="2" charset="-52"/>
+              </a:rPr>
+              <a:t xml:space="preserve">Карточка заявки: статус, срок, журнал событий, фотографии до и после</a:t>
+            </a:r>
+          </a:p>
+          <a:p>
+            <a:pPr algn="l" marL="0" indent="0">
+              <a:lnSpc>
+                <a:spcPct val="100000"/>
+              </a:lnSpc>
+              <a:spcAft>
+                <a:spcPts val="0"/>
+              </a:spcAft>
+              <a:buNone/>
+            </a:pPr>
+            <a:r>
+              <a:rPr lang="ru-RU" sz="800" b="0" dirty="0">
+                <a:solidFill>
+                  <a:srgbClr val="595959"/>
+                </a:solidFill>
+                <a:latin typeface="Onest Medium" pitchFamily="2" charset="-52"/>
+              </a:rPr>
+              <a:t xml:space="preserve">панель-3-карточка.png</a:t>
+            </a:r>
+          </a:p>
+        </p:txBody>
+      </p:sp>
+      <p:sp>
+        <p:nvSpPr>
+          <p:cNvPr id="941" name="Поле 941"/>
+          <p:cNvSpPr txBox="1"/>
+          <p:nvPr/>
+        </p:nvSpPr>
+        <p:spPr>
+          <a:xfrm>
+            <a:off x="8153400" y="5303520"/>
+            <a:ext cx="3596640" cy="411480"/>
+          </a:xfrm>
+          <a:prstGeom prst="rect">
+            <a:avLst/>
+          </a:prstGeom>
+          <a:noFill/>
+          <a:ln w="0">
+            <a:noFill/>
+          </a:ln>
+        </p:spPr>
+        <p:txBody>
+          <a:bodyPr anchor="t" lIns="91440" rIns="91440" tIns="68580" bIns="68580" wrap="square">
+            <a:noAutofit/>
+          </a:bodyPr>
+          <a:lstStyle/>
+          <a:p>
+            <a:pPr algn="l" marL="0" indent="0">
+              <a:lnSpc>
+                <a:spcPct val="105000"/>
+              </a:lnSpc>
+              <a:spcAft>
+                <a:spcPts val="0"/>
+              </a:spcAft>
+              <a:buNone/>
+            </a:pPr>
+            <a:r>
+              <a:rPr lang="ru-RU" sz="850" b="0" dirty="0">
+                <a:solidFill>
+                  <a:srgbClr val="595959"/>
+                </a:solidFill>
+                <a:latin typeface="Onest Medium" pitchFamily="2" charset="-52"/>
+              </a:rPr>
+              <a:t xml:space="preserve"/>
+            </a:r>
+          </a:p>
+        </p:txBody>
+      </p:sp>
+      <p:sp>
+        <p:nvSpPr>
+          <p:cNvPr id="942" name="Поле 942"/>
+          <p:cNvSpPr txBox="1"/>
+          <p:nvPr/>
+        </p:nvSpPr>
+        <p:spPr>
+          <a:xfrm>
+            <a:off x="411480" y="6053328"/>
+            <a:ext cx="11338560" cy="457200"/>
+          </a:xfrm>
+          <a:prstGeom prst="rect">
+            <a:avLst/>
+          </a:prstGeom>
+          <a:noFill/>
+          <a:ln w="0">
+            <a:noFill/>
+          </a:ln>
+        </p:spPr>
+        <p:txBody>
+          <a:bodyPr anchor="t" lIns="91440" rIns="91440" tIns="68580" bIns="68580" wrap="square">
+            <a:noAutofit/>
+          </a:bodyPr>
+          <a:lstStyle/>
+          <a:p>
+            <a:pPr algn="l" marL="0" indent="0">
+              <a:lnSpc>
+                <a:spcPct val="105000"/>
+              </a:lnSpc>
+              <a:spcAft>
+                <a:spcPts val="0"/>
+              </a:spcAft>
+              <a:buNone/>
+            </a:pPr>
+            <a:r>
+              <a:rPr lang="ru-RU" sz="950" b="0" dirty="0">
+                <a:solidFill>
+                  <a:srgbClr val="6C5CE0"/>
+                </a:solidFill>
+                <a:latin typeface="Onest Medium" pitchFamily="2" charset="-52"/>
+              </a:rPr>
+              <a:t xml:space="preserve">Руководитель видит процесс целиком и в реальном времени: где проблемы, кто их ведёт, что просрочено. Прежде сводка собиралась вручную и занимала до недели.</a:t>
+            </a:r>
+          </a:p>
+        </p:txBody>
+      </p:sp>
+    </p:spTree>
+  </p:cSld>
+  <p:clrMapOvr>
+    <a:masterClrMapping/>
+  </p:clrMapOvr>
+  <mc:AlternateContent xmlns:mc="http://schemas.openxmlformats.org/markup-compatibility/2006">
+    <mc:Choice xmlns:p14="http://schemas.microsoft.com/office/powerpoint/2010/main" Requires="p14">
+      <p:transition p14:dur="2000" advClick="1"/>
+    </mc:Choice>
+    <mc:Fallback>
+      <p:transition advClick="1"/>
+    </mc:Fallback>
+  </mc:AlternateContent>
+  <p:timing>
+    <p:tnLst>
+      <p:par>
+        <p:cTn id="1" dur="indefinite" restart="never" nodeType="tmRoot"/>
+      </p:par>
+    </p:tnLst>
+  </p:timing>
+</p:sld>
+</file>
+
+<file path=ppt/slides/slide17.xml><?xml version="1.0" encoding="utf-8"?>
+<p:sld xmlns:a="http://schemas.openxmlformats.org/drawingml/2006/main" xmlns:r="http://schemas.openxmlformats.org/officeDocument/2006/relationships" xmlns:p="http://schemas.openxmlformats.org/presentationml/2006/main" xmlns:m="http://schemas.openxmlformats.org/officeDocument/2006/math" xmlns:w="http://schemas.openxmlformats.org/wordprocessingml/2006/main" showMasterPhAnim="0" show="1">
+  <p:cSld name="">
+    <p:spTree>
+      <p:nvGrpSpPr>
+        <p:cNvPr id="1" name=""/>
+        <p:cNvGrpSpPr/>
+        <p:nvPr/>
+      </p:nvGrpSpPr>
+      <p:grpSpPr bwMode="auto">
+        <a:xfrm>
+          <a:off x="0" y="0"/>
+          <a:ext cx="0" cy="0"/>
+          <a:chOff x="0" y="0"/>
+          <a:chExt cx="0" cy="0"/>
+        </a:xfrm>
+      </p:grpSpPr>
+      <p:sp>
+        <p:nvSpPr>
+          <p:cNvPr id="8" name="Прямоугольник 2"/>
+          <p:cNvSpPr/>
+          <p:nvPr/>
+        </p:nvSpPr>
+        <p:spPr bwMode="auto">
+          <a:xfrm rot="5400000">
+            <a:off x="2436608" y="-2112865"/>
+            <a:ext cx="656216" cy="5529430"/>
+          </a:xfrm>
+          <a:prstGeom prst="round2SameRect">
+            <a:avLst>
+              <a:gd name="adj1" fmla="val 18167"/>
+              <a:gd name="adj2" fmla="val 0"/>
+            </a:avLst>
+          </a:prstGeom>
+          <a:blipFill>
+            <a:blip r:embed="rId2">
+              <a:alphaModFix amt="63000"/>
+            </a:blip>
+            <a:stretch/>
+          </a:blipFill>
+          <a:ln>
+            <a:noFill/>
+          </a:ln>
+        </p:spPr>
+        <p:style>
+          <a:lnRef idx="2">
+            <a:schemeClr val="accent1">
+              <a:shade val="50000"/>
+            </a:schemeClr>
+          </a:lnRef>
+          <a:fillRef idx="1">
+            <a:schemeClr val="accent1"/>
+          </a:fillRef>
+          <a:effectRef idx="0">
+            <a:schemeClr val="accent1"/>
+          </a:effectRef>
+          <a:fontRef idx="minor"/>
+        </p:style>
+        <p:txBody>
+          <a:bodyPr lIns="90000" tIns="45000" rIns="90000" bIns="45000" anchor="ctr">
+            <a:noAutofit/>
+          </a:bodyPr>
+          <a:lstStyle/>
+          <a:p>
+            <a:pPr algn="ctr" defTabSz="914400">
+              <a:lnSpc>
+                <a:spcPct val="100000"/>
+              </a:lnSpc>
+              <a:defRPr/>
+            </a:pPr>
+            <a:endParaRPr lang="ru-RU" sz="1800" b="1" strike="noStrike" spc="-1">
+              <a:solidFill>
+                <a:schemeClr val="lt1"/>
+              </a:solidFill>
+              <a:latin typeface="Arial"/>
+              <a:ea typeface="DejaVu Sans"/>
+            </a:endParaRPr>
+          </a:p>
+        </p:txBody>
+      </p:sp>
+      <p:sp>
+        <p:nvSpPr>
+          <p:cNvPr id="9" name="Заголовок 1"/>
+          <p:cNvSpPr/>
+          <p:nvPr/>
+        </p:nvSpPr>
+        <p:spPr bwMode="auto">
+          <a:xfrm>
+            <a:off x="236667" y="481750"/>
+            <a:ext cx="5755341" cy="340200"/>
+          </a:xfrm>
+          <a:prstGeom prst="rect">
+            <a:avLst/>
+          </a:prstGeom>
+          <a:noFill/>
+          <a:ln w="0">
+            <a:noFill/>
+          </a:ln>
+        </p:spPr>
+        <p:style>
+          <a:lnRef idx="0">
+            <a:srgbClr val="000000"/>
+          </a:lnRef>
+          <a:fillRef idx="0">
+            <a:srgbClr val="000000"/>
+          </a:fillRef>
+          <a:effectRef idx="0">
+            <a:srgbClr val="000000"/>
+          </a:effectRef>
+          <a:fontRef idx="minor"/>
+        </p:style>
+        <p:txBody>
+          <a:bodyPr anchor="t">
+            <a:noAutofit/>
+          </a:bodyPr>
+          <a:lstStyle/>
+          <a:p>
+            <a:pPr>
+              <a:lnSpc>
+                <a:spcPct val="90000"/>
+              </a:lnSpc>
+              <a:defRPr/>
+            </a:pPr>
+            <a:r>
+              <a:rPr lang="ru-RU" sz="2400">
+                <a:latin typeface="Onest Black"/>
+              </a:rPr>
+              <a:t xml:space="preserve">ПРИЛОЖЕНИЕ. Было и стало</a:t>
+            </a:r>
+            <a:endParaRPr lang="ru-RU" sz="2400">
+              <a:latin typeface="Onest Black"/>
+            </a:endParaRPr>
+          </a:p>
+        </p:txBody>
+      </p:sp>
+      <p:grpSp>
+        <p:nvGrpSpPr>
+          <p:cNvPr id="16" name="Группа 15"/>
+          <p:cNvGrpSpPr/>
+          <p:nvPr/>
+        </p:nvGrpSpPr>
+        <p:grpSpPr bwMode="auto">
+          <a:xfrm>
+            <a:off x="11345720" y="339877"/>
+            <a:ext cx="623944" cy="623943"/>
+            <a:chOff x="11482442" y="369793"/>
+            <a:chExt cx="623944" cy="623943"/>
+          </a:xfrm>
+        </p:grpSpPr>
+        <p:sp>
+          <p:nvSpPr>
+            <p:cNvPr id="17" name="Овал 16"/>
+            <p:cNvSpPr/>
+            <p:nvPr/>
+          </p:nvSpPr>
+          <p:spPr bwMode="auto">
+            <a:xfrm>
+              <a:off x="11510840" y="369793"/>
+              <a:ext cx="567147" cy="567147"/>
+            </a:xfrm>
+            <a:prstGeom prst="ellipse">
+              <a:avLst/>
+            </a:prstGeom>
+            <a:blipFill>
+              <a:blip r:embed="rId3">
+                <a:alphaModFix amt="63000"/>
+              </a:blip>
+              <a:stretch/>
+            </a:blipFill>
+            <a:ln>
+              <a:noFill/>
+            </a:ln>
+          </p:spPr>
+          <p:style>
+            <a:lnRef idx="2">
+              <a:schemeClr val="accent1">
+                <a:shade val="50000"/>
+              </a:schemeClr>
+            </a:lnRef>
+            <a:fillRef idx="1">
+              <a:schemeClr val="accent1"/>
+            </a:fillRef>
+            <a:effectRef idx="0">
+              <a:schemeClr val="accent1"/>
+            </a:effectRef>
+            <a:fontRef idx="minor">
+              <a:schemeClr val="lt1"/>
+            </a:fontRef>
+          </p:style>
+          <p:txBody>
+            <a:bodyPr rtlCol="0" anchor="ctr"/>
+            <a:lstStyle/>
+            <a:p>
+              <a:pPr algn="ctr">
+                <a:defRPr/>
+              </a:pPr>
+              <a:endParaRPr lang="ru-RU">
+                <a:latin typeface="Onest ExtraBold"/>
+              </a:endParaRPr>
+            </a:p>
+          </p:txBody>
+        </p:sp>
+        <p:sp>
+          <p:nvSpPr>
+            <p:cNvPr id="18" name="Заголовок 1"/>
+            <p:cNvSpPr/>
+            <p:nvPr/>
+          </p:nvSpPr>
+          <p:spPr bwMode="auto">
+            <a:xfrm>
+              <a:off x="11482442" y="369793"/>
+              <a:ext cx="623944" cy="623943"/>
+            </a:xfrm>
+            <a:prstGeom prst="rect">
+              <a:avLst/>
+            </a:prstGeom>
+            <a:noFill/>
+            <a:ln w="0">
+              <a:noFill/>
+            </a:ln>
+          </p:spPr>
+          <p:style>
+            <a:lnRef idx="0">
+              <a:srgbClr val="000000"/>
+            </a:lnRef>
+            <a:fillRef idx="0">
+              <a:srgbClr val="000000"/>
+            </a:fillRef>
+            <a:effectRef idx="0">
+              <a:srgbClr val="000000"/>
+            </a:effectRef>
+            <a:fontRef idx="minor"/>
+          </p:style>
+          <p:txBody>
+            <a:bodyPr anchor="ctr">
+              <a:noAutofit/>
+            </a:bodyPr>
+            <a:lstStyle/>
+            <a:p>
+              <a:pPr algn="ctr">
+                <a:lnSpc>
+                  <a:spcPct val="90000"/>
+                </a:lnSpc>
+                <a:defRPr/>
+              </a:pPr>
+              <a:r>
+                <a:rPr lang="en-US" sz="2400">
+                  <a:latin typeface="Onest ExtraBold"/>
+                </a:rPr>
+                <a:t>15</a:t>
+              </a:r>
+              <a:endParaRPr lang="ru-RU" sz="2400">
+                <a:latin typeface="Onest ExtraBold"/>
+              </a:endParaRPr>
+            </a:p>
+          </p:txBody>
+        </p:sp>
+      </p:grpSp>
+      <p:sp>
+        <p:nvSpPr>
+          <p:cNvPr id="943" name="Поле 943"/>
+          <p:cNvSpPr txBox="1"/>
+          <p:nvPr/>
+        </p:nvSpPr>
+        <p:spPr>
+          <a:xfrm>
+            <a:off x="411480" y="1234440"/>
+            <a:ext cx="3596640" cy="4023360"/>
+          </a:xfrm>
+          <a:prstGeom prst="roundRect">
+            <a:avLst>
+              <a:gd name="adj" fmla="val 4000"/>
+            </a:avLst>
+          </a:prstGeom>
+          <a:solidFill>
+            <a:srgbClr val="F7F6FE"/>
+          </a:solidFill>
+          <a:ln w="12700">
+            <a:solidFill>
+              <a:srgbClr val="6C5CE0"/>
+            </a:solidFill>
+            <a:prstDash val="dash"/>
+          </a:ln>
+        </p:spPr>
+        <p:txBody>
+          <a:bodyPr anchor="ctr" lIns="91440" rIns="91440" tIns="68580" bIns="68580" wrap="square">
+            <a:noAutofit/>
+          </a:bodyPr>
+          <a:lstStyle/>
+          <a:p>
+            <a:pPr algn="l" marL="0" indent="0">
+              <a:lnSpc>
+                <a:spcPct val="100000"/>
+              </a:lnSpc>
+              <a:spcAft>
+                <a:spcPts val="300"/>
+              </a:spcAft>
+              <a:buNone/>
+            </a:pPr>
+            <a:r>
+              <a:rPr lang="ru-RU" sz="1000" b="1" dirty="0">
+                <a:solidFill>
+                  <a:srgbClr val="6C5CE0"/>
+                </a:solidFill>
+                <a:latin typeface="Onest Black" pitchFamily="2" charset="-52"/>
+              </a:rPr>
+              <a:t xml:space="preserve">НУЖЕН СНИМОК</a:t>
+            </a:r>
+          </a:p>
+          <a:p>
+            <a:pPr algn="l" marL="0" indent="0">
+              <a:lnSpc>
+                <a:spcPct val="112000"/>
+              </a:lnSpc>
+              <a:spcAft>
+                <a:spcPts val="400"/>
+              </a:spcAft>
+              <a:buNone/>
+            </a:pPr>
+            <a:r>
+              <a:rPr lang="ru-RU" sz="900" b="0" dirty="0">
+                <a:solidFill>
+                  <a:srgbClr val="595959"/>
+                </a:solidFill>
+                <a:latin typeface="Onest Medium" pitchFamily="2" charset="-52"/>
+              </a:rPr>
+              <a:t xml:space="preserve">Было: журнал регистрации входящих и письменные заявления</a:t>
+            </a:r>
+          </a:p>
+          <a:p>
+            <a:pPr algn="l" marL="0" indent="0">
+              <a:lnSpc>
+                <a:spcPct val="100000"/>
+              </a:lnSpc>
+              <a:spcAft>
+                <a:spcPts val="0"/>
+              </a:spcAft>
+              <a:buNone/>
+            </a:pPr>
+            <a:r>
+              <a:rPr lang="ru-RU" sz="800" b="0" dirty="0">
+                <a:solidFill>
+                  <a:srgbClr val="595959"/>
+                </a:solidFill>
+                <a:latin typeface="Onest Medium" pitchFamily="2" charset="-52"/>
+              </a:rPr>
+              <a:t xml:space="preserve">было-1-журнал.png</a:t>
+            </a:r>
+          </a:p>
+        </p:txBody>
+      </p:sp>
+      <p:sp>
+        <p:nvSpPr>
+          <p:cNvPr id="944" name="Поле 944"/>
+          <p:cNvSpPr txBox="1"/>
+          <p:nvPr/>
+        </p:nvSpPr>
+        <p:spPr>
+          <a:xfrm>
+            <a:off x="411480" y="5303520"/>
+            <a:ext cx="3596640" cy="411480"/>
+          </a:xfrm>
+          <a:prstGeom prst="rect">
+            <a:avLst/>
+          </a:prstGeom>
+          <a:noFill/>
+          <a:ln w="0">
+            <a:noFill/>
+          </a:ln>
+        </p:spPr>
+        <p:txBody>
+          <a:bodyPr anchor="t" lIns="91440" rIns="91440" tIns="68580" bIns="68580" wrap="square">
+            <a:noAutofit/>
+          </a:bodyPr>
+          <a:lstStyle/>
+          <a:p>
+            <a:pPr algn="l" marL="0" indent="0">
+              <a:lnSpc>
+                <a:spcPct val="105000"/>
+              </a:lnSpc>
+              <a:spcAft>
+                <a:spcPts val="0"/>
+              </a:spcAft>
+              <a:buNone/>
+            </a:pPr>
+            <a:r>
+              <a:rPr lang="ru-RU" sz="850" b="0" dirty="0">
+                <a:solidFill>
+                  <a:srgbClr val="595959"/>
+                </a:solidFill>
+                <a:latin typeface="Onest Medium" pitchFamily="2" charset="-52"/>
+              </a:rPr>
+              <a:t xml:space="preserve"/>
+            </a:r>
+          </a:p>
+        </p:txBody>
+      </p:sp>
+      <p:sp>
+        <p:nvSpPr>
+          <p:cNvPr id="945" name="Поле 945"/>
+          <p:cNvSpPr txBox="1"/>
+          <p:nvPr/>
+        </p:nvSpPr>
+        <p:spPr>
+          <a:xfrm>
+            <a:off x="4282440" y="1234440"/>
+            <a:ext cx="3596640" cy="4023360"/>
+          </a:xfrm>
+          <a:prstGeom prst="roundRect">
+            <a:avLst>
+              <a:gd name="adj" fmla="val 4000"/>
+            </a:avLst>
+          </a:prstGeom>
+          <a:solidFill>
+            <a:srgbClr val="F7F6FE"/>
+          </a:solidFill>
+          <a:ln w="12700">
+            <a:solidFill>
+              <a:srgbClr val="6C5CE0"/>
+            </a:solidFill>
+            <a:prstDash val="dash"/>
+          </a:ln>
+        </p:spPr>
+        <p:txBody>
+          <a:bodyPr anchor="ctr" lIns="91440" rIns="91440" tIns="68580" bIns="68580" wrap="square">
+            <a:noAutofit/>
+          </a:bodyPr>
+          <a:lstStyle/>
+          <a:p>
+            <a:pPr algn="l" marL="0" indent="0">
+              <a:lnSpc>
+                <a:spcPct val="100000"/>
+              </a:lnSpc>
+              <a:spcAft>
+                <a:spcPts val="300"/>
+              </a:spcAft>
+              <a:buNone/>
+            </a:pPr>
+            <a:r>
+              <a:rPr lang="ru-RU" sz="1000" b="1" dirty="0">
+                <a:solidFill>
+                  <a:srgbClr val="6C5CE0"/>
+                </a:solidFill>
+                <a:latin typeface="Onest Black" pitchFamily="2" charset="-52"/>
+              </a:rPr>
+              <a:t xml:space="preserve">НУЖЕН СНИМОК</a:t>
+            </a:r>
+          </a:p>
+          <a:p>
+            <a:pPr algn="l" marL="0" indent="0">
+              <a:lnSpc>
+                <a:spcPct val="112000"/>
+              </a:lnSpc>
+              <a:spcAft>
+                <a:spcPts val="400"/>
+              </a:spcAft>
+              <a:buNone/>
+            </a:pPr>
+            <a:r>
+              <a:rPr lang="ru-RU" sz="900" b="0" dirty="0">
+                <a:solidFill>
+                  <a:srgbClr val="595959"/>
+                </a:solidFill>
+                <a:latin typeface="Onest Medium" pitchFamily="2" charset="-52"/>
+              </a:rPr>
+              <a:t xml:space="preserve">Было: карточка обращения в СЭД «Дело», поля заполняются вручную</a:t>
+            </a:r>
+          </a:p>
+          <a:p>
+            <a:pPr algn="l" marL="0" indent="0">
+              <a:lnSpc>
+                <a:spcPct val="100000"/>
+              </a:lnSpc>
+              <a:spcAft>
+                <a:spcPts val="0"/>
+              </a:spcAft>
+              <a:buNone/>
+            </a:pPr>
+            <a:r>
+              <a:rPr lang="ru-RU" sz="800" b="0" dirty="0">
+                <a:solidFill>
+                  <a:srgbClr val="595959"/>
+                </a:solidFill>
+                <a:latin typeface="Onest Medium" pitchFamily="2" charset="-52"/>
+              </a:rPr>
+              <a:t xml:space="preserve">было-2-сэд.png</a:t>
+            </a:r>
+          </a:p>
+        </p:txBody>
+      </p:sp>
+      <p:sp>
+        <p:nvSpPr>
+          <p:cNvPr id="946" name="Поле 946"/>
+          <p:cNvSpPr txBox="1"/>
+          <p:nvPr/>
+        </p:nvSpPr>
+        <p:spPr>
+          <a:xfrm>
+            <a:off x="4282440" y="5303520"/>
+            <a:ext cx="3596640" cy="411480"/>
+          </a:xfrm>
+          <a:prstGeom prst="rect">
+            <a:avLst/>
+          </a:prstGeom>
+          <a:noFill/>
+          <a:ln w="0">
+            <a:noFill/>
+          </a:ln>
+        </p:spPr>
+        <p:txBody>
+          <a:bodyPr anchor="t" lIns="91440" rIns="91440" tIns="68580" bIns="68580" wrap="square">
+            <a:noAutofit/>
+          </a:bodyPr>
+          <a:lstStyle/>
+          <a:p>
+            <a:pPr algn="l" marL="0" indent="0">
+              <a:lnSpc>
+                <a:spcPct val="105000"/>
+              </a:lnSpc>
+              <a:spcAft>
+                <a:spcPts val="0"/>
+              </a:spcAft>
+              <a:buNone/>
+            </a:pPr>
+            <a:r>
+              <a:rPr lang="ru-RU" sz="850" b="0" dirty="0">
+                <a:solidFill>
+                  <a:srgbClr val="595959"/>
+                </a:solidFill>
+                <a:latin typeface="Onest Medium" pitchFamily="2" charset="-52"/>
+              </a:rPr>
+              <a:t xml:space="preserve"/>
+            </a:r>
+          </a:p>
+        </p:txBody>
+      </p:sp>
+      <p:sp>
+        <p:nvSpPr>
+          <p:cNvPr id="947" name="Поле 947"/>
+          <p:cNvSpPr txBox="1"/>
+          <p:nvPr/>
+        </p:nvSpPr>
+        <p:spPr>
+          <a:xfrm>
+            <a:off x="8153400" y="1234440"/>
+            <a:ext cx="3596640" cy="4023360"/>
+          </a:xfrm>
+          <a:prstGeom prst="roundRect">
+            <a:avLst>
+              <a:gd name="adj" fmla="val 4000"/>
+            </a:avLst>
+          </a:prstGeom>
+          <a:solidFill>
+            <a:srgbClr val="F7F6FE"/>
+          </a:solidFill>
+          <a:ln w="12700">
+            <a:solidFill>
+              <a:srgbClr val="6C5CE0"/>
+            </a:solidFill>
+            <a:prstDash val="dash"/>
+          </a:ln>
+        </p:spPr>
+        <p:txBody>
+          <a:bodyPr anchor="ctr" lIns="91440" rIns="91440" tIns="68580" bIns="68580" wrap="square">
+            <a:noAutofit/>
+          </a:bodyPr>
+          <a:lstStyle/>
+          <a:p>
+            <a:pPr algn="l" marL="0" indent="0">
+              <a:lnSpc>
+                <a:spcPct val="100000"/>
+              </a:lnSpc>
+              <a:spcAft>
+                <a:spcPts val="300"/>
+              </a:spcAft>
+              <a:buNone/>
+            </a:pPr>
+            <a:r>
+              <a:rPr lang="ru-RU" sz="1000" b="1" dirty="0">
+                <a:solidFill>
+                  <a:srgbClr val="6C5CE0"/>
+                </a:solidFill>
+                <a:latin typeface="Onest Black" pitchFamily="2" charset="-52"/>
+              </a:rPr>
+              <a:t xml:space="preserve">НУЖЕН СНИМОК</a:t>
+            </a:r>
+          </a:p>
+          <a:p>
+            <a:pPr algn="l" marL="0" indent="0">
+              <a:lnSpc>
+                <a:spcPct val="112000"/>
+              </a:lnSpc>
+              <a:spcAft>
+                <a:spcPts val="400"/>
+              </a:spcAft>
+              <a:buNone/>
+            </a:pPr>
+            <a:r>
+              <a:rPr lang="ru-RU" sz="900" b="0" dirty="0">
+                <a:solidFill>
+                  <a:srgbClr val="595959"/>
+                </a:solidFill>
+                <a:latin typeface="Onest Medium" pitchFamily="2" charset="-52"/>
+              </a:rPr>
+              <a:t xml:space="preserve">Стало: заявка пришла исполнителю с готовой категорией, адресом и сроком</a:t>
+            </a:r>
+          </a:p>
+          <a:p>
+            <a:pPr algn="l" marL="0" indent="0">
+              <a:lnSpc>
+                <a:spcPct val="100000"/>
+              </a:lnSpc>
+              <a:spcAft>
+                <a:spcPts val="0"/>
+              </a:spcAft>
+              <a:buNone/>
+            </a:pPr>
+            <a:r>
+              <a:rPr lang="ru-RU" sz="800" b="0" dirty="0">
+                <a:solidFill>
+                  <a:srgbClr val="595959"/>
+                </a:solidFill>
+                <a:latin typeface="Onest Medium" pitchFamily="2" charset="-52"/>
+              </a:rPr>
+              <a:t xml:space="preserve">стало-1-заявка.png</a:t>
+            </a:r>
+          </a:p>
+        </p:txBody>
+      </p:sp>
+      <p:sp>
+        <p:nvSpPr>
+          <p:cNvPr id="948" name="Поле 948"/>
+          <p:cNvSpPr txBox="1"/>
+          <p:nvPr/>
+        </p:nvSpPr>
+        <p:spPr>
+          <a:xfrm>
+            <a:off x="8153400" y="5303520"/>
+            <a:ext cx="3596640" cy="411480"/>
+          </a:xfrm>
+          <a:prstGeom prst="rect">
+            <a:avLst/>
+          </a:prstGeom>
+          <a:noFill/>
+          <a:ln w="0">
+            <a:noFill/>
+          </a:ln>
+        </p:spPr>
+        <p:txBody>
+          <a:bodyPr anchor="t" lIns="91440" rIns="91440" tIns="68580" bIns="68580" wrap="square">
+            <a:noAutofit/>
+          </a:bodyPr>
+          <a:lstStyle/>
+          <a:p>
+            <a:pPr algn="l" marL="0" indent="0">
+              <a:lnSpc>
+                <a:spcPct val="105000"/>
+              </a:lnSpc>
+              <a:spcAft>
+                <a:spcPts val="0"/>
+              </a:spcAft>
+              <a:buNone/>
+            </a:pPr>
+            <a:r>
+              <a:rPr lang="ru-RU" sz="850" b="0" dirty="0">
+                <a:solidFill>
+                  <a:srgbClr val="595959"/>
+                </a:solidFill>
+                <a:latin typeface="Onest Medium" pitchFamily="2" charset="-52"/>
+              </a:rPr>
+              <a:t xml:space="preserve"/>
+            </a:r>
+          </a:p>
+        </p:txBody>
+      </p:sp>
+      <p:sp>
+        <p:nvSpPr>
+          <p:cNvPr id="949" name="Поле 949"/>
+          <p:cNvSpPr txBox="1"/>
+          <p:nvPr/>
+        </p:nvSpPr>
+        <p:spPr>
+          <a:xfrm>
+            <a:off x="411480" y="6053328"/>
+            <a:ext cx="11338560" cy="457200"/>
+          </a:xfrm>
+          <a:prstGeom prst="rect">
+            <a:avLst/>
+          </a:prstGeom>
+          <a:noFill/>
+          <a:ln w="0">
+            <a:noFill/>
+          </a:ln>
+        </p:spPr>
+        <p:txBody>
+          <a:bodyPr anchor="t" lIns="91440" rIns="91440" tIns="68580" bIns="68580" wrap="square">
+            <a:noAutofit/>
+          </a:bodyPr>
+          <a:lstStyle/>
+          <a:p>
+            <a:pPr algn="l" marL="0" indent="0">
+              <a:lnSpc>
+                <a:spcPct val="105000"/>
+              </a:lnSpc>
+              <a:spcAft>
+                <a:spcPts val="0"/>
+              </a:spcAft>
+              <a:buNone/>
+            </a:pPr>
+            <a:r>
+              <a:rPr lang="ru-RU" sz="950" b="0" dirty="0">
+                <a:solidFill>
+                  <a:srgbClr val="6C5CE0"/>
+                </a:solidFill>
+                <a:latin typeface="Onest Medium" pitchFamily="2" charset="-52"/>
+              </a:rPr>
+              <a:t xml:space="preserve">Одна и та же операция — приём сообщения и назначение исполнителя — до проекта и после. Слева ручная работа, справа она же без участия сотрудника.</a:t>
+            </a:r>
+          </a:p>
+        </p:txBody>
+      </p:sp>
+    </p:spTree>
+  </p:cSld>
+  <p:clrMapOvr>
+    <a:masterClrMapping/>
+  </p:clrMapOvr>
+  <mc:AlternateContent xmlns:mc="http://schemas.openxmlformats.org/markup-compatibility/2006">
+    <mc:Choice xmlns:p14="http://schemas.microsoft.com/office/powerpoint/2010/main" Requires="p14">
+      <p:transition p14:dur="2000" advClick="1"/>
+    </mc:Choice>
+    <mc:Fallback>
+      <p:transition advClick="1"/>
+    </mc:Fallback>
+  </mc:AlternateContent>
+  <p:timing>
+    <p:tnLst>
+      <p:par>
+        <p:cTn id="1" dur="indefinite" restart="never" nodeType="tmRoot"/>
+      </p:par>
+    </p:tnLst>
+  </p:timing>
+</p:sld>
+</file>
+
 <file path=ppt/slides/slide2.xml><?xml version="1.0" encoding="utf-8"?>
 <p:sld xmlns:a="http://schemas.openxmlformats.org/drawingml/2006/main" xmlns:r="http://schemas.openxmlformats.org/officeDocument/2006/relationships" xmlns:p="http://schemas.openxmlformats.org/presentationml/2006/main" xmlns:m="http://schemas.openxmlformats.org/officeDocument/2006/math" xmlns:w="http://schemas.openxmlformats.org/wordprocessingml/2006/main" showMasterPhAnim="0" show="1">
   <p:cSld name="">
